--- a/a7/packages/A7 Unit 3 - Exponents and Scientific Notation/Lessons/3.04/A7 3.04 Negative Exponent Law - Slides.pptx
+++ b/a7/packages/A7 Unit 3 - Exponents and Scientific Notation/Lessons/3.04/A7 3.04 Negative Exponent Law - Slides.pptx
@@ -3129,7 +3129,7 @@
         </p:nvSpPr>
         <p:spPr>
           <a:xfrm>
-            <a:off x="777240" y="1691640"/>
+            <a:off x="777240" y="2148840"/>
             <a:ext cx="10607040" cy="347472"/>
           </a:xfrm>
           <a:prstGeom prst="rect">
@@ -3164,7 +3164,7 @@
         </p:nvSpPr>
         <p:spPr>
           <a:xfrm>
-            <a:off x="777240" y="2048256"/>
+            <a:off x="777240" y="2505456"/>
             <a:ext cx="10607040" cy="1005840"/>
           </a:xfrm>
           <a:prstGeom prst="rect">
@@ -3199,7 +3199,7 @@
         </p:nvCxnSpPr>
         <p:spPr>
           <a:xfrm>
-            <a:off x="3291840" y="3255264"/>
+            <a:off x="3291840" y="3712464"/>
             <a:ext cx="5577840" cy="0"/>
           </a:xfrm>
           <a:prstGeom prst="line">
@@ -3234,7 +3234,7 @@
         </p:nvCxnSpPr>
         <p:spPr>
           <a:xfrm>
-            <a:off x="3291840" y="3337560"/>
+            <a:off x="3291840" y="3794760"/>
             <a:ext cx="5577840" cy="0"/>
           </a:xfrm>
           <a:prstGeom prst="line">
@@ -3269,7 +3269,7 @@
         </p:nvSpPr>
         <p:spPr>
           <a:xfrm>
-            <a:off x="777240" y="3502152"/>
+            <a:off x="777240" y="3959352"/>
             <a:ext cx="10607040" cy="310896"/>
           </a:xfrm>
           <a:prstGeom prst="rect">
@@ -3304,7 +3304,7 @@
         </p:nvSpPr>
         <p:spPr>
           <a:xfrm>
-            <a:off x="777240" y="3840480"/>
+            <a:off x="777240" y="4297680"/>
             <a:ext cx="10607040" cy="731520"/>
           </a:xfrm>
           <a:prstGeom prst="rect">
@@ -3327,147 +3327,13 @@
                 <a:latin typeface="Century Schoolbook"/>
               </a:rPr>
               <a:t>I can rewrite a power with a negative exponent using a positive exponent, and evaluate it.</a:t>
-            </a:r>
-          </a:p>
-        </p:txBody>
-      </p:sp>
-      <p:sp>
-        <p:nvSpPr>
-          <p:cNvPr id="8" name="Rectangle 7"/>
-          <p:cNvSpPr/>
-          <p:nvPr/>
-        </p:nvSpPr>
-        <p:spPr>
-          <a:xfrm>
-            <a:off x="2377440" y="4736592"/>
-            <a:ext cx="7406640" cy="1051560"/>
-          </a:xfrm>
-          <a:prstGeom prst="rect">
-            <a:avLst/>
-          </a:prstGeom>
-          <a:solidFill>
-            <a:srgbClr val="F2F2F0"/>
-          </a:solidFill>
-          <a:ln w="9525">
-            <a:solidFill>
-              <a:srgbClr val="BFBFBF"/>
-            </a:solidFill>
-          </a:ln>
-          <a:effectLst/>
-        </p:spPr>
-        <p:style>
-          <a:lnRef idx="1">
-            <a:schemeClr val="accent1"/>
-          </a:lnRef>
-          <a:fillRef idx="3">
-            <a:schemeClr val="accent1"/>
-          </a:fillRef>
-          <a:effectRef idx="2">
-            <a:schemeClr val="accent1"/>
-          </a:effectRef>
-          <a:fontRef idx="minor">
-            <a:schemeClr val="lt1"/>
-          </a:fontRef>
-        </p:style>
-        <p:txBody>
-          <a:bodyPr rtlCol="0" anchor="ctr"/>
-          <a:lstStyle/>
-          <a:p>
-            <a:pPr algn="ctr"/>
-          </a:p>
-        </p:txBody>
-      </p:sp>
-      <p:sp>
-        <p:nvSpPr>
-          <p:cNvPr id="9" name="TextBox 8"/>
-          <p:cNvSpPr txBox="1"/>
-          <p:nvPr/>
-        </p:nvSpPr>
-        <p:spPr>
-          <a:xfrm>
-            <a:off x="2606040" y="4892040"/>
-            <a:ext cx="6949440" cy="365760"/>
-          </a:xfrm>
-          <a:prstGeom prst="rect">
-            <a:avLst/>
-          </a:prstGeom>
-          <a:noFill/>
-        </p:spPr>
-        <p:txBody>
-          <a:bodyPr wrap="square" lIns="45720" rIns="45720" tIns="18288" bIns="18288" anchor="t">
-            <a:spAutoFit/>
-          </a:bodyPr>
-          <a:lstStyle/>
-          <a:p>
-            <a:pPr algn="ctr"/>
-            <a:r>
-              <a:rPr sz="1700" b="0" i="1">
-                <a:solidFill>
-                  <a:srgbClr val="6B6B6B"/>
-                </a:solidFill>
-                <a:latin typeface="Century Schoolbook"/>
-              </a:rPr>
-              <a:t>Yesterday the exponents stopped at 0.</a:t>
-            </a:r>
-          </a:p>
-        </p:txBody>
-      </p:sp>
-      <p:sp>
-        <p:nvSpPr>
-          <p:cNvPr id="10" name="TextBox 9"/>
-          <p:cNvSpPr txBox="1"/>
-          <p:nvPr/>
-        </p:nvSpPr>
-        <p:spPr>
-          <a:xfrm>
-            <a:off x="2606040" y="5276088"/>
-            <a:ext cx="6949440" cy="365760"/>
-          </a:xfrm>
-          <a:prstGeom prst="rect">
-            <a:avLst/>
-          </a:prstGeom>
-          <a:noFill/>
-        </p:spPr>
-        <p:txBody>
-          <a:bodyPr wrap="square" lIns="45720" rIns="45720" tIns="18288" bIns="18288" anchor="t">
-            <a:spAutoFit/>
-          </a:bodyPr>
-          <a:lstStyle/>
-          <a:p>
-            <a:pPr algn="ctr"/>
-            <a:r>
-              <a:rPr sz="1700" b="1" i="0">
-                <a:solidFill>
-                  <a:srgbClr val="1A1A1A"/>
-                </a:solidFill>
-                <a:latin typeface="Century Schoolbook"/>
-              </a:rPr>
-              <a:t>Today they keep going — and 5</a:t>
-            </a:r>
-            <a:r>
-              <a:rPr sz="1700" b="1" i="0" baseline="30000">
-                <a:solidFill>
-                  <a:srgbClr val="1A1A1A"/>
-                </a:solidFill>
-                <a:latin typeface="Century Schoolbook"/>
-              </a:rPr>
-              <a:t>-2</a:t>
-            </a:r>
-            <a:r>
-              <a:rPr sz="1700" b="1" i="0">
-                <a:solidFill>
-                  <a:srgbClr val="1A1A1A"/>
-                </a:solidFill>
-                <a:latin typeface="Century Schoolbook"/>
-              </a:rPr>
-              <a:t> is not a negative number.</a:t>
             </a:r>
           </a:p>
         </p:txBody>
       </p:sp>
       <p:cxnSp>
         <p:nvCxnSpPr>
-          <p:cNvPr id="11" name="Connector 10"/>
+          <p:cNvPr id="8" name="Connector 7"/>
           <p:cNvCxnSpPr/>
           <p:nvPr/>
         </p:nvCxnSpPr>
@@ -3502,7 +3368,7 @@
       </p:cxnSp>
       <p:sp>
         <p:nvSpPr>
-          <p:cNvPr id="12" name="TextBox 11"/>
+          <p:cNvPr id="9" name="TextBox 8"/>
           <p:cNvSpPr txBox="1"/>
           <p:nvPr/>
         </p:nvSpPr>
@@ -3537,7 +3403,7 @@
       </p:sp>
       <p:sp>
         <p:nvSpPr>
-          <p:cNvPr id="13" name="TextBox 12"/>
+          <p:cNvPr id="10" name="TextBox 9"/>
           <p:cNvSpPr txBox="1"/>
           <p:nvPr/>
         </p:nvSpPr>
@@ -3693,44 +3559,9 @@
           </a:fontRef>
         </p:style>
       </p:cxnSp>
-      <p:sp>
-        <p:nvSpPr>
-          <p:cNvPr id="5" name="TextBox 4"/>
-          <p:cNvSpPr txBox="1"/>
-          <p:nvPr/>
-        </p:nvSpPr>
-        <p:spPr>
-          <a:xfrm>
-            <a:off x="777240" y="1261872"/>
-            <a:ext cx="10607040" cy="310896"/>
-          </a:xfrm>
-          <a:prstGeom prst="rect">
-            <a:avLst/>
-          </a:prstGeom>
-          <a:noFill/>
-        </p:spPr>
-        <p:txBody>
-          <a:bodyPr wrap="square" lIns="45720" rIns="45720" tIns="18288" bIns="18288" anchor="t">
-            <a:spAutoFit/>
-          </a:bodyPr>
-          <a:lstStyle/>
-          <a:p>
-            <a:pPr algn="l"/>
-            <a:r>
-              <a:rPr sz="1700" b="0" i="1">
-                <a:solidFill>
-                  <a:srgbClr val="6B6B6B"/>
-                </a:solidFill>
-                <a:latin typeface="Century Schoolbook"/>
-              </a:rPr>
-              <a:t>Answer.</a:t>
-            </a:r>
-          </a:p>
-        </p:txBody>
-      </p:sp>
       <p:cxnSp>
         <p:nvCxnSpPr>
-          <p:cNvPr id="6" name="Connector 5"/>
+          <p:cNvPr id="5" name="Connector 4"/>
           <p:cNvCxnSpPr/>
           <p:nvPr/>
         </p:nvCxnSpPr>
@@ -3765,7 +3596,7 @@
       </p:cxnSp>
       <p:sp>
         <p:nvSpPr>
-          <p:cNvPr id="7" name="TextBox 6"/>
+          <p:cNvPr id="6" name="TextBox 5"/>
           <p:cNvSpPr txBox="1"/>
           <p:nvPr/>
         </p:nvSpPr>
@@ -3800,7 +3631,7 @@
       </p:sp>
       <p:sp>
         <p:nvSpPr>
-          <p:cNvPr id="8" name="TextBox 7"/>
+          <p:cNvPr id="7" name="TextBox 6"/>
           <p:cNvSpPr txBox="1"/>
           <p:nvPr/>
         </p:nvSpPr>
@@ -3835,7 +3666,7 @@
       </p:sp>
       <p:pic>
         <p:nvPicPr>
-          <p:cNvPr id="9" name="Picture 8" descr="395fcf61f0d867ea.png"/>
+          <p:cNvPr id="8" name="Picture 7" descr="395fcf61f0d867ea.png"/>
           <p:cNvPicPr>
             <a:picLocks noChangeAspect="1"/>
           </p:cNvPicPr>
@@ -3859,69 +3690,42 @@
       </p:pic>
       <p:sp>
         <p:nvSpPr>
+          <p:cNvPr id="9" name="TextBox 8"/>
+          <p:cNvSpPr txBox="1"/>
+          <p:nvPr/>
+        </p:nvSpPr>
+        <p:spPr>
+          <a:xfrm>
+            <a:off x="777240" y="3712463"/>
+            <a:ext cx="10607040" cy="429370"/>
+          </a:xfrm>
+          <a:prstGeom prst="rect">
+            <a:avLst/>
+          </a:prstGeom>
+          <a:noFill/>
+        </p:spPr>
+        <p:txBody>
+          <a:bodyPr wrap="square" lIns="45720" rIns="45720" tIns="18288" bIns="18288" anchor="t">
+            <a:spAutoFit/>
+          </a:bodyPr>
+          <a:lstStyle/>
+          <a:p>
+            <a:pPr algn="ctr"/>
+            <a:r>
+              <a:rPr sz="2400" b="1" i="0">
+                <a:solidFill>
+                  <a:srgbClr val="1A1A1A"/>
+                </a:solidFill>
+                <a:latin typeface="Century Schoolbook"/>
+              </a:rPr>
+              <a:t>Rewrite with positive exponents, then find the value.</a:t>
+            </a:r>
+          </a:p>
+        </p:txBody>
+      </p:sp>
+      <p:sp>
+        <p:nvSpPr>
           <p:cNvPr id="10" name="TextBox 9"/>
-          <p:cNvSpPr txBox="1"/>
-          <p:nvPr/>
-        </p:nvSpPr>
-        <p:spPr>
-          <a:xfrm>
-            <a:off x="777240" y="3529584"/>
-            <a:ext cx="10607040" cy="429370"/>
-          </a:xfrm>
-          <a:prstGeom prst="rect">
-            <a:avLst/>
-          </a:prstGeom>
-          <a:noFill/>
-        </p:spPr>
-        <p:txBody>
-          <a:bodyPr wrap="square" lIns="45720" rIns="45720" tIns="18288" bIns="18288" anchor="t">
-            <a:spAutoFit/>
-          </a:bodyPr>
-          <a:lstStyle/>
-          <a:p>
-            <a:pPr algn="ctr"/>
-            <a:r>
-              <a:rPr sz="2400" b="0" i="0">
-                <a:solidFill>
-                  <a:srgbClr val="6B6B6B"/>
-                </a:solidFill>
-                <a:latin typeface="Century Schoolbook"/>
-              </a:rPr>
-              <a:t>swap sides, positive exponents: 5</a:t>
-            </a:r>
-            <a:r>
-              <a:rPr sz="2400" b="0" i="0" baseline="30000">
-                <a:solidFill>
-                  <a:srgbClr val="6B6B6B"/>
-                </a:solidFill>
-                <a:latin typeface="Century Schoolbook"/>
-              </a:rPr>
-              <a:t>1</a:t>
-            </a:r>
-            <a:r>
-              <a:rPr sz="2400" b="0" i="0">
-                <a:solidFill>
-                  <a:srgbClr val="6B6B6B"/>
-                </a:solidFill>
-                <a:latin typeface="Century Schoolbook"/>
-              </a:rPr>
-              <a:t> over 3</a:t>
-            </a:r>
-            <a:r>
-              <a:rPr sz="2400" b="0" i="0" baseline="30000">
-                <a:solidFill>
-                  <a:srgbClr val="6B6B6B"/>
-                </a:solidFill>
-                <a:latin typeface="Century Schoolbook"/>
-              </a:rPr>
-              <a:t>2</a:t>
-            </a:r>
-          </a:p>
-        </p:txBody>
-      </p:sp>
-      <p:sp>
-        <p:nvSpPr>
-          <p:cNvPr id="11" name="TextBox 10"/>
           <p:cNvSpPr txBox="1"/>
           <p:nvPr/>
         </p:nvSpPr>
@@ -3956,7 +3760,7 @@
       </p:sp>
       <p:pic>
         <p:nvPicPr>
-          <p:cNvPr id="12" name="Picture 11" descr="f8b652a33b6da231.png"/>
+          <p:cNvPr id="11" name="Picture 10" descr="f8b652a33b6da231.png"/>
           <p:cNvPicPr>
             <a:picLocks noChangeAspect="1"/>
           </p:cNvPicPr>
@@ -4101,44 +3905,9 @@
           </a:fontRef>
         </p:style>
       </p:cxnSp>
-      <p:sp>
-        <p:nvSpPr>
-          <p:cNvPr id="5" name="TextBox 4"/>
-          <p:cNvSpPr txBox="1"/>
-          <p:nvPr/>
-        </p:nvSpPr>
-        <p:spPr>
-          <a:xfrm>
-            <a:off x="777240" y="1261872"/>
-            <a:ext cx="10607040" cy="310896"/>
-          </a:xfrm>
-          <a:prstGeom prst="rect">
-            <a:avLst/>
-          </a:prstGeom>
-          <a:noFill/>
-        </p:spPr>
-        <p:txBody>
-          <a:bodyPr wrap="square" lIns="45720" rIns="45720" tIns="18288" bIns="18288" anchor="t">
-            <a:spAutoFit/>
-          </a:bodyPr>
-          <a:lstStyle/>
-          <a:p>
-            <a:pPr algn="l"/>
-            <a:r>
-              <a:rPr sz="1700" b="0" i="1">
-                <a:solidFill>
-                  <a:srgbClr val="6B6B6B"/>
-                </a:solidFill>
-                <a:latin typeface="Century Schoolbook"/>
-              </a:rPr>
-              <a:t>A quotient law crossing zero.</a:t>
-            </a:r>
-          </a:p>
-        </p:txBody>
-      </p:sp>
       <p:cxnSp>
         <p:nvCxnSpPr>
-          <p:cNvPr id="6" name="Connector 5"/>
+          <p:cNvPr id="5" name="Connector 4"/>
           <p:cNvCxnSpPr/>
           <p:nvPr/>
         </p:nvCxnSpPr>
@@ -4173,7 +3942,7 @@
       </p:cxnSp>
       <p:sp>
         <p:nvSpPr>
-          <p:cNvPr id="7" name="TextBox 6"/>
+          <p:cNvPr id="6" name="TextBox 5"/>
           <p:cNvSpPr txBox="1"/>
           <p:nvPr/>
         </p:nvSpPr>
@@ -4208,7 +3977,7 @@
       </p:sp>
       <p:sp>
         <p:nvSpPr>
-          <p:cNvPr id="8" name="TextBox 7"/>
+          <p:cNvPr id="7" name="TextBox 6"/>
           <p:cNvSpPr txBox="1"/>
           <p:nvPr/>
         </p:nvSpPr>
@@ -4243,7 +4012,7 @@
       </p:sp>
       <p:pic>
         <p:nvPicPr>
-          <p:cNvPr id="9" name="Picture 8" descr="4ffd0e25f89e0e87.png"/>
+          <p:cNvPr id="8" name="Picture 7" descr="4ffd0e25f89e0e87.png"/>
           <p:cNvPicPr>
             <a:picLocks noChangeAspect="1"/>
           </p:cNvPicPr>
@@ -4267,7 +4036,7 @@
       </p:pic>
       <p:sp>
         <p:nvSpPr>
-          <p:cNvPr id="10" name="TextBox 9"/>
+          <p:cNvPr id="9" name="TextBox 8"/>
           <p:cNvSpPr txBox="1"/>
           <p:nvPr/>
         </p:nvSpPr>
@@ -4423,44 +4192,9 @@
           </a:fontRef>
         </p:style>
       </p:cxnSp>
-      <p:sp>
-        <p:nvSpPr>
-          <p:cNvPr id="5" name="TextBox 4"/>
-          <p:cNvSpPr txBox="1"/>
-          <p:nvPr/>
-        </p:nvSpPr>
-        <p:spPr>
-          <a:xfrm>
-            <a:off x="777240" y="1261872"/>
-            <a:ext cx="10607040" cy="310896"/>
-          </a:xfrm>
-          <a:prstGeom prst="rect">
-            <a:avLst/>
-          </a:prstGeom>
-          <a:noFill/>
-        </p:spPr>
-        <p:txBody>
-          <a:bodyPr wrap="square" lIns="45720" rIns="45720" tIns="18288" bIns="18288" anchor="t">
-            <a:spAutoFit/>
-          </a:bodyPr>
-          <a:lstStyle/>
-          <a:p>
-            <a:pPr algn="l"/>
-            <a:r>
-              <a:rPr sz="1700" b="0" i="1">
-                <a:solidFill>
-                  <a:srgbClr val="6B6B6B"/>
-                </a:solidFill>
-                <a:latin typeface="Century Schoolbook"/>
-              </a:rPr>
-              <a:t>Worked both ways.</a:t>
-            </a:r>
-          </a:p>
-        </p:txBody>
-      </p:sp>
       <p:cxnSp>
         <p:nvCxnSpPr>
-          <p:cNvPr id="6" name="Connector 5"/>
+          <p:cNvPr id="5" name="Connector 4"/>
           <p:cNvCxnSpPr/>
           <p:nvPr/>
         </p:nvCxnSpPr>
@@ -4495,7 +4229,7 @@
       </p:cxnSp>
       <p:sp>
         <p:nvSpPr>
-          <p:cNvPr id="7" name="TextBox 6"/>
+          <p:cNvPr id="6" name="TextBox 5"/>
           <p:cNvSpPr txBox="1"/>
           <p:nvPr/>
         </p:nvSpPr>
@@ -4530,7 +4264,7 @@
       </p:sp>
       <p:sp>
         <p:nvSpPr>
-          <p:cNvPr id="8" name="TextBox 7"/>
+          <p:cNvPr id="7" name="TextBox 6"/>
           <p:cNvSpPr txBox="1"/>
           <p:nvPr/>
         </p:nvSpPr>
@@ -4565,7 +4299,7 @@
       </p:sp>
       <p:pic>
         <p:nvPicPr>
-          <p:cNvPr id="9" name="Picture 8" descr="8b0ea9280595c69a.png"/>
+          <p:cNvPr id="8" name="Picture 7" descr="8b0ea9280595c69a.png"/>
           <p:cNvPicPr>
             <a:picLocks noChangeAspect="1"/>
           </p:cNvPicPr>
@@ -4587,44 +4321,9 @@
           </a:prstGeom>
         </p:spPr>
       </p:pic>
-      <p:sp>
-        <p:nvSpPr>
-          <p:cNvPr id="10" name="TextBox 9"/>
-          <p:cNvSpPr txBox="1"/>
-          <p:nvPr/>
-        </p:nvSpPr>
-        <p:spPr>
-          <a:xfrm>
-            <a:off x="5215128" y="2093976"/>
-            <a:ext cx="6169151" cy="502920"/>
-          </a:xfrm>
-          <a:prstGeom prst="rect">
-            <a:avLst/>
-          </a:prstGeom>
-          <a:noFill/>
-        </p:spPr>
-        <p:txBody>
-          <a:bodyPr wrap="square" lIns="45720" rIns="45720" tIns="18288" bIns="18288" anchor="ctr">
-            <a:spAutoFit/>
-          </a:bodyPr>
-          <a:lstStyle/>
-          <a:p>
-            <a:pPr algn="l"/>
-            <a:r>
-              <a:rPr sz="2100" b="0" i="1">
-                <a:solidFill>
-                  <a:srgbClr val="6B6B6B"/>
-                </a:solidFill>
-                <a:latin typeface="Century Schoolbook"/>
-              </a:rPr>
-              <a:t>quotient of powers: 0 − (−4) = 4</a:t>
-            </a:r>
-          </a:p>
-        </p:txBody>
-      </p:sp>
       <p:pic>
         <p:nvPicPr>
-          <p:cNvPr id="11" name="Picture 10" descr="a0522eb547e4bac4.png"/>
+          <p:cNvPr id="9" name="Picture 8" descr="a0522eb547e4bac4.png"/>
           <p:cNvPicPr>
             <a:picLocks noChangeAspect="1"/>
           </p:cNvPicPr>
@@ -4646,62 +4345,9 @@
           </a:prstGeom>
         </p:spPr>
       </p:pic>
-      <p:sp>
-        <p:nvSpPr>
-          <p:cNvPr id="12" name="TextBox 11"/>
-          <p:cNvSpPr txBox="1"/>
-          <p:nvPr/>
-        </p:nvSpPr>
-        <p:spPr>
-          <a:xfrm>
-            <a:off x="4654296" y="3172968"/>
-            <a:ext cx="6400800" cy="502920"/>
-          </a:xfrm>
-          <a:prstGeom prst="rect">
-            <a:avLst/>
-          </a:prstGeom>
-          <a:noFill/>
-        </p:spPr>
-        <p:txBody>
-          <a:bodyPr wrap="square" lIns="45720" rIns="45720" tIns="18288" bIns="18288" anchor="ctr">
-            <a:spAutoFit/>
-          </a:bodyPr>
-          <a:lstStyle/>
-          <a:p>
-            <a:pPr algn="l"/>
-            <a:r>
-              <a:rPr sz="2100" b="0" i="1">
-                <a:solidFill>
-                  <a:srgbClr val="6B6B6B"/>
-                </a:solidFill>
-                <a:latin typeface="Century Schoolbook"/>
-              </a:rPr>
-              <a:t>zero exponent, then move 7</a:t>
-            </a:r>
-            <a:r>
-              <a:rPr sz="2100" b="0" i="1" baseline="30000">
-                <a:solidFill>
-                  <a:srgbClr val="6B6B6B"/>
-                </a:solidFill>
-                <a:latin typeface="Century Schoolbook"/>
-              </a:rPr>
-              <a:t>-4</a:t>
-            </a:r>
-            <a:r>
-              <a:rPr sz="2100" b="0" i="1">
-                <a:solidFill>
-                  <a:srgbClr val="6B6B6B"/>
-                </a:solidFill>
-                <a:latin typeface="Century Schoolbook"/>
-              </a:rPr>
-              <a:t> up</a:t>
-            </a:r>
-          </a:p>
-        </p:txBody>
-      </p:sp>
       <p:pic>
         <p:nvPicPr>
-          <p:cNvPr id="13" name="Picture 12" descr="f5e46e308b616f81.png"/>
+          <p:cNvPr id="10" name="Picture 9" descr="f5e46e308b616f81.png"/>
           <p:cNvPicPr>
             <a:picLocks noChangeAspect="1"/>
           </p:cNvPicPr>
@@ -4725,42 +4371,7 @@
       </p:pic>
       <p:sp>
         <p:nvSpPr>
-          <p:cNvPr id="14" name="TextBox 13"/>
-          <p:cNvSpPr txBox="1"/>
-          <p:nvPr/>
-        </p:nvSpPr>
-        <p:spPr>
-          <a:xfrm>
-            <a:off x="3816096" y="4023360"/>
-            <a:ext cx="6400800" cy="502920"/>
-          </a:xfrm>
-          <a:prstGeom prst="rect">
-            <a:avLst/>
-          </a:prstGeom>
-          <a:noFill/>
-        </p:spPr>
-        <p:txBody>
-          <a:bodyPr wrap="square" lIns="45720" rIns="45720" tIns="18288" bIns="18288" anchor="ctr">
-            <a:spAutoFit/>
-          </a:bodyPr>
-          <a:lstStyle/>
-          <a:p>
-            <a:pPr algn="l"/>
-            <a:r>
-              <a:rPr sz="2100" b="0" i="1">
-                <a:solidFill>
-                  <a:srgbClr val="6B6B6B"/>
-                </a:solidFill>
-                <a:latin typeface="Century Schoolbook"/>
-              </a:rPr>
-              <a:t>evaluate</a:t>
-            </a:r>
-          </a:p>
-        </p:txBody>
-      </p:sp>
-      <p:sp>
-        <p:nvSpPr>
-          <p:cNvPr id="15" name="TextBox 14"/>
+          <p:cNvPr id="11" name="TextBox 10"/>
           <p:cNvSpPr txBox="1"/>
           <p:nvPr/>
         </p:nvSpPr>
@@ -4916,44 +4527,9 @@
           </a:fontRef>
         </p:style>
       </p:cxnSp>
-      <p:sp>
-        <p:nvSpPr>
-          <p:cNvPr id="5" name="TextBox 4"/>
-          <p:cNvSpPr txBox="1"/>
-          <p:nvPr/>
-        </p:nvSpPr>
-        <p:spPr>
-          <a:xfrm>
-            <a:off x="777240" y="1261872"/>
-            <a:ext cx="10607040" cy="310896"/>
-          </a:xfrm>
-          <a:prstGeom prst="rect">
-            <a:avLst/>
-          </a:prstGeom>
-          <a:noFill/>
-        </p:spPr>
-        <p:txBody>
-          <a:bodyPr wrap="square" lIns="45720" rIns="45720" tIns="18288" bIns="18288" anchor="t">
-            <a:spAutoFit/>
-          </a:bodyPr>
-          <a:lstStyle/>
-          <a:p>
-            <a:pPr algn="l"/>
-            <a:r>
-              <a:rPr sz="1700" b="0" i="1">
-                <a:solidFill>
-                  <a:srgbClr val="6B6B6B"/>
-                </a:solidFill>
-                <a:latin typeface="Century Schoolbook"/>
-              </a:rPr>
-              <a:t>Same steps, your numbers. Boards up when done.</a:t>
-            </a:r>
-          </a:p>
-        </p:txBody>
-      </p:sp>
       <p:cxnSp>
         <p:nvCxnSpPr>
-          <p:cNvPr id="6" name="Connector 5"/>
+          <p:cNvPr id="5" name="Connector 4"/>
           <p:cNvCxnSpPr/>
           <p:nvPr/>
         </p:nvCxnSpPr>
@@ -4988,7 +4564,7 @@
       </p:cxnSp>
       <p:sp>
         <p:nvSpPr>
-          <p:cNvPr id="7" name="TextBox 6"/>
+          <p:cNvPr id="6" name="TextBox 5"/>
           <p:cNvSpPr txBox="1"/>
           <p:nvPr/>
         </p:nvSpPr>
@@ -5023,7 +4599,7 @@
       </p:sp>
       <p:sp>
         <p:nvSpPr>
-          <p:cNvPr id="8" name="TextBox 7"/>
+          <p:cNvPr id="7" name="TextBox 6"/>
           <p:cNvSpPr txBox="1"/>
           <p:nvPr/>
         </p:nvSpPr>
@@ -5058,7 +4634,7 @@
       </p:sp>
       <p:pic>
         <p:nvPicPr>
-          <p:cNvPr id="9" name="Picture 8" descr="3d867da857833487.png"/>
+          <p:cNvPr id="8" name="Picture 7" descr="3d867da857833487.png"/>
           <p:cNvPicPr>
             <a:picLocks noChangeAspect="1"/>
           </p:cNvPicPr>
@@ -5080,6 +4656,41 @@
           </a:prstGeom>
         </p:spPr>
       </p:pic>
+      <p:sp>
+        <p:nvSpPr>
+          <p:cNvPr id="9" name="TextBox 8"/>
+          <p:cNvSpPr txBox="1"/>
+          <p:nvPr/>
+        </p:nvSpPr>
+        <p:spPr>
+          <a:xfrm>
+            <a:off x="777240" y="3886200"/>
+            <a:ext cx="10607040" cy="429370"/>
+          </a:xfrm>
+          <a:prstGeom prst="rect">
+            <a:avLst/>
+          </a:prstGeom>
+          <a:noFill/>
+        </p:spPr>
+        <p:txBody>
+          <a:bodyPr wrap="square" lIns="45720" rIns="45720" tIns="18288" bIns="18288" anchor="t">
+            <a:spAutoFit/>
+          </a:bodyPr>
+          <a:lstStyle/>
+          <a:p>
+            <a:pPr algn="ctr"/>
+            <a:r>
+              <a:rPr sz="2400" b="1" i="0">
+                <a:solidFill>
+                  <a:srgbClr val="1A1A1A"/>
+                </a:solidFill>
+                <a:latin typeface="Century Schoolbook"/>
+              </a:rPr>
+              <a:t>Find the value.</a:t>
+            </a:r>
+          </a:p>
+        </p:txBody>
+      </p:sp>
     </p:spTree>
   </p:cSld>
   <p:clrMapOvr>
@@ -5203,44 +4814,9 @@
           </a:fontRef>
         </p:style>
       </p:cxnSp>
-      <p:sp>
-        <p:nvSpPr>
-          <p:cNvPr id="5" name="TextBox 4"/>
-          <p:cNvSpPr txBox="1"/>
-          <p:nvPr/>
-        </p:nvSpPr>
-        <p:spPr>
-          <a:xfrm>
-            <a:off x="777240" y="1261872"/>
-            <a:ext cx="10607040" cy="310896"/>
-          </a:xfrm>
-          <a:prstGeom prst="rect">
-            <a:avLst/>
-          </a:prstGeom>
-          <a:noFill/>
-        </p:spPr>
-        <p:txBody>
-          <a:bodyPr wrap="square" lIns="45720" rIns="45720" tIns="18288" bIns="18288" anchor="t">
-            <a:spAutoFit/>
-          </a:bodyPr>
-          <a:lstStyle/>
-          <a:p>
-            <a:pPr algn="l"/>
-            <a:r>
-              <a:rPr sz="1700" b="0" i="1">
-                <a:solidFill>
-                  <a:srgbClr val="6B6B6B"/>
-                </a:solidFill>
-                <a:latin typeface="Century Schoolbook"/>
-              </a:rPr>
-              <a:t>Answer.</a:t>
-            </a:r>
-          </a:p>
-        </p:txBody>
-      </p:sp>
       <p:cxnSp>
         <p:nvCxnSpPr>
-          <p:cNvPr id="6" name="Connector 5"/>
+          <p:cNvPr id="5" name="Connector 4"/>
           <p:cNvCxnSpPr/>
           <p:nvPr/>
         </p:nvCxnSpPr>
@@ -5275,7 +4851,7 @@
       </p:cxnSp>
       <p:sp>
         <p:nvSpPr>
-          <p:cNvPr id="7" name="TextBox 6"/>
+          <p:cNvPr id="6" name="TextBox 5"/>
           <p:cNvSpPr txBox="1"/>
           <p:nvPr/>
         </p:nvSpPr>
@@ -5310,7 +4886,7 @@
       </p:sp>
       <p:sp>
         <p:nvSpPr>
-          <p:cNvPr id="8" name="TextBox 7"/>
+          <p:cNvPr id="7" name="TextBox 6"/>
           <p:cNvSpPr txBox="1"/>
           <p:nvPr/>
         </p:nvSpPr>
@@ -5345,7 +4921,7 @@
       </p:sp>
       <p:pic>
         <p:nvPicPr>
-          <p:cNvPr id="9" name="Picture 8" descr="bd647a6f29dfd2ac.png"/>
+          <p:cNvPr id="8" name="Picture 7" descr="bd647a6f29dfd2ac.png"/>
           <p:cNvPicPr>
             <a:picLocks noChangeAspect="1"/>
           </p:cNvPicPr>
@@ -5369,57 +4945,48 @@
       </p:pic>
       <p:sp>
         <p:nvSpPr>
+          <p:cNvPr id="9" name="TextBox 8"/>
+          <p:cNvSpPr txBox="1"/>
+          <p:nvPr/>
+        </p:nvSpPr>
+        <p:spPr>
+          <a:xfrm>
+            <a:off x="777240" y="3883151"/>
+            <a:ext cx="10607040" cy="429370"/>
+          </a:xfrm>
+          <a:prstGeom prst="rect">
+            <a:avLst/>
+          </a:prstGeom>
+          <a:noFill/>
+        </p:spPr>
+        <p:txBody>
+          <a:bodyPr wrap="square" lIns="45720" rIns="45720" tIns="18288" bIns="18288" anchor="t">
+            <a:spAutoFit/>
+          </a:bodyPr>
+          <a:lstStyle/>
+          <a:p>
+            <a:pPr algn="ctr"/>
+            <a:r>
+              <a:rPr sz="2400" b="1" i="0">
+                <a:solidFill>
+                  <a:srgbClr val="1A1A1A"/>
+                </a:solidFill>
+                <a:latin typeface="Century Schoolbook"/>
+              </a:rPr>
+              <a:t>Find the value.</a:t>
+            </a:r>
+          </a:p>
+        </p:txBody>
+      </p:sp>
+      <p:sp>
+        <p:nvSpPr>
           <p:cNvPr id="10" name="TextBox 9"/>
           <p:cNvSpPr txBox="1"/>
           <p:nvPr/>
         </p:nvSpPr>
         <p:spPr>
           <a:xfrm>
-            <a:off x="777240" y="3700271"/>
-            <a:ext cx="10607040" cy="429370"/>
-          </a:xfrm>
-          <a:prstGeom prst="rect">
-            <a:avLst/>
-          </a:prstGeom>
-          <a:noFill/>
-        </p:spPr>
-        <p:txBody>
-          <a:bodyPr wrap="square" lIns="45720" rIns="45720" tIns="18288" bIns="18288" anchor="t">
-            <a:spAutoFit/>
-          </a:bodyPr>
-          <a:lstStyle/>
-          <a:p>
-            <a:pPr algn="ctr"/>
-            <a:r>
-              <a:rPr sz="2400" b="0" i="0">
-                <a:solidFill>
-                  <a:srgbClr val="6B6B6B"/>
-                </a:solidFill>
-                <a:latin typeface="Century Schoolbook"/>
-              </a:rPr>
-              <a:t>−4 − (−6) = 2, so (−8)</a:t>
-            </a:r>
-            <a:r>
-              <a:rPr sz="2400" b="0" i="0" baseline="30000">
-                <a:solidFill>
-                  <a:srgbClr val="6B6B6B"/>
-                </a:solidFill>
-                <a:latin typeface="Century Schoolbook"/>
-              </a:rPr>
-              <a:t>2</a:t>
-            </a:r>
-          </a:p>
-        </p:txBody>
-      </p:sp>
-      <p:sp>
-        <p:nvSpPr>
-          <p:cNvPr id="11" name="TextBox 10"/>
-          <p:cNvSpPr txBox="1"/>
-          <p:nvPr/>
-        </p:nvSpPr>
-        <p:spPr>
-          <a:xfrm>
-            <a:off x="777240" y="4572000"/>
+            <a:off x="777240" y="4605130"/>
             <a:ext cx="10607040" cy="548640"/>
           </a:xfrm>
           <a:prstGeom prst="rect">
@@ -5569,44 +5136,9 @@
           </a:fontRef>
         </p:style>
       </p:cxnSp>
-      <p:sp>
-        <p:nvSpPr>
-          <p:cNvPr id="5" name="TextBox 4"/>
-          <p:cNvSpPr txBox="1"/>
-          <p:nvPr/>
-        </p:nvSpPr>
-        <p:spPr>
-          <a:xfrm>
-            <a:off x="777240" y="1261872"/>
-            <a:ext cx="10607040" cy="310896"/>
-          </a:xfrm>
-          <a:prstGeom prst="rect">
-            <a:avLst/>
-          </a:prstGeom>
-          <a:noFill/>
-        </p:spPr>
-        <p:txBody>
-          <a:bodyPr wrap="square" lIns="45720" rIns="45720" tIns="18288" bIns="18288" anchor="t">
-            <a:spAutoFit/>
-          </a:bodyPr>
-          <a:lstStyle/>
-          <a:p>
-            <a:pPr algn="l"/>
-            <a:r>
-              <a:rPr sz="1700" b="0" i="1">
-                <a:solidFill>
-                  <a:srgbClr val="6B6B6B"/>
-                </a:solidFill>
-                <a:latin typeface="Century Schoolbook"/>
-              </a:rPr>
-              <a:t>Boards up on three.</a:t>
-            </a:r>
-          </a:p>
-        </p:txBody>
-      </p:sp>
       <p:cxnSp>
         <p:nvCxnSpPr>
-          <p:cNvPr id="6" name="Connector 5"/>
+          <p:cNvPr id="5" name="Connector 4"/>
           <p:cNvCxnSpPr/>
           <p:nvPr/>
         </p:nvCxnSpPr>
@@ -5641,7 +5173,7 @@
       </p:cxnSp>
       <p:sp>
         <p:nvSpPr>
-          <p:cNvPr id="7" name="TextBox 6"/>
+          <p:cNvPr id="6" name="TextBox 5"/>
           <p:cNvSpPr txBox="1"/>
           <p:nvPr/>
         </p:nvSpPr>
@@ -5676,7 +5208,7 @@
       </p:sp>
       <p:sp>
         <p:nvSpPr>
-          <p:cNvPr id="8" name="TextBox 7"/>
+          <p:cNvPr id="7" name="TextBox 6"/>
           <p:cNvSpPr txBox="1"/>
           <p:nvPr/>
         </p:nvSpPr>
@@ -5711,7 +5243,7 @@
       </p:sp>
       <p:pic>
         <p:nvPicPr>
-          <p:cNvPr id="9" name="Picture 8" descr="2d36713d8b05952d.png"/>
+          <p:cNvPr id="8" name="Picture 7" descr="2d36713d8b05952d.png"/>
           <p:cNvPicPr>
             <a:picLocks noChangeAspect="1"/>
           </p:cNvPicPr>
@@ -5735,7 +5267,7 @@
       </p:pic>
       <p:sp>
         <p:nvSpPr>
-          <p:cNvPr id="10" name="TextBox 9"/>
+          <p:cNvPr id="9" name="TextBox 8"/>
           <p:cNvSpPr txBox="1"/>
           <p:nvPr/>
         </p:nvSpPr>
@@ -5764,41 +5296,6 @@
                 <a:latin typeface="Century Schoolbook"/>
               </a:rPr>
               <a:t>Answer it.</a:t>
-            </a:r>
-          </a:p>
-        </p:txBody>
-      </p:sp>
-      <p:sp>
-        <p:nvSpPr>
-          <p:cNvPr id="11" name="TextBox 10"/>
-          <p:cNvSpPr txBox="1"/>
-          <p:nvPr/>
-        </p:nvSpPr>
-        <p:spPr>
-          <a:xfrm>
-            <a:off x="777240" y="4828032"/>
-            <a:ext cx="10607040" cy="365760"/>
-          </a:xfrm>
-          <a:prstGeom prst="rect">
-            <a:avLst/>
-          </a:prstGeom>
-          <a:noFill/>
-        </p:spPr>
-        <p:txBody>
-          <a:bodyPr wrap="square" lIns="45720" rIns="45720" tIns="18288" bIns="18288" anchor="t">
-            <a:spAutoFit/>
-          </a:bodyPr>
-          <a:lstStyle/>
-          <a:p>
-            <a:pPr algn="ctr"/>
-            <a:r>
-              <a:rPr sz="1900" b="0" i="1">
-                <a:solidFill>
-                  <a:srgbClr val="6B6B6B"/>
-                </a:solidFill>
-                <a:latin typeface="Century Schoolbook"/>
-              </a:rPr>
-              <a:t>Rewrite with a positive exponent.</a:t>
             </a:r>
           </a:p>
         </p:txBody>
@@ -5926,44 +5423,9 @@
           </a:fontRef>
         </p:style>
       </p:cxnSp>
-      <p:sp>
-        <p:nvSpPr>
-          <p:cNvPr id="5" name="TextBox 4"/>
-          <p:cNvSpPr txBox="1"/>
-          <p:nvPr/>
-        </p:nvSpPr>
-        <p:spPr>
-          <a:xfrm>
-            <a:off x="777240" y="1261872"/>
-            <a:ext cx="10607040" cy="310896"/>
-          </a:xfrm>
-          <a:prstGeom prst="rect">
-            <a:avLst/>
-          </a:prstGeom>
-          <a:noFill/>
-        </p:spPr>
-        <p:txBody>
-          <a:bodyPr wrap="square" lIns="45720" rIns="45720" tIns="18288" bIns="18288" anchor="t">
-            <a:spAutoFit/>
-          </a:bodyPr>
-          <a:lstStyle/>
-          <a:p>
-            <a:pPr algn="l"/>
-            <a:r>
-              <a:rPr sz="1700" b="0" i="1">
-                <a:solidFill>
-                  <a:srgbClr val="6B6B6B"/>
-                </a:solidFill>
-                <a:latin typeface="Century Schoolbook"/>
-              </a:rPr>
-              <a:t>Answer.</a:t>
-            </a:r>
-          </a:p>
-        </p:txBody>
-      </p:sp>
       <p:cxnSp>
         <p:nvCxnSpPr>
-          <p:cNvPr id="6" name="Connector 5"/>
+          <p:cNvPr id="5" name="Connector 4"/>
           <p:cNvCxnSpPr/>
           <p:nvPr/>
         </p:nvCxnSpPr>
@@ -5998,7 +5460,7 @@
       </p:cxnSp>
       <p:sp>
         <p:nvSpPr>
-          <p:cNvPr id="7" name="TextBox 6"/>
+          <p:cNvPr id="6" name="TextBox 5"/>
           <p:cNvSpPr txBox="1"/>
           <p:nvPr/>
         </p:nvSpPr>
@@ -6033,7 +5495,7 @@
       </p:sp>
       <p:sp>
         <p:nvSpPr>
-          <p:cNvPr id="8" name="TextBox 7"/>
+          <p:cNvPr id="7" name="TextBox 6"/>
           <p:cNvSpPr txBox="1"/>
           <p:nvPr/>
         </p:nvSpPr>
@@ -6068,7 +5530,7 @@
       </p:sp>
       <p:pic>
         <p:nvPicPr>
-          <p:cNvPr id="9" name="Picture 8" descr="745cde1f9722bfe0.png"/>
+          <p:cNvPr id="8" name="Picture 7" descr="745cde1f9722bfe0.png"/>
           <p:cNvPicPr>
             <a:picLocks noChangeAspect="1"/>
           </p:cNvPicPr>
@@ -6092,51 +5554,7 @@
       </p:pic>
       <p:sp>
         <p:nvSpPr>
-          <p:cNvPr id="10" name="TextBox 9"/>
-          <p:cNvSpPr txBox="1"/>
-          <p:nvPr/>
-        </p:nvSpPr>
-        <p:spPr>
-          <a:xfrm>
-            <a:off x="1828800" y="2804160"/>
-            <a:ext cx="8503920" cy="548640"/>
-          </a:xfrm>
-          <a:prstGeom prst="rect">
-            <a:avLst/>
-          </a:prstGeom>
-          <a:noFill/>
-        </p:spPr>
-        <p:txBody>
-          <a:bodyPr wrap="square" lIns="45720" rIns="45720" tIns="18288" bIns="18288" anchor="t">
-            <a:spAutoFit/>
-          </a:bodyPr>
-          <a:lstStyle/>
-          <a:p>
-            <a:pPr algn="ctr"/>
-            <a:r>
-              <a:rPr sz="2400" b="0" i="0">
-                <a:solidFill>
-                  <a:srgbClr val="6B6B6B"/>
-                </a:solidFill>
-                <a:latin typeface="Century Schoolbook"/>
-              </a:rPr>
-              <a:t>reciprocal of 8</a:t>
-            </a:r>
-            <a:r>
-              <a:rPr sz="2400" b="0" i="0" baseline="30000">
-                <a:solidFill>
-                  <a:srgbClr val="6B6B6B"/>
-                </a:solidFill>
-                <a:latin typeface="Century Schoolbook"/>
-              </a:rPr>
-              <a:t>3</a:t>
-            </a:r>
-          </a:p>
-        </p:txBody>
-      </p:sp>
-      <p:sp>
-        <p:nvSpPr>
-          <p:cNvPr id="11" name="TextBox 10"/>
+          <p:cNvPr id="9" name="TextBox 8"/>
           <p:cNvSpPr txBox="1"/>
           <p:nvPr/>
         </p:nvSpPr>
@@ -6171,7 +5589,7 @@
       </p:sp>
       <p:pic>
         <p:nvPicPr>
-          <p:cNvPr id="12" name="Picture 11" descr="ae3379378f6437bc.png"/>
+          <p:cNvPr id="10" name="Picture 9" descr="ae3379378f6437bc.png"/>
           <p:cNvPicPr>
             <a:picLocks noChangeAspect="1"/>
           </p:cNvPicPr>
@@ -6316,44 +5734,9 @@
           </a:fontRef>
         </p:style>
       </p:cxnSp>
-      <p:sp>
-        <p:nvSpPr>
-          <p:cNvPr id="5" name="TextBox 4"/>
-          <p:cNvSpPr txBox="1"/>
-          <p:nvPr/>
-        </p:nvSpPr>
-        <p:spPr>
-          <a:xfrm>
-            <a:off x="777240" y="1261872"/>
-            <a:ext cx="10607040" cy="310896"/>
-          </a:xfrm>
-          <a:prstGeom prst="rect">
-            <a:avLst/>
-          </a:prstGeom>
-          <a:noFill/>
-        </p:spPr>
-        <p:txBody>
-          <a:bodyPr wrap="square" lIns="45720" rIns="45720" tIns="18288" bIns="18288" anchor="t">
-            <a:spAutoFit/>
-          </a:bodyPr>
-          <a:lstStyle/>
-          <a:p>
-            <a:pPr algn="l"/>
-            <a:r>
-              <a:rPr sz="1700" b="0" i="1">
-                <a:solidFill>
-                  <a:srgbClr val="6B6B6B"/>
-                </a:solidFill>
-                <a:latin typeface="Century Schoolbook"/>
-              </a:rPr>
-              <a:t>Boards up on three.</a:t>
-            </a:r>
-          </a:p>
-        </p:txBody>
-      </p:sp>
       <p:cxnSp>
         <p:nvCxnSpPr>
-          <p:cNvPr id="6" name="Connector 5"/>
+          <p:cNvPr id="5" name="Connector 4"/>
           <p:cNvCxnSpPr/>
           <p:nvPr/>
         </p:nvCxnSpPr>
@@ -6388,7 +5771,7 @@
       </p:cxnSp>
       <p:sp>
         <p:nvSpPr>
-          <p:cNvPr id="7" name="TextBox 6"/>
+          <p:cNvPr id="6" name="TextBox 5"/>
           <p:cNvSpPr txBox="1"/>
           <p:nvPr/>
         </p:nvSpPr>
@@ -6423,7 +5806,7 @@
       </p:sp>
       <p:sp>
         <p:nvSpPr>
-          <p:cNvPr id="8" name="TextBox 7"/>
+          <p:cNvPr id="7" name="TextBox 6"/>
           <p:cNvSpPr txBox="1"/>
           <p:nvPr/>
         </p:nvSpPr>
@@ -6458,7 +5841,7 @@
       </p:sp>
       <p:sp>
         <p:nvSpPr>
-          <p:cNvPr id="9" name="TextBox 8"/>
+          <p:cNvPr id="8" name="TextBox 7"/>
           <p:cNvSpPr txBox="1"/>
           <p:nvPr/>
         </p:nvSpPr>
@@ -6493,7 +5876,7 @@
       </p:sp>
       <p:sp>
         <p:nvSpPr>
-          <p:cNvPr id="10" name="TextBox 9"/>
+          <p:cNvPr id="9" name="TextBox 8"/>
           <p:cNvSpPr txBox="1"/>
           <p:nvPr/>
         </p:nvSpPr>
@@ -6528,7 +5911,7 @@
       </p:sp>
       <p:sp>
         <p:nvSpPr>
-          <p:cNvPr id="11" name="TextBox 10"/>
+          <p:cNvPr id="10" name="TextBox 9"/>
           <p:cNvSpPr txBox="1"/>
           <p:nvPr/>
         </p:nvSpPr>
@@ -6563,7 +5946,7 @@
       </p:sp>
       <p:sp>
         <p:nvSpPr>
-          <p:cNvPr id="12" name="TextBox 11"/>
+          <p:cNvPr id="11" name="TextBox 10"/>
           <p:cNvSpPr txBox="1"/>
           <p:nvPr/>
         </p:nvSpPr>
@@ -6719,44 +6102,9 @@
           </a:fontRef>
         </p:style>
       </p:cxnSp>
-      <p:sp>
-        <p:nvSpPr>
-          <p:cNvPr id="5" name="TextBox 4"/>
-          <p:cNvSpPr txBox="1"/>
-          <p:nvPr/>
-        </p:nvSpPr>
-        <p:spPr>
-          <a:xfrm>
-            <a:off x="777240" y="1261872"/>
-            <a:ext cx="10607040" cy="310896"/>
-          </a:xfrm>
-          <a:prstGeom prst="rect">
-            <a:avLst/>
-          </a:prstGeom>
-          <a:noFill/>
-        </p:spPr>
-        <p:txBody>
-          <a:bodyPr wrap="square" lIns="45720" rIns="45720" tIns="18288" bIns="18288" anchor="t">
-            <a:spAutoFit/>
-          </a:bodyPr>
-          <a:lstStyle/>
-          <a:p>
-            <a:pPr algn="l"/>
-            <a:r>
-              <a:rPr sz="1700" b="0" i="1">
-                <a:solidFill>
-                  <a:srgbClr val="6B6B6B"/>
-                </a:solidFill>
-                <a:latin typeface="Century Schoolbook"/>
-              </a:rPr>
-              <a:t>Answer.</a:t>
-            </a:r>
-          </a:p>
-        </p:txBody>
-      </p:sp>
       <p:cxnSp>
         <p:nvCxnSpPr>
-          <p:cNvPr id="6" name="Connector 5"/>
+          <p:cNvPr id="5" name="Connector 4"/>
           <p:cNvCxnSpPr/>
           <p:nvPr/>
         </p:nvCxnSpPr>
@@ -6791,7 +6139,7 @@
       </p:cxnSp>
       <p:sp>
         <p:nvSpPr>
-          <p:cNvPr id="7" name="TextBox 6"/>
+          <p:cNvPr id="6" name="TextBox 5"/>
           <p:cNvSpPr txBox="1"/>
           <p:nvPr/>
         </p:nvSpPr>
@@ -6826,7 +6174,7 @@
       </p:sp>
       <p:sp>
         <p:nvSpPr>
-          <p:cNvPr id="8" name="TextBox 7"/>
+          <p:cNvPr id="7" name="TextBox 6"/>
           <p:cNvSpPr txBox="1"/>
           <p:nvPr/>
         </p:nvSpPr>
@@ -6861,7 +6209,7 @@
       </p:sp>
       <p:sp>
         <p:nvSpPr>
-          <p:cNvPr id="9" name="TextBox 8"/>
+          <p:cNvPr id="8" name="TextBox 7"/>
           <p:cNvSpPr txBox="1"/>
           <p:nvPr/>
         </p:nvSpPr>
@@ -6896,7 +6244,7 @@
       </p:sp>
       <p:sp>
         <p:nvSpPr>
-          <p:cNvPr id="10" name="TextBox 9"/>
+          <p:cNvPr id="9" name="TextBox 8"/>
           <p:cNvSpPr txBox="1"/>
           <p:nvPr/>
         </p:nvSpPr>
@@ -6931,7 +6279,7 @@
       </p:sp>
       <p:sp>
         <p:nvSpPr>
-          <p:cNvPr id="11" name="TextBox 10"/>
+          <p:cNvPr id="10" name="TextBox 9"/>
           <p:cNvSpPr txBox="1"/>
           <p:nvPr/>
         </p:nvSpPr>
@@ -6966,75 +6314,13 @@
       </p:sp>
       <p:sp>
         <p:nvSpPr>
-          <p:cNvPr id="12" name="TextBox 11"/>
-          <p:cNvSpPr txBox="1"/>
-          <p:nvPr/>
-        </p:nvSpPr>
-        <p:spPr>
-          <a:xfrm>
-            <a:off x="1828800" y="4012625"/>
-            <a:ext cx="8503920" cy="548640"/>
-          </a:xfrm>
-          <a:prstGeom prst="rect">
-            <a:avLst/>
-          </a:prstGeom>
-          <a:noFill/>
-        </p:spPr>
-        <p:txBody>
-          <a:bodyPr wrap="square" lIns="45720" rIns="45720" tIns="18288" bIns="18288" anchor="t">
-            <a:spAutoFit/>
-          </a:bodyPr>
-          <a:lstStyle/>
-          <a:p>
-            <a:pPr algn="ctr"/>
-            <a:r>
-              <a:rPr sz="2400" b="0" i="0">
-                <a:solidFill>
-                  <a:srgbClr val="6B6B6B"/>
-                </a:solidFill>
-                <a:latin typeface="Century Schoolbook"/>
-              </a:rPr>
-              <a:t>halved 7 times: 2</a:t>
-            </a:r>
-            <a:r>
-              <a:rPr sz="2400" b="0" i="0" baseline="30000">
-                <a:solidFill>
-                  <a:srgbClr val="6B6B6B"/>
-                </a:solidFill>
-                <a:latin typeface="Century Schoolbook"/>
-              </a:rPr>
-              <a:t>-7</a:t>
-            </a:r>
-            <a:r>
-              <a:rPr sz="2400" b="0" i="0">
-                <a:solidFill>
-                  <a:srgbClr val="6B6B6B"/>
-                </a:solidFill>
-                <a:latin typeface="Century Schoolbook"/>
-              </a:rPr>
-              <a:t> = 1 over 2</a:t>
-            </a:r>
-            <a:r>
-              <a:rPr sz="2400" b="0" i="0" baseline="30000">
-                <a:solidFill>
-                  <a:srgbClr val="6B6B6B"/>
-                </a:solidFill>
-                <a:latin typeface="Century Schoolbook"/>
-              </a:rPr>
-              <a:t>7</a:t>
-            </a:r>
-          </a:p>
-        </p:txBody>
-      </p:sp>
-      <p:sp>
-        <p:nvSpPr>
-          <p:cNvPr id="13" name="TextBox 12"/>
-          <p:cNvSpPr txBox="1"/>
-          <p:nvPr/>
-        </p:nvSpPr>
-        <p:spPr>
-          <a:xfrm>
-            <a:off x="4738116" y="4899593"/>
+          <p:cNvPr id="11" name="TextBox 10"/>
+          <p:cNvSpPr txBox="1"/>
+          <p:nvPr/>
+        </p:nvSpPr>
+        <p:spPr>
+          <a:xfrm>
+            <a:off x="4738116" y="4818888"/>
             <a:ext cx="1920240" cy="548640"/>
           </a:xfrm>
           <a:prstGeom prst="rect">
@@ -7063,7 +6349,7 @@
       </p:sp>
       <p:pic>
         <p:nvPicPr>
-          <p:cNvPr id="14" name="Picture 13" descr="b025bbe2352d111b.png"/>
+          <p:cNvPr id="12" name="Picture 11" descr="b025bbe2352d111b.png"/>
           <p:cNvPicPr>
             <a:picLocks noChangeAspect="1"/>
           </p:cNvPicPr>
@@ -7077,7 +6363,7 @@
         </p:blipFill>
         <p:spPr>
           <a:xfrm>
-            <a:off x="6658356" y="4744145"/>
+            <a:off x="6658356" y="4663440"/>
             <a:ext cx="765048" cy="859536"/>
           </a:xfrm>
           <a:prstGeom prst="rect">
@@ -7208,44 +6494,9 @@
           </a:fontRef>
         </p:style>
       </p:cxnSp>
-      <p:sp>
-        <p:nvSpPr>
-          <p:cNvPr id="5" name="TextBox 4"/>
-          <p:cNvSpPr txBox="1"/>
-          <p:nvPr/>
-        </p:nvSpPr>
-        <p:spPr>
-          <a:xfrm>
-            <a:off x="777240" y="1261872"/>
-            <a:ext cx="10607040" cy="310896"/>
-          </a:xfrm>
-          <a:prstGeom prst="rect">
-            <a:avLst/>
-          </a:prstGeom>
-          <a:noFill/>
-        </p:spPr>
-        <p:txBody>
-          <a:bodyPr wrap="square" lIns="45720" rIns="45720" tIns="18288" bIns="18288" anchor="t">
-            <a:spAutoFit/>
-          </a:bodyPr>
-          <a:lstStyle/>
-          <a:p>
-            <a:pPr algn="l"/>
-            <a:r>
-              <a:rPr sz="1700" b="0" i="1">
-                <a:solidFill>
-                  <a:srgbClr val="6B6B6B"/>
-                </a:solidFill>
-                <a:latin typeface="Century Schoolbook"/>
-              </a:rPr>
-              <a:t>Boards up on three.</a:t>
-            </a:r>
-          </a:p>
-        </p:txBody>
-      </p:sp>
       <p:cxnSp>
         <p:nvCxnSpPr>
-          <p:cNvPr id="6" name="Connector 5"/>
+          <p:cNvPr id="5" name="Connector 4"/>
           <p:cNvCxnSpPr/>
           <p:nvPr/>
         </p:nvCxnSpPr>
@@ -7280,7 +6531,7 @@
       </p:cxnSp>
       <p:sp>
         <p:nvSpPr>
-          <p:cNvPr id="7" name="TextBox 6"/>
+          <p:cNvPr id="6" name="TextBox 5"/>
           <p:cNvSpPr txBox="1"/>
           <p:nvPr/>
         </p:nvSpPr>
@@ -7315,7 +6566,7 @@
       </p:sp>
       <p:sp>
         <p:nvSpPr>
-          <p:cNvPr id="8" name="TextBox 7"/>
+          <p:cNvPr id="7" name="TextBox 6"/>
           <p:cNvSpPr txBox="1"/>
           <p:nvPr/>
         </p:nvSpPr>
@@ -7350,7 +6601,7 @@
       </p:sp>
       <p:pic>
         <p:nvPicPr>
-          <p:cNvPr id="9" name="Picture 8" descr="229e5926a19b9fe2.png"/>
+          <p:cNvPr id="8" name="Picture 7" descr="229e5926a19b9fe2.png"/>
           <p:cNvPicPr>
             <a:picLocks noChangeAspect="1"/>
           </p:cNvPicPr>
@@ -7374,7 +6625,7 @@
       </p:pic>
       <p:sp>
         <p:nvSpPr>
-          <p:cNvPr id="10" name="TextBox 9"/>
+          <p:cNvPr id="9" name="TextBox 8"/>
           <p:cNvSpPr txBox="1"/>
           <p:nvPr/>
         </p:nvSpPr>
@@ -7403,41 +6654,6 @@
                 <a:latin typeface="Century Schoolbook"/>
               </a:rPr>
               <a:t>Answer it.</a:t>
-            </a:r>
-          </a:p>
-        </p:txBody>
-      </p:sp>
-      <p:sp>
-        <p:nvSpPr>
-          <p:cNvPr id="11" name="TextBox 10"/>
-          <p:cNvSpPr txBox="1"/>
-          <p:nvPr/>
-        </p:nvSpPr>
-        <p:spPr>
-          <a:xfrm>
-            <a:off x="777240" y="4828032"/>
-            <a:ext cx="10607040" cy="365760"/>
-          </a:xfrm>
-          <a:prstGeom prst="rect">
-            <a:avLst/>
-          </a:prstGeom>
-          <a:noFill/>
-        </p:spPr>
-        <p:txBody>
-          <a:bodyPr wrap="square" lIns="45720" rIns="45720" tIns="18288" bIns="18288" anchor="t">
-            <a:spAutoFit/>
-          </a:bodyPr>
-          <a:lstStyle/>
-          <a:p>
-            <a:pPr algn="ctr"/>
-            <a:r>
-              <a:rPr sz="1900" b="0" i="1">
-                <a:solidFill>
-                  <a:srgbClr val="6B6B6B"/>
-                </a:solidFill>
-                <a:latin typeface="Century Schoolbook"/>
-              </a:rPr>
-              <a:t>Rewrite with a positive exponent, then find the value.</a:t>
             </a:r>
           </a:p>
         </p:txBody>
@@ -7565,44 +6781,9 @@
           </a:fontRef>
         </p:style>
       </p:cxnSp>
-      <p:sp>
-        <p:nvSpPr>
-          <p:cNvPr id="5" name="TextBox 4"/>
-          <p:cNvSpPr txBox="1"/>
-          <p:nvPr/>
-        </p:nvSpPr>
-        <p:spPr>
-          <a:xfrm>
-            <a:off x="777240" y="1261872"/>
-            <a:ext cx="10607040" cy="310896"/>
-          </a:xfrm>
-          <a:prstGeom prst="rect">
-            <a:avLst/>
-          </a:prstGeom>
-          <a:noFill/>
-        </p:spPr>
-        <p:txBody>
-          <a:bodyPr wrap="square" lIns="45720" rIns="45720" tIns="18288" bIns="18288" anchor="t">
-            <a:spAutoFit/>
-          </a:bodyPr>
-          <a:lstStyle/>
-          <a:p>
-            <a:pPr algn="l"/>
-            <a:r>
-              <a:rPr sz="1700" b="0" i="1">
-                <a:solidFill>
-                  <a:srgbClr val="6B6B6B"/>
-                </a:solidFill>
-                <a:latin typeface="Century Schoolbook"/>
-              </a:rPr>
-              <a:t>On your own. Four minutes. No notes.</a:t>
-            </a:r>
-          </a:p>
-        </p:txBody>
-      </p:sp>
       <p:cxnSp>
         <p:nvCxnSpPr>
-          <p:cNvPr id="6" name="Connector 5"/>
+          <p:cNvPr id="5" name="Connector 4"/>
           <p:cNvCxnSpPr/>
           <p:nvPr/>
         </p:nvCxnSpPr>
@@ -7637,7 +6818,7 @@
       </p:cxnSp>
       <p:sp>
         <p:nvSpPr>
-          <p:cNvPr id="7" name="TextBox 6"/>
+          <p:cNvPr id="6" name="TextBox 5"/>
           <p:cNvSpPr txBox="1"/>
           <p:nvPr/>
         </p:nvSpPr>
@@ -7672,7 +6853,7 @@
       </p:sp>
       <p:sp>
         <p:nvSpPr>
-          <p:cNvPr id="8" name="TextBox 7"/>
+          <p:cNvPr id="7" name="TextBox 6"/>
           <p:cNvSpPr txBox="1"/>
           <p:nvPr/>
         </p:nvSpPr>
@@ -7707,13 +6888,13 @@
       </p:sp>
       <p:sp>
         <p:nvSpPr>
-          <p:cNvPr id="9" name="TextBox 8"/>
-          <p:cNvSpPr txBox="1"/>
-          <p:nvPr/>
-        </p:nvSpPr>
-        <p:spPr>
-          <a:xfrm>
-            <a:off x="1874519" y="1886712"/>
+          <p:cNvPr id="8" name="TextBox 7"/>
+          <p:cNvSpPr txBox="1"/>
+          <p:nvPr/>
+        </p:nvSpPr>
+        <p:spPr>
+          <a:xfrm>
+            <a:off x="1874519" y="1566672"/>
             <a:ext cx="3058734" cy="457200"/>
           </a:xfrm>
           <a:prstGeom prst="rect">
@@ -7742,7 +6923,7 @@
       </p:sp>
       <p:pic>
         <p:nvPicPr>
-          <p:cNvPr id="10" name="Picture 9" descr="e6b67427858e96f9.png"/>
+          <p:cNvPr id="9" name="Picture 8" descr="e6b67427858e96f9.png"/>
           <p:cNvPicPr>
             <a:picLocks noChangeAspect="1"/>
           </p:cNvPicPr>
@@ -7756,7 +6937,7 @@
         </p:blipFill>
         <p:spPr>
           <a:xfrm>
-            <a:off x="4796094" y="1783080"/>
+            <a:off x="4796094" y="1463040"/>
             <a:ext cx="795528" cy="664464"/>
           </a:xfrm>
           <a:prstGeom prst="rect">
@@ -7766,13 +6947,13 @@
       </p:pic>
       <p:sp>
         <p:nvSpPr>
-          <p:cNvPr id="11" name="TextBox 10"/>
-          <p:cNvSpPr txBox="1"/>
-          <p:nvPr/>
-        </p:nvSpPr>
-        <p:spPr>
-          <a:xfrm>
-            <a:off x="1874519" y="2625852"/>
+          <p:cNvPr id="10" name="TextBox 9"/>
+          <p:cNvSpPr txBox="1"/>
+          <p:nvPr/>
+        </p:nvSpPr>
+        <p:spPr>
+          <a:xfrm>
+            <a:off x="1874519" y="2305812"/>
             <a:ext cx="3255563" cy="457200"/>
           </a:xfrm>
           <a:prstGeom prst="rect">
@@ -7801,7 +6982,7 @@
       </p:sp>
       <p:pic>
         <p:nvPicPr>
-          <p:cNvPr id="12" name="Picture 11" descr="9a9a9137b9c7170a.png"/>
+          <p:cNvPr id="11" name="Picture 10" descr="9a9a9137b9c7170a.png"/>
           <p:cNvPicPr>
             <a:picLocks noChangeAspect="1"/>
           </p:cNvPicPr>
@@ -7815,7 +6996,7 @@
         </p:blipFill>
         <p:spPr>
           <a:xfrm>
-            <a:off x="4992923" y="2650236"/>
+            <a:off x="4992923" y="2330196"/>
             <a:ext cx="688848" cy="408432"/>
           </a:xfrm>
           <a:prstGeom prst="rect">
@@ -7825,13 +7006,13 @@
       </p:pic>
       <p:sp>
         <p:nvSpPr>
-          <p:cNvPr id="13" name="TextBox 12"/>
-          <p:cNvSpPr txBox="1"/>
-          <p:nvPr/>
-        </p:nvSpPr>
-        <p:spPr>
-          <a:xfrm>
-            <a:off x="5681771" y="2625852"/>
+          <p:cNvPr id="12" name="TextBox 11"/>
+          <p:cNvSpPr txBox="1"/>
+          <p:nvPr/>
+        </p:nvSpPr>
+        <p:spPr>
+          <a:xfrm>
+            <a:off x="5681771" y="2305812"/>
             <a:ext cx="1242626" cy="457200"/>
           </a:xfrm>
           <a:prstGeom prst="rect">
@@ -7860,13 +7041,13 @@
       </p:sp>
       <p:sp>
         <p:nvSpPr>
-          <p:cNvPr id="14" name="TextBox 13"/>
-          <p:cNvSpPr txBox="1"/>
-          <p:nvPr/>
-        </p:nvSpPr>
-        <p:spPr>
-          <a:xfrm>
-            <a:off x="1874519" y="3238500"/>
+          <p:cNvPr id="13" name="TextBox 12"/>
+          <p:cNvSpPr txBox="1"/>
+          <p:nvPr/>
+        </p:nvSpPr>
+        <p:spPr>
+          <a:xfrm>
+            <a:off x="1874519" y="2918460"/>
             <a:ext cx="1652008" cy="457200"/>
           </a:xfrm>
           <a:prstGeom prst="rect">
@@ -7895,7 +7076,7 @@
       </p:sp>
       <p:pic>
         <p:nvPicPr>
-          <p:cNvPr id="15" name="Picture 14" descr="86c14b3a9138d085.png"/>
+          <p:cNvPr id="14" name="Picture 13" descr="86c14b3a9138d085.png"/>
           <p:cNvPicPr>
             <a:picLocks noChangeAspect="1"/>
           </p:cNvPicPr>
@@ -7909,7 +7090,7 @@
         </p:blipFill>
         <p:spPr>
           <a:xfrm>
-            <a:off x="3389368" y="3351276"/>
+            <a:off x="3389368" y="3031236"/>
             <a:ext cx="1136904" cy="231648"/>
           </a:xfrm>
           <a:prstGeom prst="rect">
@@ -7919,13 +7100,13 @@
       </p:pic>
       <p:sp>
         <p:nvSpPr>
-          <p:cNvPr id="16" name="TextBox 15"/>
-          <p:cNvSpPr txBox="1"/>
-          <p:nvPr/>
-        </p:nvSpPr>
-        <p:spPr>
-          <a:xfrm>
-            <a:off x="1874519" y="3922776"/>
+          <p:cNvPr id="15" name="TextBox 14"/>
+          <p:cNvSpPr txBox="1"/>
+          <p:nvPr/>
+        </p:nvSpPr>
+        <p:spPr>
+          <a:xfrm>
+            <a:off x="1874519" y="3602736"/>
             <a:ext cx="4308965" cy="457200"/>
           </a:xfrm>
           <a:prstGeom prst="rect">
@@ -7954,7 +7135,7 @@
       </p:sp>
       <p:pic>
         <p:nvPicPr>
-          <p:cNvPr id="17" name="Picture 16" descr="ef641fad4ba74c7d.png"/>
+          <p:cNvPr id="16" name="Picture 15" descr="ef641fad4ba74c7d.png"/>
           <p:cNvPicPr>
             <a:picLocks noChangeAspect="1"/>
           </p:cNvPicPr>
@@ -7968,7 +7149,7 @@
         </p:blipFill>
         <p:spPr>
           <a:xfrm>
-            <a:off x="6046325" y="3874008"/>
+            <a:off x="6046325" y="3553968"/>
             <a:ext cx="170688" cy="554736"/>
           </a:xfrm>
           <a:prstGeom prst="rect">
@@ -7978,13 +7159,13 @@
       </p:pic>
       <p:sp>
         <p:nvSpPr>
-          <p:cNvPr id="18" name="TextBox 17"/>
-          <p:cNvSpPr txBox="1"/>
-          <p:nvPr/>
-        </p:nvSpPr>
-        <p:spPr>
-          <a:xfrm>
-            <a:off x="6217013" y="3922776"/>
+          <p:cNvPr id="17" name="TextBox 16"/>
+          <p:cNvSpPr txBox="1"/>
+          <p:nvPr/>
+        </p:nvSpPr>
+        <p:spPr>
+          <a:xfrm>
+            <a:off x="6217013" y="3602736"/>
             <a:ext cx="3880389" cy="457200"/>
           </a:xfrm>
           <a:prstGeom prst="rect">
@@ -8013,7 +7194,7 @@
       </p:sp>
       <p:pic>
         <p:nvPicPr>
-          <p:cNvPr id="19" name="Picture 18" descr="ef641fad4ba74c7d.png"/>
+          <p:cNvPr id="18" name="Picture 17" descr="ef641fad4ba74c7d.png"/>
           <p:cNvPicPr>
             <a:picLocks noChangeAspect="1"/>
           </p:cNvPicPr>
@@ -8027,7 +7208,7 @@
         </p:blipFill>
         <p:spPr>
           <a:xfrm>
-            <a:off x="9960242" y="3874008"/>
+            <a:off x="9960242" y="3553968"/>
             <a:ext cx="170688" cy="554736"/>
           </a:xfrm>
           <a:prstGeom prst="rect">
@@ -8037,13 +7218,13 @@
       </p:pic>
       <p:sp>
         <p:nvSpPr>
-          <p:cNvPr id="20" name="TextBox 19"/>
-          <p:cNvSpPr txBox="1"/>
-          <p:nvPr/>
-        </p:nvSpPr>
-        <p:spPr>
-          <a:xfrm>
-            <a:off x="10130930" y="3922776"/>
+          <p:cNvPr id="19" name="TextBox 18"/>
+          <p:cNvSpPr txBox="1"/>
+          <p:nvPr/>
+        </p:nvSpPr>
+        <p:spPr>
+          <a:xfrm>
+            <a:off x="10130930" y="3602736"/>
             <a:ext cx="347771" cy="457200"/>
           </a:xfrm>
           <a:prstGeom prst="rect">
@@ -8193,44 +7374,9 @@
           </a:fontRef>
         </p:style>
       </p:cxnSp>
-      <p:sp>
-        <p:nvSpPr>
-          <p:cNvPr id="5" name="TextBox 4"/>
-          <p:cNvSpPr txBox="1"/>
-          <p:nvPr/>
-        </p:nvSpPr>
-        <p:spPr>
-          <a:xfrm>
-            <a:off x="777240" y="1261872"/>
-            <a:ext cx="10607040" cy="310896"/>
-          </a:xfrm>
-          <a:prstGeom prst="rect">
-            <a:avLst/>
-          </a:prstGeom>
-          <a:noFill/>
-        </p:spPr>
-        <p:txBody>
-          <a:bodyPr wrap="square" lIns="45720" rIns="45720" tIns="18288" bIns="18288" anchor="t">
-            <a:spAutoFit/>
-          </a:bodyPr>
-          <a:lstStyle/>
-          <a:p>
-            <a:pPr algn="l"/>
-            <a:r>
-              <a:rPr sz="1700" b="0" i="1">
-                <a:solidFill>
-                  <a:srgbClr val="6B6B6B"/>
-                </a:solidFill>
-                <a:latin typeface="Century Schoolbook"/>
-              </a:rPr>
-              <a:t>Answer.</a:t>
-            </a:r>
-          </a:p>
-        </p:txBody>
-      </p:sp>
       <p:cxnSp>
         <p:nvCxnSpPr>
-          <p:cNvPr id="6" name="Connector 5"/>
+          <p:cNvPr id="5" name="Connector 4"/>
           <p:cNvCxnSpPr/>
           <p:nvPr/>
         </p:nvCxnSpPr>
@@ -8265,7 +7411,7 @@
       </p:cxnSp>
       <p:sp>
         <p:nvSpPr>
-          <p:cNvPr id="7" name="TextBox 6"/>
+          <p:cNvPr id="6" name="TextBox 5"/>
           <p:cNvSpPr txBox="1"/>
           <p:nvPr/>
         </p:nvSpPr>
@@ -8300,7 +7446,7 @@
       </p:sp>
       <p:sp>
         <p:nvSpPr>
-          <p:cNvPr id="8" name="TextBox 7"/>
+          <p:cNvPr id="7" name="TextBox 6"/>
           <p:cNvSpPr txBox="1"/>
           <p:nvPr/>
         </p:nvSpPr>
@@ -8335,7 +7481,7 @@
       </p:sp>
       <p:pic>
         <p:nvPicPr>
-          <p:cNvPr id="9" name="Picture 8" descr="8f039f3016127628.png"/>
+          <p:cNvPr id="8" name="Picture 7" descr="8f039f3016127628.png"/>
           <p:cNvPicPr>
             <a:picLocks noChangeAspect="1"/>
           </p:cNvPicPr>
@@ -8359,51 +7505,7 @@
       </p:pic>
       <p:sp>
         <p:nvSpPr>
-          <p:cNvPr id="10" name="TextBox 9"/>
-          <p:cNvSpPr txBox="1"/>
-          <p:nvPr/>
-        </p:nvSpPr>
-        <p:spPr>
-          <a:xfrm>
-            <a:off x="1828800" y="3310127"/>
-            <a:ext cx="8503920" cy="548640"/>
-          </a:xfrm>
-          <a:prstGeom prst="rect">
-            <a:avLst/>
-          </a:prstGeom>
-          <a:noFill/>
-        </p:spPr>
-        <p:txBody>
-          <a:bodyPr wrap="square" lIns="45720" rIns="45720" tIns="18288" bIns="18288" anchor="t">
-            <a:spAutoFit/>
-          </a:bodyPr>
-          <a:lstStyle/>
-          <a:p>
-            <a:pPr algn="ctr"/>
-            <a:r>
-              <a:rPr sz="2400" b="0" i="0">
-                <a:solidFill>
-                  <a:srgbClr val="6B6B6B"/>
-                </a:solidFill>
-                <a:latin typeface="Century Schoolbook"/>
-              </a:rPr>
-              <a:t>the power moves up: 10</a:t>
-            </a:r>
-            <a:r>
-              <a:rPr sz="2400" b="0" i="0" baseline="30000">
-                <a:solidFill>
-                  <a:srgbClr val="6B6B6B"/>
-                </a:solidFill>
-                <a:latin typeface="Century Schoolbook"/>
-              </a:rPr>
-              <a:t>2</a:t>
-            </a:r>
-          </a:p>
-        </p:txBody>
-      </p:sp>
-      <p:sp>
-        <p:nvSpPr>
-          <p:cNvPr id="11" name="TextBox 10"/>
+          <p:cNvPr id="9" name="TextBox 8"/>
           <p:cNvSpPr txBox="1"/>
           <p:nvPr/>
         </p:nvSpPr>
@@ -8577,44 +7679,9 @@
           </a:fontRef>
         </p:style>
       </p:cxnSp>
-      <p:sp>
-        <p:nvSpPr>
-          <p:cNvPr id="5" name="TextBox 4"/>
-          <p:cNvSpPr txBox="1"/>
-          <p:nvPr/>
-        </p:nvSpPr>
-        <p:spPr>
-          <a:xfrm>
-            <a:off x="777240" y="1261872"/>
-            <a:ext cx="10607040" cy="310896"/>
-          </a:xfrm>
-          <a:prstGeom prst="rect">
-            <a:avLst/>
-          </a:prstGeom>
-          <a:noFill/>
-        </p:spPr>
-        <p:txBody>
-          <a:bodyPr wrap="square" lIns="45720" rIns="45720" tIns="18288" bIns="18288" anchor="t">
-            <a:spAutoFit/>
-          </a:bodyPr>
-          <a:lstStyle/>
-          <a:p>
-            <a:pPr algn="l"/>
-            <a:r>
-              <a:rPr sz="1700" b="0" i="1">
-                <a:solidFill>
-                  <a:srgbClr val="6B6B6B"/>
-                </a:solidFill>
-                <a:latin typeface="Century Schoolbook"/>
-              </a:rPr>
-              <a:t>Boards up on three.</a:t>
-            </a:r>
-          </a:p>
-        </p:txBody>
-      </p:sp>
       <p:cxnSp>
         <p:nvCxnSpPr>
-          <p:cNvPr id="6" name="Connector 5"/>
+          <p:cNvPr id="5" name="Connector 4"/>
           <p:cNvCxnSpPr/>
           <p:nvPr/>
         </p:nvCxnSpPr>
@@ -8649,7 +7716,7 @@
       </p:cxnSp>
       <p:sp>
         <p:nvSpPr>
-          <p:cNvPr id="7" name="TextBox 6"/>
+          <p:cNvPr id="6" name="TextBox 5"/>
           <p:cNvSpPr txBox="1"/>
           <p:nvPr/>
         </p:nvSpPr>
@@ -8684,7 +7751,7 @@
       </p:sp>
       <p:sp>
         <p:nvSpPr>
-          <p:cNvPr id="8" name="TextBox 7"/>
+          <p:cNvPr id="7" name="TextBox 6"/>
           <p:cNvSpPr txBox="1"/>
           <p:nvPr/>
         </p:nvSpPr>
@@ -8719,7 +7786,7 @@
       </p:sp>
       <p:pic>
         <p:nvPicPr>
-          <p:cNvPr id="9" name="Picture 8" descr="c242b51e1e2a08aa.png"/>
+          <p:cNvPr id="8" name="Picture 7" descr="c242b51e1e2a08aa.png"/>
           <p:cNvPicPr>
             <a:picLocks noChangeAspect="1"/>
           </p:cNvPicPr>
@@ -8743,7 +7810,7 @@
       </p:pic>
       <p:sp>
         <p:nvSpPr>
-          <p:cNvPr id="10" name="TextBox 9"/>
+          <p:cNvPr id="9" name="TextBox 8"/>
           <p:cNvSpPr txBox="1"/>
           <p:nvPr/>
         </p:nvSpPr>
@@ -8772,41 +7839,6 @@
                 <a:latin typeface="Century Schoolbook"/>
               </a:rPr>
               <a:t>Answer it.</a:t>
-            </a:r>
-          </a:p>
-        </p:txBody>
-      </p:sp>
-      <p:sp>
-        <p:nvSpPr>
-          <p:cNvPr id="11" name="TextBox 10"/>
-          <p:cNvSpPr txBox="1"/>
-          <p:nvPr/>
-        </p:nvSpPr>
-        <p:spPr>
-          <a:xfrm>
-            <a:off x="777240" y="4828032"/>
-            <a:ext cx="10607040" cy="365760"/>
-          </a:xfrm>
-          <a:prstGeom prst="rect">
-            <a:avLst/>
-          </a:prstGeom>
-          <a:noFill/>
-        </p:spPr>
-        <p:txBody>
-          <a:bodyPr wrap="square" lIns="45720" rIns="45720" tIns="18288" bIns="18288" anchor="t">
-            <a:spAutoFit/>
-          </a:bodyPr>
-          <a:lstStyle/>
-          <a:p>
-            <a:pPr algn="ctr"/>
-            <a:r>
-              <a:rPr sz="1900" b="0" i="1">
-                <a:solidFill>
-                  <a:srgbClr val="6B6B6B"/>
-                </a:solidFill>
-                <a:latin typeface="Century Schoolbook"/>
-              </a:rPr>
-              <a:t>Find the value.</a:t>
             </a:r>
           </a:p>
         </p:txBody>
@@ -8934,44 +7966,9 @@
           </a:fontRef>
         </p:style>
       </p:cxnSp>
-      <p:sp>
-        <p:nvSpPr>
-          <p:cNvPr id="5" name="TextBox 4"/>
-          <p:cNvSpPr txBox="1"/>
-          <p:nvPr/>
-        </p:nvSpPr>
-        <p:spPr>
-          <a:xfrm>
-            <a:off x="777240" y="1261872"/>
-            <a:ext cx="10607040" cy="310896"/>
-          </a:xfrm>
-          <a:prstGeom prst="rect">
-            <a:avLst/>
-          </a:prstGeom>
-          <a:noFill/>
-        </p:spPr>
-        <p:txBody>
-          <a:bodyPr wrap="square" lIns="45720" rIns="45720" tIns="18288" bIns="18288" anchor="t">
-            <a:spAutoFit/>
-          </a:bodyPr>
-          <a:lstStyle/>
-          <a:p>
-            <a:pPr algn="l"/>
-            <a:r>
-              <a:rPr sz="1700" b="0" i="1">
-                <a:solidFill>
-                  <a:srgbClr val="6B6B6B"/>
-                </a:solidFill>
-                <a:latin typeface="Century Schoolbook"/>
-              </a:rPr>
-              <a:t>Answer.</a:t>
-            </a:r>
-          </a:p>
-        </p:txBody>
-      </p:sp>
       <p:cxnSp>
         <p:nvCxnSpPr>
-          <p:cNvPr id="6" name="Connector 5"/>
+          <p:cNvPr id="5" name="Connector 4"/>
           <p:cNvCxnSpPr/>
           <p:nvPr/>
         </p:nvCxnSpPr>
@@ -9006,7 +8003,7 @@
       </p:cxnSp>
       <p:sp>
         <p:nvSpPr>
-          <p:cNvPr id="7" name="TextBox 6"/>
+          <p:cNvPr id="6" name="TextBox 5"/>
           <p:cNvSpPr txBox="1"/>
           <p:nvPr/>
         </p:nvSpPr>
@@ -9041,7 +8038,7 @@
       </p:sp>
       <p:sp>
         <p:nvSpPr>
-          <p:cNvPr id="8" name="TextBox 7"/>
+          <p:cNvPr id="7" name="TextBox 6"/>
           <p:cNvSpPr txBox="1"/>
           <p:nvPr/>
         </p:nvSpPr>
@@ -9076,7 +8073,7 @@
       </p:sp>
       <p:pic>
         <p:nvPicPr>
-          <p:cNvPr id="9" name="Picture 8" descr="79a5e9e14577308b.png"/>
+          <p:cNvPr id="8" name="Picture 7" descr="79a5e9e14577308b.png"/>
           <p:cNvPicPr>
             <a:picLocks noChangeAspect="1"/>
           </p:cNvPicPr>
@@ -9100,60 +8097,7 @@
       </p:pic>
       <p:sp>
         <p:nvSpPr>
-          <p:cNvPr id="10" name="TextBox 9"/>
-          <p:cNvSpPr txBox="1"/>
-          <p:nvPr/>
-        </p:nvSpPr>
-        <p:spPr>
-          <a:xfrm>
-            <a:off x="1828800" y="2892552"/>
-            <a:ext cx="8503920" cy="548640"/>
-          </a:xfrm>
-          <a:prstGeom prst="rect">
-            <a:avLst/>
-          </a:prstGeom>
-          <a:noFill/>
-        </p:spPr>
-        <p:txBody>
-          <a:bodyPr wrap="square" lIns="45720" rIns="45720" tIns="18288" bIns="18288" anchor="t">
-            <a:spAutoFit/>
-          </a:bodyPr>
-          <a:lstStyle/>
-          <a:p>
-            <a:pPr algn="ctr"/>
-            <a:r>
-              <a:rPr sz="2400" b="0" i="0">
-                <a:solidFill>
-                  <a:srgbClr val="6B6B6B"/>
-                </a:solidFill>
-                <a:latin typeface="Century Schoolbook"/>
-              </a:rPr>
-              <a:t>1 over (−2)</a:t>
-            </a:r>
-            <a:r>
-              <a:rPr sz="2400" b="0" i="0" baseline="30000">
-                <a:solidFill>
-                  <a:srgbClr val="6B6B6B"/>
-                </a:solidFill>
-                <a:latin typeface="Century Schoolbook"/>
-              </a:rPr>
-              <a:t>3</a:t>
-            </a:r>
-            <a:r>
-              <a:rPr sz="2400" b="0" i="0">
-                <a:solidFill>
-                  <a:srgbClr val="6B6B6B"/>
-                </a:solidFill>
-                <a:latin typeface="Century Schoolbook"/>
-              </a:rPr>
-              <a:t> = 1 over −8</a:t>
-            </a:r>
-          </a:p>
-        </p:txBody>
-      </p:sp>
-      <p:sp>
-        <p:nvSpPr>
-          <p:cNvPr id="11" name="TextBox 10"/>
+          <p:cNvPr id="9" name="TextBox 8"/>
           <p:cNvSpPr txBox="1"/>
           <p:nvPr/>
         </p:nvSpPr>
@@ -9188,7 +8132,7 @@
       </p:sp>
       <p:pic>
         <p:nvPicPr>
-          <p:cNvPr id="12" name="Picture 11" descr="ec4ffcbfe2b2982d.png"/>
+          <p:cNvPr id="10" name="Picture 9" descr="ec4ffcbfe2b2982d.png"/>
           <p:cNvPicPr>
             <a:picLocks noChangeAspect="1"/>
           </p:cNvPicPr>
@@ -9333,44 +8277,9 @@
           </a:fontRef>
         </p:style>
       </p:cxnSp>
-      <p:sp>
-        <p:nvSpPr>
-          <p:cNvPr id="5" name="TextBox 4"/>
-          <p:cNvSpPr txBox="1"/>
-          <p:nvPr/>
-        </p:nvSpPr>
-        <p:spPr>
-          <a:xfrm>
-            <a:off x="777240" y="1261872"/>
-            <a:ext cx="10607040" cy="310896"/>
-          </a:xfrm>
-          <a:prstGeom prst="rect">
-            <a:avLst/>
-          </a:prstGeom>
-          <a:noFill/>
-        </p:spPr>
-        <p:txBody>
-          <a:bodyPr wrap="square" lIns="45720" rIns="45720" tIns="18288" bIns="18288" anchor="t">
-            <a:spAutoFit/>
-          </a:bodyPr>
-          <a:lstStyle/>
-          <a:p>
-            <a:pPr algn="l"/>
-            <a:r>
-              <a:rPr sz="1700" b="0" i="1">
-                <a:solidFill>
-                  <a:srgbClr val="6B6B6B"/>
-                </a:solidFill>
-                <a:latin typeface="Century Schoolbook"/>
-              </a:rPr>
-              <a:t>Boards up on three.</a:t>
-            </a:r>
-          </a:p>
-        </p:txBody>
-      </p:sp>
       <p:cxnSp>
         <p:nvCxnSpPr>
-          <p:cNvPr id="6" name="Connector 5"/>
+          <p:cNvPr id="5" name="Connector 4"/>
           <p:cNvCxnSpPr/>
           <p:nvPr/>
         </p:nvCxnSpPr>
@@ -9405,7 +8314,7 @@
       </p:cxnSp>
       <p:sp>
         <p:nvSpPr>
-          <p:cNvPr id="7" name="TextBox 6"/>
+          <p:cNvPr id="6" name="TextBox 5"/>
           <p:cNvSpPr txBox="1"/>
           <p:nvPr/>
         </p:nvSpPr>
@@ -9440,7 +8349,7 @@
       </p:sp>
       <p:sp>
         <p:nvSpPr>
-          <p:cNvPr id="8" name="TextBox 7"/>
+          <p:cNvPr id="7" name="TextBox 6"/>
           <p:cNvSpPr txBox="1"/>
           <p:nvPr/>
         </p:nvSpPr>
@@ -9475,7 +8384,7 @@
       </p:sp>
       <p:pic>
         <p:nvPicPr>
-          <p:cNvPr id="9" name="Picture 8" descr="2f69500044ec6e87.png"/>
+          <p:cNvPr id="8" name="Picture 7" descr="2f69500044ec6e87.png"/>
           <p:cNvPicPr>
             <a:picLocks noChangeAspect="1"/>
           </p:cNvPicPr>
@@ -9499,7 +8408,7 @@
       </p:pic>
       <p:sp>
         <p:nvSpPr>
-          <p:cNvPr id="10" name="TextBox 9"/>
+          <p:cNvPr id="9" name="TextBox 8"/>
           <p:cNvSpPr txBox="1"/>
           <p:nvPr/>
         </p:nvSpPr>
@@ -9534,7 +8443,7 @@
       </p:sp>
       <p:sp>
         <p:nvSpPr>
-          <p:cNvPr id="11" name="TextBox 10"/>
+          <p:cNvPr id="10" name="TextBox 9"/>
           <p:cNvSpPr txBox="1"/>
           <p:nvPr/>
         </p:nvSpPr>
@@ -9578,7 +8487,7 @@
       </p:sp>
       <p:sp>
         <p:nvSpPr>
-          <p:cNvPr id="12" name="TextBox 11"/>
+          <p:cNvPr id="11" name="TextBox 10"/>
           <p:cNvSpPr txBox="1"/>
           <p:nvPr/>
         </p:nvSpPr>
@@ -9622,7 +8531,7 @@
       </p:sp>
       <p:sp>
         <p:nvSpPr>
-          <p:cNvPr id="13" name="TextBox 12"/>
+          <p:cNvPr id="12" name="TextBox 11"/>
           <p:cNvSpPr txBox="1"/>
           <p:nvPr/>
         </p:nvSpPr>
@@ -9666,7 +8575,7 @@
       </p:sp>
       <p:sp>
         <p:nvSpPr>
-          <p:cNvPr id="14" name="TextBox 13"/>
+          <p:cNvPr id="13" name="TextBox 12"/>
           <p:cNvSpPr txBox="1"/>
           <p:nvPr/>
         </p:nvSpPr>
@@ -9710,7 +8619,7 @@
       </p:sp>
       <p:sp>
         <p:nvSpPr>
-          <p:cNvPr id="15" name="TextBox 14"/>
+          <p:cNvPr id="14" name="TextBox 13"/>
           <p:cNvSpPr txBox="1"/>
           <p:nvPr/>
         </p:nvSpPr>
@@ -9866,44 +8775,9 @@
           </a:fontRef>
         </p:style>
       </p:cxnSp>
-      <p:sp>
-        <p:nvSpPr>
-          <p:cNvPr id="5" name="TextBox 4"/>
-          <p:cNvSpPr txBox="1"/>
-          <p:nvPr/>
-        </p:nvSpPr>
-        <p:spPr>
-          <a:xfrm>
-            <a:off x="777240" y="1261872"/>
-            <a:ext cx="10607040" cy="310896"/>
-          </a:xfrm>
-          <a:prstGeom prst="rect">
-            <a:avLst/>
-          </a:prstGeom>
-          <a:noFill/>
-        </p:spPr>
-        <p:txBody>
-          <a:bodyPr wrap="square" lIns="45720" rIns="45720" tIns="18288" bIns="18288" anchor="t">
-            <a:spAutoFit/>
-          </a:bodyPr>
-          <a:lstStyle/>
-          <a:p>
-            <a:pPr algn="l"/>
-            <a:r>
-              <a:rPr sz="1700" b="0" i="1">
-                <a:solidFill>
-                  <a:srgbClr val="6B6B6B"/>
-                </a:solidFill>
-                <a:latin typeface="Century Schoolbook"/>
-              </a:rPr>
-              <a:t>Answer.</a:t>
-            </a:r>
-          </a:p>
-        </p:txBody>
-      </p:sp>
       <p:cxnSp>
         <p:nvCxnSpPr>
-          <p:cNvPr id="6" name="Connector 5"/>
+          <p:cNvPr id="5" name="Connector 4"/>
           <p:cNvCxnSpPr/>
           <p:nvPr/>
         </p:nvCxnSpPr>
@@ -9938,7 +8812,7 @@
       </p:cxnSp>
       <p:sp>
         <p:nvSpPr>
-          <p:cNvPr id="7" name="TextBox 6"/>
+          <p:cNvPr id="6" name="TextBox 5"/>
           <p:cNvSpPr txBox="1"/>
           <p:nvPr/>
         </p:nvSpPr>
@@ -9973,7 +8847,7 @@
       </p:sp>
       <p:sp>
         <p:nvSpPr>
-          <p:cNvPr id="8" name="TextBox 7"/>
+          <p:cNvPr id="7" name="TextBox 6"/>
           <p:cNvSpPr txBox="1"/>
           <p:nvPr/>
         </p:nvSpPr>
@@ -10008,7 +8882,7 @@
       </p:sp>
       <p:pic>
         <p:nvPicPr>
-          <p:cNvPr id="9" name="Picture 8" descr="0b09890174e136ec.png"/>
+          <p:cNvPr id="8" name="Picture 7" descr="0b09890174e136ec.png"/>
           <p:cNvPicPr>
             <a:picLocks noChangeAspect="1"/>
           </p:cNvPicPr>
@@ -10032,7 +8906,7 @@
       </p:pic>
       <p:sp>
         <p:nvSpPr>
-          <p:cNvPr id="10" name="TextBox 9"/>
+          <p:cNvPr id="9" name="TextBox 8"/>
           <p:cNvSpPr txBox="1"/>
           <p:nvPr/>
         </p:nvSpPr>
@@ -10067,7 +8941,7 @@
       </p:sp>
       <p:sp>
         <p:nvSpPr>
-          <p:cNvPr id="11" name="TextBox 10"/>
+          <p:cNvPr id="10" name="TextBox 9"/>
           <p:cNvSpPr txBox="1"/>
           <p:nvPr/>
         </p:nvSpPr>
@@ -10111,7 +8985,7 @@
       </p:sp>
       <p:sp>
         <p:nvSpPr>
-          <p:cNvPr id="12" name="TextBox 11"/>
+          <p:cNvPr id="11" name="TextBox 10"/>
           <p:cNvSpPr txBox="1"/>
           <p:nvPr/>
         </p:nvSpPr>
@@ -10155,7 +9029,7 @@
       </p:sp>
       <p:sp>
         <p:nvSpPr>
-          <p:cNvPr id="13" name="TextBox 12"/>
+          <p:cNvPr id="12" name="TextBox 11"/>
           <p:cNvSpPr txBox="1"/>
           <p:nvPr/>
         </p:nvSpPr>
@@ -10199,7 +9073,7 @@
       </p:sp>
       <p:sp>
         <p:nvSpPr>
-          <p:cNvPr id="14" name="TextBox 13"/>
+          <p:cNvPr id="13" name="TextBox 12"/>
           <p:cNvSpPr txBox="1"/>
           <p:nvPr/>
         </p:nvSpPr>
@@ -10243,7 +9117,7 @@
       </p:sp>
       <p:sp>
         <p:nvSpPr>
-          <p:cNvPr id="15" name="TextBox 14"/>
+          <p:cNvPr id="14" name="TextBox 13"/>
           <p:cNvSpPr txBox="1"/>
           <p:nvPr/>
         </p:nvSpPr>
@@ -10399,44 +9273,9 @@
           </a:fontRef>
         </p:style>
       </p:cxnSp>
-      <p:sp>
-        <p:nvSpPr>
-          <p:cNvPr id="5" name="TextBox 4"/>
-          <p:cNvSpPr txBox="1"/>
-          <p:nvPr/>
-        </p:nvSpPr>
-        <p:spPr>
-          <a:xfrm>
-            <a:off x="777240" y="1261872"/>
-            <a:ext cx="10607040" cy="310896"/>
-          </a:xfrm>
-          <a:prstGeom prst="rect">
-            <a:avLst/>
-          </a:prstGeom>
-          <a:noFill/>
-        </p:spPr>
-        <p:txBody>
-          <a:bodyPr wrap="square" lIns="45720" rIns="45720" tIns="18288" bIns="18288" anchor="t">
-            <a:spAutoFit/>
-          </a:bodyPr>
-          <a:lstStyle/>
-          <a:p>
-            <a:pPr algn="l"/>
-            <a:r>
-              <a:rPr sz="1700" b="0" i="1">
-                <a:solidFill>
-                  <a:srgbClr val="6B6B6B"/>
-                </a:solidFill>
-                <a:latin typeface="Century Schoolbook"/>
-              </a:rPr>
-              <a:t>Boards up on three.</a:t>
-            </a:r>
-          </a:p>
-        </p:txBody>
-      </p:sp>
       <p:cxnSp>
         <p:nvCxnSpPr>
-          <p:cNvPr id="6" name="Connector 5"/>
+          <p:cNvPr id="5" name="Connector 4"/>
           <p:cNvCxnSpPr/>
           <p:nvPr/>
         </p:nvCxnSpPr>
@@ -10471,7 +9310,7 @@
       </p:cxnSp>
       <p:sp>
         <p:nvSpPr>
-          <p:cNvPr id="7" name="TextBox 6"/>
+          <p:cNvPr id="6" name="TextBox 5"/>
           <p:cNvSpPr txBox="1"/>
           <p:nvPr/>
         </p:nvSpPr>
@@ -10506,7 +9345,7 @@
       </p:sp>
       <p:sp>
         <p:nvSpPr>
-          <p:cNvPr id="8" name="TextBox 7"/>
+          <p:cNvPr id="7" name="TextBox 6"/>
           <p:cNvSpPr txBox="1"/>
           <p:nvPr/>
         </p:nvSpPr>
@@ -10541,7 +9380,7 @@
       </p:sp>
       <p:pic>
         <p:nvPicPr>
-          <p:cNvPr id="9" name="Picture 8" descr="9e50adf1c8369698.png"/>
+          <p:cNvPr id="8" name="Picture 7" descr="9e50adf1c8369698.png"/>
           <p:cNvPicPr>
             <a:picLocks noChangeAspect="1"/>
           </p:cNvPicPr>
@@ -10565,7 +9404,7 @@
       </p:pic>
       <p:sp>
         <p:nvSpPr>
-          <p:cNvPr id="10" name="TextBox 9"/>
+          <p:cNvPr id="9" name="TextBox 8"/>
           <p:cNvSpPr txBox="1"/>
           <p:nvPr/>
         </p:nvSpPr>
@@ -10600,7 +9439,7 @@
       </p:sp>
       <p:sp>
         <p:nvSpPr>
-          <p:cNvPr id="11" name="TextBox 10"/>
+          <p:cNvPr id="10" name="TextBox 9"/>
           <p:cNvSpPr txBox="1"/>
           <p:nvPr/>
         </p:nvSpPr>
@@ -10653,7 +9492,7 @@
       </p:sp>
       <p:sp>
         <p:nvSpPr>
-          <p:cNvPr id="12" name="TextBox 11"/>
+          <p:cNvPr id="11" name="TextBox 10"/>
           <p:cNvSpPr txBox="1"/>
           <p:nvPr/>
         </p:nvSpPr>
@@ -10706,7 +9545,7 @@
       </p:sp>
       <p:sp>
         <p:nvSpPr>
-          <p:cNvPr id="13" name="TextBox 12"/>
+          <p:cNvPr id="12" name="TextBox 11"/>
           <p:cNvSpPr txBox="1"/>
           <p:nvPr/>
         </p:nvSpPr>
@@ -10759,7 +9598,7 @@
       </p:sp>
       <p:sp>
         <p:nvSpPr>
-          <p:cNvPr id="14" name="TextBox 13"/>
+          <p:cNvPr id="13" name="TextBox 12"/>
           <p:cNvSpPr txBox="1"/>
           <p:nvPr/>
         </p:nvSpPr>
@@ -10812,7 +9651,7 @@
       </p:sp>
       <p:sp>
         <p:nvSpPr>
-          <p:cNvPr id="15" name="TextBox 14"/>
+          <p:cNvPr id="14" name="TextBox 13"/>
           <p:cNvSpPr txBox="1"/>
           <p:nvPr/>
         </p:nvSpPr>
@@ -10968,44 +9807,9 @@
           </a:fontRef>
         </p:style>
       </p:cxnSp>
-      <p:sp>
-        <p:nvSpPr>
-          <p:cNvPr id="5" name="TextBox 4"/>
-          <p:cNvSpPr txBox="1"/>
-          <p:nvPr/>
-        </p:nvSpPr>
-        <p:spPr>
-          <a:xfrm>
-            <a:off x="777240" y="1261872"/>
-            <a:ext cx="10607040" cy="310896"/>
-          </a:xfrm>
-          <a:prstGeom prst="rect">
-            <a:avLst/>
-          </a:prstGeom>
-          <a:noFill/>
-        </p:spPr>
-        <p:txBody>
-          <a:bodyPr wrap="square" lIns="45720" rIns="45720" tIns="18288" bIns="18288" anchor="t">
-            <a:spAutoFit/>
-          </a:bodyPr>
-          <a:lstStyle/>
-          <a:p>
-            <a:pPr algn="l"/>
-            <a:r>
-              <a:rPr sz="1700" b="0" i="1">
-                <a:solidFill>
-                  <a:srgbClr val="6B6B6B"/>
-                </a:solidFill>
-                <a:latin typeface="Century Schoolbook"/>
-              </a:rPr>
-              <a:t>Answer.</a:t>
-            </a:r>
-          </a:p>
-        </p:txBody>
-      </p:sp>
       <p:cxnSp>
         <p:nvCxnSpPr>
-          <p:cNvPr id="6" name="Connector 5"/>
+          <p:cNvPr id="5" name="Connector 4"/>
           <p:cNvCxnSpPr/>
           <p:nvPr/>
         </p:nvCxnSpPr>
@@ -11040,7 +9844,7 @@
       </p:cxnSp>
       <p:sp>
         <p:nvSpPr>
-          <p:cNvPr id="7" name="TextBox 6"/>
+          <p:cNvPr id="6" name="TextBox 5"/>
           <p:cNvSpPr txBox="1"/>
           <p:nvPr/>
         </p:nvSpPr>
@@ -11075,7 +9879,7 @@
       </p:sp>
       <p:sp>
         <p:nvSpPr>
-          <p:cNvPr id="8" name="TextBox 7"/>
+          <p:cNvPr id="7" name="TextBox 6"/>
           <p:cNvSpPr txBox="1"/>
           <p:nvPr/>
         </p:nvSpPr>
@@ -11110,7 +9914,7 @@
       </p:sp>
       <p:pic>
         <p:nvPicPr>
-          <p:cNvPr id="9" name="Picture 8" descr="c950f888df2a107a.png"/>
+          <p:cNvPr id="8" name="Picture 7" descr="c950f888df2a107a.png"/>
           <p:cNvPicPr>
             <a:picLocks noChangeAspect="1"/>
           </p:cNvPicPr>
@@ -11134,7 +9938,7 @@
       </p:pic>
       <p:sp>
         <p:nvSpPr>
-          <p:cNvPr id="10" name="TextBox 9"/>
+          <p:cNvPr id="9" name="TextBox 8"/>
           <p:cNvSpPr txBox="1"/>
           <p:nvPr/>
         </p:nvSpPr>
@@ -11169,7 +9973,7 @@
       </p:sp>
       <p:sp>
         <p:nvSpPr>
-          <p:cNvPr id="11" name="TextBox 10"/>
+          <p:cNvPr id="10" name="TextBox 9"/>
           <p:cNvSpPr txBox="1"/>
           <p:nvPr/>
         </p:nvSpPr>
@@ -11222,7 +10026,7 @@
       </p:sp>
       <p:sp>
         <p:nvSpPr>
-          <p:cNvPr id="12" name="TextBox 11"/>
+          <p:cNvPr id="11" name="TextBox 10"/>
           <p:cNvSpPr txBox="1"/>
           <p:nvPr/>
         </p:nvSpPr>
@@ -11275,7 +10079,7 @@
       </p:sp>
       <p:sp>
         <p:nvSpPr>
-          <p:cNvPr id="13" name="TextBox 12"/>
+          <p:cNvPr id="12" name="TextBox 11"/>
           <p:cNvSpPr txBox="1"/>
           <p:nvPr/>
         </p:nvSpPr>
@@ -11328,7 +10132,7 @@
       </p:sp>
       <p:sp>
         <p:nvSpPr>
-          <p:cNvPr id="14" name="TextBox 13"/>
+          <p:cNvPr id="13" name="TextBox 12"/>
           <p:cNvSpPr txBox="1"/>
           <p:nvPr/>
         </p:nvSpPr>
@@ -11381,7 +10185,7 @@
       </p:sp>
       <p:sp>
         <p:nvSpPr>
-          <p:cNvPr id="15" name="TextBox 14"/>
+          <p:cNvPr id="14" name="TextBox 13"/>
           <p:cNvSpPr txBox="1"/>
           <p:nvPr/>
         </p:nvSpPr>
@@ -11546,44 +10350,9 @@
           </a:fontRef>
         </p:style>
       </p:cxnSp>
-      <p:sp>
-        <p:nvSpPr>
-          <p:cNvPr id="5" name="TextBox 4"/>
-          <p:cNvSpPr txBox="1"/>
-          <p:nvPr/>
-        </p:nvSpPr>
-        <p:spPr>
-          <a:xfrm>
-            <a:off x="777240" y="1261872"/>
-            <a:ext cx="10607040" cy="310896"/>
-          </a:xfrm>
-          <a:prstGeom prst="rect">
-            <a:avLst/>
-          </a:prstGeom>
-          <a:noFill/>
-        </p:spPr>
-        <p:txBody>
-          <a:bodyPr wrap="square" lIns="45720" rIns="45720" tIns="18288" bIns="18288" anchor="t">
-            <a:spAutoFit/>
-          </a:bodyPr>
-          <a:lstStyle/>
-          <a:p>
-            <a:pPr algn="l"/>
-            <a:r>
-              <a:rPr sz="1700" b="0" i="1">
-                <a:solidFill>
-                  <a:srgbClr val="6B6B6B"/>
-                </a:solidFill>
-                <a:latin typeface="Century Schoolbook"/>
-              </a:rPr>
-              <a:t>Boards up on three.</a:t>
-            </a:r>
-          </a:p>
-        </p:txBody>
-      </p:sp>
       <p:cxnSp>
         <p:nvCxnSpPr>
-          <p:cNvPr id="6" name="Connector 5"/>
+          <p:cNvPr id="5" name="Connector 4"/>
           <p:cNvCxnSpPr/>
           <p:nvPr/>
         </p:nvCxnSpPr>
@@ -11618,7 +10387,7 @@
       </p:cxnSp>
       <p:sp>
         <p:nvSpPr>
-          <p:cNvPr id="7" name="TextBox 6"/>
+          <p:cNvPr id="6" name="TextBox 5"/>
           <p:cNvSpPr txBox="1"/>
           <p:nvPr/>
         </p:nvSpPr>
@@ -11653,7 +10422,7 @@
       </p:sp>
       <p:sp>
         <p:nvSpPr>
-          <p:cNvPr id="8" name="TextBox 7"/>
+          <p:cNvPr id="7" name="TextBox 6"/>
           <p:cNvSpPr txBox="1"/>
           <p:nvPr/>
         </p:nvSpPr>
@@ -11688,7 +10457,7 @@
       </p:sp>
       <p:pic>
         <p:nvPicPr>
-          <p:cNvPr id="9" name="Picture 8" descr="e37e6585587b7338.png"/>
+          <p:cNvPr id="8" name="Picture 7" descr="e37e6585587b7338.png"/>
           <p:cNvPicPr>
             <a:picLocks noChangeAspect="1"/>
           </p:cNvPicPr>
@@ -11712,7 +10481,7 @@
       </p:pic>
       <p:sp>
         <p:nvSpPr>
-          <p:cNvPr id="10" name="TextBox 9"/>
+          <p:cNvPr id="9" name="TextBox 8"/>
           <p:cNvSpPr txBox="1"/>
           <p:nvPr/>
         </p:nvSpPr>
@@ -11741,41 +10510,6 @@
                 <a:latin typeface="Century Schoolbook"/>
               </a:rPr>
               <a:t>Answer it.</a:t>
-            </a:r>
-          </a:p>
-        </p:txBody>
-      </p:sp>
-      <p:sp>
-        <p:nvSpPr>
-          <p:cNvPr id="11" name="TextBox 10"/>
-          <p:cNvSpPr txBox="1"/>
-          <p:nvPr/>
-        </p:nvSpPr>
-        <p:spPr>
-          <a:xfrm>
-            <a:off x="777240" y="4828032"/>
-            <a:ext cx="10607040" cy="365760"/>
-          </a:xfrm>
-          <a:prstGeom prst="rect">
-            <a:avLst/>
-          </a:prstGeom>
-          <a:noFill/>
-        </p:spPr>
-        <p:txBody>
-          <a:bodyPr wrap="square" lIns="45720" rIns="45720" tIns="18288" bIns="18288" anchor="t">
-            <a:spAutoFit/>
-          </a:bodyPr>
-          <a:lstStyle/>
-          <a:p>
-            <a:pPr algn="ctr"/>
-            <a:r>
-              <a:rPr sz="1900" b="0" i="1">
-                <a:solidFill>
-                  <a:srgbClr val="6B6B6B"/>
-                </a:solidFill>
-                <a:latin typeface="Century Schoolbook"/>
-              </a:rPr>
-              <a:t>Find the value.</a:t>
             </a:r>
           </a:p>
         </p:txBody>
@@ -11903,44 +10637,9 @@
           </a:fontRef>
         </p:style>
       </p:cxnSp>
-      <p:sp>
-        <p:nvSpPr>
-          <p:cNvPr id="5" name="TextBox 4"/>
-          <p:cNvSpPr txBox="1"/>
-          <p:nvPr/>
-        </p:nvSpPr>
-        <p:spPr>
-          <a:xfrm>
-            <a:off x="777240" y="1261872"/>
-            <a:ext cx="10607040" cy="310896"/>
-          </a:xfrm>
-          <a:prstGeom prst="rect">
-            <a:avLst/>
-          </a:prstGeom>
-          <a:noFill/>
-        </p:spPr>
-        <p:txBody>
-          <a:bodyPr wrap="square" lIns="45720" rIns="45720" tIns="18288" bIns="18288" anchor="t">
-            <a:spAutoFit/>
-          </a:bodyPr>
-          <a:lstStyle/>
-          <a:p>
-            <a:pPr algn="l"/>
-            <a:r>
-              <a:rPr sz="1700" b="0" i="1">
-                <a:solidFill>
-                  <a:srgbClr val="6B6B6B"/>
-                </a:solidFill>
-                <a:latin typeface="Century Schoolbook"/>
-              </a:rPr>
-              <a:t>Answer.</a:t>
-            </a:r>
-          </a:p>
-        </p:txBody>
-      </p:sp>
       <p:cxnSp>
         <p:nvCxnSpPr>
-          <p:cNvPr id="6" name="Connector 5"/>
+          <p:cNvPr id="5" name="Connector 4"/>
           <p:cNvCxnSpPr/>
           <p:nvPr/>
         </p:nvCxnSpPr>
@@ -11975,7 +10674,7 @@
       </p:cxnSp>
       <p:sp>
         <p:nvSpPr>
-          <p:cNvPr id="7" name="TextBox 6"/>
+          <p:cNvPr id="6" name="TextBox 5"/>
           <p:cNvSpPr txBox="1"/>
           <p:nvPr/>
         </p:nvSpPr>
@@ -12010,7 +10709,7 @@
       </p:sp>
       <p:sp>
         <p:nvSpPr>
-          <p:cNvPr id="8" name="TextBox 7"/>
+          <p:cNvPr id="7" name="TextBox 6"/>
           <p:cNvSpPr txBox="1"/>
           <p:nvPr/>
         </p:nvSpPr>
@@ -12045,7 +10744,7 @@
       </p:sp>
       <p:pic>
         <p:nvPicPr>
-          <p:cNvPr id="9" name="Picture 8" descr="3a37a698b11c2b61.png"/>
+          <p:cNvPr id="8" name="Picture 7" descr="3a37a698b11c2b61.png"/>
           <p:cNvPicPr>
             <a:picLocks noChangeAspect="1"/>
           </p:cNvPicPr>
@@ -12069,51 +10768,7 @@
       </p:pic>
       <p:sp>
         <p:nvSpPr>
-          <p:cNvPr id="10" name="TextBox 9"/>
-          <p:cNvSpPr txBox="1"/>
-          <p:nvPr/>
-        </p:nvSpPr>
-        <p:spPr>
-          <a:xfrm>
-            <a:off x="1828800" y="2804160"/>
-            <a:ext cx="8503920" cy="548640"/>
-          </a:xfrm>
-          <a:prstGeom prst="rect">
-            <a:avLst/>
-          </a:prstGeom>
-          <a:noFill/>
-        </p:spPr>
-        <p:txBody>
-          <a:bodyPr wrap="square" lIns="45720" rIns="45720" tIns="18288" bIns="18288" anchor="t">
-            <a:spAutoFit/>
-          </a:bodyPr>
-          <a:lstStyle/>
-          <a:p>
-            <a:pPr algn="ctr"/>
-            <a:r>
-              <a:rPr sz="2400" b="0" i="0">
-                <a:solidFill>
-                  <a:srgbClr val="6B6B6B"/>
-                </a:solidFill>
-                <a:latin typeface="Century Schoolbook"/>
-              </a:rPr>
-              <a:t>3</a:t>
-            </a:r>
-            <a:r>
-              <a:rPr sz="2400" b="0" i="0" baseline="30000">
-                <a:solidFill>
-                  <a:srgbClr val="6B6B6B"/>
-                </a:solidFill>
-                <a:latin typeface="Century Schoolbook"/>
-              </a:rPr>
-              <a:t>0</a:t>
-            </a:r>
-          </a:p>
-        </p:txBody>
-      </p:sp>
-      <p:sp>
-        <p:nvSpPr>
-          <p:cNvPr id="11" name="TextBox 10"/>
+          <p:cNvPr id="9" name="TextBox 8"/>
           <p:cNvSpPr txBox="1"/>
           <p:nvPr/>
         </p:nvSpPr>
@@ -12269,44 +10924,9 @@
           </a:fontRef>
         </p:style>
       </p:cxnSp>
-      <p:sp>
-        <p:nvSpPr>
-          <p:cNvPr id="5" name="TextBox 4"/>
-          <p:cNvSpPr txBox="1"/>
-          <p:nvPr/>
-        </p:nvSpPr>
-        <p:spPr>
-          <a:xfrm>
-            <a:off x="777240" y="1261872"/>
-            <a:ext cx="10607040" cy="310896"/>
-          </a:xfrm>
-          <a:prstGeom prst="rect">
-            <a:avLst/>
-          </a:prstGeom>
-          <a:noFill/>
-        </p:spPr>
-        <p:txBody>
-          <a:bodyPr wrap="square" lIns="45720" rIns="45720" tIns="18288" bIns="18288" anchor="t">
-            <a:spAutoFit/>
-          </a:bodyPr>
-          <a:lstStyle/>
-          <a:p>
-            <a:pPr algn="l"/>
-            <a:r>
-              <a:rPr sz="1700" b="0" i="1">
-                <a:solidFill>
-                  <a:srgbClr val="6B6B6B"/>
-                </a:solidFill>
-                <a:latin typeface="Century Schoolbook"/>
-              </a:rPr>
-              <a:t>Boards up on three.</a:t>
-            </a:r>
-          </a:p>
-        </p:txBody>
-      </p:sp>
       <p:cxnSp>
         <p:nvCxnSpPr>
-          <p:cNvPr id="6" name="Connector 5"/>
+          <p:cNvPr id="5" name="Connector 4"/>
           <p:cNvCxnSpPr/>
           <p:nvPr/>
         </p:nvCxnSpPr>
@@ -12341,7 +10961,7 @@
       </p:cxnSp>
       <p:sp>
         <p:nvSpPr>
-          <p:cNvPr id="7" name="TextBox 6"/>
+          <p:cNvPr id="6" name="TextBox 5"/>
           <p:cNvSpPr txBox="1"/>
           <p:nvPr/>
         </p:nvSpPr>
@@ -12376,7 +10996,7 @@
       </p:sp>
       <p:sp>
         <p:nvSpPr>
-          <p:cNvPr id="8" name="TextBox 7"/>
+          <p:cNvPr id="7" name="TextBox 6"/>
           <p:cNvSpPr txBox="1"/>
           <p:nvPr/>
         </p:nvSpPr>
@@ -12411,7 +11031,7 @@
       </p:sp>
       <p:pic>
         <p:nvPicPr>
-          <p:cNvPr id="9" name="Picture 8" descr="d5e2dc9bfa32dfce.png"/>
+          <p:cNvPr id="8" name="Picture 7" descr="d5e2dc9bfa32dfce.png"/>
           <p:cNvPicPr>
             <a:picLocks noChangeAspect="1"/>
           </p:cNvPicPr>
@@ -12435,7 +11055,7 @@
       </p:pic>
       <p:sp>
         <p:nvSpPr>
-          <p:cNvPr id="10" name="TextBox 9"/>
+          <p:cNvPr id="9" name="TextBox 8"/>
           <p:cNvSpPr txBox="1"/>
           <p:nvPr/>
         </p:nvSpPr>
@@ -12464,41 +11084,6 @@
                 <a:latin typeface="Century Schoolbook"/>
               </a:rPr>
               <a:t>Answer it.</a:t>
-            </a:r>
-          </a:p>
-        </p:txBody>
-      </p:sp>
-      <p:sp>
-        <p:nvSpPr>
-          <p:cNvPr id="11" name="TextBox 10"/>
-          <p:cNvSpPr txBox="1"/>
-          <p:nvPr/>
-        </p:nvSpPr>
-        <p:spPr>
-          <a:xfrm>
-            <a:off x="777240" y="4828032"/>
-            <a:ext cx="10607040" cy="365760"/>
-          </a:xfrm>
-          <a:prstGeom prst="rect">
-            <a:avLst/>
-          </a:prstGeom>
-          <a:noFill/>
-        </p:spPr>
-        <p:txBody>
-          <a:bodyPr wrap="square" lIns="45720" rIns="45720" tIns="18288" bIns="18288" anchor="t">
-            <a:spAutoFit/>
-          </a:bodyPr>
-          <a:lstStyle/>
-          <a:p>
-            <a:pPr algn="ctr"/>
-            <a:r>
-              <a:rPr sz="1900" b="0" i="1">
-                <a:solidFill>
-                  <a:srgbClr val="6B6B6B"/>
-                </a:solidFill>
-                <a:latin typeface="Century Schoolbook"/>
-              </a:rPr>
-              <a:t>Write it as one power with a positive exponent.</a:t>
             </a:r>
           </a:p>
         </p:txBody>
@@ -12626,44 +11211,9 @@
           </a:fontRef>
         </p:style>
       </p:cxnSp>
-      <p:sp>
-        <p:nvSpPr>
-          <p:cNvPr id="5" name="TextBox 4"/>
-          <p:cNvSpPr txBox="1"/>
-          <p:nvPr/>
-        </p:nvSpPr>
-        <p:spPr>
-          <a:xfrm>
-            <a:off x="777240" y="1261872"/>
-            <a:ext cx="10607040" cy="310896"/>
-          </a:xfrm>
-          <a:prstGeom prst="rect">
-            <a:avLst/>
-          </a:prstGeom>
-          <a:noFill/>
-        </p:spPr>
-        <p:txBody>
-          <a:bodyPr wrap="square" lIns="45720" rIns="45720" tIns="18288" bIns="18288" anchor="t">
-            <a:spAutoFit/>
-          </a:bodyPr>
-          <a:lstStyle/>
-          <a:p>
-            <a:pPr algn="l"/>
-            <a:r>
-              <a:rPr sz="1700" b="0" i="1">
-                <a:solidFill>
-                  <a:srgbClr val="6B6B6B"/>
-                </a:solidFill>
-                <a:latin typeface="Century Schoolbook"/>
-              </a:rPr>
-              <a:t>Answers.</a:t>
-            </a:r>
-          </a:p>
-        </p:txBody>
-      </p:sp>
       <p:cxnSp>
         <p:nvCxnSpPr>
-          <p:cNvPr id="6" name="Connector 5"/>
+          <p:cNvPr id="5" name="Connector 4"/>
           <p:cNvCxnSpPr/>
           <p:nvPr/>
         </p:nvCxnSpPr>
@@ -12698,7 +11248,7 @@
       </p:cxnSp>
       <p:sp>
         <p:nvSpPr>
-          <p:cNvPr id="7" name="TextBox 6"/>
+          <p:cNvPr id="6" name="TextBox 5"/>
           <p:cNvSpPr txBox="1"/>
           <p:nvPr/>
         </p:nvSpPr>
@@ -12733,7 +11283,7 @@
       </p:sp>
       <p:sp>
         <p:nvSpPr>
-          <p:cNvPr id="8" name="TextBox 7"/>
+          <p:cNvPr id="7" name="TextBox 6"/>
           <p:cNvSpPr txBox="1"/>
           <p:nvPr/>
         </p:nvSpPr>
@@ -12768,13 +11318,13 @@
       </p:sp>
       <p:sp>
         <p:nvSpPr>
-          <p:cNvPr id="9" name="TextBox 8"/>
-          <p:cNvSpPr txBox="1"/>
-          <p:nvPr/>
-        </p:nvSpPr>
-        <p:spPr>
-          <a:xfrm>
-            <a:off x="1874519" y="1886712"/>
+          <p:cNvPr id="8" name="TextBox 7"/>
+          <p:cNvSpPr txBox="1"/>
+          <p:nvPr/>
+        </p:nvSpPr>
+        <p:spPr>
+          <a:xfrm>
+            <a:off x="1874519" y="1566672"/>
             <a:ext cx="3058734" cy="457200"/>
           </a:xfrm>
           <a:prstGeom prst="rect">
@@ -12803,7 +11353,7 @@
       </p:sp>
       <p:pic>
         <p:nvPicPr>
-          <p:cNvPr id="10" name="Picture 9" descr="e6b67427858e96f9.png"/>
+          <p:cNvPr id="9" name="Picture 8" descr="e6b67427858e96f9.png"/>
           <p:cNvPicPr>
             <a:picLocks noChangeAspect="1"/>
           </p:cNvPicPr>
@@ -12817,7 +11367,7 @@
         </p:blipFill>
         <p:spPr>
           <a:xfrm>
-            <a:off x="4796094" y="1783080"/>
+            <a:off x="4796094" y="1463040"/>
             <a:ext cx="795528" cy="664464"/>
           </a:xfrm>
           <a:prstGeom prst="rect">
@@ -12827,13 +11377,13 @@
       </p:pic>
       <p:sp>
         <p:nvSpPr>
-          <p:cNvPr id="11" name="TextBox 10"/>
-          <p:cNvSpPr txBox="1"/>
-          <p:nvPr/>
-        </p:nvSpPr>
-        <p:spPr>
-          <a:xfrm>
-            <a:off x="6140262" y="1760220"/>
+          <p:cNvPr id="10" name="TextBox 9"/>
+          <p:cNvSpPr txBox="1"/>
+          <p:nvPr/>
+        </p:nvSpPr>
+        <p:spPr>
+          <a:xfrm>
+            <a:off x="6140262" y="1440180"/>
             <a:ext cx="565792" cy="457200"/>
           </a:xfrm>
           <a:prstGeom prst="rect">
@@ -12862,13 +11412,13 @@
       </p:sp>
       <p:sp>
         <p:nvSpPr>
-          <p:cNvPr id="12" name="TextBox 11"/>
-          <p:cNvSpPr txBox="1"/>
-          <p:nvPr/>
-        </p:nvSpPr>
-        <p:spPr>
-          <a:xfrm>
-            <a:off x="1874519" y="2625852"/>
+          <p:cNvPr id="11" name="TextBox 10"/>
+          <p:cNvSpPr txBox="1"/>
+          <p:nvPr/>
+        </p:nvSpPr>
+        <p:spPr>
+          <a:xfrm>
+            <a:off x="1874519" y="2305812"/>
             <a:ext cx="3255563" cy="457200"/>
           </a:xfrm>
           <a:prstGeom prst="rect">
@@ -12897,7 +11447,7 @@
       </p:sp>
       <p:pic>
         <p:nvPicPr>
-          <p:cNvPr id="13" name="Picture 12" descr="9a9a9137b9c7170a.png"/>
+          <p:cNvPr id="12" name="Picture 11" descr="9a9a9137b9c7170a.png"/>
           <p:cNvPicPr>
             <a:picLocks noChangeAspect="1"/>
           </p:cNvPicPr>
@@ -12911,7 +11461,7 @@
         </p:blipFill>
         <p:spPr>
           <a:xfrm>
-            <a:off x="4992923" y="2650236"/>
+            <a:off x="4992923" y="2330196"/>
             <a:ext cx="688848" cy="408432"/>
           </a:xfrm>
           <a:prstGeom prst="rect">
@@ -12921,13 +11471,13 @@
       </p:pic>
       <p:sp>
         <p:nvSpPr>
-          <p:cNvPr id="14" name="TextBox 13"/>
-          <p:cNvSpPr txBox="1"/>
-          <p:nvPr/>
-        </p:nvSpPr>
-        <p:spPr>
-          <a:xfrm>
-            <a:off x="5681771" y="2625852"/>
+          <p:cNvPr id="13" name="TextBox 12"/>
+          <p:cNvSpPr txBox="1"/>
+          <p:nvPr/>
+        </p:nvSpPr>
+        <p:spPr>
+          <a:xfrm>
+            <a:off x="5681771" y="2305812"/>
             <a:ext cx="1242626" cy="457200"/>
           </a:xfrm>
           <a:prstGeom prst="rect">
@@ -12956,13 +11506,13 @@
       </p:sp>
       <p:sp>
         <p:nvSpPr>
-          <p:cNvPr id="15" name="TextBox 14"/>
-          <p:cNvSpPr txBox="1"/>
-          <p:nvPr/>
-        </p:nvSpPr>
-        <p:spPr>
-          <a:xfrm>
-            <a:off x="7335878" y="2625852"/>
+          <p:cNvPr id="14" name="TextBox 13"/>
+          <p:cNvSpPr txBox="1"/>
+          <p:nvPr/>
+        </p:nvSpPr>
+        <p:spPr>
+          <a:xfrm>
+            <a:off x="7335878" y="2305812"/>
             <a:ext cx="651876" cy="457200"/>
           </a:xfrm>
           <a:prstGeom prst="rect">
@@ -12991,13 +11541,13 @@
       </p:sp>
       <p:sp>
         <p:nvSpPr>
-          <p:cNvPr id="16" name="TextBox 15"/>
-          <p:cNvSpPr txBox="1"/>
-          <p:nvPr/>
-        </p:nvSpPr>
-        <p:spPr>
-          <a:xfrm>
-            <a:off x="1874519" y="3238500"/>
+          <p:cNvPr id="15" name="TextBox 14"/>
+          <p:cNvSpPr txBox="1"/>
+          <p:nvPr/>
+        </p:nvSpPr>
+        <p:spPr>
+          <a:xfrm>
+            <a:off x="1874519" y="2918460"/>
             <a:ext cx="1652008" cy="457200"/>
           </a:xfrm>
           <a:prstGeom prst="rect">
@@ -13026,7 +11576,7 @@
       </p:sp>
       <p:pic>
         <p:nvPicPr>
-          <p:cNvPr id="17" name="Picture 16" descr="86c14b3a9138d085.png"/>
+          <p:cNvPr id="16" name="Picture 15" descr="86c14b3a9138d085.png"/>
           <p:cNvPicPr>
             <a:picLocks noChangeAspect="1"/>
           </p:cNvPicPr>
@@ -13040,7 +11590,7 @@
         </p:blipFill>
         <p:spPr>
           <a:xfrm>
-            <a:off x="3389368" y="3351276"/>
+            <a:off x="3389368" y="3031236"/>
             <a:ext cx="1136904" cy="231648"/>
           </a:xfrm>
           <a:prstGeom prst="rect">
@@ -13050,13 +11600,13 @@
       </p:pic>
       <p:sp>
         <p:nvSpPr>
-          <p:cNvPr id="18" name="TextBox 17"/>
-          <p:cNvSpPr txBox="1"/>
-          <p:nvPr/>
-        </p:nvSpPr>
-        <p:spPr>
-          <a:xfrm>
-            <a:off x="5074912" y="3238500"/>
+          <p:cNvPr id="17" name="TextBox 16"/>
+          <p:cNvSpPr txBox="1"/>
+          <p:nvPr/>
+        </p:nvSpPr>
+        <p:spPr>
+          <a:xfrm>
+            <a:off x="5074912" y="2918460"/>
             <a:ext cx="1130250" cy="457200"/>
           </a:xfrm>
           <a:prstGeom prst="rect">
@@ -13085,13 +11635,13 @@
       </p:sp>
       <p:sp>
         <p:nvSpPr>
-          <p:cNvPr id="19" name="TextBox 18"/>
-          <p:cNvSpPr txBox="1"/>
-          <p:nvPr/>
-        </p:nvSpPr>
-        <p:spPr>
-          <a:xfrm>
-            <a:off x="1874519" y="3922776"/>
+          <p:cNvPr id="18" name="TextBox 17"/>
+          <p:cNvSpPr txBox="1"/>
+          <p:nvPr/>
+        </p:nvSpPr>
+        <p:spPr>
+          <a:xfrm>
+            <a:off x="1874519" y="3602736"/>
             <a:ext cx="4308965" cy="457200"/>
           </a:xfrm>
           <a:prstGeom prst="rect">
@@ -13120,7 +11670,7 @@
       </p:sp>
       <p:pic>
         <p:nvPicPr>
-          <p:cNvPr id="20" name="Picture 19" descr="ef641fad4ba74c7d.png"/>
+          <p:cNvPr id="19" name="Picture 18" descr="ef641fad4ba74c7d.png"/>
           <p:cNvPicPr>
             <a:picLocks noChangeAspect="1"/>
           </p:cNvPicPr>
@@ -13134,7 +11684,7 @@
         </p:blipFill>
         <p:spPr>
           <a:xfrm>
-            <a:off x="6046325" y="3874008"/>
+            <a:off x="6046325" y="3553968"/>
             <a:ext cx="170688" cy="554736"/>
           </a:xfrm>
           <a:prstGeom prst="rect">
@@ -13144,13 +11694,13 @@
       </p:pic>
       <p:sp>
         <p:nvSpPr>
-          <p:cNvPr id="21" name="TextBox 20"/>
-          <p:cNvSpPr txBox="1"/>
-          <p:nvPr/>
-        </p:nvSpPr>
-        <p:spPr>
-          <a:xfrm>
-            <a:off x="6217013" y="3922776"/>
+          <p:cNvPr id="20" name="TextBox 19"/>
+          <p:cNvSpPr txBox="1"/>
+          <p:nvPr/>
+        </p:nvSpPr>
+        <p:spPr>
+          <a:xfrm>
+            <a:off x="6217013" y="3602736"/>
             <a:ext cx="3880389" cy="457200"/>
           </a:xfrm>
           <a:prstGeom prst="rect">
@@ -13179,7 +11729,7 @@
       </p:sp>
       <p:pic>
         <p:nvPicPr>
-          <p:cNvPr id="22" name="Picture 21" descr="ef641fad4ba74c7d.png"/>
+          <p:cNvPr id="21" name="Picture 20" descr="ef641fad4ba74c7d.png"/>
           <p:cNvPicPr>
             <a:picLocks noChangeAspect="1"/>
           </p:cNvPicPr>
@@ -13193,7 +11743,7 @@
         </p:blipFill>
         <p:spPr>
           <a:xfrm>
-            <a:off x="9960242" y="3874008"/>
+            <a:off x="9960242" y="3553968"/>
             <a:ext cx="170688" cy="554736"/>
           </a:xfrm>
           <a:prstGeom prst="rect">
@@ -13203,13 +11753,13 @@
       </p:pic>
       <p:sp>
         <p:nvSpPr>
-          <p:cNvPr id="23" name="TextBox 22"/>
-          <p:cNvSpPr txBox="1"/>
-          <p:nvPr/>
-        </p:nvSpPr>
-        <p:spPr>
-          <a:xfrm>
-            <a:off x="10130930" y="3922776"/>
+          <p:cNvPr id="22" name="TextBox 21"/>
+          <p:cNvSpPr txBox="1"/>
+          <p:nvPr/>
+        </p:nvSpPr>
+        <p:spPr>
+          <a:xfrm>
+            <a:off x="10130930" y="3602736"/>
             <a:ext cx="347771" cy="457200"/>
           </a:xfrm>
           <a:prstGeom prst="rect">
@@ -13238,7 +11788,7 @@
       </p:sp>
       <p:pic>
         <p:nvPicPr>
-          <p:cNvPr id="24" name="Picture 23" descr="c947c2e93b2d33a0.png"/>
+          <p:cNvPr id="23" name="Picture 22" descr="c947c2e93b2d33a0.png"/>
           <p:cNvPicPr>
             <a:picLocks noChangeAspect="1"/>
           </p:cNvPicPr>
@@ -13252,7 +11802,7 @@
         </p:blipFill>
         <p:spPr>
           <a:xfrm>
-            <a:off x="2606040" y="4474464"/>
+            <a:off x="2606040" y="4154424"/>
             <a:ext cx="170688" cy="554736"/>
           </a:xfrm>
           <a:prstGeom prst="rect">
@@ -13262,13 +11812,13 @@
       </p:pic>
       <p:sp>
         <p:nvSpPr>
-          <p:cNvPr id="25" name="TextBox 24"/>
-          <p:cNvSpPr txBox="1"/>
-          <p:nvPr/>
-        </p:nvSpPr>
-        <p:spPr>
-          <a:xfrm>
-            <a:off x="2776728" y="4523232"/>
+          <p:cNvPr id="24" name="TextBox 23"/>
+          <p:cNvSpPr txBox="1"/>
+          <p:nvPr/>
+        </p:nvSpPr>
+        <p:spPr>
+          <a:xfrm>
+            <a:off x="2776728" y="4203192"/>
             <a:ext cx="1173581" cy="457200"/>
           </a:xfrm>
           <a:prstGeom prst="rect">
@@ -13297,7 +11847,7 @@
       </p:sp>
       <p:pic>
         <p:nvPicPr>
-          <p:cNvPr id="26" name="Picture 25" descr="a339c6c78254d98a.png"/>
+          <p:cNvPr id="25" name="Picture 24" descr="a339c6c78254d98a.png"/>
           <p:cNvPicPr>
             <a:picLocks noChangeAspect="1"/>
           </p:cNvPicPr>
@@ -13311,7 +11861,7 @@
         </p:blipFill>
         <p:spPr>
           <a:xfrm>
-            <a:off x="3813149" y="4474464"/>
+            <a:off x="3813149" y="4154424"/>
             <a:ext cx="377952" cy="554736"/>
           </a:xfrm>
           <a:prstGeom prst="rect">
@@ -13442,44 +11992,9 @@
           </a:fontRef>
         </p:style>
       </p:cxnSp>
-      <p:sp>
-        <p:nvSpPr>
-          <p:cNvPr id="5" name="TextBox 4"/>
-          <p:cNvSpPr txBox="1"/>
-          <p:nvPr/>
-        </p:nvSpPr>
-        <p:spPr>
-          <a:xfrm>
-            <a:off x="777240" y="1261872"/>
-            <a:ext cx="10607040" cy="310896"/>
-          </a:xfrm>
-          <a:prstGeom prst="rect">
-            <a:avLst/>
-          </a:prstGeom>
-          <a:noFill/>
-        </p:spPr>
-        <p:txBody>
-          <a:bodyPr wrap="square" lIns="45720" rIns="45720" tIns="18288" bIns="18288" anchor="t">
-            <a:spAutoFit/>
-          </a:bodyPr>
-          <a:lstStyle/>
-          <a:p>
-            <a:pPr algn="l"/>
-            <a:r>
-              <a:rPr sz="1700" b="0" i="1">
-                <a:solidFill>
-                  <a:srgbClr val="6B6B6B"/>
-                </a:solidFill>
-                <a:latin typeface="Century Schoolbook"/>
-              </a:rPr>
-              <a:t>Answer.</a:t>
-            </a:r>
-          </a:p>
-        </p:txBody>
-      </p:sp>
       <p:cxnSp>
         <p:nvCxnSpPr>
-          <p:cNvPr id="6" name="Connector 5"/>
+          <p:cNvPr id="5" name="Connector 4"/>
           <p:cNvCxnSpPr/>
           <p:nvPr/>
         </p:nvCxnSpPr>
@@ -13514,7 +12029,7 @@
       </p:cxnSp>
       <p:sp>
         <p:nvSpPr>
-          <p:cNvPr id="7" name="TextBox 6"/>
+          <p:cNvPr id="6" name="TextBox 5"/>
           <p:cNvSpPr txBox="1"/>
           <p:nvPr/>
         </p:nvSpPr>
@@ -13549,7 +12064,7 @@
       </p:sp>
       <p:sp>
         <p:nvSpPr>
-          <p:cNvPr id="8" name="TextBox 7"/>
+          <p:cNvPr id="7" name="TextBox 6"/>
           <p:cNvSpPr txBox="1"/>
           <p:nvPr/>
         </p:nvSpPr>
@@ -13584,7 +12099,7 @@
       </p:sp>
       <p:pic>
         <p:nvPicPr>
-          <p:cNvPr id="9" name="Picture 8" descr="4d44fa8d60938d74.png"/>
+          <p:cNvPr id="8" name="Picture 7" descr="4d44fa8d60938d74.png"/>
           <p:cNvPicPr>
             <a:picLocks noChangeAspect="1"/>
           </p:cNvPicPr>
@@ -13608,51 +12123,7 @@
       </p:pic>
       <p:sp>
         <p:nvSpPr>
-          <p:cNvPr id="10" name="TextBox 9"/>
-          <p:cNvSpPr txBox="1"/>
-          <p:nvPr/>
-        </p:nvSpPr>
-        <p:spPr>
-          <a:xfrm>
-            <a:off x="1828800" y="3404615"/>
-            <a:ext cx="8503920" cy="548640"/>
-          </a:xfrm>
-          <a:prstGeom prst="rect">
-            <a:avLst/>
-          </a:prstGeom>
-          <a:noFill/>
-        </p:spPr>
-        <p:txBody>
-          <a:bodyPr wrap="square" lIns="45720" rIns="45720" tIns="18288" bIns="18288" anchor="t">
-            <a:spAutoFit/>
-          </a:bodyPr>
-          <a:lstStyle/>
-          <a:p>
-            <a:pPr algn="ctr"/>
-            <a:r>
-              <a:rPr sz="2400" b="0" i="0">
-                <a:solidFill>
-                  <a:srgbClr val="6B6B6B"/>
-                </a:solidFill>
-                <a:latin typeface="Century Schoolbook"/>
-              </a:rPr>
-              <a:t>9</a:t>
-            </a:r>
-            <a:r>
-              <a:rPr sz="2400" b="0" i="0" baseline="30000">
-                <a:solidFill>
-                  <a:srgbClr val="6B6B6B"/>
-                </a:solidFill>
-                <a:latin typeface="Century Schoolbook"/>
-              </a:rPr>
-              <a:t>-8</a:t>
-            </a:r>
-          </a:p>
-        </p:txBody>
-      </p:sp>
-      <p:sp>
-        <p:nvSpPr>
-          <p:cNvPr id="11" name="TextBox 10"/>
+          <p:cNvPr id="9" name="TextBox 8"/>
           <p:cNvSpPr txBox="1"/>
           <p:nvPr/>
         </p:nvSpPr>
@@ -13687,7 +12158,7 @@
       </p:sp>
       <p:pic>
         <p:nvPicPr>
-          <p:cNvPr id="12" name="Picture 11" descr="f17cb56101b51681.png"/>
+          <p:cNvPr id="10" name="Picture 9" descr="f17cb56101b51681.png"/>
           <p:cNvPicPr>
             <a:picLocks noChangeAspect="1"/>
           </p:cNvPicPr>
@@ -13832,44 +12303,9 @@
           </a:fontRef>
         </p:style>
       </p:cxnSp>
-      <p:sp>
-        <p:nvSpPr>
-          <p:cNvPr id="5" name="TextBox 4"/>
-          <p:cNvSpPr txBox="1"/>
-          <p:nvPr/>
-        </p:nvSpPr>
-        <p:spPr>
-          <a:xfrm>
-            <a:off x="777240" y="1261872"/>
-            <a:ext cx="10607040" cy="310896"/>
-          </a:xfrm>
-          <a:prstGeom prst="rect">
-            <a:avLst/>
-          </a:prstGeom>
-          <a:noFill/>
-        </p:spPr>
-        <p:txBody>
-          <a:bodyPr wrap="square" lIns="45720" rIns="45720" tIns="18288" bIns="18288" anchor="t">
-            <a:spAutoFit/>
-          </a:bodyPr>
-          <a:lstStyle/>
-          <a:p>
-            <a:pPr algn="l"/>
-            <a:r>
-              <a:rPr sz="1700" b="0" i="1">
-                <a:solidFill>
-                  <a:srgbClr val="6B6B6B"/>
-                </a:solidFill>
-                <a:latin typeface="Century Schoolbook"/>
-              </a:rPr>
-              <a:t>Take your time. Boards up when you have written it.</a:t>
-            </a:r>
-          </a:p>
-        </p:txBody>
-      </p:sp>
       <p:cxnSp>
         <p:nvCxnSpPr>
-          <p:cNvPr id="6" name="Connector 5"/>
+          <p:cNvPr id="5" name="Connector 4"/>
           <p:cNvCxnSpPr/>
           <p:nvPr/>
         </p:nvCxnSpPr>
@@ -13904,7 +12340,7 @@
       </p:cxnSp>
       <p:sp>
         <p:nvSpPr>
-          <p:cNvPr id="7" name="TextBox 6"/>
+          <p:cNvPr id="6" name="TextBox 5"/>
           <p:cNvSpPr txBox="1"/>
           <p:nvPr/>
         </p:nvSpPr>
@@ -13939,7 +12375,7 @@
       </p:sp>
       <p:sp>
         <p:nvSpPr>
-          <p:cNvPr id="8" name="TextBox 7"/>
+          <p:cNvPr id="7" name="TextBox 6"/>
           <p:cNvSpPr txBox="1"/>
           <p:nvPr/>
         </p:nvSpPr>
@@ -13974,7 +12410,7 @@
       </p:sp>
       <p:sp>
         <p:nvSpPr>
-          <p:cNvPr id="9" name="TextBox 8"/>
+          <p:cNvPr id="8" name="TextBox 7"/>
           <p:cNvSpPr txBox="1"/>
           <p:nvPr/>
         </p:nvSpPr>
@@ -14009,7 +12445,7 @@
       </p:sp>
       <p:pic>
         <p:nvPicPr>
-          <p:cNvPr id="10" name="Picture 9" descr="b9af177cb680bce6.png"/>
+          <p:cNvPr id="9" name="Picture 8" descr="b9af177cb680bce6.png"/>
           <p:cNvPicPr>
             <a:picLocks noChangeAspect="1"/>
           </p:cNvPicPr>
@@ -14033,7 +12469,7 @@
       </p:pic>
       <p:sp>
         <p:nvSpPr>
-          <p:cNvPr id="11" name="TextBox 10"/>
+          <p:cNvPr id="10" name="TextBox 9"/>
           <p:cNvSpPr txBox="1"/>
           <p:nvPr/>
         </p:nvSpPr>
@@ -14068,7 +12504,7 @@
       </p:sp>
       <p:sp>
         <p:nvSpPr>
-          <p:cNvPr id="12" name="TextBox 11"/>
+          <p:cNvPr id="11" name="TextBox 10"/>
           <p:cNvSpPr txBox="1"/>
           <p:nvPr/>
         </p:nvSpPr>
@@ -14103,7 +12539,7 @@
       </p:sp>
       <p:sp>
         <p:nvSpPr>
-          <p:cNvPr id="13" name="TextBox 12"/>
+          <p:cNvPr id="12" name="TextBox 11"/>
           <p:cNvSpPr txBox="1"/>
           <p:nvPr/>
         </p:nvSpPr>
@@ -14132,41 +12568,6 @@
                 <a:latin typeface="Century Schoolbook"/>
               </a:rPr>
               <a:t>Write your answer in sentences.</a:t>
-            </a:r>
-          </a:p>
-        </p:txBody>
-      </p:sp>
-      <p:sp>
-        <p:nvSpPr>
-          <p:cNvPr id="14" name="TextBox 13"/>
-          <p:cNvSpPr txBox="1"/>
-          <p:nvPr/>
-        </p:nvSpPr>
-        <p:spPr>
-          <a:xfrm>
-            <a:off x="777240" y="4828032"/>
-            <a:ext cx="10607040" cy="365760"/>
-          </a:xfrm>
-          <a:prstGeom prst="rect">
-            <a:avLst/>
-          </a:prstGeom>
-          <a:noFill/>
-        </p:spPr>
-        <p:txBody>
-          <a:bodyPr wrap="square" lIns="45720" rIns="45720" tIns="18288" bIns="18288" anchor="t">
-            <a:spAutoFit/>
-          </a:bodyPr>
-          <a:lstStyle/>
-          <a:p>
-            <a:pPr algn="ctr"/>
-            <a:r>
-              <a:rPr sz="1900" b="0" i="1">
-                <a:solidFill>
-                  <a:srgbClr val="6B6B6B"/>
-                </a:solidFill>
-                <a:latin typeface="Century Schoolbook"/>
-              </a:rPr>
-              <a:t>Use the word reciprocal.</a:t>
             </a:r>
           </a:p>
         </p:txBody>
@@ -14294,44 +12695,9 @@
           </a:fontRef>
         </p:style>
       </p:cxnSp>
-      <p:sp>
-        <p:nvSpPr>
-          <p:cNvPr id="5" name="TextBox 4"/>
-          <p:cNvSpPr txBox="1"/>
-          <p:nvPr/>
-        </p:nvSpPr>
-        <p:spPr>
-          <a:xfrm>
-            <a:off x="777240" y="1261872"/>
-            <a:ext cx="10607040" cy="310896"/>
-          </a:xfrm>
-          <a:prstGeom prst="rect">
-            <a:avLst/>
-          </a:prstGeom>
-          <a:noFill/>
-        </p:spPr>
-        <p:txBody>
-          <a:bodyPr wrap="square" lIns="45720" rIns="45720" tIns="18288" bIns="18288" anchor="t">
-            <a:spAutoFit/>
-          </a:bodyPr>
-          <a:lstStyle/>
-          <a:p>
-            <a:pPr algn="l"/>
-            <a:r>
-              <a:rPr sz="1700" b="0" i="1">
-                <a:solidFill>
-                  <a:srgbClr val="6B6B6B"/>
-                </a:solidFill>
-                <a:latin typeface="Century Schoolbook"/>
-              </a:rPr>
-              <a:t>Answer.</a:t>
-            </a:r>
-          </a:p>
-        </p:txBody>
-      </p:sp>
       <p:cxnSp>
         <p:nvCxnSpPr>
-          <p:cNvPr id="6" name="Connector 5"/>
+          <p:cNvPr id="5" name="Connector 4"/>
           <p:cNvCxnSpPr/>
           <p:nvPr/>
         </p:nvCxnSpPr>
@@ -14366,7 +12732,7 @@
       </p:cxnSp>
       <p:sp>
         <p:nvSpPr>
-          <p:cNvPr id="7" name="TextBox 6"/>
+          <p:cNvPr id="6" name="TextBox 5"/>
           <p:cNvSpPr txBox="1"/>
           <p:nvPr/>
         </p:nvSpPr>
@@ -14401,7 +12767,7 @@
       </p:sp>
       <p:sp>
         <p:nvSpPr>
-          <p:cNvPr id="8" name="TextBox 7"/>
+          <p:cNvPr id="7" name="TextBox 6"/>
           <p:cNvSpPr txBox="1"/>
           <p:nvPr/>
         </p:nvSpPr>
@@ -14436,7 +12802,7 @@
       </p:sp>
       <p:sp>
         <p:nvSpPr>
-          <p:cNvPr id="9" name="TextBox 8"/>
+          <p:cNvPr id="8" name="TextBox 7"/>
           <p:cNvSpPr txBox="1"/>
           <p:nvPr/>
         </p:nvSpPr>
@@ -14471,7 +12837,7 @@
       </p:sp>
       <p:pic>
         <p:nvPicPr>
-          <p:cNvPr id="10" name="Picture 9" descr="04a54a40cd0eb4b5.png"/>
+          <p:cNvPr id="9" name="Picture 8" descr="04a54a40cd0eb4b5.png"/>
           <p:cNvPicPr>
             <a:picLocks noChangeAspect="1"/>
           </p:cNvPicPr>
@@ -14495,7 +12861,7 @@
       </p:pic>
       <p:sp>
         <p:nvSpPr>
-          <p:cNvPr id="11" name="TextBox 10"/>
+          <p:cNvPr id="10" name="TextBox 9"/>
           <p:cNvSpPr txBox="1"/>
           <p:nvPr/>
         </p:nvSpPr>
@@ -14530,7 +12896,7 @@
       </p:sp>
       <p:sp>
         <p:nvSpPr>
-          <p:cNvPr id="12" name="TextBox 11"/>
+          <p:cNvPr id="11" name="TextBox 10"/>
           <p:cNvSpPr txBox="1"/>
           <p:nvPr/>
         </p:nvSpPr>
@@ -14565,42 +12931,7 @@
       </p:sp>
       <p:sp>
         <p:nvSpPr>
-          <p:cNvPr id="13" name="TextBox 12"/>
-          <p:cNvSpPr txBox="1"/>
-          <p:nvPr/>
-        </p:nvSpPr>
-        <p:spPr>
-          <a:xfrm>
-            <a:off x="1828800" y="3409519"/>
-            <a:ext cx="8503920" cy="548640"/>
-          </a:xfrm>
-          <a:prstGeom prst="rect">
-            <a:avLst/>
-          </a:prstGeom>
-          <a:noFill/>
-        </p:spPr>
-        <p:txBody>
-          <a:bodyPr wrap="square" lIns="45720" rIns="45720" tIns="18288" bIns="18288" anchor="t">
-            <a:spAutoFit/>
-          </a:bodyPr>
-          <a:lstStyle/>
-          <a:p>
-            <a:pPr algn="ctr"/>
-            <a:r>
-              <a:rPr sz="2400" b="0" i="0">
-                <a:solidFill>
-                  <a:srgbClr val="6B6B6B"/>
-                </a:solidFill>
-                <a:latin typeface="Century Schoolbook"/>
-              </a:rPr>
-              <a:t>reciprocal, not opposite</a:t>
-            </a:r>
-          </a:p>
-        </p:txBody>
-      </p:sp>
-      <p:sp>
-        <p:nvSpPr>
-          <p:cNvPr id="14" name="TextBox 13"/>
+          <p:cNvPr id="12" name="TextBox 11"/>
           <p:cNvSpPr txBox="1"/>
           <p:nvPr/>
         </p:nvSpPr>
@@ -14792,44 +13123,9 @@
           </a:fontRef>
         </p:style>
       </p:cxnSp>
-      <p:sp>
-        <p:nvSpPr>
-          <p:cNvPr id="5" name="TextBox 4"/>
-          <p:cNvSpPr txBox="1"/>
-          <p:nvPr/>
-        </p:nvSpPr>
-        <p:spPr>
-          <a:xfrm>
-            <a:off x="777240" y="1261872"/>
-            <a:ext cx="10607040" cy="310896"/>
-          </a:xfrm>
-          <a:prstGeom prst="rect">
-            <a:avLst/>
-          </a:prstGeom>
-          <a:noFill/>
-        </p:spPr>
-        <p:txBody>
-          <a:bodyPr wrap="square" lIns="45720" rIns="45720" tIns="18288" bIns="18288" anchor="t">
-            <a:spAutoFit/>
-          </a:bodyPr>
-          <a:lstStyle/>
-          <a:p>
-            <a:pPr algn="l"/>
-            <a:r>
-              <a:rPr sz="1700" b="0" i="1">
-                <a:solidFill>
-                  <a:srgbClr val="6B6B6B"/>
-                </a:solidFill>
-                <a:latin typeface="Century Schoolbook"/>
-              </a:rPr>
-              <a:t>Six questions. On your own, in silence.</a:t>
-            </a:r>
-          </a:p>
-        </p:txBody>
-      </p:sp>
       <p:cxnSp>
         <p:nvCxnSpPr>
-          <p:cNvPr id="6" name="Connector 5"/>
+          <p:cNvPr id="5" name="Connector 4"/>
           <p:cNvCxnSpPr/>
           <p:nvPr/>
         </p:nvCxnSpPr>
@@ -14864,7 +13160,7 @@
       </p:cxnSp>
       <p:sp>
         <p:nvSpPr>
-          <p:cNvPr id="7" name="TextBox 6"/>
+          <p:cNvPr id="6" name="TextBox 5"/>
           <p:cNvSpPr txBox="1"/>
           <p:nvPr/>
         </p:nvSpPr>
@@ -14899,7 +13195,7 @@
       </p:sp>
       <p:sp>
         <p:nvSpPr>
-          <p:cNvPr id="8" name="TextBox 7"/>
+          <p:cNvPr id="7" name="TextBox 6"/>
           <p:cNvSpPr txBox="1"/>
           <p:nvPr/>
         </p:nvSpPr>
@@ -14934,7 +13230,7 @@
       </p:sp>
       <p:sp>
         <p:nvSpPr>
-          <p:cNvPr id="9" name="TextBox 8"/>
+          <p:cNvPr id="8" name="TextBox 7"/>
           <p:cNvSpPr txBox="1"/>
           <p:nvPr/>
         </p:nvSpPr>
@@ -14969,7 +13265,7 @@
       </p:sp>
       <p:sp>
         <p:nvSpPr>
-          <p:cNvPr id="10" name="TextBox 9"/>
+          <p:cNvPr id="9" name="TextBox 8"/>
           <p:cNvSpPr txBox="1"/>
           <p:nvPr/>
         </p:nvSpPr>
@@ -15004,7 +13300,7 @@
       </p:sp>
       <p:sp>
         <p:nvSpPr>
-          <p:cNvPr id="11" name="TextBox 10"/>
+          <p:cNvPr id="10" name="TextBox 9"/>
           <p:cNvSpPr txBox="1"/>
           <p:nvPr/>
         </p:nvSpPr>
@@ -15039,7 +13335,7 @@
       </p:sp>
       <p:sp>
         <p:nvSpPr>
-          <p:cNvPr id="12" name="TextBox 11"/>
+          <p:cNvPr id="11" name="TextBox 10"/>
           <p:cNvSpPr txBox="1"/>
           <p:nvPr/>
         </p:nvSpPr>
@@ -15074,7 +13370,7 @@
       </p:sp>
       <p:sp>
         <p:nvSpPr>
-          <p:cNvPr id="13" name="TextBox 12"/>
+          <p:cNvPr id="12" name="TextBox 11"/>
           <p:cNvSpPr txBox="1"/>
           <p:nvPr/>
         </p:nvSpPr>
@@ -15109,7 +13405,7 @@
       </p:sp>
       <p:sp>
         <p:nvSpPr>
-          <p:cNvPr id="14" name="TextBox 13"/>
+          <p:cNvPr id="13" name="TextBox 12"/>
           <p:cNvSpPr txBox="1"/>
           <p:nvPr/>
         </p:nvSpPr>
@@ -15265,44 +13561,9 @@
           </a:fontRef>
         </p:style>
       </p:cxnSp>
-      <p:sp>
-        <p:nvSpPr>
-          <p:cNvPr id="5" name="TextBox 4"/>
-          <p:cNvSpPr txBox="1"/>
-          <p:nvPr/>
-        </p:nvSpPr>
-        <p:spPr>
-          <a:xfrm>
-            <a:off x="777240" y="1261872"/>
-            <a:ext cx="10607040" cy="310896"/>
-          </a:xfrm>
-          <a:prstGeom prst="rect">
-            <a:avLst/>
-          </a:prstGeom>
-          <a:noFill/>
-        </p:spPr>
-        <p:txBody>
-          <a:bodyPr wrap="square" lIns="45720" rIns="45720" tIns="18288" bIns="18288" anchor="t">
-            <a:spAutoFit/>
-          </a:bodyPr>
-          <a:lstStyle/>
-          <a:p>
-            <a:pPr algn="l"/>
-            <a:r>
-              <a:rPr sz="1700" b="0" i="1">
-                <a:solidFill>
-                  <a:srgbClr val="6B6B6B"/>
-                </a:solidFill>
-                <a:latin typeface="Century Schoolbook"/>
-              </a:rPr>
-              <a:t>Last five minutes.</a:t>
-            </a:r>
-          </a:p>
-        </p:txBody>
-      </p:sp>
       <p:cxnSp>
         <p:nvCxnSpPr>
-          <p:cNvPr id="6" name="Connector 5"/>
+          <p:cNvPr id="5" name="Connector 4"/>
           <p:cNvCxnSpPr/>
           <p:nvPr/>
         </p:nvCxnSpPr>
@@ -15337,7 +13598,7 @@
       </p:cxnSp>
       <p:sp>
         <p:nvSpPr>
-          <p:cNvPr id="7" name="TextBox 6"/>
+          <p:cNvPr id="6" name="TextBox 5"/>
           <p:cNvSpPr txBox="1"/>
           <p:nvPr/>
         </p:nvSpPr>
@@ -15372,7 +13633,7 @@
       </p:sp>
       <p:sp>
         <p:nvSpPr>
-          <p:cNvPr id="8" name="TextBox 7"/>
+          <p:cNvPr id="7" name="TextBox 6"/>
           <p:cNvSpPr txBox="1"/>
           <p:nvPr/>
         </p:nvSpPr>
@@ -15407,7 +13668,7 @@
       </p:sp>
       <p:sp>
         <p:nvSpPr>
-          <p:cNvPr id="9" name="TextBox 8"/>
+          <p:cNvPr id="8" name="TextBox 7"/>
           <p:cNvSpPr txBox="1"/>
           <p:nvPr/>
         </p:nvSpPr>
@@ -15442,7 +13703,7 @@
       </p:sp>
       <p:sp>
         <p:nvSpPr>
-          <p:cNvPr id="10" name="TextBox 9"/>
+          <p:cNvPr id="9" name="TextBox 8"/>
           <p:cNvSpPr txBox="1"/>
           <p:nvPr/>
         </p:nvSpPr>
@@ -15477,7 +13738,7 @@
       </p:sp>
       <p:sp>
         <p:nvSpPr>
-          <p:cNvPr id="11" name="TextBox 10"/>
+          <p:cNvPr id="10" name="TextBox 9"/>
           <p:cNvSpPr txBox="1"/>
           <p:nvPr/>
         </p:nvSpPr>
@@ -15512,7 +13773,7 @@
       </p:sp>
       <p:sp>
         <p:nvSpPr>
-          <p:cNvPr id="12" name="TextBox 11"/>
+          <p:cNvPr id="11" name="TextBox 10"/>
           <p:cNvSpPr txBox="1"/>
           <p:nvPr/>
         </p:nvSpPr>
@@ -15547,7 +13808,7 @@
       </p:sp>
       <p:sp>
         <p:nvSpPr>
-          <p:cNvPr id="13" name="TextBox 12"/>
+          <p:cNvPr id="12" name="TextBox 11"/>
           <p:cNvSpPr txBox="1"/>
           <p:nvPr/>
         </p:nvSpPr>
@@ -15582,7 +13843,7 @@
       </p:sp>
       <p:sp>
         <p:nvSpPr>
-          <p:cNvPr id="14" name="TextBox 13"/>
+          <p:cNvPr id="13" name="TextBox 12"/>
           <p:cNvSpPr txBox="1"/>
           <p:nvPr/>
         </p:nvSpPr>
@@ -15617,7 +13878,7 @@
       </p:sp>
       <p:sp>
         <p:nvSpPr>
-          <p:cNvPr id="15" name="TextBox 14"/>
+          <p:cNvPr id="14" name="TextBox 13"/>
           <p:cNvSpPr txBox="1"/>
           <p:nvPr/>
         </p:nvSpPr>
@@ -15652,7 +13913,7 @@
       </p:sp>
       <p:sp>
         <p:nvSpPr>
-          <p:cNvPr id="16" name="TextBox 15"/>
+          <p:cNvPr id="15" name="TextBox 14"/>
           <p:cNvSpPr txBox="1"/>
           <p:nvPr/>
         </p:nvSpPr>
@@ -15687,7 +13948,7 @@
       </p:sp>
       <p:sp>
         <p:nvSpPr>
-          <p:cNvPr id="17" name="TextBox 16"/>
+          <p:cNvPr id="16" name="TextBox 15"/>
           <p:cNvSpPr txBox="1"/>
           <p:nvPr/>
         </p:nvSpPr>
@@ -15843,44 +14104,9 @@
           </a:fontRef>
         </p:style>
       </p:cxnSp>
-      <p:sp>
-        <p:nvSpPr>
-          <p:cNvPr id="5" name="TextBox 4"/>
-          <p:cNvSpPr txBox="1"/>
-          <p:nvPr/>
-        </p:nvSpPr>
-        <p:spPr>
-          <a:xfrm>
-            <a:off x="777240" y="1261872"/>
-            <a:ext cx="10607040" cy="310896"/>
-          </a:xfrm>
-          <a:prstGeom prst="rect">
-            <a:avLst/>
-          </a:prstGeom>
-          <a:noFill/>
-        </p:spPr>
-        <p:txBody>
-          <a:bodyPr wrap="square" lIns="45720" rIns="45720" tIns="18288" bIns="18288" anchor="t">
-            <a:spAutoFit/>
-          </a:bodyPr>
-          <a:lstStyle/>
-          <a:p>
-            <a:pPr algn="l"/>
-            <a:r>
-              <a:rPr sz="1700" b="0" i="1">
-                <a:solidFill>
-                  <a:srgbClr val="6B6B6B"/>
-                </a:solidFill>
-                <a:latin typeface="Century Schoolbook"/>
-              </a:rPr>
-              <a:t>Copy the table.</a:t>
-            </a:r>
-          </a:p>
-        </p:txBody>
-      </p:sp>
       <p:cxnSp>
         <p:nvCxnSpPr>
-          <p:cNvPr id="6" name="Connector 5"/>
+          <p:cNvPr id="5" name="Connector 4"/>
           <p:cNvCxnSpPr/>
           <p:nvPr/>
         </p:nvCxnSpPr>
@@ -15915,7 +14141,7 @@
       </p:cxnSp>
       <p:sp>
         <p:nvSpPr>
-          <p:cNvPr id="7" name="TextBox 6"/>
+          <p:cNvPr id="6" name="TextBox 5"/>
           <p:cNvSpPr txBox="1"/>
           <p:nvPr/>
         </p:nvSpPr>
@@ -15950,7 +14176,7 @@
       </p:sp>
       <p:sp>
         <p:nvSpPr>
-          <p:cNvPr id="8" name="TextBox 7"/>
+          <p:cNvPr id="7" name="TextBox 6"/>
           <p:cNvSpPr txBox="1"/>
           <p:nvPr/>
         </p:nvSpPr>
@@ -15985,13 +14211,13 @@
       </p:sp>
       <p:sp>
         <p:nvSpPr>
-          <p:cNvPr id="9" name="TextBox 8"/>
-          <p:cNvSpPr txBox="1"/>
-          <p:nvPr/>
-        </p:nvSpPr>
-        <p:spPr>
-          <a:xfrm>
-            <a:off x="777240" y="1737360"/>
+          <p:cNvPr id="8" name="TextBox 7"/>
+          <p:cNvSpPr txBox="1"/>
+          <p:nvPr/>
+        </p:nvSpPr>
+        <p:spPr>
+          <a:xfrm>
+            <a:off x="777240" y="1389888"/>
             <a:ext cx="10607040" cy="402336"/>
           </a:xfrm>
           <a:prstGeom prst="rect">
@@ -16020,13 +14246,13 @@
       </p:sp>
       <p:cxnSp>
         <p:nvCxnSpPr>
-          <p:cNvPr id="10" name="Connector 9"/>
+          <p:cNvPr id="9" name="Connector 8"/>
           <p:cNvCxnSpPr/>
           <p:nvPr/>
         </p:nvCxnSpPr>
         <p:spPr>
           <a:xfrm>
-            <a:off x="777240" y="2176272"/>
+            <a:off x="777240" y="1828800"/>
             <a:ext cx="10607040" cy="0"/>
           </a:xfrm>
           <a:prstGeom prst="line">
@@ -16055,14 +14281,14 @@
       </p:cxnSp>
       <p:graphicFrame>
         <p:nvGraphicFramePr>
-          <p:cNvPr id="11" name="Table 10"/>
+          <p:cNvPr id="10" name="Table 9"/>
           <p:cNvGraphicFramePr>
             <a:graphicFrameLocks noGrp="1"/>
           </p:cNvGraphicFramePr>
           <p:nvPr/>
         </p:nvGraphicFramePr>
         <p:xfrm>
-          <a:off x="777240" y="2340864"/>
+          <a:off x="777240" y="1993392"/>
           <a:ext cx="10607040" cy="768096"/>
         </p:xfrm>
         <a:graphic>
@@ -16915,7 +15141,7 @@
       </p:graphicFrame>
       <p:pic>
         <p:nvPicPr>
-          <p:cNvPr id="12" name="Picture 11" descr="81375e471a1972b2.png"/>
+          <p:cNvPr id="11" name="Picture 10" descr="81375e471a1972b2.png"/>
           <p:cNvPicPr>
             <a:picLocks noChangeAspect="1"/>
           </p:cNvPicPr>
@@ -16929,7 +15155,7 @@
         </p:blipFill>
         <p:spPr>
           <a:xfrm>
-            <a:off x="2601960" y="3337560"/>
+            <a:off x="2601960" y="2990088"/>
             <a:ext cx="1316736" cy="734568"/>
           </a:xfrm>
           <a:prstGeom prst="rect">
@@ -16939,13 +15165,13 @@
       </p:pic>
       <p:sp>
         <p:nvSpPr>
-          <p:cNvPr id="13" name="TextBox 12"/>
-          <p:cNvSpPr txBox="1"/>
-          <p:nvPr/>
-        </p:nvSpPr>
-        <p:spPr>
-          <a:xfrm>
-            <a:off x="3918696" y="3476244"/>
+          <p:cNvPr id="12" name="TextBox 11"/>
+          <p:cNvSpPr txBox="1"/>
+          <p:nvPr/>
+        </p:nvSpPr>
+        <p:spPr>
+          <a:xfrm>
+            <a:off x="3918696" y="3128772"/>
             <a:ext cx="988583" cy="457200"/>
           </a:xfrm>
           <a:prstGeom prst="rect">
@@ -16974,7 +15200,7 @@
       </p:sp>
       <p:pic>
         <p:nvPicPr>
-          <p:cNvPr id="14" name="Picture 13" descr="e662eafaba09aa9a.png"/>
+          <p:cNvPr id="13" name="Picture 12" descr="e662eafaba09aa9a.png"/>
           <p:cNvPicPr>
             <a:picLocks noChangeAspect="1"/>
           </p:cNvPicPr>
@@ -16988,7 +15214,7 @@
         </p:blipFill>
         <p:spPr>
           <a:xfrm>
-            <a:off x="4770120" y="3337560"/>
+            <a:off x="4770120" y="2990088"/>
             <a:ext cx="1969008" cy="734568"/>
           </a:xfrm>
           <a:prstGeom prst="rect">
@@ -16998,13 +15224,13 @@
       </p:pic>
       <p:sp>
         <p:nvSpPr>
-          <p:cNvPr id="15" name="TextBox 14"/>
-          <p:cNvSpPr txBox="1"/>
-          <p:nvPr/>
-        </p:nvSpPr>
-        <p:spPr>
-          <a:xfrm>
-            <a:off x="6739128" y="3476244"/>
+          <p:cNvPr id="14" name="TextBox 13"/>
+          <p:cNvSpPr txBox="1"/>
+          <p:nvPr/>
+        </p:nvSpPr>
+        <p:spPr>
+          <a:xfrm>
+            <a:off x="6739128" y="3128772"/>
             <a:ext cx="988583" cy="457200"/>
           </a:xfrm>
           <a:prstGeom prst="rect">
@@ -17033,7 +15259,7 @@
       </p:sp>
       <p:pic>
         <p:nvPicPr>
-          <p:cNvPr id="16" name="Picture 15" descr="97a68c5b0d6f071a.png"/>
+          <p:cNvPr id="15" name="Picture 14" descr="97a68c5b0d6f071a.png"/>
           <p:cNvPicPr>
             <a:picLocks noChangeAspect="1"/>
           </p:cNvPicPr>
@@ -17047,7 +15273,7 @@
         </p:blipFill>
         <p:spPr>
           <a:xfrm>
-            <a:off x="7590551" y="3337560"/>
+            <a:off x="7590551" y="2990088"/>
             <a:ext cx="1969008" cy="734568"/>
           </a:xfrm>
           <a:prstGeom prst="rect">
@@ -17291,7 +15517,7 @@
         </p:nvSpPr>
         <p:spPr>
           <a:xfrm>
-            <a:off x="777240" y="1737360"/>
+            <a:off x="777240" y="1389888"/>
             <a:ext cx="10607040" cy="402336"/>
           </a:xfrm>
           <a:prstGeom prst="rect">
@@ -17326,7 +15552,7 @@
         </p:nvCxnSpPr>
         <p:spPr>
           <a:xfrm>
-            <a:off x="777240" y="2176272"/>
+            <a:off x="777240" y="1828800"/>
             <a:ext cx="10607040" cy="0"/>
           </a:xfrm>
           <a:prstGeom prst="line">
@@ -17369,7 +15595,7 @@
         </p:blipFill>
         <p:spPr>
           <a:xfrm>
-            <a:off x="3107725" y="2340864"/>
+            <a:off x="3107725" y="1993392"/>
             <a:ext cx="1362456" cy="673608"/>
           </a:xfrm>
           <a:prstGeom prst="rect">
@@ -17385,7 +15611,7 @@
         </p:nvSpPr>
         <p:spPr>
           <a:xfrm>
-            <a:off x="4470181" y="2449068"/>
+            <a:off x="4470181" y="2101596"/>
             <a:ext cx="1183151" cy="457200"/>
           </a:xfrm>
           <a:prstGeom prst="rect">
@@ -17428,7 +15654,7 @@
         </p:blipFill>
         <p:spPr>
           <a:xfrm>
-            <a:off x="5516173" y="2340864"/>
+            <a:off x="5516173" y="1993392"/>
             <a:ext cx="1395984" cy="673608"/>
           </a:xfrm>
           <a:prstGeom prst="rect">
@@ -17444,7 +15670,7 @@
         </p:nvSpPr>
         <p:spPr>
           <a:xfrm>
-            <a:off x="6912157" y="2449068"/>
+            <a:off x="6912157" y="2101596"/>
             <a:ext cx="1299682" cy="457200"/>
           </a:xfrm>
           <a:prstGeom prst="rect">
@@ -17487,7 +15713,7 @@
         </p:blipFill>
         <p:spPr>
           <a:xfrm>
-            <a:off x="8074679" y="2508504"/>
+            <a:off x="8074679" y="2161032"/>
             <a:ext cx="789432" cy="338328"/>
           </a:xfrm>
           <a:prstGeom prst="rect">
@@ -17503,7 +15729,7 @@
         </p:nvSpPr>
         <p:spPr>
           <a:xfrm>
-            <a:off x="8864111" y="2449068"/>
+            <a:off x="8864111" y="2101596"/>
             <a:ext cx="326842" cy="457200"/>
           </a:xfrm>
           <a:prstGeom prst="rect">
@@ -17546,7 +15772,7 @@
         </p:blipFill>
         <p:spPr>
           <a:xfrm>
-            <a:off x="1497114" y="3288792"/>
+            <a:off x="1497114" y="2941320"/>
             <a:ext cx="2170176" cy="740664"/>
           </a:xfrm>
           <a:prstGeom prst="rect">
@@ -17562,7 +15788,7 @@
         </p:nvSpPr>
         <p:spPr>
           <a:xfrm>
-            <a:off x="3667290" y="3430524"/>
+            <a:off x="3667290" y="3083052"/>
             <a:ext cx="1922352" cy="457200"/>
           </a:xfrm>
           <a:prstGeom prst="rect">
@@ -17605,7 +15831,7 @@
         </p:blipFill>
         <p:spPr>
           <a:xfrm>
-            <a:off x="5452483" y="3488436"/>
+            <a:off x="5452483" y="3140964"/>
             <a:ext cx="1682496" cy="341376"/>
           </a:xfrm>
           <a:prstGeom prst="rect">
@@ -17621,7 +15847,7 @@
         </p:nvSpPr>
         <p:spPr>
           <a:xfrm>
-            <a:off x="7134979" y="3430524"/>
+            <a:off x="7134979" y="3083052"/>
             <a:ext cx="1987138" cy="457200"/>
           </a:xfrm>
           <a:prstGeom prst="rect">
@@ -17664,7 +15890,7 @@
         </p:blipFill>
         <p:spPr>
           <a:xfrm>
-            <a:off x="8984957" y="3456432"/>
+            <a:off x="8984957" y="3108960"/>
             <a:ext cx="1679448" cy="405384"/>
           </a:xfrm>
           <a:prstGeom prst="rect">
@@ -17680,7 +15906,7 @@
         </p:nvSpPr>
         <p:spPr>
           <a:xfrm>
-            <a:off x="987552" y="4367784"/>
+            <a:off x="987552" y="4020312"/>
             <a:ext cx="10131551" cy="475488"/>
           </a:xfrm>
           <a:prstGeom prst="rect">
@@ -17715,7 +15941,7 @@
         </p:nvSpPr>
         <p:spPr>
           <a:xfrm>
-            <a:off x="987552" y="5256275"/>
+            <a:off x="987552" y="4908804"/>
             <a:ext cx="4433488" cy="457200"/>
           </a:xfrm>
           <a:prstGeom prst="rect">
@@ -17758,7 +15984,7 @@
         </p:blipFill>
         <p:spPr>
           <a:xfrm>
-            <a:off x="5283880" y="5081015"/>
+            <a:off x="5283880" y="4733544"/>
             <a:ext cx="4267200" cy="807720"/>
           </a:xfrm>
           <a:prstGeom prst="rect">
@@ -18002,7 +16228,7 @@
         </p:nvSpPr>
         <p:spPr>
           <a:xfrm>
-            <a:off x="777240" y="1737360"/>
+            <a:off x="777240" y="1389888"/>
             <a:ext cx="10607040" cy="402336"/>
           </a:xfrm>
           <a:prstGeom prst="rect">
@@ -18037,7 +16263,7 @@
         </p:nvCxnSpPr>
         <p:spPr>
           <a:xfrm>
-            <a:off x="777240" y="2176272"/>
+            <a:off x="777240" y="1828800"/>
             <a:ext cx="10607040" cy="0"/>
           </a:xfrm>
           <a:prstGeom prst="line">
@@ -18080,7 +16306,7 @@
         </p:blipFill>
         <p:spPr>
           <a:xfrm>
-            <a:off x="3665219" y="2340864"/>
+            <a:off x="3665219" y="1993392"/>
             <a:ext cx="4831080" cy="752856"/>
           </a:xfrm>
           <a:prstGeom prst="rect">
@@ -18096,7 +16322,7 @@
         </p:nvSpPr>
         <p:spPr>
           <a:xfrm>
-            <a:off x="3438293" y="3345180"/>
+            <a:off x="3438293" y="2997708"/>
             <a:ext cx="1124413" cy="457200"/>
           </a:xfrm>
           <a:prstGeom prst="rect">
@@ -18139,7 +16365,7 @@
         </p:blipFill>
         <p:spPr>
           <a:xfrm>
-            <a:off x="4425546" y="3400044"/>
+            <a:off x="4425546" y="3052572"/>
             <a:ext cx="4297680" cy="347472"/>
           </a:xfrm>
           <a:prstGeom prst="rect">
@@ -18163,7 +16389,7 @@
         </p:blipFill>
         <p:spPr>
           <a:xfrm>
-            <a:off x="4219955" y="4053839"/>
+            <a:off x="4219955" y="3706368"/>
             <a:ext cx="3721608" cy="822960"/>
           </a:xfrm>
           <a:prstGeom prst="rect">
@@ -18179,7 +16405,7 @@
         </p:nvSpPr>
         <p:spPr>
           <a:xfrm>
-            <a:off x="987552" y="5215128"/>
+            <a:off x="987552" y="4867656"/>
             <a:ext cx="10131551" cy="950976"/>
           </a:xfrm>
           <a:prstGeom prst="rect">
@@ -18329,44 +16555,9 @@
           </a:fontRef>
         </p:style>
       </p:cxnSp>
-      <p:sp>
-        <p:nvSpPr>
-          <p:cNvPr id="5" name="TextBox 4"/>
-          <p:cNvSpPr txBox="1"/>
-          <p:nvPr/>
-        </p:nvSpPr>
-        <p:spPr>
-          <a:xfrm>
-            <a:off x="777240" y="1261872"/>
-            <a:ext cx="10607040" cy="310896"/>
-          </a:xfrm>
-          <a:prstGeom prst="rect">
-            <a:avLst/>
-          </a:prstGeom>
-          <a:noFill/>
-        </p:spPr>
-        <p:txBody>
-          <a:bodyPr wrap="square" lIns="45720" rIns="45720" tIns="18288" bIns="18288" anchor="t">
-            <a:spAutoFit/>
-          </a:bodyPr>
-          <a:lstStyle/>
-          <a:p>
-            <a:pPr algn="l"/>
-            <a:r>
-              <a:rPr sz="1700" b="0" i="1">
-                <a:solidFill>
-                  <a:srgbClr val="6B6B6B"/>
-                </a:solidFill>
-                <a:latin typeface="Century Schoolbook"/>
-              </a:rPr>
-              <a:t>Negative exponents top and bottom.</a:t>
-            </a:r>
-          </a:p>
-        </p:txBody>
-      </p:sp>
       <p:cxnSp>
         <p:nvCxnSpPr>
-          <p:cNvPr id="6" name="Connector 5"/>
+          <p:cNvPr id="5" name="Connector 4"/>
           <p:cNvCxnSpPr/>
           <p:nvPr/>
         </p:nvCxnSpPr>
@@ -18401,7 +16592,7 @@
       </p:cxnSp>
       <p:sp>
         <p:nvSpPr>
-          <p:cNvPr id="7" name="TextBox 6"/>
+          <p:cNvPr id="6" name="TextBox 5"/>
           <p:cNvSpPr txBox="1"/>
           <p:nvPr/>
         </p:nvSpPr>
@@ -18436,7 +16627,7 @@
       </p:sp>
       <p:sp>
         <p:nvSpPr>
-          <p:cNvPr id="8" name="TextBox 7"/>
+          <p:cNvPr id="7" name="TextBox 6"/>
           <p:cNvSpPr txBox="1"/>
           <p:nvPr/>
         </p:nvSpPr>
@@ -18471,7 +16662,7 @@
       </p:sp>
       <p:pic>
         <p:nvPicPr>
-          <p:cNvPr id="9" name="Picture 8" descr="55e053ce9247b821.png"/>
+          <p:cNvPr id="8" name="Picture 7" descr="55e053ce9247b821.png"/>
           <p:cNvPicPr>
             <a:picLocks noChangeAspect="1"/>
           </p:cNvPicPr>
@@ -18495,7 +16686,7 @@
       </p:pic>
       <p:sp>
         <p:nvSpPr>
-          <p:cNvPr id="10" name="TextBox 9"/>
+          <p:cNvPr id="9" name="TextBox 8"/>
           <p:cNvSpPr txBox="1"/>
           <p:nvPr/>
         </p:nvSpPr>
@@ -18651,44 +16842,9 @@
           </a:fontRef>
         </p:style>
       </p:cxnSp>
-      <p:sp>
-        <p:nvSpPr>
-          <p:cNvPr id="5" name="TextBox 4"/>
-          <p:cNvSpPr txBox="1"/>
-          <p:nvPr/>
-        </p:nvSpPr>
-        <p:spPr>
-          <a:xfrm>
-            <a:off x="777240" y="1261872"/>
-            <a:ext cx="10607040" cy="310896"/>
-          </a:xfrm>
-          <a:prstGeom prst="rect">
-            <a:avLst/>
-          </a:prstGeom>
-          <a:noFill/>
-        </p:spPr>
-        <p:txBody>
-          <a:bodyPr wrap="square" lIns="45720" rIns="45720" tIns="18288" bIns="18288" anchor="t">
-            <a:spAutoFit/>
-          </a:bodyPr>
-          <a:lstStyle/>
-          <a:p>
-            <a:pPr algn="l"/>
-            <a:r>
-              <a:rPr sz="1700" b="0" i="1">
-                <a:solidFill>
-                  <a:srgbClr val="6B6B6B"/>
-                </a:solidFill>
-                <a:latin typeface="Century Schoolbook"/>
-              </a:rPr>
-              <a:t>Worked.</a:t>
-            </a:r>
-          </a:p>
-        </p:txBody>
-      </p:sp>
       <p:cxnSp>
         <p:nvCxnSpPr>
-          <p:cNvPr id="6" name="Connector 5"/>
+          <p:cNvPr id="5" name="Connector 4"/>
           <p:cNvCxnSpPr/>
           <p:nvPr/>
         </p:nvCxnSpPr>
@@ -18723,7 +16879,7 @@
       </p:cxnSp>
       <p:sp>
         <p:nvSpPr>
-          <p:cNvPr id="7" name="TextBox 6"/>
+          <p:cNvPr id="6" name="TextBox 5"/>
           <p:cNvSpPr txBox="1"/>
           <p:nvPr/>
         </p:nvSpPr>
@@ -18758,7 +16914,7 @@
       </p:sp>
       <p:sp>
         <p:nvSpPr>
-          <p:cNvPr id="8" name="TextBox 7"/>
+          <p:cNvPr id="7" name="TextBox 6"/>
           <p:cNvSpPr txBox="1"/>
           <p:nvPr/>
         </p:nvSpPr>
@@ -18793,7 +16949,7 @@
       </p:sp>
       <p:pic>
         <p:nvPicPr>
-          <p:cNvPr id="9" name="Picture 8" descr="86e883f301281d71.png"/>
+          <p:cNvPr id="8" name="Picture 7" descr="86e883f301281d71.png"/>
           <p:cNvPicPr>
             <a:picLocks noChangeAspect="1"/>
           </p:cNvPicPr>
@@ -18815,44 +16971,9 @@
           </a:prstGeom>
         </p:spPr>
       </p:pic>
-      <p:sp>
-        <p:nvSpPr>
-          <p:cNvPr id="10" name="TextBox 9"/>
-          <p:cNvSpPr txBox="1"/>
-          <p:nvPr/>
-        </p:nvSpPr>
-        <p:spPr>
-          <a:xfrm>
-            <a:off x="3666744" y="2100072"/>
-            <a:ext cx="6400800" cy="502920"/>
-          </a:xfrm>
-          <a:prstGeom prst="rect">
-            <a:avLst/>
-          </a:prstGeom>
-          <a:noFill/>
-        </p:spPr>
-        <p:txBody>
-          <a:bodyPr wrap="square" lIns="45720" rIns="45720" tIns="18288" bIns="18288" anchor="ctr">
-            <a:spAutoFit/>
-          </a:bodyPr>
-          <a:lstStyle/>
-          <a:p>
-            <a:pPr algn="l"/>
-            <a:r>
-              <a:rPr sz="2100" b="0" i="1">
-                <a:solidFill>
-                  <a:srgbClr val="6B6B6B"/>
-                </a:solidFill>
-                <a:latin typeface="Century Schoolbook"/>
-              </a:rPr>
-              <a:t>each power swaps sides and loses the minus</a:t>
-            </a:r>
-          </a:p>
-        </p:txBody>
-      </p:sp>
       <p:pic>
         <p:nvPicPr>
-          <p:cNvPr id="11" name="Picture 10" descr="bdb5dbd5190fc4b9.png"/>
+          <p:cNvPr id="9" name="Picture 8" descr="bdb5dbd5190fc4b9.png"/>
           <p:cNvPicPr>
             <a:picLocks noChangeAspect="1"/>
           </p:cNvPicPr>
@@ -18876,42 +16997,7 @@
       </p:pic>
       <p:sp>
         <p:nvSpPr>
-          <p:cNvPr id="12" name="TextBox 11"/>
-          <p:cNvSpPr txBox="1"/>
-          <p:nvPr/>
-        </p:nvSpPr>
-        <p:spPr>
-          <a:xfrm>
-            <a:off x="5050536" y="3185159"/>
-            <a:ext cx="6333743" cy="502920"/>
-          </a:xfrm>
-          <a:prstGeom prst="rect">
-            <a:avLst/>
-          </a:prstGeom>
-          <a:noFill/>
-        </p:spPr>
-        <p:txBody>
-          <a:bodyPr wrap="square" lIns="45720" rIns="45720" tIns="18288" bIns="18288" anchor="ctr">
-            <a:spAutoFit/>
-          </a:bodyPr>
-          <a:lstStyle/>
-          <a:p>
-            <a:pPr algn="l"/>
-            <a:r>
-              <a:rPr sz="2100" b="0" i="1">
-                <a:solidFill>
-                  <a:srgbClr val="6B6B6B"/>
-                </a:solidFill>
-                <a:latin typeface="Century Schoolbook"/>
-              </a:rPr>
-              <a:t>evaluate</a:t>
-            </a:r>
-          </a:p>
-        </p:txBody>
-      </p:sp>
-      <p:sp>
-        <p:nvSpPr>
-          <p:cNvPr id="13" name="TextBox 12"/>
+          <p:cNvPr id="10" name="TextBox 9"/>
           <p:cNvSpPr txBox="1"/>
           <p:nvPr/>
         </p:nvSpPr>
@@ -19067,44 +17153,9 @@
           </a:fontRef>
         </p:style>
       </p:cxnSp>
-      <p:sp>
-        <p:nvSpPr>
-          <p:cNvPr id="5" name="TextBox 4"/>
-          <p:cNvSpPr txBox="1"/>
-          <p:nvPr/>
-        </p:nvSpPr>
-        <p:spPr>
-          <a:xfrm>
-            <a:off x="777240" y="1261872"/>
-            <a:ext cx="10607040" cy="310896"/>
-          </a:xfrm>
-          <a:prstGeom prst="rect">
-            <a:avLst/>
-          </a:prstGeom>
-          <a:noFill/>
-        </p:spPr>
-        <p:txBody>
-          <a:bodyPr wrap="square" lIns="45720" rIns="45720" tIns="18288" bIns="18288" anchor="t">
-            <a:spAutoFit/>
-          </a:bodyPr>
-          <a:lstStyle/>
-          <a:p>
-            <a:pPr algn="l"/>
-            <a:r>
-              <a:rPr sz="1700" b="0" i="1">
-                <a:solidFill>
-                  <a:srgbClr val="6B6B6B"/>
-                </a:solidFill>
-                <a:latin typeface="Century Schoolbook"/>
-              </a:rPr>
-              <a:t>Same steps, your numbers. Boards up when done.</a:t>
-            </a:r>
-          </a:p>
-        </p:txBody>
-      </p:sp>
       <p:cxnSp>
         <p:nvCxnSpPr>
-          <p:cNvPr id="6" name="Connector 5"/>
+          <p:cNvPr id="5" name="Connector 4"/>
           <p:cNvCxnSpPr/>
           <p:nvPr/>
         </p:nvCxnSpPr>
@@ -19139,7 +17190,7 @@
       </p:cxnSp>
       <p:sp>
         <p:nvSpPr>
-          <p:cNvPr id="7" name="TextBox 6"/>
+          <p:cNvPr id="6" name="TextBox 5"/>
           <p:cNvSpPr txBox="1"/>
           <p:nvPr/>
         </p:nvSpPr>
@@ -19174,7 +17225,7 @@
       </p:sp>
       <p:sp>
         <p:nvSpPr>
-          <p:cNvPr id="8" name="TextBox 7"/>
+          <p:cNvPr id="7" name="TextBox 6"/>
           <p:cNvSpPr txBox="1"/>
           <p:nvPr/>
         </p:nvSpPr>
@@ -19209,7 +17260,7 @@
       </p:sp>
       <p:pic>
         <p:nvPicPr>
-          <p:cNvPr id="9" name="Picture 8" descr="04c00c9d3a9d2478.png"/>
+          <p:cNvPr id="8" name="Picture 7" descr="04c00c9d3a9d2478.png"/>
           <p:cNvPicPr>
             <a:picLocks noChangeAspect="1"/>
           </p:cNvPicPr>
@@ -19231,6 +17282,41 @@
           </a:prstGeom>
         </p:spPr>
       </p:pic>
+      <p:sp>
+        <p:nvSpPr>
+          <p:cNvPr id="9" name="TextBox 8"/>
+          <p:cNvSpPr txBox="1"/>
+          <p:nvPr/>
+        </p:nvSpPr>
+        <p:spPr>
+          <a:xfrm>
+            <a:off x="777240" y="3718560"/>
+            <a:ext cx="10607040" cy="429370"/>
+          </a:xfrm>
+          <a:prstGeom prst="rect">
+            <a:avLst/>
+          </a:prstGeom>
+          <a:noFill/>
+        </p:spPr>
+        <p:txBody>
+          <a:bodyPr wrap="square" lIns="45720" rIns="45720" tIns="18288" bIns="18288" anchor="t">
+            <a:spAutoFit/>
+          </a:bodyPr>
+          <a:lstStyle/>
+          <a:p>
+            <a:pPr algn="ctr"/>
+            <a:r>
+              <a:rPr sz="2400" b="1" i="0">
+                <a:solidFill>
+                  <a:srgbClr val="1A1A1A"/>
+                </a:solidFill>
+                <a:latin typeface="Century Schoolbook"/>
+              </a:rPr>
+              <a:t>Rewrite with positive exponents, then find the value.</a:t>
+            </a:r>
+          </a:p>
+        </p:txBody>
+      </p:sp>
     </p:spTree>
   </p:cSld>
   <p:clrMapOvr>

--- a/a7/packages/A7 Unit 3 - Exponents and Scientific Notation/Lessons/3.04/A7 3.04 Negative Exponent Law - Slides.pptx
+++ b/a7/packages/A7 Unit 3 - Exponents and Scientific Notation/Lessons/3.04/A7 3.04 Negative Exponent Law - Slides.pptx
@@ -13236,23 +13236,23 @@
         </p:nvSpPr>
         <p:spPr>
           <a:xfrm>
-            <a:off x="960120" y="2011680"/>
-            <a:ext cx="548640" cy="356616"/>
-          </a:xfrm>
-          <a:prstGeom prst="rect">
-            <a:avLst/>
-          </a:prstGeom>
-          <a:noFill/>
-        </p:spPr>
-        <p:txBody>
-          <a:bodyPr wrap="square" lIns="45720" rIns="45720" tIns="18288" bIns="18288" anchor="t">
+            <a:off x="960120" y="1495043"/>
+            <a:ext cx="548640" cy="457200"/>
+          </a:xfrm>
+          <a:prstGeom prst="rect">
+            <a:avLst/>
+          </a:prstGeom>
+          <a:noFill/>
+        </p:spPr>
+        <p:txBody>
+          <a:bodyPr wrap="square" lIns="45720" rIns="45720" tIns="18288" bIns="18288" anchor="ctr">
             <a:spAutoFit/>
           </a:bodyPr>
           <a:lstStyle/>
           <a:p>
             <a:pPr algn="l"/>
             <a:r>
-              <a:rPr sz="2100" b="1" i="0">
+              <a:rPr sz="2300" b="1" i="0">
                 <a:solidFill>
                   <a:srgbClr val="0B5394"/>
                 </a:solidFill>
@@ -13271,173 +13271,586 @@
         </p:nvSpPr>
         <p:spPr>
           <a:xfrm>
-            <a:off x="1554480" y="2011680"/>
-            <a:ext cx="9829800" cy="411480"/>
-          </a:xfrm>
-          <a:prstGeom prst="rect">
-            <a:avLst/>
-          </a:prstGeom>
-          <a:noFill/>
-        </p:spPr>
-        <p:txBody>
-          <a:bodyPr wrap="square" lIns="45720" rIns="45720" tIns="18288" bIns="18288" anchor="t">
+            <a:off x="1554480" y="1495044"/>
+            <a:ext cx="7581703" cy="457200"/>
+          </a:xfrm>
+          <a:prstGeom prst="rect">
+            <a:avLst/>
+          </a:prstGeom>
+          <a:noFill/>
+        </p:spPr>
+        <p:txBody>
+          <a:bodyPr wrap="none" lIns="45720" rIns="45720" tIns="18288" bIns="18288" anchor="ctr">
+            <a:noAutofit/>
+          </a:bodyPr>
+          <a:lstStyle/>
+          <a:p>
+            <a:pPr algn="l"/>
+            <a:r>
+              <a:rPr sz="2300" b="0" i="0">
+                <a:solidFill>
+                  <a:srgbClr val="1A1A1A"/>
+                </a:solidFill>
+                <a:latin typeface="Century Schoolbook"/>
+              </a:rPr>
+              <a:t>Rewrite with a positive exponent. Do not evaluate.  </a:t>
+            </a:r>
+          </a:p>
+        </p:txBody>
+      </p:sp>
+      <p:pic>
+        <p:nvPicPr>
+          <p:cNvPr id="10" name="Picture 9" descr="461f8cd1ec532b03.png"/>
+          <p:cNvPicPr>
+            <a:picLocks noChangeAspect="1"/>
+          </p:cNvPicPr>
+          <p:nvPr/>
+        </p:nvPicPr>
+        <p:blipFill>
+          <a:blip r:embed="rId2"/>
+          <a:stretch>
+            <a:fillRect/>
+          </a:stretch>
+        </p:blipFill>
+        <p:spPr>
+          <a:xfrm>
+            <a:off x="8999023" y="1583436"/>
+            <a:ext cx="426720" cy="280416"/>
+          </a:xfrm>
+          <a:prstGeom prst="rect">
+            <a:avLst/>
+          </a:prstGeom>
+        </p:spPr>
+      </p:pic>
+      <p:sp>
+        <p:nvSpPr>
+          <p:cNvPr id="11" name="TextBox 10"/>
+          <p:cNvSpPr txBox="1"/>
+          <p:nvPr/>
+        </p:nvSpPr>
+        <p:spPr>
+          <a:xfrm>
+            <a:off x="960120" y="2089403"/>
+            <a:ext cx="548640" cy="457200"/>
+          </a:xfrm>
+          <a:prstGeom prst="rect">
+            <a:avLst/>
+          </a:prstGeom>
+          <a:noFill/>
+        </p:spPr>
+        <p:txBody>
+          <a:bodyPr wrap="square" lIns="45720" rIns="45720" tIns="18288" bIns="18288" anchor="ctr">
             <a:spAutoFit/>
           </a:bodyPr>
           <a:lstStyle/>
           <a:p>
             <a:pPr algn="l"/>
             <a:r>
-              <a:rPr sz="2100" b="0" i="0">
+              <a:rPr sz="2300" b="1" i="0">
+                <a:solidFill>
+                  <a:srgbClr val="0B5394"/>
+                </a:solidFill>
+                <a:latin typeface="Century Schoolbook"/>
+              </a:rPr>
+              <a:t>2.</a:t>
+            </a:r>
+          </a:p>
+        </p:txBody>
+      </p:sp>
+      <p:sp>
+        <p:nvSpPr>
+          <p:cNvPr id="12" name="TextBox 11"/>
+          <p:cNvSpPr txBox="1"/>
+          <p:nvPr/>
+        </p:nvSpPr>
+        <p:spPr>
+          <a:xfrm>
+            <a:off x="1554480" y="2089403"/>
+            <a:ext cx="2548440" cy="457200"/>
+          </a:xfrm>
+          <a:prstGeom prst="rect">
+            <a:avLst/>
+          </a:prstGeom>
+          <a:noFill/>
+        </p:spPr>
+        <p:txBody>
+          <a:bodyPr wrap="none" lIns="45720" rIns="45720" tIns="18288" bIns="18288" anchor="ctr">
+            <a:noAutofit/>
+          </a:bodyPr>
+          <a:lstStyle/>
+          <a:p>
+            <a:pPr algn="l"/>
+            <a:r>
+              <a:rPr sz="2300" b="0" i="0">
                 <a:solidFill>
                   <a:srgbClr val="1A1A1A"/>
                 </a:solidFill>
                 <a:latin typeface="Century Schoolbook"/>
               </a:rPr>
-              <a:t>Six questions. Work down the page.</a:t>
-            </a:r>
-          </a:p>
-        </p:txBody>
-      </p:sp>
-      <p:sp>
-        <p:nvSpPr>
-          <p:cNvPr id="10" name="TextBox 9"/>
-          <p:cNvSpPr txBox="1"/>
-          <p:nvPr/>
-        </p:nvSpPr>
-        <p:spPr>
-          <a:xfrm>
-            <a:off x="960120" y="2551176"/>
-            <a:ext cx="548640" cy="356616"/>
-          </a:xfrm>
-          <a:prstGeom prst="rect">
-            <a:avLst/>
-          </a:prstGeom>
-          <a:noFill/>
-        </p:spPr>
-        <p:txBody>
-          <a:bodyPr wrap="square" lIns="45720" rIns="45720" tIns="18288" bIns="18288" anchor="t">
+              <a:t>Find the value.  </a:t>
+            </a:r>
+          </a:p>
+        </p:txBody>
+      </p:sp>
+      <p:pic>
+        <p:nvPicPr>
+          <p:cNvPr id="13" name="Picture 12" descr="dfc1ef4164404941.png"/>
+          <p:cNvPicPr>
+            <a:picLocks noChangeAspect="1"/>
+          </p:cNvPicPr>
+          <p:nvPr/>
+        </p:nvPicPr>
+        <p:blipFill>
+          <a:blip r:embed="rId3"/>
+          <a:stretch>
+            <a:fillRect/>
+          </a:stretch>
+        </p:blipFill>
+        <p:spPr>
+          <a:xfrm>
+            <a:off x="3965760" y="2176271"/>
+            <a:ext cx="423672" cy="283464"/>
+          </a:xfrm>
+          <a:prstGeom prst="rect">
+            <a:avLst/>
+          </a:prstGeom>
+        </p:spPr>
+      </p:pic>
+      <p:sp>
+        <p:nvSpPr>
+          <p:cNvPr id="14" name="TextBox 13"/>
+          <p:cNvSpPr txBox="1"/>
+          <p:nvPr/>
+        </p:nvSpPr>
+        <p:spPr>
+          <a:xfrm>
+            <a:off x="960120" y="2683763"/>
+            <a:ext cx="548640" cy="457200"/>
+          </a:xfrm>
+          <a:prstGeom prst="rect">
+            <a:avLst/>
+          </a:prstGeom>
+          <a:noFill/>
+        </p:spPr>
+        <p:txBody>
+          <a:bodyPr wrap="square" lIns="45720" rIns="45720" tIns="18288" bIns="18288" anchor="ctr">
             <a:spAutoFit/>
           </a:bodyPr>
           <a:lstStyle/>
           <a:p>
             <a:pPr algn="l"/>
             <a:r>
-              <a:rPr sz="2100" b="1" i="0">
+              <a:rPr sz="2300" b="1" i="0">
                 <a:solidFill>
                   <a:srgbClr val="0B5394"/>
                 </a:solidFill>
                 <a:latin typeface="Century Schoolbook"/>
               </a:rPr>
-              <a:t>2.</a:t>
-            </a:r>
-          </a:p>
-        </p:txBody>
-      </p:sp>
-      <p:sp>
-        <p:nvSpPr>
-          <p:cNvPr id="11" name="TextBox 10"/>
-          <p:cNvSpPr txBox="1"/>
-          <p:nvPr/>
-        </p:nvSpPr>
-        <p:spPr>
-          <a:xfrm>
-            <a:off x="1554480" y="2551176"/>
-            <a:ext cx="9829800" cy="411480"/>
-          </a:xfrm>
-          <a:prstGeom prst="rect">
-            <a:avLst/>
-          </a:prstGeom>
-          <a:noFill/>
-        </p:spPr>
-        <p:txBody>
-          <a:bodyPr wrap="square" lIns="45720" rIns="45720" tIns="18288" bIns="18288" anchor="t">
+              <a:t>3.</a:t>
+            </a:r>
+          </a:p>
+        </p:txBody>
+      </p:sp>
+      <p:sp>
+        <p:nvSpPr>
+          <p:cNvPr id="15" name="TextBox 14"/>
+          <p:cNvSpPr txBox="1"/>
+          <p:nvPr/>
+        </p:nvSpPr>
+        <p:spPr>
+          <a:xfrm>
+            <a:off x="1554480" y="2683763"/>
+            <a:ext cx="2548440" cy="457200"/>
+          </a:xfrm>
+          <a:prstGeom prst="rect">
+            <a:avLst/>
+          </a:prstGeom>
+          <a:noFill/>
+        </p:spPr>
+        <p:txBody>
+          <a:bodyPr wrap="none" lIns="45720" rIns="45720" tIns="18288" bIns="18288" anchor="ctr">
+            <a:noAutofit/>
+          </a:bodyPr>
+          <a:lstStyle/>
+          <a:p>
+            <a:pPr algn="l"/>
+            <a:r>
+              <a:rPr sz="2300" b="0" i="0">
+                <a:solidFill>
+                  <a:srgbClr val="1A1A1A"/>
+                </a:solidFill>
+                <a:latin typeface="Century Schoolbook"/>
+              </a:rPr>
+              <a:t>Find the value.  </a:t>
+            </a:r>
+          </a:p>
+        </p:txBody>
+      </p:sp>
+      <p:pic>
+        <p:nvPicPr>
+          <p:cNvPr id="16" name="Picture 15" descr="e54deab6934343bd.png"/>
+          <p:cNvPicPr>
+            <a:picLocks noChangeAspect="1"/>
+          </p:cNvPicPr>
+          <p:nvPr/>
+        </p:nvPicPr>
+        <p:blipFill>
+          <a:blip r:embed="rId4"/>
+          <a:stretch>
+            <a:fillRect/>
+          </a:stretch>
+        </p:blipFill>
+        <p:spPr>
+          <a:xfrm>
+            <a:off x="3965760" y="2744723"/>
+            <a:ext cx="868680" cy="335280"/>
+          </a:xfrm>
+          <a:prstGeom prst="rect">
+            <a:avLst/>
+          </a:prstGeom>
+        </p:spPr>
+      </p:pic>
+      <p:sp>
+        <p:nvSpPr>
+          <p:cNvPr id="17" name="TextBox 16"/>
+          <p:cNvSpPr txBox="1"/>
+          <p:nvPr/>
+        </p:nvSpPr>
+        <p:spPr>
+          <a:xfrm>
+            <a:off x="960120" y="3375659"/>
+            <a:ext cx="548640" cy="457200"/>
+          </a:xfrm>
+          <a:prstGeom prst="rect">
+            <a:avLst/>
+          </a:prstGeom>
+          <a:noFill/>
+        </p:spPr>
+        <p:txBody>
+          <a:bodyPr wrap="square" lIns="45720" rIns="45720" tIns="18288" bIns="18288" anchor="ctr">
             <a:spAutoFit/>
           </a:bodyPr>
           <a:lstStyle/>
           <a:p>
             <a:pPr algn="l"/>
             <a:r>
-              <a:rPr sz="2100" b="0" i="0">
+              <a:rPr sz="2300" b="1" i="0">
+                <a:solidFill>
+                  <a:srgbClr val="0B5394"/>
+                </a:solidFill>
+                <a:latin typeface="Century Schoolbook"/>
+              </a:rPr>
+              <a:t>4.</a:t>
+            </a:r>
+          </a:p>
+        </p:txBody>
+      </p:sp>
+      <p:sp>
+        <p:nvSpPr>
+          <p:cNvPr id="18" name="TextBox 17"/>
+          <p:cNvSpPr txBox="1"/>
+          <p:nvPr/>
+        </p:nvSpPr>
+        <p:spPr>
+          <a:xfrm>
+            <a:off x="1554480" y="3375659"/>
+            <a:ext cx="2548440" cy="457200"/>
+          </a:xfrm>
+          <a:prstGeom prst="rect">
+            <a:avLst/>
+          </a:prstGeom>
+          <a:noFill/>
+        </p:spPr>
+        <p:txBody>
+          <a:bodyPr wrap="none" lIns="45720" rIns="45720" tIns="18288" bIns="18288" anchor="ctr">
+            <a:noAutofit/>
+          </a:bodyPr>
+          <a:lstStyle/>
+          <a:p>
+            <a:pPr algn="l"/>
+            <a:r>
+              <a:rPr sz="2300" b="0" i="0">
                 <a:solidFill>
                   <a:srgbClr val="1A1A1A"/>
                 </a:solidFill>
                 <a:latin typeface="Century Schoolbook"/>
               </a:rPr>
-              <a:t>Show the step that does the work, not just the answer.</a:t>
-            </a:r>
-          </a:p>
-        </p:txBody>
-      </p:sp>
-      <p:sp>
-        <p:nvSpPr>
-          <p:cNvPr id="12" name="TextBox 11"/>
-          <p:cNvSpPr txBox="1"/>
-          <p:nvPr/>
-        </p:nvSpPr>
-        <p:spPr>
-          <a:xfrm>
-            <a:off x="960120" y="3090672"/>
-            <a:ext cx="548640" cy="356616"/>
-          </a:xfrm>
-          <a:prstGeom prst="rect">
-            <a:avLst/>
-          </a:prstGeom>
-          <a:noFill/>
-        </p:spPr>
-        <p:txBody>
-          <a:bodyPr wrap="square" lIns="45720" rIns="45720" tIns="18288" bIns="18288" anchor="t">
+              <a:t>Find the value.  </a:t>
+            </a:r>
+          </a:p>
+        </p:txBody>
+      </p:sp>
+      <p:pic>
+        <p:nvPicPr>
+          <p:cNvPr id="19" name="Picture 18" descr="15c9666cbba8effe.png"/>
+          <p:cNvPicPr>
+            <a:picLocks noChangeAspect="1"/>
+          </p:cNvPicPr>
+          <p:nvPr/>
+        </p:nvPicPr>
+        <p:blipFill>
+          <a:blip r:embed="rId5"/>
+          <a:stretch>
+            <a:fillRect/>
+          </a:stretch>
+        </p:blipFill>
+        <p:spPr>
+          <a:xfrm>
+            <a:off x="3965760" y="3300983"/>
+            <a:ext cx="627888" cy="606552"/>
+          </a:xfrm>
+          <a:prstGeom prst="rect">
+            <a:avLst/>
+          </a:prstGeom>
+        </p:spPr>
+      </p:pic>
+      <p:sp>
+        <p:nvSpPr>
+          <p:cNvPr id="20" name="TextBox 19"/>
+          <p:cNvSpPr txBox="1"/>
+          <p:nvPr/>
+        </p:nvSpPr>
+        <p:spPr>
+          <a:xfrm>
+            <a:off x="960120" y="4067555"/>
+            <a:ext cx="548640" cy="457200"/>
+          </a:xfrm>
+          <a:prstGeom prst="rect">
+            <a:avLst/>
+          </a:prstGeom>
+          <a:noFill/>
+        </p:spPr>
+        <p:txBody>
+          <a:bodyPr wrap="square" lIns="45720" rIns="45720" tIns="18288" bIns="18288" anchor="ctr">
             <a:spAutoFit/>
           </a:bodyPr>
           <a:lstStyle/>
           <a:p>
             <a:pPr algn="l"/>
             <a:r>
-              <a:rPr sz="2100" b="1" i="0">
+              <a:rPr sz="2300" b="1" i="0">
                 <a:solidFill>
                   <a:srgbClr val="0B5394"/>
                 </a:solidFill>
                 <a:latin typeface="Century Schoolbook"/>
               </a:rPr>
-              <a:t>3.</a:t>
-            </a:r>
-          </a:p>
-        </p:txBody>
-      </p:sp>
-      <p:sp>
-        <p:nvSpPr>
-          <p:cNvPr id="13" name="TextBox 12"/>
-          <p:cNvSpPr txBox="1"/>
-          <p:nvPr/>
-        </p:nvSpPr>
-        <p:spPr>
-          <a:xfrm>
-            <a:off x="1554480" y="3090672"/>
-            <a:ext cx="9829800" cy="411480"/>
-          </a:xfrm>
-          <a:prstGeom prst="rect">
-            <a:avLst/>
-          </a:prstGeom>
-          <a:noFill/>
-        </p:spPr>
-        <p:txBody>
-          <a:bodyPr wrap="square" lIns="45720" rIns="45720" tIns="18288" bIns="18288" anchor="t">
+              <a:t>5.</a:t>
+            </a:r>
+          </a:p>
+        </p:txBody>
+      </p:sp>
+      <p:sp>
+        <p:nvSpPr>
+          <p:cNvPr id="21" name="TextBox 20"/>
+          <p:cNvSpPr txBox="1"/>
+          <p:nvPr/>
+        </p:nvSpPr>
+        <p:spPr>
+          <a:xfrm>
+            <a:off x="1554480" y="4067555"/>
+            <a:ext cx="2548440" cy="457200"/>
+          </a:xfrm>
+          <a:prstGeom prst="rect">
+            <a:avLst/>
+          </a:prstGeom>
+          <a:noFill/>
+        </p:spPr>
+        <p:txBody>
+          <a:bodyPr wrap="none" lIns="45720" rIns="45720" tIns="18288" bIns="18288" anchor="ctr">
+            <a:noAutofit/>
+          </a:bodyPr>
+          <a:lstStyle/>
+          <a:p>
+            <a:pPr algn="l"/>
+            <a:r>
+              <a:rPr sz="2300" b="0" i="0">
+                <a:solidFill>
+                  <a:srgbClr val="1A1A1A"/>
+                </a:solidFill>
+                <a:latin typeface="Century Schoolbook"/>
+              </a:rPr>
+              <a:t>Find the value.  </a:t>
+            </a:r>
+          </a:p>
+        </p:txBody>
+      </p:sp>
+      <p:pic>
+        <p:nvPicPr>
+          <p:cNvPr id="22" name="Picture 21" descr="cf4e0187a56e9633.png"/>
+          <p:cNvPicPr>
+            <a:picLocks noChangeAspect="1"/>
+          </p:cNvPicPr>
+          <p:nvPr/>
+        </p:nvPicPr>
+        <p:blipFill>
+          <a:blip r:embed="rId6"/>
+          <a:stretch>
+            <a:fillRect/>
+          </a:stretch>
+        </p:blipFill>
+        <p:spPr>
+          <a:xfrm>
+            <a:off x="3965760" y="4155947"/>
+            <a:ext cx="911352" cy="280416"/>
+          </a:xfrm>
+          <a:prstGeom prst="rect">
+            <a:avLst/>
+          </a:prstGeom>
+        </p:spPr>
+      </p:pic>
+      <p:sp>
+        <p:nvSpPr>
+          <p:cNvPr id="23" name="TextBox 22"/>
+          <p:cNvSpPr txBox="1"/>
+          <p:nvPr/>
+        </p:nvSpPr>
+        <p:spPr>
+          <a:xfrm>
+            <a:off x="960120" y="4735067"/>
+            <a:ext cx="548640" cy="457200"/>
+          </a:xfrm>
+          <a:prstGeom prst="rect">
+            <a:avLst/>
+          </a:prstGeom>
+          <a:noFill/>
+        </p:spPr>
+        <p:txBody>
+          <a:bodyPr wrap="square" lIns="45720" rIns="45720" tIns="18288" bIns="18288" anchor="ctr">
             <a:spAutoFit/>
           </a:bodyPr>
           <a:lstStyle/>
           <a:p>
             <a:pPr algn="l"/>
             <a:r>
-              <a:rPr sz="2100" b="0" i="0">
+              <a:rPr sz="2300" b="1" i="0">
+                <a:solidFill>
+                  <a:srgbClr val="0B5394"/>
+                </a:solidFill>
+                <a:latin typeface="Century Schoolbook"/>
+              </a:rPr>
+              <a:t>6.</a:t>
+            </a:r>
+          </a:p>
+        </p:txBody>
+      </p:sp>
+      <p:sp>
+        <p:nvSpPr>
+          <p:cNvPr id="24" name="TextBox 23"/>
+          <p:cNvSpPr txBox="1"/>
+          <p:nvPr/>
+        </p:nvSpPr>
+        <p:spPr>
+          <a:xfrm>
+            <a:off x="1554480" y="4735067"/>
+            <a:ext cx="2720291" cy="457200"/>
+          </a:xfrm>
+          <a:prstGeom prst="rect">
+            <a:avLst/>
+          </a:prstGeom>
+          <a:noFill/>
+        </p:spPr>
+        <p:txBody>
+          <a:bodyPr wrap="none" lIns="45720" rIns="45720" tIns="18288" bIns="18288" anchor="ctr">
+            <a:noAutofit/>
+          </a:bodyPr>
+          <a:lstStyle/>
+          <a:p>
+            <a:pPr algn="l"/>
+            <a:r>
+              <a:rPr sz="2300" b="0" i="0">
                 <a:solidFill>
                   <a:srgbClr val="1A1A1A"/>
                 </a:solidFill>
                 <a:latin typeface="Century Schoolbook"/>
               </a:rPr>
-              <a:t>Silence until the six minutes are up.</a:t>
-            </a:r>
-          </a:p>
-        </p:txBody>
-      </p:sp>
+              <a:t>Find the value of </a:t>
+            </a:r>
+          </a:p>
+        </p:txBody>
+      </p:sp>
+      <p:pic>
+        <p:nvPicPr>
+          <p:cNvPr id="25" name="Picture 24" descr="0afe177f69dd5e06.png"/>
+          <p:cNvPicPr>
+            <a:picLocks noChangeAspect="1"/>
+          </p:cNvPicPr>
+          <p:nvPr/>
+        </p:nvPicPr>
+        <p:blipFill>
+          <a:blip r:embed="rId7"/>
+          <a:stretch>
+            <a:fillRect/>
+          </a:stretch>
+        </p:blipFill>
+        <p:spPr>
+          <a:xfrm>
+            <a:off x="4137611" y="4888992"/>
+            <a:ext cx="155448" cy="149352"/>
+          </a:xfrm>
+          <a:prstGeom prst="rect">
+            <a:avLst/>
+          </a:prstGeom>
+        </p:spPr>
+      </p:pic>
+      <p:sp>
+        <p:nvSpPr>
+          <p:cNvPr id="26" name="TextBox 25"/>
+          <p:cNvSpPr txBox="1"/>
+          <p:nvPr/>
+        </p:nvSpPr>
+        <p:spPr>
+          <a:xfrm>
+            <a:off x="4293059" y="4735067"/>
+            <a:ext cx="468561" cy="457200"/>
+          </a:xfrm>
+          <a:prstGeom prst="rect">
+            <a:avLst/>
+          </a:prstGeom>
+          <a:noFill/>
+        </p:spPr>
+        <p:txBody>
+          <a:bodyPr wrap="none" lIns="45720" rIns="45720" tIns="18288" bIns="18288" anchor="ctr">
+            <a:noAutofit/>
+          </a:bodyPr>
+          <a:lstStyle/>
+          <a:p>
+            <a:pPr algn="l"/>
+            <a:r>
+              <a:rPr sz="2300" b="0" i="0">
+                <a:solidFill>
+                  <a:srgbClr val="1A1A1A"/>
+                </a:solidFill>
+                <a:latin typeface="Century Schoolbook"/>
+              </a:rPr>
+              <a:t>.  </a:t>
+            </a:r>
+          </a:p>
+        </p:txBody>
+      </p:sp>
+      <p:pic>
+        <p:nvPicPr>
+          <p:cNvPr id="27" name="Picture 26" descr="cd419a222e900c27.png"/>
+          <p:cNvPicPr>
+            <a:picLocks noChangeAspect="1"/>
+          </p:cNvPicPr>
+          <p:nvPr/>
+        </p:nvPicPr>
+        <p:blipFill>
+          <a:blip r:embed="rId8"/>
+          <a:stretch>
+            <a:fillRect/>
+          </a:stretch>
+        </p:blipFill>
+        <p:spPr>
+          <a:xfrm>
+            <a:off x="4624460" y="4684776"/>
+            <a:ext cx="947928" cy="557784"/>
+          </a:xfrm>
+          <a:prstGeom prst="rect">
+            <a:avLst/>
+          </a:prstGeom>
+        </p:spPr>
+      </p:pic>
     </p:spTree>
   </p:cSld>
   <p:clrMapOvr>

--- a/a7/packages/A7 Unit 3 - Exponents and Scientific Notation/Lessons/3.04/A7 3.04 Negative Exponent Law - Slides.pptx
+++ b/a7/packages/A7 Unit 3 - Exponents and Scientific Notation/Lessons/3.04/A7 3.04 Negative Exponent Law - Slides.pptx
@@ -3145,11 +3145,11 @@
           <a:p>
             <a:pPr algn="ctr"/>
             <a:r>
-              <a:rPr sz="1500" b="0" i="0">
+              <a:rPr sz="1420" b="0" i="0">
                 <a:solidFill>
                   <a:srgbClr val="6B6B6B"/>
                 </a:solidFill>
-                <a:latin typeface="Century Schoolbook"/>
+                <a:latin typeface="Lexend"/>
               </a:rPr>
               <a:t>GRADE 7 ACCELERATED  ·  UNIT 3  ·  LESSON 4</a:t>
             </a:r>
@@ -3180,11 +3180,11 @@
           <a:p>
             <a:pPr algn="ctr"/>
             <a:r>
-              <a:rPr sz="3400" b="1" i="0">
+              <a:rPr sz="3229" b="1" i="0">
                 <a:solidFill>
                   <a:srgbClr val="1A1A1A"/>
                 </a:solidFill>
-                <a:latin typeface="Century Schoolbook"/>
+                <a:latin typeface="Lexend"/>
               </a:rPr>
               <a:t>Negative Exponent Law</a:t>
             </a:r>
@@ -3285,11 +3285,11 @@
           <a:p>
             <a:pPr algn="ctr"/>
             <a:r>
-              <a:rPr sz="1600" b="1" i="0">
+              <a:rPr sz="1520" b="1" i="0">
                 <a:solidFill>
                   <a:srgbClr val="1A1A1A"/>
                 </a:solidFill>
-                <a:latin typeface="Century Schoolbook"/>
+                <a:latin typeface="Lexend"/>
               </a:rPr>
               <a:t>MA.8.NSO.1.3</a:t>
             </a:r>
@@ -3320,11 +3320,11 @@
           <a:p>
             <a:pPr algn="ctr"/>
             <a:r>
-              <a:rPr sz="1900" b="0" i="1">
+              <a:rPr sz="1810" b="0" i="0">
                 <a:solidFill>
                   <a:srgbClr val="1A1A1A"/>
                 </a:solidFill>
-                <a:latin typeface="Century Schoolbook"/>
+                <a:latin typeface="Lexend"/>
               </a:rPr>
               <a:t>I can rewrite a power with a negative exponent using a positive exponent, and evaluate it.</a:t>
             </a:r>
@@ -3390,11 +3390,11 @@
           <a:p>
             <a:pPr algn="l"/>
             <a:r>
-              <a:rPr sz="1100" b="0" i="1">
+              <a:rPr sz="1040" b="0" i="0">
                 <a:solidFill>
                   <a:srgbClr val="6B6B6B"/>
                 </a:solidFill>
-                <a:latin typeface="Century Schoolbook"/>
+                <a:latin typeface="Lexend"/>
               </a:rPr>
               <a:t>Grade 7 Accelerated · Unit 3 · Lesson 4 — Negative Exponent Law</a:t>
             </a:r>
@@ -3425,11 +3425,11 @@
           <a:p>
             <a:pPr algn="r"/>
             <a:r>
-              <a:rPr sz="1100" b="0" i="0">
+              <a:rPr sz="1040" b="0" i="0">
                 <a:solidFill>
                   <a:srgbClr val="6B6B6B"/>
                 </a:solidFill>
-                <a:latin typeface="Century Schoolbook"/>
+                <a:latin typeface="Lexend"/>
               </a:rPr>
               <a:t>1</a:t>
             </a:r>
@@ -3478,11 +3478,11 @@
           <a:p>
             <a:pPr algn="l"/>
             <a:r>
-              <a:rPr sz="3600" b="1" i="0">
+              <a:rPr sz="3420" b="1" i="0">
                 <a:solidFill>
                   <a:srgbClr val="1A1A1A"/>
                 </a:solidFill>
-                <a:latin typeface="Century Schoolbook"/>
+                <a:latin typeface="Lexend"/>
               </a:rPr>
               <a:t>Your Turn</a:t>
             </a:r>
@@ -3618,11 +3618,11 @@
           <a:p>
             <a:pPr algn="l"/>
             <a:r>
-              <a:rPr sz="1100" b="0" i="1">
+              <a:rPr sz="1040" b="0" i="0">
                 <a:solidFill>
                   <a:srgbClr val="6B6B6B"/>
                 </a:solidFill>
-                <a:latin typeface="Century Schoolbook"/>
+                <a:latin typeface="Lexend"/>
               </a:rPr>
               <a:t>Grade 7 Accelerated · Unit 3 · Lesson 4 — Negative Exponent Law</a:t>
             </a:r>
@@ -3653,11 +3653,11 @@
           <a:p>
             <a:pPr algn="r"/>
             <a:r>
-              <a:rPr sz="1100" b="0" i="0">
+              <a:rPr sz="1040" b="0" i="0">
                 <a:solidFill>
                   <a:srgbClr val="6B6B6B"/>
                 </a:solidFill>
-                <a:latin typeface="Century Schoolbook"/>
+                <a:latin typeface="Lexend"/>
               </a:rPr>
               <a:t>10</a:t>
             </a:r>
@@ -3666,7 +3666,7 @@
       </p:sp>
       <p:pic>
         <p:nvPicPr>
-          <p:cNvPr id="8" name="Picture 7" descr="395fcf61f0d867ea.png"/>
+          <p:cNvPr id="8" name="Picture 7" descr="a614b6a36d8c6fb1.png"/>
           <p:cNvPicPr>
             <a:picLocks noChangeAspect="1"/>
           </p:cNvPicPr>
@@ -3680,8 +3680,8 @@
         </p:blipFill>
         <p:spPr>
           <a:xfrm>
-            <a:off x="5728716" y="2194560"/>
-            <a:ext cx="704088" cy="1014984"/>
+            <a:off x="5753099" y="1600200"/>
+            <a:ext cx="655320" cy="990599"/>
           </a:xfrm>
           <a:prstGeom prst="rect">
             <a:avLst/>
@@ -3696,7 +3696,7 @@
         </p:nvSpPr>
         <p:spPr>
           <a:xfrm>
-            <a:off x="777240" y="3712463"/>
+            <a:off x="777240" y="3093720"/>
             <a:ext cx="10607040" cy="429370"/>
           </a:xfrm>
           <a:prstGeom prst="rect">
@@ -3712,55 +3712,20 @@
           <a:p>
             <a:pPr algn="ctr"/>
             <a:r>
-              <a:rPr sz="2400" b="1" i="0">
+              <a:rPr sz="2280" b="1" i="0">
                 <a:solidFill>
                   <a:srgbClr val="1A1A1A"/>
                 </a:solidFill>
-                <a:latin typeface="Century Schoolbook"/>
+                <a:latin typeface="Lexend"/>
               </a:rPr>
               <a:t>Rewrite with positive exponents, then find the value.</a:t>
-            </a:r>
-          </a:p>
-        </p:txBody>
-      </p:sp>
-      <p:sp>
-        <p:nvSpPr>
-          <p:cNvPr id="10" name="TextBox 9"/>
-          <p:cNvSpPr txBox="1"/>
-          <p:nvPr/>
-        </p:nvSpPr>
-        <p:spPr>
-          <a:xfrm>
-            <a:off x="4991100" y="4645152"/>
-            <a:ext cx="1920240" cy="548640"/>
-          </a:xfrm>
-          <a:prstGeom prst="rect">
-            <a:avLst/>
-          </a:prstGeom>
-          <a:noFill/>
-        </p:spPr>
-        <p:txBody>
-          <a:bodyPr wrap="square" lIns="45720" rIns="45720" tIns="18288" bIns="18288" anchor="ctr">
-            <a:spAutoFit/>
-          </a:bodyPr>
-          <a:lstStyle/>
-          <a:p>
-            <a:pPr algn="l"/>
-            <a:r>
-              <a:rPr sz="3200" b="1" i="0">
-                <a:solidFill>
-                  <a:srgbClr val="9E1B32"/>
-                </a:solidFill>
-                <a:latin typeface="Century Schoolbook"/>
-              </a:rPr>
-              <a:t>Answer:</a:t>
             </a:r>
           </a:p>
         </p:txBody>
       </p:sp>
       <p:pic>
         <p:nvPicPr>
-          <p:cNvPr id="11" name="Picture 10" descr="f8b652a33b6da231.png"/>
+          <p:cNvPr id="10" name="Picture 9" descr="a77b1d7cf427ed1e.png"/>
           <p:cNvPicPr>
             <a:picLocks noChangeAspect="1"/>
           </p:cNvPicPr>
@@ -3774,8 +3739,150 @@
         </p:blipFill>
         <p:spPr>
           <a:xfrm>
-            <a:off x="6911340" y="4480560"/>
-            <a:ext cx="259080" cy="877824"/>
+            <a:off x="4091473" y="3705970"/>
+            <a:ext cx="1124712" cy="664464"/>
+          </a:xfrm>
+          <a:prstGeom prst="rect">
+            <a:avLst/>
+          </a:prstGeom>
+        </p:spPr>
+      </p:pic>
+      <p:sp>
+        <p:nvSpPr>
+          <p:cNvPr id="11" name="TextBox 10"/>
+          <p:cNvSpPr txBox="1"/>
+          <p:nvPr/>
+        </p:nvSpPr>
+        <p:spPr>
+          <a:xfrm>
+            <a:off x="5216185" y="3809602"/>
+            <a:ext cx="1939461" cy="457200"/>
+          </a:xfrm>
+          <a:prstGeom prst="rect">
+            <a:avLst/>
+          </a:prstGeom>
+          <a:noFill/>
+        </p:spPr>
+        <p:txBody>
+          <a:bodyPr wrap="none" lIns="45720" rIns="45720" tIns="18288" bIns="18288" anchor="ctr">
+            <a:noAutofit/>
+          </a:bodyPr>
+          <a:lstStyle/>
+          <a:p>
+            <a:pPr algn="l"/>
+            <a:r>
+              <a:rPr sz="2750" b="0" i="0">
+                <a:solidFill>
+                  <a:srgbClr val="1A1A1A"/>
+                </a:solidFill>
+                <a:latin typeface="Lexend"/>
+              </a:rPr>
+              <a:t>     and     </a:t>
+            </a:r>
+          </a:p>
+        </p:txBody>
+      </p:sp>
+      <p:pic>
+        <p:nvPicPr>
+          <p:cNvPr id="12" name="Picture 11" descr="9dc9678259e96ae2.png"/>
+          <p:cNvPicPr>
+            <a:picLocks noChangeAspect="1"/>
+          </p:cNvPicPr>
+          <p:nvPr/>
+        </p:nvPicPr>
+        <p:blipFill>
+          <a:blip r:embed="rId4"/>
+          <a:stretch>
+            <a:fillRect/>
+          </a:stretch>
+        </p:blipFill>
+        <p:spPr>
+          <a:xfrm>
+            <a:off x="7018486" y="3705970"/>
+            <a:ext cx="1161288" cy="664464"/>
+          </a:xfrm>
+          <a:prstGeom prst="rect">
+            <a:avLst/>
+          </a:prstGeom>
+        </p:spPr>
+      </p:pic>
+      <p:pic>
+        <p:nvPicPr>
+          <p:cNvPr id="13" name="Picture 12" descr="c675e00ae2c4c275.png"/>
+          <p:cNvPicPr>
+            <a:picLocks noChangeAspect="1"/>
+          </p:cNvPicPr>
+          <p:nvPr/>
+        </p:nvPicPr>
+        <p:blipFill>
+          <a:blip r:embed="rId5"/>
+          <a:stretch>
+            <a:fillRect/>
+          </a:stretch>
+        </p:blipFill>
+        <p:spPr>
+          <a:xfrm>
+            <a:off x="4091473" y="4498450"/>
+            <a:ext cx="1749552" cy="722376"/>
+          </a:xfrm>
+          <a:prstGeom prst="rect">
+            <a:avLst/>
+          </a:prstGeom>
+        </p:spPr>
+      </p:pic>
+      <p:sp>
+        <p:nvSpPr>
+          <p:cNvPr id="14" name="TextBox 13"/>
+          <p:cNvSpPr txBox="1"/>
+          <p:nvPr/>
+        </p:nvSpPr>
+        <p:spPr>
+          <a:xfrm>
+            <a:off x="4981956" y="5501242"/>
+            <a:ext cx="1920240" cy="548640"/>
+          </a:xfrm>
+          <a:prstGeom prst="rect">
+            <a:avLst/>
+          </a:prstGeom>
+          <a:noFill/>
+        </p:spPr>
+        <p:txBody>
+          <a:bodyPr wrap="square" lIns="45720" rIns="45720" tIns="18288" bIns="18288" anchor="ctr">
+            <a:spAutoFit/>
+          </a:bodyPr>
+          <a:lstStyle/>
+          <a:p>
+            <a:pPr algn="l"/>
+            <a:r>
+              <a:rPr sz="3040" b="1" i="0">
+                <a:solidFill>
+                  <a:srgbClr val="9E1B32"/>
+                </a:solidFill>
+                <a:latin typeface="Lexend"/>
+              </a:rPr>
+              <a:t>Answer:</a:t>
+            </a:r>
+          </a:p>
+        </p:txBody>
+      </p:sp>
+      <p:pic>
+        <p:nvPicPr>
+          <p:cNvPr id="15" name="Picture 14" descr="7cc84f7ce49a4b30.png"/>
+          <p:cNvPicPr>
+            <a:picLocks noChangeAspect="1"/>
+          </p:cNvPicPr>
+          <p:nvPr/>
+        </p:nvPicPr>
+        <p:blipFill>
+          <a:blip r:embed="rId6"/>
+          <a:stretch>
+            <a:fillRect/>
+          </a:stretch>
+        </p:blipFill>
+        <p:spPr>
+          <a:xfrm>
+            <a:off x="6902196" y="5357986"/>
+            <a:ext cx="277368" cy="835152"/>
           </a:xfrm>
           <a:prstGeom prst="rect">
             <a:avLst/>
@@ -3824,11 +3931,11 @@
           <a:p>
             <a:pPr algn="l"/>
             <a:r>
-              <a:rPr sz="3600" b="1" i="0">
+              <a:rPr sz="3420" b="1" i="0">
                 <a:solidFill>
                   <a:srgbClr val="1A1A1A"/>
                 </a:solidFill>
-                <a:latin typeface="Century Schoolbook"/>
+                <a:latin typeface="Lexend"/>
               </a:rPr>
               <a:t>Example 2</a:t>
             </a:r>
@@ -3964,11 +4071,11 @@
           <a:p>
             <a:pPr algn="l"/>
             <a:r>
-              <a:rPr sz="1100" b="0" i="1">
+              <a:rPr sz="1040" b="0" i="0">
                 <a:solidFill>
                   <a:srgbClr val="6B6B6B"/>
                 </a:solidFill>
-                <a:latin typeface="Century Schoolbook"/>
+                <a:latin typeface="Lexend"/>
               </a:rPr>
               <a:t>Grade 7 Accelerated · Unit 3 · Lesson 4 — Negative Exponent Law</a:t>
             </a:r>
@@ -3999,11 +4106,11 @@
           <a:p>
             <a:pPr algn="r"/>
             <a:r>
-              <a:rPr sz="1100" b="0" i="0">
+              <a:rPr sz="1040" b="0" i="0">
                 <a:solidFill>
                   <a:srgbClr val="6B6B6B"/>
                 </a:solidFill>
-                <a:latin typeface="Century Schoolbook"/>
+                <a:latin typeface="Lexend"/>
               </a:rPr>
               <a:t>11</a:t>
             </a:r>
@@ -4012,7 +4119,7 @@
       </p:sp>
       <p:pic>
         <p:nvPicPr>
-          <p:cNvPr id="8" name="Picture 7" descr="4ffd0e25f89e0e87.png"/>
+          <p:cNvPr id="8" name="Picture 7" descr="1d7b994a7331cb73.png"/>
           <p:cNvPicPr>
             <a:picLocks noChangeAspect="1"/>
           </p:cNvPicPr>
@@ -4026,8 +4133,8 @@
         </p:blipFill>
         <p:spPr>
           <a:xfrm>
-            <a:off x="5795772" y="2103120"/>
-            <a:ext cx="569976" cy="807720"/>
+            <a:off x="5804915" y="2103120"/>
+            <a:ext cx="551688" cy="792480"/>
           </a:xfrm>
           <a:prstGeom prst="rect">
             <a:avLst/>
@@ -4042,7 +4149,7 @@
         </p:nvSpPr>
         <p:spPr>
           <a:xfrm>
-            <a:off x="777240" y="3413760"/>
+            <a:off x="777240" y="3398520"/>
             <a:ext cx="10607040" cy="429370"/>
           </a:xfrm>
           <a:prstGeom prst="rect">
@@ -4058,11 +4165,11 @@
           <a:p>
             <a:pPr algn="ctr"/>
             <a:r>
-              <a:rPr sz="2400" b="1" i="0">
+              <a:rPr sz="2280" b="1" i="0">
                 <a:solidFill>
                   <a:srgbClr val="1A1A1A"/>
                 </a:solidFill>
-                <a:latin typeface="Century Schoolbook"/>
+                <a:latin typeface="Lexend"/>
               </a:rPr>
               <a:t>Find the value.</a:t>
             </a:r>
@@ -4111,11 +4218,11 @@
           <a:p>
             <a:pPr algn="l"/>
             <a:r>
-              <a:rPr sz="3600" b="1" i="0">
+              <a:rPr sz="3420" b="1" i="0">
                 <a:solidFill>
                   <a:srgbClr val="1A1A1A"/>
                 </a:solidFill>
-                <a:latin typeface="Century Schoolbook"/>
+                <a:latin typeface="Lexend"/>
               </a:rPr>
               <a:t>Example 2</a:t>
             </a:r>
@@ -4251,11 +4358,11 @@
           <a:p>
             <a:pPr algn="l"/>
             <a:r>
-              <a:rPr sz="1100" b="0" i="1">
+              <a:rPr sz="1040" b="0" i="0">
                 <a:solidFill>
                   <a:srgbClr val="6B6B6B"/>
                 </a:solidFill>
-                <a:latin typeface="Century Schoolbook"/>
+                <a:latin typeface="Lexend"/>
               </a:rPr>
               <a:t>Grade 7 Accelerated · Unit 3 · Lesson 4 — Negative Exponent Law</a:t>
             </a:r>
@@ -4286,11 +4393,11 @@
           <a:p>
             <a:pPr algn="r"/>
             <a:r>
-              <a:rPr sz="1100" b="0" i="0">
+              <a:rPr sz="1040" b="0" i="0">
                 <a:solidFill>
                   <a:srgbClr val="6B6B6B"/>
                 </a:solidFill>
-                <a:latin typeface="Century Schoolbook"/>
+                <a:latin typeface="Lexend"/>
               </a:rPr>
               <a:t>12</a:t>
             </a:r>
@@ -4299,7 +4406,7 @@
       </p:sp>
       <p:pic>
         <p:nvPicPr>
-          <p:cNvPr id="8" name="Picture 7" descr="8b0ea9280595c69a.png"/>
+          <p:cNvPr id="8" name="Picture 7" descr="a40b57a8a09e72b0.png"/>
           <p:cNvPicPr>
             <a:picLocks noChangeAspect="1"/>
           </p:cNvPicPr>
@@ -4314,7 +4421,7 @@
         <p:spPr>
           <a:xfrm>
             <a:off x="1828800" y="1920240"/>
-            <a:ext cx="2929128" cy="804672"/>
+            <a:ext cx="2855976" cy="789432"/>
           </a:xfrm>
           <a:prstGeom prst="rect">
             <a:avLst/>
@@ -4323,7 +4430,7 @@
       </p:pic>
       <p:pic>
         <p:nvPicPr>
-          <p:cNvPr id="9" name="Picture 8" descr="a0522eb547e4bac4.png"/>
+          <p:cNvPr id="9" name="Picture 8" descr="cf7273435b048912.png"/>
           <p:cNvPicPr>
             <a:picLocks noChangeAspect="1"/>
           </p:cNvPicPr>
@@ -4337,8 +4444,8 @@
         </p:blipFill>
         <p:spPr>
           <a:xfrm>
-            <a:off x="1828800" y="2999232"/>
-            <a:ext cx="2368296" cy="804672"/>
+            <a:off x="1828800" y="2983992"/>
+            <a:ext cx="2286000" cy="789432"/>
           </a:xfrm>
           <a:prstGeom prst="rect">
             <a:avLst/>
@@ -4347,7 +4454,7 @@
       </p:pic>
       <p:pic>
         <p:nvPicPr>
-          <p:cNvPr id="10" name="Picture 9" descr="f5e46e308b616f81.png"/>
+          <p:cNvPr id="10" name="Picture 9" descr="1b79637c342989aa.png"/>
           <p:cNvPicPr>
             <a:picLocks noChangeAspect="1"/>
           </p:cNvPicPr>
@@ -4361,8 +4468,8 @@
         </p:blipFill>
         <p:spPr>
           <a:xfrm>
-            <a:off x="1828800" y="4078224"/>
-            <a:ext cx="1530096" cy="347472"/>
+            <a:off x="1828800" y="4047744"/>
+            <a:ext cx="1584960" cy="338328"/>
           </a:xfrm>
           <a:prstGeom prst="rect">
             <a:avLst/>
@@ -4377,7 +4484,7 @@
         </p:nvSpPr>
         <p:spPr>
           <a:xfrm>
-            <a:off x="777240" y="4882896"/>
+            <a:off x="777240" y="4843272"/>
             <a:ext cx="10607040" cy="548640"/>
           </a:xfrm>
           <a:prstGeom prst="rect">
@@ -4393,11 +4500,11 @@
           <a:p>
             <a:pPr algn="ctr"/>
             <a:r>
-              <a:rPr sz="3200" b="1" i="0">
+              <a:rPr sz="3040" b="1" i="0">
                 <a:solidFill>
                   <a:srgbClr val="9E1B32"/>
                 </a:solidFill>
-                <a:latin typeface="Century Schoolbook"/>
+                <a:latin typeface="Lexend"/>
               </a:rPr>
               <a:t>Answer:   2,401</a:t>
             </a:r>
@@ -4446,11 +4553,11 @@
           <a:p>
             <a:pPr algn="l"/>
             <a:r>
-              <a:rPr sz="3600" b="1" i="0">
+              <a:rPr sz="3420" b="1" i="0">
                 <a:solidFill>
                   <a:srgbClr val="1A1A1A"/>
                 </a:solidFill>
-                <a:latin typeface="Century Schoolbook"/>
+                <a:latin typeface="Lexend"/>
               </a:rPr>
               <a:t>Your Turn</a:t>
             </a:r>
@@ -4586,11 +4693,11 @@
           <a:p>
             <a:pPr algn="l"/>
             <a:r>
-              <a:rPr sz="1100" b="0" i="1">
+              <a:rPr sz="1040" b="0" i="0">
                 <a:solidFill>
                   <a:srgbClr val="6B6B6B"/>
                 </a:solidFill>
-                <a:latin typeface="Century Schoolbook"/>
+                <a:latin typeface="Lexend"/>
               </a:rPr>
               <a:t>Grade 7 Accelerated · Unit 3 · Lesson 4 — Negative Exponent Law</a:t>
             </a:r>
@@ -4621,11 +4728,11 @@
           <a:p>
             <a:pPr algn="r"/>
             <a:r>
-              <a:rPr sz="1100" b="0" i="0">
+              <a:rPr sz="1040" b="0" i="0">
                 <a:solidFill>
                   <a:srgbClr val="6B6B6B"/>
                 </a:solidFill>
-                <a:latin typeface="Century Schoolbook"/>
+                <a:latin typeface="Lexend"/>
               </a:rPr>
               <a:t>13</a:t>
             </a:r>
@@ -4634,7 +4741,7 @@
       </p:sp>
       <p:pic>
         <p:nvPicPr>
-          <p:cNvPr id="8" name="Picture 7" descr="3d867da857833487.png"/>
+          <p:cNvPr id="8" name="Picture 7" descr="d2b1010d50fd96f9.png"/>
           <p:cNvPicPr>
             <a:picLocks noChangeAspect="1"/>
           </p:cNvPicPr>
@@ -4648,8 +4755,8 @@
         </p:blipFill>
         <p:spPr>
           <a:xfrm>
-            <a:off x="5382767" y="2194560"/>
-            <a:ext cx="1395984" cy="1188720"/>
+            <a:off x="5410199" y="1600200"/>
+            <a:ext cx="1341120" cy="1164336"/>
           </a:xfrm>
           <a:prstGeom prst="rect">
             <a:avLst/>
@@ -4664,7 +4771,7 @@
         </p:nvSpPr>
         <p:spPr>
           <a:xfrm>
-            <a:off x="777240" y="3886200"/>
+            <a:off x="777240" y="3267456"/>
             <a:ext cx="10607040" cy="429370"/>
           </a:xfrm>
           <a:prstGeom prst="rect">
@@ -4680,11 +4787,11 @@
           <a:p>
             <a:pPr algn="ctr"/>
             <a:r>
-              <a:rPr sz="2400" b="1" i="0">
+              <a:rPr sz="2280" b="1" i="0">
                 <a:solidFill>
                   <a:srgbClr val="1A1A1A"/>
                 </a:solidFill>
-                <a:latin typeface="Century Schoolbook"/>
+                <a:latin typeface="Lexend"/>
               </a:rPr>
               <a:t>Find the value.</a:t>
             </a:r>
@@ -4733,11 +4840,11 @@
           <a:p>
             <a:pPr algn="l"/>
             <a:r>
-              <a:rPr sz="3600" b="1" i="0">
+              <a:rPr sz="3420" b="1" i="0">
                 <a:solidFill>
                   <a:srgbClr val="1A1A1A"/>
                 </a:solidFill>
-                <a:latin typeface="Century Schoolbook"/>
+                <a:latin typeface="Lexend"/>
               </a:rPr>
               <a:t>Your Turn</a:t>
             </a:r>
@@ -4873,11 +4980,11 @@
           <a:p>
             <a:pPr algn="l"/>
             <a:r>
-              <a:rPr sz="1100" b="0" i="1">
+              <a:rPr sz="1040" b="0" i="0">
                 <a:solidFill>
                   <a:srgbClr val="6B6B6B"/>
                 </a:solidFill>
-                <a:latin typeface="Century Schoolbook"/>
+                <a:latin typeface="Lexend"/>
               </a:rPr>
               <a:t>Grade 7 Accelerated · Unit 3 · Lesson 4 — Negative Exponent Law</a:t>
             </a:r>
@@ -4908,11 +5015,11 @@
           <a:p>
             <a:pPr algn="r"/>
             <a:r>
-              <a:rPr sz="1100" b="0" i="0">
+              <a:rPr sz="1040" b="0" i="0">
                 <a:solidFill>
                   <a:srgbClr val="6B6B6B"/>
                 </a:solidFill>
-                <a:latin typeface="Century Schoolbook"/>
+                <a:latin typeface="Lexend"/>
               </a:rPr>
               <a:t>14</a:t>
             </a:r>
@@ -4921,7 +5028,7 @@
       </p:sp>
       <p:pic>
         <p:nvPicPr>
-          <p:cNvPr id="8" name="Picture 7" descr="bd647a6f29dfd2ac.png"/>
+          <p:cNvPr id="8" name="Picture 7" descr="7ac64fd7acb912a6.png"/>
           <p:cNvPicPr>
             <a:picLocks noChangeAspect="1"/>
           </p:cNvPicPr>
@@ -4935,8 +5042,8 @@
         </p:blipFill>
         <p:spPr>
           <a:xfrm>
-            <a:off x="5384291" y="2194560"/>
-            <a:ext cx="1392936" cy="1185672"/>
+            <a:off x="5413248" y="1600200"/>
+            <a:ext cx="1335024" cy="1167384"/>
           </a:xfrm>
           <a:prstGeom prst="rect">
             <a:avLst/>
@@ -4951,7 +5058,7 @@
         </p:nvSpPr>
         <p:spPr>
           <a:xfrm>
-            <a:off x="777240" y="3883151"/>
+            <a:off x="777240" y="3270504"/>
             <a:ext cx="10607040" cy="429370"/>
           </a:xfrm>
           <a:prstGeom prst="rect">
@@ -4967,26 +5074,74 @@
           <a:p>
             <a:pPr algn="ctr"/>
             <a:r>
-              <a:rPr sz="2400" b="1" i="0">
+              <a:rPr sz="2280" b="1" i="0">
                 <a:solidFill>
                   <a:srgbClr val="1A1A1A"/>
                 </a:solidFill>
-                <a:latin typeface="Century Schoolbook"/>
+                <a:latin typeface="Lexend"/>
               </a:rPr>
               <a:t>Find the value.</a:t>
             </a:r>
           </a:p>
         </p:txBody>
       </p:sp>
-      <p:sp>
-        <p:nvSpPr>
-          <p:cNvPr id="10" name="TextBox 9"/>
-          <p:cNvSpPr txBox="1"/>
-          <p:nvPr/>
-        </p:nvSpPr>
-        <p:spPr>
-          <a:xfrm>
-            <a:off x="777240" y="4605130"/>
+      <p:pic>
+        <p:nvPicPr>
+          <p:cNvPr id="10" name="Picture 9" descr="7d3ab70b25bdc114.png"/>
+          <p:cNvPicPr>
+            <a:picLocks noChangeAspect="1"/>
+          </p:cNvPicPr>
+          <p:nvPr/>
+        </p:nvPicPr>
+        <p:blipFill>
+          <a:blip r:embed="rId3"/>
+          <a:stretch>
+            <a:fillRect/>
+          </a:stretch>
+        </p:blipFill>
+        <p:spPr>
+          <a:xfrm>
+            <a:off x="4078223" y="3882754"/>
+            <a:ext cx="4114800" cy="847344"/>
+          </a:xfrm>
+          <a:prstGeom prst="rect">
+            <a:avLst/>
+          </a:prstGeom>
+        </p:spPr>
+      </p:pic>
+      <p:pic>
+        <p:nvPicPr>
+          <p:cNvPr id="11" name="Picture 10" descr="815116ea7185775a.png"/>
+          <p:cNvPicPr>
+            <a:picLocks noChangeAspect="1"/>
+          </p:cNvPicPr>
+          <p:nvPr/>
+        </p:nvPicPr>
+        <p:blipFill>
+          <a:blip r:embed="rId4"/>
+          <a:stretch>
+            <a:fillRect/>
+          </a:stretch>
+        </p:blipFill>
+        <p:spPr>
+          <a:xfrm>
+            <a:off x="4078223" y="4877926"/>
+            <a:ext cx="1520952" cy="371856"/>
+          </a:xfrm>
+          <a:prstGeom prst="rect">
+            <a:avLst/>
+          </a:prstGeom>
+        </p:spPr>
+      </p:pic>
+      <p:sp>
+        <p:nvSpPr>
+          <p:cNvPr id="12" name="TextBox 11"/>
+          <p:cNvSpPr txBox="1"/>
+          <p:nvPr/>
+        </p:nvSpPr>
+        <p:spPr>
+          <a:xfrm>
+            <a:off x="777240" y="5406754"/>
             <a:ext cx="10607040" cy="548640"/>
           </a:xfrm>
           <a:prstGeom prst="rect">
@@ -5002,11 +5157,11 @@
           <a:p>
             <a:pPr algn="ctr"/>
             <a:r>
-              <a:rPr sz="3200" b="1" i="0">
+              <a:rPr sz="3040" b="1" i="0">
                 <a:solidFill>
                   <a:srgbClr val="9E1B32"/>
                 </a:solidFill>
-                <a:latin typeface="Century Schoolbook"/>
+                <a:latin typeface="Lexend"/>
               </a:rPr>
               <a:t>Answer:   64</a:t>
             </a:r>
@@ -5055,11 +5210,11 @@
           <a:p>
             <a:pPr algn="l"/>
             <a:r>
-              <a:rPr sz="3400" b="1" i="0">
+              <a:rPr sz="3229" b="1" i="0">
                 <a:solidFill>
                   <a:srgbClr val="1A1A1A"/>
                 </a:solidFill>
-                <a:latin typeface="Century Schoolbook"/>
+                <a:latin typeface="Lexend"/>
               </a:rPr>
               <a:t>Whiteboards   ·   Question 1 of 9</a:t>
             </a:r>
@@ -5195,11 +5350,11 @@
           <a:p>
             <a:pPr algn="l"/>
             <a:r>
-              <a:rPr sz="1100" b="0" i="1">
+              <a:rPr sz="1040" b="0" i="0">
                 <a:solidFill>
                   <a:srgbClr val="6B6B6B"/>
                 </a:solidFill>
-                <a:latin typeface="Century Schoolbook"/>
+                <a:latin typeface="Lexend"/>
               </a:rPr>
               <a:t>Grade 7 Accelerated · Unit 3 · Lesson 4 — Negative Exponent Law</a:t>
             </a:r>
@@ -5230,11 +5385,11 @@
           <a:p>
             <a:pPr algn="r"/>
             <a:r>
-              <a:rPr sz="1100" b="0" i="0">
+              <a:rPr sz="1040" b="0" i="0">
                 <a:solidFill>
                   <a:srgbClr val="6B6B6B"/>
                 </a:solidFill>
-                <a:latin typeface="Century Schoolbook"/>
+                <a:latin typeface="Lexend"/>
               </a:rPr>
               <a:t>15</a:t>
             </a:r>
@@ -5243,7 +5398,7 @@
       </p:sp>
       <p:pic>
         <p:nvPicPr>
-          <p:cNvPr id="8" name="Picture 7" descr="2d36713d8b05952d.png"/>
+          <p:cNvPr id="8" name="Picture 7" descr="9c3ed80bb4c05763.png"/>
           <p:cNvPicPr>
             <a:picLocks noChangeAspect="1"/>
           </p:cNvPicPr>
@@ -5257,8 +5412,8 @@
         </p:blipFill>
         <p:spPr>
           <a:xfrm>
-            <a:off x="5765292" y="2194560"/>
-            <a:ext cx="630936" cy="426720"/>
+            <a:off x="5769864" y="2194560"/>
+            <a:ext cx="621792" cy="414528"/>
           </a:xfrm>
           <a:prstGeom prst="rect">
             <a:avLst/>
@@ -5289,11 +5444,11 @@
           <a:p>
             <a:pPr algn="ctr"/>
             <a:r>
-              <a:rPr sz="2600" b="1" i="0">
+              <a:rPr sz="2470" b="1" i="0">
                 <a:solidFill>
                   <a:srgbClr val="1A1A1A"/>
                 </a:solidFill>
-                <a:latin typeface="Century Schoolbook"/>
+                <a:latin typeface="Lexend"/>
               </a:rPr>
               <a:t>Answer it.</a:t>
             </a:r>
@@ -5342,11 +5497,11 @@
           <a:p>
             <a:pPr algn="l"/>
             <a:r>
-              <a:rPr sz="3400" b="1" i="0">
+              <a:rPr sz="3229" b="1" i="0">
                 <a:solidFill>
                   <a:srgbClr val="1A1A1A"/>
                 </a:solidFill>
-                <a:latin typeface="Century Schoolbook"/>
+                <a:latin typeface="Lexend"/>
               </a:rPr>
               <a:t>Whiteboards   ·   Question 1 of 9</a:t>
             </a:r>
@@ -5482,11 +5637,11 @@
           <a:p>
             <a:pPr algn="l"/>
             <a:r>
-              <a:rPr sz="1100" b="0" i="1">
+              <a:rPr sz="1040" b="0" i="0">
                 <a:solidFill>
                   <a:srgbClr val="6B6B6B"/>
                 </a:solidFill>
-                <a:latin typeface="Century Schoolbook"/>
+                <a:latin typeface="Lexend"/>
               </a:rPr>
               <a:t>Grade 7 Accelerated · Unit 3 · Lesson 4 — Negative Exponent Law</a:t>
             </a:r>
@@ -5517,11 +5672,11 @@
           <a:p>
             <a:pPr algn="r"/>
             <a:r>
-              <a:rPr sz="1100" b="0" i="0">
+              <a:rPr sz="1040" b="0" i="0">
                 <a:solidFill>
                   <a:srgbClr val="6B6B6B"/>
                 </a:solidFill>
-                <a:latin typeface="Century Schoolbook"/>
+                <a:latin typeface="Lexend"/>
               </a:rPr>
               <a:t>16</a:t>
             </a:r>
@@ -5530,7 +5685,7 @@
       </p:sp>
       <p:pic>
         <p:nvPicPr>
-          <p:cNvPr id="8" name="Picture 7" descr="745cde1f9722bfe0.png"/>
+          <p:cNvPr id="8" name="Picture 7" descr="2e28a9bdc4532974.png"/>
           <p:cNvPicPr>
             <a:picLocks noChangeAspect="1"/>
           </p:cNvPicPr>
@@ -5544,52 +5699,17 @@
         </p:blipFill>
         <p:spPr>
           <a:xfrm>
-            <a:off x="5762243" y="2103120"/>
-            <a:ext cx="637032" cy="426720"/>
+            <a:off x="5768339" y="2103120"/>
+            <a:ext cx="624840" cy="414528"/>
           </a:xfrm>
           <a:prstGeom prst="rect">
             <a:avLst/>
           </a:prstGeom>
         </p:spPr>
       </p:pic>
-      <p:sp>
-        <p:nvSpPr>
-          <p:cNvPr id="9" name="TextBox 8"/>
-          <p:cNvSpPr txBox="1"/>
-          <p:nvPr/>
-        </p:nvSpPr>
-        <p:spPr>
-          <a:xfrm>
-            <a:off x="4887468" y="4855464"/>
-            <a:ext cx="1920240" cy="548640"/>
-          </a:xfrm>
-          <a:prstGeom prst="rect">
-            <a:avLst/>
-          </a:prstGeom>
-          <a:noFill/>
-        </p:spPr>
-        <p:txBody>
-          <a:bodyPr wrap="square" lIns="45720" rIns="45720" tIns="18288" bIns="18288" anchor="ctr">
-            <a:spAutoFit/>
-          </a:bodyPr>
-          <a:lstStyle/>
-          <a:p>
-            <a:pPr algn="l"/>
-            <a:r>
-              <a:rPr sz="3200" b="1" i="0">
-                <a:solidFill>
-                  <a:srgbClr val="9E1B32"/>
-                </a:solidFill>
-                <a:latin typeface="Century Schoolbook"/>
-              </a:rPr>
-              <a:t>Answer:</a:t>
-            </a:r>
-          </a:p>
-        </p:txBody>
-      </p:sp>
       <p:pic>
         <p:nvPicPr>
-          <p:cNvPr id="10" name="Picture 9" descr="ae3379378f6437bc.png"/>
+          <p:cNvPr id="9" name="Picture 8" descr="15da0b6dbd5791d1.png"/>
           <p:cNvPicPr>
             <a:picLocks noChangeAspect="1"/>
           </p:cNvPicPr>
@@ -5603,8 +5723,67 @@
         </p:blipFill>
         <p:spPr>
           <a:xfrm>
-            <a:off x="6807708" y="4663440"/>
-            <a:ext cx="466344" cy="932688"/>
+            <a:off x="5564123" y="2819399"/>
+            <a:ext cx="1139952" cy="658368"/>
+          </a:xfrm>
+          <a:prstGeom prst="rect">
+            <a:avLst/>
+          </a:prstGeom>
+        </p:spPr>
+      </p:pic>
+      <p:sp>
+        <p:nvSpPr>
+          <p:cNvPr id="10" name="TextBox 9"/>
+          <p:cNvSpPr txBox="1"/>
+          <p:nvPr/>
+        </p:nvSpPr>
+        <p:spPr>
+          <a:xfrm>
+            <a:off x="4881372" y="4843271"/>
+            <a:ext cx="1920240" cy="548640"/>
+          </a:xfrm>
+          <a:prstGeom prst="rect">
+            <a:avLst/>
+          </a:prstGeom>
+          <a:noFill/>
+        </p:spPr>
+        <p:txBody>
+          <a:bodyPr wrap="square" lIns="45720" rIns="45720" tIns="18288" bIns="18288" anchor="ctr">
+            <a:spAutoFit/>
+          </a:bodyPr>
+          <a:lstStyle/>
+          <a:p>
+            <a:pPr algn="l"/>
+            <a:r>
+              <a:rPr sz="3040" b="1" i="0">
+                <a:solidFill>
+                  <a:srgbClr val="9E1B32"/>
+                </a:solidFill>
+                <a:latin typeface="Lexend"/>
+              </a:rPr>
+              <a:t>Answer:</a:t>
+            </a:r>
+          </a:p>
+        </p:txBody>
+      </p:sp>
+      <p:pic>
+        <p:nvPicPr>
+          <p:cNvPr id="11" name="Picture 10" descr="1abbd0053a87d77e.png"/>
+          <p:cNvPicPr>
+            <a:picLocks noChangeAspect="1"/>
+          </p:cNvPicPr>
+          <p:nvPr/>
+        </p:nvPicPr>
+        <p:blipFill>
+          <a:blip r:embed="rId4"/>
+          <a:stretch>
+            <a:fillRect/>
+          </a:stretch>
+        </p:blipFill>
+        <p:spPr>
+          <a:xfrm>
+            <a:off x="6801611" y="4663440"/>
+            <a:ext cx="478536" cy="908304"/>
           </a:xfrm>
           <a:prstGeom prst="rect">
             <a:avLst/>
@@ -5653,11 +5832,11 @@
           <a:p>
             <a:pPr algn="l"/>
             <a:r>
-              <a:rPr sz="3400" b="1" i="0">
+              <a:rPr sz="3229" b="1" i="0">
                 <a:solidFill>
                   <a:srgbClr val="1A1A1A"/>
                 </a:solidFill>
-                <a:latin typeface="Century Schoolbook"/>
+                <a:latin typeface="Lexend"/>
               </a:rPr>
               <a:t>Whiteboards   ·   Question 2 of 9</a:t>
             </a:r>
@@ -5793,11 +5972,11 @@
           <a:p>
             <a:pPr algn="l"/>
             <a:r>
-              <a:rPr sz="1100" b="0" i="1">
+              <a:rPr sz="1040" b="0" i="0">
                 <a:solidFill>
                   <a:srgbClr val="6B6B6B"/>
                 </a:solidFill>
-                <a:latin typeface="Century Schoolbook"/>
+                <a:latin typeface="Lexend"/>
               </a:rPr>
               <a:t>Grade 7 Accelerated · Unit 3 · Lesson 4 — Negative Exponent Law</a:t>
             </a:r>
@@ -5828,11 +6007,11 @@
           <a:p>
             <a:pPr algn="r"/>
             <a:r>
-              <a:rPr sz="1100" b="0" i="0">
+              <a:rPr sz="1040" b="0" i="0">
                 <a:solidFill>
                   <a:srgbClr val="6B6B6B"/>
                 </a:solidFill>
-                <a:latin typeface="Century Schoolbook"/>
+                <a:latin typeface="Lexend"/>
               </a:rPr>
               <a:t>17</a:t>
             </a:r>
@@ -5863,11 +6042,11 @@
           <a:p>
             <a:pPr algn="l"/>
             <a:r>
-              <a:rPr sz="2400" b="0" i="0">
+              <a:rPr sz="2280" b="0" i="0">
                 <a:solidFill>
                   <a:srgbClr val="1A1A1A"/>
                 </a:solidFill>
-                <a:latin typeface="Century Schoolbook"/>
+                <a:latin typeface="Lexend"/>
               </a:rPr>
               <a:t>A sheet of paper 30 centimeters long is folded in half 7 times.</a:t>
             </a:r>
@@ -5898,11 +6077,11 @@
           <a:p>
             <a:pPr algn="l"/>
             <a:r>
-              <a:rPr sz="2400" b="0" i="0">
+              <a:rPr sz="2280" b="0" i="0">
                 <a:solidFill>
                   <a:srgbClr val="1A1A1A"/>
                 </a:solidFill>
-                <a:latin typeface="Century Schoolbook"/>
+                <a:latin typeface="Lexend"/>
               </a:rPr>
               <a:t>Each fold makes the top layer half as big.</a:t>
             </a:r>
@@ -5918,7 +6097,7 @@
         <p:spPr>
           <a:xfrm>
             <a:off x="1234440" y="2952716"/>
-            <a:ext cx="10058400" cy="858740"/>
+            <a:ext cx="10058400" cy="429370"/>
           </a:xfrm>
           <a:prstGeom prst="rect">
             <a:avLst/>
@@ -5933,11 +6112,11 @@
           <a:p>
             <a:pPr algn="l"/>
             <a:r>
-              <a:rPr sz="2400" b="1" i="0">
+              <a:rPr sz="2280" b="1" i="0">
                 <a:solidFill>
                   <a:srgbClr val="1A1A1A"/>
                 </a:solidFill>
-                <a:latin typeface="Century Schoolbook"/>
+                <a:latin typeface="Lexend"/>
               </a:rPr>
               <a:t>What fraction of the whole sheet is the top layer after 7 folds?</a:t>
             </a:r>
@@ -5968,11 +6147,11 @@
           <a:p>
             <a:pPr algn="ctr"/>
             <a:r>
-              <a:rPr sz="2600" b="1" i="0">
+              <a:rPr sz="2470" b="1" i="0">
                 <a:solidFill>
                   <a:srgbClr val="1A1A1A"/>
                 </a:solidFill>
-                <a:latin typeface="Century Schoolbook"/>
+                <a:latin typeface="Lexend"/>
               </a:rPr>
               <a:t>Answer it.</a:t>
             </a:r>
@@ -6021,11 +6200,11 @@
           <a:p>
             <a:pPr algn="l"/>
             <a:r>
-              <a:rPr sz="3400" b="1" i="0">
+              <a:rPr sz="3229" b="1" i="0">
                 <a:solidFill>
                   <a:srgbClr val="1A1A1A"/>
                 </a:solidFill>
-                <a:latin typeface="Century Schoolbook"/>
+                <a:latin typeface="Lexend"/>
               </a:rPr>
               <a:t>Whiteboards   ·   Question 2 of 9</a:t>
             </a:r>
@@ -6161,11 +6340,11 @@
           <a:p>
             <a:pPr algn="l"/>
             <a:r>
-              <a:rPr sz="1100" b="0" i="1">
+              <a:rPr sz="1040" b="0" i="0">
                 <a:solidFill>
                   <a:srgbClr val="6B6B6B"/>
                 </a:solidFill>
-                <a:latin typeface="Century Schoolbook"/>
+                <a:latin typeface="Lexend"/>
               </a:rPr>
               <a:t>Grade 7 Accelerated · Unit 3 · Lesson 4 — Negative Exponent Law</a:t>
             </a:r>
@@ -6196,11 +6375,11 @@
           <a:p>
             <a:pPr algn="r"/>
             <a:r>
-              <a:rPr sz="1100" b="0" i="0">
+              <a:rPr sz="1040" b="0" i="0">
                 <a:solidFill>
                   <a:srgbClr val="6B6B6B"/>
                 </a:solidFill>
-                <a:latin typeface="Century Schoolbook"/>
+                <a:latin typeface="Lexend"/>
               </a:rPr>
               <a:t>18</a:t>
             </a:r>
@@ -6231,11 +6410,11 @@
           <a:p>
             <a:pPr algn="l"/>
             <a:r>
-              <a:rPr sz="2400" b="0" i="0">
+              <a:rPr sz="2280" b="0" i="0">
                 <a:solidFill>
                   <a:srgbClr val="1A1A1A"/>
                 </a:solidFill>
-                <a:latin typeface="Century Schoolbook"/>
+                <a:latin typeface="Lexend"/>
               </a:rPr>
               <a:t>A sheet of paper 30 centimeters long is folded in half 7 times.</a:t>
             </a:r>
@@ -6266,11 +6445,11 @@
           <a:p>
             <a:pPr algn="l"/>
             <a:r>
-              <a:rPr sz="2400" b="0" i="0">
+              <a:rPr sz="2280" b="0" i="0">
                 <a:solidFill>
                   <a:srgbClr val="1A1A1A"/>
                 </a:solidFill>
-                <a:latin typeface="Century Schoolbook"/>
+                <a:latin typeface="Lexend"/>
               </a:rPr>
               <a:t>Each fold makes the top layer half as big.</a:t>
             </a:r>
@@ -6286,7 +6465,7 @@
         <p:spPr>
           <a:xfrm>
             <a:off x="1234440" y="2952716"/>
-            <a:ext cx="10058400" cy="858740"/>
+            <a:ext cx="10058400" cy="429370"/>
           </a:xfrm>
           <a:prstGeom prst="rect">
             <a:avLst/>
@@ -6301,11 +6480,11 @@
           <a:p>
             <a:pPr algn="l"/>
             <a:r>
-              <a:rPr sz="2400" b="1" i="0">
+              <a:rPr sz="2280" b="1" i="0">
                 <a:solidFill>
                   <a:srgbClr val="1A1A1A"/>
                 </a:solidFill>
-                <a:latin typeface="Century Schoolbook"/>
+                <a:latin typeface="Lexend"/>
               </a:rPr>
               <a:t>What fraction of the whole sheet is the top layer after 7 folds?</a:t>
             </a:r>
@@ -6320,36 +6499,36 @@
         </p:nvSpPr>
         <p:spPr>
           <a:xfrm>
-            <a:off x="4738116" y="4818888"/>
-            <a:ext cx="1920240" cy="548640"/>
-          </a:xfrm>
-          <a:prstGeom prst="rect">
-            <a:avLst/>
-          </a:prstGeom>
-          <a:noFill/>
-        </p:spPr>
-        <p:txBody>
-          <a:bodyPr wrap="square" lIns="45720" rIns="45720" tIns="18288" bIns="18288" anchor="ctr">
-            <a:spAutoFit/>
+            <a:off x="3565587" y="3712795"/>
+            <a:ext cx="3771521" cy="457200"/>
+          </a:xfrm>
+          <a:prstGeom prst="rect">
+            <a:avLst/>
+          </a:prstGeom>
+          <a:noFill/>
+        </p:spPr>
+        <p:txBody>
+          <a:bodyPr wrap="none" lIns="45720" rIns="45720" tIns="18288" bIns="18288" anchor="ctr">
+            <a:noAutofit/>
           </a:bodyPr>
           <a:lstStyle/>
           <a:p>
             <a:pPr algn="l"/>
             <a:r>
-              <a:rPr sz="3200" b="1" i="0">
-                <a:solidFill>
-                  <a:srgbClr val="9E1B32"/>
-                </a:solidFill>
-                <a:latin typeface="Century Schoolbook"/>
-              </a:rPr>
-              <a:t>Answer:</a:t>
+              <a:rPr sz="2750" b="0" i="0">
+                <a:solidFill>
+                  <a:srgbClr val="1A1A1A"/>
+                </a:solidFill>
+                <a:latin typeface="Lexend"/>
+              </a:rPr>
+              <a:t>Each fold halves it:  </a:t>
             </a:r>
           </a:p>
         </p:txBody>
       </p:sp>
       <p:pic>
         <p:nvPicPr>
-          <p:cNvPr id="12" name="Picture 11" descr="b025bbe2352d111b.png"/>
+          <p:cNvPr id="12" name="Picture 11" descr="55ec7b58e31aa342.png"/>
           <p:cNvPicPr>
             <a:picLocks noChangeAspect="1"/>
           </p:cNvPicPr>
@@ -6363,8 +6542,150 @@
         </p:blipFill>
         <p:spPr>
           <a:xfrm>
-            <a:off x="6658356" y="4663440"/>
-            <a:ext cx="765048" cy="859536"/>
+            <a:off x="7199948" y="3610687"/>
+            <a:ext cx="1392936" cy="661416"/>
+          </a:xfrm>
+          <a:prstGeom prst="rect">
+            <a:avLst/>
+          </a:prstGeom>
+        </p:spPr>
+      </p:pic>
+      <p:pic>
+        <p:nvPicPr>
+          <p:cNvPr id="13" name="Picture 12" descr="93c08fb8bb36cdbf.png"/>
+          <p:cNvPicPr>
+            <a:picLocks noChangeAspect="1"/>
+          </p:cNvPicPr>
+          <p:nvPr/>
+        </p:nvPicPr>
+        <p:blipFill>
+          <a:blip r:embed="rId3"/>
+          <a:stretch>
+            <a:fillRect/>
+          </a:stretch>
+        </p:blipFill>
+        <p:spPr>
+          <a:xfrm>
+            <a:off x="3620451" y="4578427"/>
+            <a:ext cx="1197864" cy="301752"/>
+          </a:xfrm>
+          <a:prstGeom prst="rect">
+            <a:avLst/>
+          </a:prstGeom>
+        </p:spPr>
+      </p:pic>
+      <p:sp>
+        <p:nvSpPr>
+          <p:cNvPr id="14" name="TextBox 13"/>
+          <p:cNvSpPr txBox="1"/>
+          <p:nvPr/>
+        </p:nvSpPr>
+        <p:spPr>
+          <a:xfrm>
+            <a:off x="4818315" y="4500703"/>
+            <a:ext cx="1338233" cy="457200"/>
+          </a:xfrm>
+          <a:prstGeom prst="rect">
+            <a:avLst/>
+          </a:prstGeom>
+          <a:noFill/>
+        </p:spPr>
+        <p:txBody>
+          <a:bodyPr wrap="none" lIns="45720" rIns="45720" tIns="18288" bIns="18288" anchor="ctr">
+            <a:noAutofit/>
+          </a:bodyPr>
+          <a:lstStyle/>
+          <a:p>
+            <a:pPr algn="l"/>
+            <a:r>
+              <a:rPr sz="2750" b="0" i="0">
+                <a:solidFill>
+                  <a:srgbClr val="1A1A1A"/>
+                </a:solidFill>
+                <a:latin typeface="Lexend"/>
+              </a:rPr>
+              <a:t>,   so   </a:t>
+            </a:r>
+          </a:p>
+        </p:txBody>
+      </p:sp>
+      <p:pic>
+        <p:nvPicPr>
+          <p:cNvPr id="15" name="Picture 14" descr="d5cb71527a492aa6.png"/>
+          <p:cNvPicPr>
+            <a:picLocks noChangeAspect="1"/>
+          </p:cNvPicPr>
+          <p:nvPr/>
+        </p:nvPicPr>
+        <p:blipFill>
+          <a:blip r:embed="rId4"/>
+          <a:stretch>
+            <a:fillRect/>
+          </a:stretch>
+        </p:blipFill>
+        <p:spPr>
+          <a:xfrm>
+            <a:off x="6019388" y="4400119"/>
+            <a:ext cx="1277112" cy="658368"/>
+          </a:xfrm>
+          <a:prstGeom prst="rect">
+            <a:avLst/>
+          </a:prstGeom>
+        </p:spPr>
+      </p:pic>
+      <p:sp>
+        <p:nvSpPr>
+          <p:cNvPr id="16" name="TextBox 15"/>
+          <p:cNvSpPr txBox="1"/>
+          <p:nvPr/>
+        </p:nvSpPr>
+        <p:spPr>
+          <a:xfrm>
+            <a:off x="4725924" y="5340427"/>
+            <a:ext cx="1920240" cy="548640"/>
+          </a:xfrm>
+          <a:prstGeom prst="rect">
+            <a:avLst/>
+          </a:prstGeom>
+          <a:noFill/>
+        </p:spPr>
+        <p:txBody>
+          <a:bodyPr wrap="square" lIns="45720" rIns="45720" tIns="18288" bIns="18288" anchor="ctr">
+            <a:spAutoFit/>
+          </a:bodyPr>
+          <a:lstStyle/>
+          <a:p>
+            <a:pPr algn="l"/>
+            <a:r>
+              <a:rPr sz="3040" b="1" i="0">
+                <a:solidFill>
+                  <a:srgbClr val="9E1B32"/>
+                </a:solidFill>
+                <a:latin typeface="Lexend"/>
+              </a:rPr>
+              <a:t>Answer:</a:t>
+            </a:r>
+          </a:p>
+        </p:txBody>
+      </p:sp>
+      <p:pic>
+        <p:nvPicPr>
+          <p:cNvPr id="17" name="Picture 16" descr="e1d9433f34f95708.png"/>
+          <p:cNvPicPr>
+            <a:picLocks noChangeAspect="1"/>
+          </p:cNvPicPr>
+          <p:nvPr/>
+        </p:nvPicPr>
+        <p:blipFill>
+          <a:blip r:embed="rId5"/>
+          <a:stretch>
+            <a:fillRect/>
+          </a:stretch>
+        </p:blipFill>
+        <p:spPr>
+          <a:xfrm>
+            <a:off x="6646163" y="5195647"/>
+            <a:ext cx="789432" cy="838200"/>
           </a:xfrm>
           <a:prstGeom prst="rect">
             <a:avLst/>
@@ -6413,11 +6734,11 @@
           <a:p>
             <a:pPr algn="l"/>
             <a:r>
-              <a:rPr sz="3400" b="1" i="0">
+              <a:rPr sz="3229" b="1" i="0">
                 <a:solidFill>
                   <a:srgbClr val="1A1A1A"/>
                 </a:solidFill>
-                <a:latin typeface="Century Schoolbook"/>
+                <a:latin typeface="Lexend"/>
               </a:rPr>
               <a:t>Whiteboards   ·   Question 3 of 9</a:t>
             </a:r>
@@ -6553,11 +6874,11 @@
           <a:p>
             <a:pPr algn="l"/>
             <a:r>
-              <a:rPr sz="1100" b="0" i="1">
+              <a:rPr sz="1040" b="0" i="0">
                 <a:solidFill>
                   <a:srgbClr val="6B6B6B"/>
                 </a:solidFill>
-                <a:latin typeface="Century Schoolbook"/>
+                <a:latin typeface="Lexend"/>
               </a:rPr>
               <a:t>Grade 7 Accelerated · Unit 3 · Lesson 4 — Negative Exponent Law</a:t>
             </a:r>
@@ -6588,11 +6909,11 @@
           <a:p>
             <a:pPr algn="r"/>
             <a:r>
-              <a:rPr sz="1100" b="0" i="0">
+              <a:rPr sz="1040" b="0" i="0">
                 <a:solidFill>
                   <a:srgbClr val="6B6B6B"/>
                 </a:solidFill>
-                <a:latin typeface="Century Schoolbook"/>
+                <a:latin typeface="Lexend"/>
               </a:rPr>
               <a:t>19</a:t>
             </a:r>
@@ -6601,7 +6922,7 @@
       </p:sp>
       <p:pic>
         <p:nvPicPr>
-          <p:cNvPr id="8" name="Picture 7" descr="229e5926a19b9fe2.png"/>
+          <p:cNvPr id="8" name="Picture 7" descr="0f4f7eddbf625835.png"/>
           <p:cNvPicPr>
             <a:picLocks noChangeAspect="1"/>
           </p:cNvPicPr>
@@ -6615,8 +6936,8 @@
         </p:blipFill>
         <p:spPr>
           <a:xfrm>
-            <a:off x="5599176" y="2194560"/>
-            <a:ext cx="963167" cy="932688"/>
+            <a:off x="5612891" y="2194560"/>
+            <a:ext cx="935736" cy="917448"/>
           </a:xfrm>
           <a:prstGeom prst="rect">
             <a:avLst/>
@@ -6647,11 +6968,11 @@
           <a:p>
             <a:pPr algn="ctr"/>
             <a:r>
-              <a:rPr sz="2600" b="1" i="0">
+              <a:rPr sz="2470" b="1" i="0">
                 <a:solidFill>
                   <a:srgbClr val="1A1A1A"/>
                 </a:solidFill>
-                <a:latin typeface="Century Schoolbook"/>
+                <a:latin typeface="Lexend"/>
               </a:rPr>
               <a:t>Answer it.</a:t>
             </a:r>
@@ -6700,11 +7021,11 @@
           <a:p>
             <a:pPr algn="l"/>
             <a:r>
-              <a:rPr sz="3600" b="1" i="0">
+              <a:rPr sz="3420" b="1" i="0">
                 <a:solidFill>
                   <a:srgbClr val="1A1A1A"/>
                 </a:solidFill>
-                <a:latin typeface="Century Schoolbook"/>
+                <a:latin typeface="Lexend"/>
               </a:rPr>
               <a:t>Warm-Up</a:t>
             </a:r>
@@ -6840,11 +7161,11 @@
           <a:p>
             <a:pPr algn="l"/>
             <a:r>
-              <a:rPr sz="1100" b="0" i="1">
+              <a:rPr sz="1040" b="0" i="0">
                 <a:solidFill>
                   <a:srgbClr val="6B6B6B"/>
                 </a:solidFill>
-                <a:latin typeface="Century Schoolbook"/>
+                <a:latin typeface="Lexend"/>
               </a:rPr>
               <a:t>Grade 7 Accelerated · Unit 3 · Lesson 4 — Negative Exponent Law</a:t>
             </a:r>
@@ -6875,11 +7196,11 @@
           <a:p>
             <a:pPr algn="r"/>
             <a:r>
-              <a:rPr sz="1100" b="0" i="0">
+              <a:rPr sz="1040" b="0" i="0">
                 <a:solidFill>
                   <a:srgbClr val="6B6B6B"/>
                 </a:solidFill>
-                <a:latin typeface="Century Schoolbook"/>
+                <a:latin typeface="Lexend"/>
               </a:rPr>
               <a:t>2</a:t>
             </a:r>
@@ -6894,8 +7215,8 @@
         </p:nvSpPr>
         <p:spPr>
           <a:xfrm>
-            <a:off x="1874519" y="1566672"/>
-            <a:ext cx="3058734" cy="457200"/>
+            <a:off x="1874519" y="1559052"/>
+            <a:ext cx="2921808" cy="457200"/>
           </a:xfrm>
           <a:prstGeom prst="rect">
             <a:avLst/>
@@ -6910,11 +7231,11 @@
           <a:p>
             <a:pPr algn="l"/>
             <a:r>
-              <a:rPr sz="2300" b="0" i="0">
+              <a:rPr sz="2180" b="0" i="0">
                 <a:solidFill>
                   <a:srgbClr val="1A1A1A"/>
                 </a:solidFill>
-                <a:latin typeface="Century Schoolbook"/>
+                <a:latin typeface="Lexend"/>
               </a:rPr>
               <a:t>1.   Find the value:  </a:t>
             </a:r>
@@ -6923,7 +7244,7 @@
       </p:sp>
       <p:pic>
         <p:nvPicPr>
-          <p:cNvPr id="9" name="Picture 8" descr="e6b67427858e96f9.png"/>
+          <p:cNvPr id="9" name="Picture 8" descr="7e2e2a945d199f77.png"/>
           <p:cNvPicPr>
             <a:picLocks noChangeAspect="1"/>
           </p:cNvPicPr>
@@ -6937,8 +7258,8 @@
         </p:blipFill>
         <p:spPr>
           <a:xfrm>
-            <a:off x="4796094" y="1463040"/>
-            <a:ext cx="795528" cy="664464"/>
+            <a:off x="4659168" y="1463040"/>
+            <a:ext cx="844296" cy="649224"/>
           </a:xfrm>
           <a:prstGeom prst="rect">
             <a:avLst/>
@@ -6953,8 +7274,8 @@
         </p:nvSpPr>
         <p:spPr>
           <a:xfrm>
-            <a:off x="1874519" y="2305812"/>
-            <a:ext cx="3255563" cy="457200"/>
+            <a:off x="1874519" y="2290572"/>
+            <a:ext cx="3159402" cy="457200"/>
           </a:xfrm>
           <a:prstGeom prst="rect">
             <a:avLst/>
@@ -6969,11 +7290,11 @@
           <a:p>
             <a:pPr algn="l"/>
             <a:r>
-              <a:rPr sz="2300" b="0" i="0">
+              <a:rPr sz="2180" b="0" i="0">
                 <a:solidFill>
                   <a:srgbClr val="1A1A1A"/>
                 </a:solidFill>
-                <a:latin typeface="Century Schoolbook"/>
+                <a:latin typeface="Lexend"/>
               </a:rPr>
               <a:t>2.   Which is greater, </a:t>
             </a:r>
@@ -6982,7 +7303,7 @@
       </p:sp>
       <p:pic>
         <p:nvPicPr>
-          <p:cNvPr id="11" name="Picture 10" descr="9a9a9137b9c7170a.png"/>
+          <p:cNvPr id="11" name="Picture 10" descr="10d7b99c008a1e6a.png"/>
           <p:cNvPicPr>
             <a:picLocks noChangeAspect="1"/>
           </p:cNvPicPr>
@@ -6996,8 +7317,8 @@
         </p:blipFill>
         <p:spPr>
           <a:xfrm>
-            <a:off x="4992923" y="2330196"/>
-            <a:ext cx="688848" cy="408432"/>
+            <a:off x="4896762" y="2324100"/>
+            <a:ext cx="697992" cy="390144"/>
           </a:xfrm>
           <a:prstGeom prst="rect">
             <a:avLst/>
@@ -7012,8 +7333,8 @@
         </p:nvSpPr>
         <p:spPr>
           <a:xfrm>
-            <a:off x="5681771" y="2305812"/>
-            <a:ext cx="1242626" cy="457200"/>
+            <a:off x="5594754" y="2290572"/>
+            <a:ext cx="1225980" cy="457200"/>
           </a:xfrm>
           <a:prstGeom prst="rect">
             <a:avLst/>
@@ -7028,11 +7349,11 @@
           <a:p>
             <a:pPr algn="l"/>
             <a:r>
-              <a:rPr sz="2300" b="0" i="0">
+              <a:rPr sz="2180" b="0" i="0">
                 <a:solidFill>
                   <a:srgbClr val="1A1A1A"/>
                 </a:solidFill>
-                <a:latin typeface="Century Schoolbook"/>
+                <a:latin typeface="Lexend"/>
               </a:rPr>
               <a:t> or 5.5?</a:t>
             </a:r>
@@ -7047,8 +7368,8 @@
         </p:nvSpPr>
         <p:spPr>
           <a:xfrm>
-            <a:off x="1874519" y="2918460"/>
-            <a:ext cx="1652008" cy="457200"/>
+            <a:off x="1874519" y="2903220"/>
+            <a:ext cx="1612295" cy="457200"/>
           </a:xfrm>
           <a:prstGeom prst="rect">
             <a:avLst/>
@@ -7063,11 +7384,11 @@
           <a:p>
             <a:pPr algn="l"/>
             <a:r>
-              <a:rPr sz="2300" b="0" i="0">
+              <a:rPr sz="2180" b="0" i="0">
                 <a:solidFill>
                   <a:srgbClr val="1A1A1A"/>
                 </a:solidFill>
-                <a:latin typeface="Century Schoolbook"/>
+                <a:latin typeface="Lexend"/>
               </a:rPr>
               <a:t>3.   Solve  </a:t>
             </a:r>
@@ -7076,7 +7397,7 @@
       </p:sp>
       <p:pic>
         <p:nvPicPr>
-          <p:cNvPr id="14" name="Picture 13" descr="86c14b3a9138d085.png"/>
+          <p:cNvPr id="14" name="Picture 13" descr="3835561d3a33385e.png"/>
           <p:cNvPicPr>
             <a:picLocks noChangeAspect="1"/>
           </p:cNvPicPr>
@@ -7090,8 +7411,8 @@
         </p:blipFill>
         <p:spPr>
           <a:xfrm>
-            <a:off x="3389368" y="3031236"/>
-            <a:ext cx="1136904" cy="231648"/>
+            <a:off x="3349655" y="3019044"/>
+            <a:ext cx="1112520" cy="225552"/>
           </a:xfrm>
           <a:prstGeom prst="rect">
             <a:avLst/>
@@ -7106,8 +7427,8 @@
         </p:nvSpPr>
         <p:spPr>
           <a:xfrm>
-            <a:off x="1874519" y="3602736"/>
-            <a:ext cx="4308965" cy="457200"/>
+            <a:off x="1874519" y="3579876"/>
+            <a:ext cx="4278880" cy="457200"/>
           </a:xfrm>
           <a:prstGeom prst="rect">
             <a:avLst/>
@@ -7122,11 +7443,11 @@
           <a:p>
             <a:pPr algn="l"/>
             <a:r>
-              <a:rPr sz="2300" b="0" i="0">
+              <a:rPr sz="2180" b="0" i="0">
                 <a:solidFill>
                   <a:srgbClr val="1A1A1A"/>
                 </a:solidFill>
-                <a:latin typeface="Century Schoolbook"/>
+                <a:latin typeface="Lexend"/>
               </a:rPr>
               <a:t>4.   What is the reciprocal of </a:t>
             </a:r>
@@ -7135,7 +7456,7 @@
       </p:sp>
       <p:pic>
         <p:nvPicPr>
-          <p:cNvPr id="16" name="Picture 15" descr="ef641fad4ba74c7d.png"/>
+          <p:cNvPr id="16" name="Picture 15" descr="f0b15a73405cbe94.png"/>
           <p:cNvPicPr>
             <a:picLocks noChangeAspect="1"/>
           </p:cNvPicPr>
@@ -7149,8 +7470,8 @@
         </p:blipFill>
         <p:spPr>
           <a:xfrm>
-            <a:off x="6046325" y="3553968"/>
-            <a:ext cx="170688" cy="554736"/>
+            <a:off x="6016240" y="3538728"/>
+            <a:ext cx="198120" cy="539496"/>
           </a:xfrm>
           <a:prstGeom prst="rect">
             <a:avLst/>
@@ -7165,8 +7486,8 @@
         </p:nvSpPr>
         <p:spPr>
           <a:xfrm>
-            <a:off x="6217013" y="3602736"/>
-            <a:ext cx="3880389" cy="457200"/>
+            <a:off x="6214360" y="3579876"/>
+            <a:ext cx="3917394" cy="457200"/>
           </a:xfrm>
           <a:prstGeom prst="rect">
             <a:avLst/>
@@ -7181,11 +7502,11 @@
           <a:p>
             <a:pPr algn="l"/>
             <a:r>
-              <a:rPr sz="2300" b="0" i="0">
+              <a:rPr sz="2180" b="0" i="0">
                 <a:solidFill>
                   <a:srgbClr val="1A1A1A"/>
                 </a:solidFill>
-                <a:latin typeface="Century Schoolbook"/>
+                <a:latin typeface="Lexend"/>
               </a:rPr>
               <a:t>?  What is the opposite of </a:t>
             </a:r>
@@ -7194,7 +7515,7 @@
       </p:sp>
       <p:pic>
         <p:nvPicPr>
-          <p:cNvPr id="18" name="Picture 17" descr="ef641fad4ba74c7d.png"/>
+          <p:cNvPr id="18" name="Picture 17" descr="f0b15a73405cbe94.png"/>
           <p:cNvPicPr>
             <a:picLocks noChangeAspect="1"/>
           </p:cNvPicPr>
@@ -7208,8 +7529,8 @@
         </p:blipFill>
         <p:spPr>
           <a:xfrm>
-            <a:off x="9960242" y="3553968"/>
-            <a:ext cx="170688" cy="554736"/>
+            <a:off x="9994595" y="3538728"/>
+            <a:ext cx="198120" cy="539496"/>
           </a:xfrm>
           <a:prstGeom prst="rect">
             <a:avLst/>
@@ -7224,8 +7545,8 @@
         </p:nvSpPr>
         <p:spPr>
           <a:xfrm>
-            <a:off x="10130930" y="3602736"/>
-            <a:ext cx="347771" cy="457200"/>
+            <a:off x="10192715" y="3579876"/>
+            <a:ext cx="360631" cy="457200"/>
           </a:xfrm>
           <a:prstGeom prst="rect">
             <a:avLst/>
@@ -7240,11 +7561,11 @@
           <a:p>
             <a:pPr algn="l"/>
             <a:r>
-              <a:rPr sz="2300" b="0" i="0">
+              <a:rPr sz="2180" b="0" i="0">
                 <a:solidFill>
                   <a:srgbClr val="1A1A1A"/>
                 </a:solidFill>
-                <a:latin typeface="Century Schoolbook"/>
+                <a:latin typeface="Lexend"/>
               </a:rPr>
               <a:t>?</a:t>
             </a:r>
@@ -7293,11 +7614,11 @@
           <a:p>
             <a:pPr algn="l"/>
             <a:r>
-              <a:rPr sz="3400" b="1" i="0">
+              <a:rPr sz="3229" b="1" i="0">
                 <a:solidFill>
                   <a:srgbClr val="1A1A1A"/>
                 </a:solidFill>
-                <a:latin typeface="Century Schoolbook"/>
+                <a:latin typeface="Lexend"/>
               </a:rPr>
               <a:t>Whiteboards   ·   Question 3 of 9</a:t>
             </a:r>
@@ -7433,11 +7754,11 @@
           <a:p>
             <a:pPr algn="l"/>
             <a:r>
-              <a:rPr sz="1100" b="0" i="1">
+              <a:rPr sz="1040" b="0" i="0">
                 <a:solidFill>
                   <a:srgbClr val="6B6B6B"/>
                 </a:solidFill>
-                <a:latin typeface="Century Schoolbook"/>
+                <a:latin typeface="Lexend"/>
               </a:rPr>
               <a:t>Grade 7 Accelerated · Unit 3 · Lesson 4 — Negative Exponent Law</a:t>
             </a:r>
@@ -7468,11 +7789,11 @@
           <a:p>
             <a:pPr algn="r"/>
             <a:r>
-              <a:rPr sz="1100" b="0" i="0">
+              <a:rPr sz="1040" b="0" i="0">
                 <a:solidFill>
                   <a:srgbClr val="6B6B6B"/>
                 </a:solidFill>
-                <a:latin typeface="Century Schoolbook"/>
+                <a:latin typeface="Lexend"/>
               </a:rPr>
               <a:t>20</a:t>
             </a:r>
@@ -7481,7 +7802,7 @@
       </p:sp>
       <p:pic>
         <p:nvPicPr>
-          <p:cNvPr id="8" name="Picture 7" descr="8f039f3016127628.png"/>
+          <p:cNvPr id="8" name="Picture 7" descr="9a062827f8f12eb2.png"/>
           <p:cNvPicPr>
             <a:picLocks noChangeAspect="1"/>
           </p:cNvPicPr>
@@ -7495,17 +7816,65 @@
         </p:blipFill>
         <p:spPr>
           <a:xfrm>
-            <a:off x="5600699" y="2103120"/>
-            <a:ext cx="960120" cy="932688"/>
+            <a:off x="5614416" y="2103120"/>
+            <a:ext cx="932688" cy="917448"/>
           </a:xfrm>
           <a:prstGeom prst="rect">
             <a:avLst/>
           </a:prstGeom>
         </p:spPr>
       </p:pic>
-      <p:sp>
-        <p:nvSpPr>
-          <p:cNvPr id="9" name="TextBox 8"/>
+      <p:pic>
+        <p:nvPicPr>
+          <p:cNvPr id="9" name="Picture 8" descr="cf7fb92401bc0fd0.png"/>
+          <p:cNvPicPr>
+            <a:picLocks noChangeAspect="1"/>
+          </p:cNvPicPr>
+          <p:nvPr/>
+        </p:nvPicPr>
+        <p:blipFill>
+          <a:blip r:embed="rId3"/>
+          <a:stretch>
+            <a:fillRect/>
+          </a:stretch>
+        </p:blipFill>
+        <p:spPr>
+          <a:xfrm>
+            <a:off x="5353812" y="3322320"/>
+            <a:ext cx="1563624" cy="664464"/>
+          </a:xfrm>
+          <a:prstGeom prst="rect">
+            <a:avLst/>
+          </a:prstGeom>
+        </p:spPr>
+      </p:pic>
+      <p:pic>
+        <p:nvPicPr>
+          <p:cNvPr id="10" name="Picture 9" descr="33a151155381260c.png"/>
+          <p:cNvPicPr>
+            <a:picLocks noChangeAspect="1"/>
+          </p:cNvPicPr>
+          <p:nvPr/>
+        </p:nvPicPr>
+        <p:blipFill>
+          <a:blip r:embed="rId4"/>
+          <a:stretch>
+            <a:fillRect/>
+          </a:stretch>
+        </p:blipFill>
+        <p:spPr>
+          <a:xfrm>
+            <a:off x="5353812" y="4168140"/>
+            <a:ext cx="1417320" cy="304800"/>
+          </a:xfrm>
+          <a:prstGeom prst="rect">
+            <a:avLst/>
+          </a:prstGeom>
+        </p:spPr>
+      </p:pic>
+      <p:sp>
+        <p:nvSpPr>
+          <p:cNvPr id="11" name="TextBox 10"/>
           <p:cNvSpPr txBox="1"/>
           <p:nvPr/>
         </p:nvSpPr>
@@ -7527,29 +7896,29 @@
           <a:p>
             <a:pPr algn="ctr"/>
             <a:r>
-              <a:rPr sz="3200" b="1" i="0">
+              <a:rPr sz="3040" b="1" i="0">
                 <a:solidFill>
                   <a:srgbClr val="9E1B32"/>
                 </a:solidFill>
-                <a:latin typeface="Century Schoolbook"/>
+                <a:latin typeface="Lexend"/>
               </a:rPr>
               <a:t>Answer:   10</a:t>
             </a:r>
             <a:r>
-              <a:rPr sz="3200" b="1" i="0" baseline="30000">
+              <a:rPr sz="3040" b="1" i="0" baseline="30000">
                 <a:solidFill>
                   <a:srgbClr val="9E1B32"/>
                 </a:solidFill>
-                <a:latin typeface="Century Schoolbook"/>
+                <a:latin typeface="Lexend"/>
               </a:rPr>
               <a:t>2</a:t>
             </a:r>
             <a:r>
-              <a:rPr sz="3200" b="1" i="0">
+              <a:rPr sz="3040" b="1" i="0">
                 <a:solidFill>
                   <a:srgbClr val="9E1B32"/>
                 </a:solidFill>
-                <a:latin typeface="Century Schoolbook"/>
+                <a:latin typeface="Lexend"/>
               </a:rPr>
               <a:t> = 100</a:t>
             </a:r>
@@ -7598,11 +7967,11 @@
           <a:p>
             <a:pPr algn="l"/>
             <a:r>
-              <a:rPr sz="3400" b="1" i="0">
+              <a:rPr sz="3229" b="1" i="0">
                 <a:solidFill>
                   <a:srgbClr val="1A1A1A"/>
                 </a:solidFill>
-                <a:latin typeface="Century Schoolbook"/>
+                <a:latin typeface="Lexend"/>
               </a:rPr>
               <a:t>Whiteboards   ·   Question 4 of 9</a:t>
             </a:r>
@@ -7738,11 +8107,11 @@
           <a:p>
             <a:pPr algn="l"/>
             <a:r>
-              <a:rPr sz="1100" b="0" i="1">
+              <a:rPr sz="1040" b="0" i="0">
                 <a:solidFill>
                   <a:srgbClr val="6B6B6B"/>
                 </a:solidFill>
-                <a:latin typeface="Century Schoolbook"/>
+                <a:latin typeface="Lexend"/>
               </a:rPr>
               <a:t>Grade 7 Accelerated · Unit 3 · Lesson 4 — Negative Exponent Law</a:t>
             </a:r>
@@ -7773,11 +8142,11 @@
           <a:p>
             <a:pPr algn="r"/>
             <a:r>
-              <a:rPr sz="1100" b="0" i="0">
+              <a:rPr sz="1040" b="0" i="0">
                 <a:solidFill>
                   <a:srgbClr val="6B6B6B"/>
                 </a:solidFill>
-                <a:latin typeface="Century Schoolbook"/>
+                <a:latin typeface="Lexend"/>
               </a:rPr>
               <a:t>21</a:t>
             </a:r>
@@ -7786,7 +8155,7 @@
       </p:sp>
       <p:pic>
         <p:nvPicPr>
-          <p:cNvPr id="8" name="Picture 7" descr="c242b51e1e2a08aa.png"/>
+          <p:cNvPr id="8" name="Picture 7" descr="20cab291981eb64f.png"/>
           <p:cNvPicPr>
             <a:picLocks noChangeAspect="1"/>
           </p:cNvPicPr>
@@ -7800,8 +8169,8 @@
         </p:blipFill>
         <p:spPr>
           <a:xfrm>
-            <a:off x="5420867" y="2194560"/>
-            <a:ext cx="1319784" cy="512064"/>
+            <a:off x="5457444" y="2194560"/>
+            <a:ext cx="1246632" cy="505968"/>
           </a:xfrm>
           <a:prstGeom prst="rect">
             <a:avLst/>
@@ -7832,11 +8201,11 @@
           <a:p>
             <a:pPr algn="ctr"/>
             <a:r>
-              <a:rPr sz="2600" b="1" i="0">
+              <a:rPr sz="2470" b="1" i="0">
                 <a:solidFill>
                   <a:srgbClr val="1A1A1A"/>
                 </a:solidFill>
-                <a:latin typeface="Century Schoolbook"/>
+                <a:latin typeface="Lexend"/>
               </a:rPr>
               <a:t>Answer it.</a:t>
             </a:r>
@@ -7885,11 +8254,11 @@
           <a:p>
             <a:pPr algn="l"/>
             <a:r>
-              <a:rPr sz="3400" b="1" i="0">
+              <a:rPr sz="3229" b="1" i="0">
                 <a:solidFill>
                   <a:srgbClr val="1A1A1A"/>
                 </a:solidFill>
-                <a:latin typeface="Century Schoolbook"/>
+                <a:latin typeface="Lexend"/>
               </a:rPr>
               <a:t>Whiteboards   ·   Question 4 of 9</a:t>
             </a:r>
@@ -8025,11 +8394,11 @@
           <a:p>
             <a:pPr algn="l"/>
             <a:r>
-              <a:rPr sz="1100" b="0" i="1">
+              <a:rPr sz="1040" b="0" i="0">
                 <a:solidFill>
                   <a:srgbClr val="6B6B6B"/>
                 </a:solidFill>
-                <a:latin typeface="Century Schoolbook"/>
+                <a:latin typeface="Lexend"/>
               </a:rPr>
               <a:t>Grade 7 Accelerated · Unit 3 · Lesson 4 — Negative Exponent Law</a:t>
             </a:r>
@@ -8060,11 +8429,11 @@
           <a:p>
             <a:pPr algn="r"/>
             <a:r>
-              <a:rPr sz="1100" b="0" i="0">
+              <a:rPr sz="1040" b="0" i="0">
                 <a:solidFill>
                   <a:srgbClr val="6B6B6B"/>
                 </a:solidFill>
-                <a:latin typeface="Century Schoolbook"/>
+                <a:latin typeface="Lexend"/>
               </a:rPr>
               <a:t>22</a:t>
             </a:r>
@@ -8073,7 +8442,7 @@
       </p:sp>
       <p:pic>
         <p:nvPicPr>
-          <p:cNvPr id="8" name="Picture 7" descr="79a5e9e14577308b.png"/>
+          <p:cNvPr id="8" name="Picture 7" descr="b3224c13b7d8fa54.png"/>
           <p:cNvPicPr>
             <a:picLocks noChangeAspect="1"/>
           </p:cNvPicPr>
@@ -8087,52 +8456,17 @@
         </p:blipFill>
         <p:spPr>
           <a:xfrm>
-            <a:off x="5417820" y="2103120"/>
-            <a:ext cx="1325880" cy="515112"/>
+            <a:off x="5455919" y="2103120"/>
+            <a:ext cx="1249680" cy="509016"/>
           </a:xfrm>
           <a:prstGeom prst="rect">
             <a:avLst/>
           </a:prstGeom>
         </p:spPr>
       </p:pic>
-      <p:sp>
-        <p:nvSpPr>
-          <p:cNvPr id="9" name="TextBox 8"/>
-          <p:cNvSpPr txBox="1"/>
-          <p:nvPr/>
-        </p:nvSpPr>
-        <p:spPr>
-          <a:xfrm>
-            <a:off x="4832603" y="4818888"/>
-            <a:ext cx="1920240" cy="548640"/>
-          </a:xfrm>
-          <a:prstGeom prst="rect">
-            <a:avLst/>
-          </a:prstGeom>
-          <a:noFill/>
-        </p:spPr>
-        <p:txBody>
-          <a:bodyPr wrap="square" lIns="45720" rIns="45720" tIns="18288" bIns="18288" anchor="ctr">
-            <a:spAutoFit/>
-          </a:bodyPr>
-          <a:lstStyle/>
-          <a:p>
-            <a:pPr algn="l"/>
-            <a:r>
-              <a:rPr sz="3200" b="1" i="0">
-                <a:solidFill>
-                  <a:srgbClr val="9E1B32"/>
-                </a:solidFill>
-                <a:latin typeface="Century Schoolbook"/>
-              </a:rPr>
-              <a:t>Answer:</a:t>
-            </a:r>
-          </a:p>
-        </p:txBody>
-      </p:sp>
       <p:pic>
         <p:nvPicPr>
-          <p:cNvPr id="10" name="Picture 9" descr="ec4ffcbfe2b2982d.png"/>
+          <p:cNvPr id="9" name="Picture 8" descr="6b0d31b34f4f077d.png"/>
           <p:cNvPicPr>
             <a:picLocks noChangeAspect="1"/>
           </p:cNvPicPr>
@@ -8146,8 +8480,150 @@
         </p:blipFill>
         <p:spPr>
           <a:xfrm>
-            <a:off x="6752844" y="4663440"/>
-            <a:ext cx="576072" cy="859536"/>
+            <a:off x="4001943" y="2913888"/>
+            <a:ext cx="2039112" cy="728472"/>
+          </a:xfrm>
+          <a:prstGeom prst="rect">
+            <a:avLst/>
+          </a:prstGeom>
+        </p:spPr>
+      </p:pic>
+      <p:pic>
+        <p:nvPicPr>
+          <p:cNvPr id="10" name="Picture 9" descr="6a0147d16c9e8ceb.png"/>
+          <p:cNvPicPr>
+            <a:picLocks noChangeAspect="1"/>
+          </p:cNvPicPr>
+          <p:nvPr/>
+        </p:nvPicPr>
+        <p:blipFill>
+          <a:blip r:embed="rId4"/>
+          <a:stretch>
+            <a:fillRect/>
+          </a:stretch>
+        </p:blipFill>
+        <p:spPr>
+          <a:xfrm>
+            <a:off x="4001943" y="3950207"/>
+            <a:ext cx="1493520" cy="368808"/>
+          </a:xfrm>
+          <a:prstGeom prst="rect">
+            <a:avLst/>
+          </a:prstGeom>
+        </p:spPr>
+      </p:pic>
+      <p:sp>
+        <p:nvSpPr>
+          <p:cNvPr id="11" name="TextBox 10"/>
+          <p:cNvSpPr txBox="1"/>
+          <p:nvPr/>
+        </p:nvSpPr>
+        <p:spPr>
+          <a:xfrm>
+            <a:off x="5495463" y="3906012"/>
+            <a:ext cx="1338233" cy="457200"/>
+          </a:xfrm>
+          <a:prstGeom prst="rect">
+            <a:avLst/>
+          </a:prstGeom>
+          <a:noFill/>
+        </p:spPr>
+        <p:txBody>
+          <a:bodyPr wrap="none" lIns="45720" rIns="45720" tIns="18288" bIns="18288" anchor="ctr">
+            <a:noAutofit/>
+          </a:bodyPr>
+          <a:lstStyle/>
+          <a:p>
+            <a:pPr algn="l"/>
+            <a:r>
+              <a:rPr sz="2750" b="0" i="0">
+                <a:solidFill>
+                  <a:srgbClr val="1A1A1A"/>
+                </a:solidFill>
+                <a:latin typeface="Lexend"/>
+              </a:rPr>
+              <a:t>,   so   </a:t>
+            </a:r>
+          </a:p>
+        </p:txBody>
+      </p:sp>
+      <p:pic>
+        <p:nvPicPr>
+          <p:cNvPr id="12" name="Picture 11" descr="e42c82d3a519661f.png"/>
+          <p:cNvPicPr>
+            <a:picLocks noChangeAspect="1"/>
+          </p:cNvPicPr>
+          <p:nvPr/>
+        </p:nvPicPr>
+        <p:blipFill>
+          <a:blip r:embed="rId5"/>
+          <a:stretch>
+            <a:fillRect/>
+          </a:stretch>
+        </p:blipFill>
+        <p:spPr>
+          <a:xfrm>
+            <a:off x="6696536" y="3770375"/>
+            <a:ext cx="1569720" cy="728472"/>
+          </a:xfrm>
+          <a:prstGeom prst="rect">
+            <a:avLst/>
+          </a:prstGeom>
+        </p:spPr>
+      </p:pic>
+      <p:sp>
+        <p:nvSpPr>
+          <p:cNvPr id="13" name="TextBox 12"/>
+          <p:cNvSpPr txBox="1"/>
+          <p:nvPr/>
+        </p:nvSpPr>
+        <p:spPr>
+          <a:xfrm>
+            <a:off x="4849367" y="4806695"/>
+            <a:ext cx="1920240" cy="548640"/>
+          </a:xfrm>
+          <a:prstGeom prst="rect">
+            <a:avLst/>
+          </a:prstGeom>
+          <a:noFill/>
+        </p:spPr>
+        <p:txBody>
+          <a:bodyPr wrap="square" lIns="45720" rIns="45720" tIns="18288" bIns="18288" anchor="ctr">
+            <a:spAutoFit/>
+          </a:bodyPr>
+          <a:lstStyle/>
+          <a:p>
+            <a:pPr algn="l"/>
+            <a:r>
+              <a:rPr sz="3040" b="1" i="0">
+                <a:solidFill>
+                  <a:srgbClr val="9E1B32"/>
+                </a:solidFill>
+                <a:latin typeface="Lexend"/>
+              </a:rPr>
+              <a:t>Answer:</a:t>
+            </a:r>
+          </a:p>
+        </p:txBody>
+      </p:sp>
+      <p:pic>
+        <p:nvPicPr>
+          <p:cNvPr id="14" name="Picture 13" descr="4df8b33a9d5d56bd.png"/>
+          <p:cNvPicPr>
+            <a:picLocks noChangeAspect="1"/>
+          </p:cNvPicPr>
+          <p:nvPr/>
+        </p:nvPicPr>
+        <p:blipFill>
+          <a:blip r:embed="rId6"/>
+          <a:stretch>
+            <a:fillRect/>
+          </a:stretch>
+        </p:blipFill>
+        <p:spPr>
+          <a:xfrm>
+            <a:off x="6769607" y="4663440"/>
+            <a:ext cx="542544" cy="835152"/>
           </a:xfrm>
           <a:prstGeom prst="rect">
             <a:avLst/>
@@ -8196,11 +8672,11 @@
           <a:p>
             <a:pPr algn="l"/>
             <a:r>
-              <a:rPr sz="3400" b="1" i="0">
+              <a:rPr sz="3229" b="1" i="0">
                 <a:solidFill>
                   <a:srgbClr val="1A1A1A"/>
                 </a:solidFill>
-                <a:latin typeface="Century Schoolbook"/>
+                <a:latin typeface="Lexend"/>
               </a:rPr>
               <a:t>Whiteboards   ·   Question 5 of 9</a:t>
             </a:r>
@@ -8336,11 +8812,11 @@
           <a:p>
             <a:pPr algn="l"/>
             <a:r>
-              <a:rPr sz="1100" b="0" i="1">
+              <a:rPr sz="1040" b="0" i="0">
                 <a:solidFill>
                   <a:srgbClr val="6B6B6B"/>
                 </a:solidFill>
-                <a:latin typeface="Century Schoolbook"/>
+                <a:latin typeface="Lexend"/>
               </a:rPr>
               <a:t>Grade 7 Accelerated · Unit 3 · Lesson 4 — Negative Exponent Law</a:t>
             </a:r>
@@ -8371,11 +8847,11 @@
           <a:p>
             <a:pPr algn="r"/>
             <a:r>
-              <a:rPr sz="1100" b="0" i="0">
+              <a:rPr sz="1040" b="0" i="0">
                 <a:solidFill>
                   <a:srgbClr val="6B6B6B"/>
                 </a:solidFill>
-                <a:latin typeface="Century Schoolbook"/>
+                <a:latin typeface="Lexend"/>
               </a:rPr>
               <a:t>23</a:t>
             </a:r>
@@ -8384,7 +8860,7 @@
       </p:sp>
       <p:pic>
         <p:nvPicPr>
-          <p:cNvPr id="8" name="Picture 7" descr="2f69500044ec6e87.png"/>
+          <p:cNvPr id="8" name="Picture 7" descr="9e00e37454aae3a5.png"/>
           <p:cNvPicPr>
             <a:picLocks noChangeAspect="1"/>
           </p:cNvPicPr>
@@ -8398,8 +8874,8 @@
         </p:blipFill>
         <p:spPr>
           <a:xfrm>
-            <a:off x="5751575" y="2194560"/>
-            <a:ext cx="658368" cy="432816"/>
+            <a:off x="5765292" y="2194560"/>
+            <a:ext cx="630936" cy="420624"/>
           </a:xfrm>
           <a:prstGeom prst="rect">
             <a:avLst/>
@@ -8414,7 +8890,7 @@
         </p:nvSpPr>
         <p:spPr>
           <a:xfrm>
-            <a:off x="777240" y="2855975"/>
+            <a:off x="777240" y="2843784"/>
             <a:ext cx="10607040" cy="465151"/>
           </a:xfrm>
           <a:prstGeom prst="rect">
@@ -8430,11 +8906,11 @@
           <a:p>
             <a:pPr algn="ctr"/>
             <a:r>
-              <a:rPr sz="2600" b="0" i="0">
+              <a:rPr sz="2470" b="0" i="0">
                 <a:solidFill>
                   <a:srgbClr val="1A1A1A"/>
                 </a:solidFill>
-                <a:latin typeface="Century Schoolbook"/>
+                <a:latin typeface="Lexend"/>
               </a:rPr>
               <a:t>Which is the value?</a:t>
             </a:r>
@@ -8449,7 +8925,7 @@
         </p:nvSpPr>
         <p:spPr>
           <a:xfrm>
-            <a:off x="1874519" y="3522295"/>
+            <a:off x="1874519" y="3510103"/>
             <a:ext cx="4572000" cy="548640"/>
           </a:xfrm>
           <a:prstGeom prst="rect">
@@ -8465,20 +8941,20 @@
           <a:p>
             <a:pPr algn="l"/>
             <a:r>
-              <a:rPr sz="2400" b="1" i="0">
+              <a:rPr sz="2280" b="1" i="0">
                 <a:solidFill>
                   <a:srgbClr val="1A1A1A"/>
                 </a:solidFill>
-                <a:latin typeface="Century Schoolbook"/>
+                <a:latin typeface="Lexend"/>
               </a:rPr>
               <a:t>A.   </a:t>
             </a:r>
             <a:r>
-              <a:rPr sz="2400" b="0" i="0">
+              <a:rPr sz="2280" b="0" i="0">
                 <a:solidFill>
                   <a:srgbClr val="1A1A1A"/>
                 </a:solidFill>
-                <a:latin typeface="Century Schoolbook"/>
+                <a:latin typeface="Lexend"/>
               </a:rPr>
               <a:t>1/10</a:t>
             </a:r>
@@ -8493,7 +8969,7 @@
         </p:nvSpPr>
         <p:spPr>
           <a:xfrm>
-            <a:off x="6629400" y="3522295"/>
+            <a:off x="6629400" y="3510103"/>
             <a:ext cx="4572000" cy="548640"/>
           </a:xfrm>
           <a:prstGeom prst="rect">
@@ -8509,20 +8985,20 @@
           <a:p>
             <a:pPr algn="l"/>
             <a:r>
-              <a:rPr sz="2400" b="1" i="0">
+              <a:rPr sz="2280" b="1" i="0">
                 <a:solidFill>
                   <a:srgbClr val="1A1A1A"/>
                 </a:solidFill>
-                <a:latin typeface="Century Schoolbook"/>
+                <a:latin typeface="Lexend"/>
               </a:rPr>
               <a:t>B.   </a:t>
             </a:r>
             <a:r>
-              <a:rPr sz="2400" b="0" i="0">
+              <a:rPr sz="2280" b="0" i="0">
                 <a:solidFill>
                   <a:srgbClr val="1A1A1A"/>
                 </a:solidFill>
-                <a:latin typeface="Century Schoolbook"/>
+                <a:latin typeface="Lexend"/>
               </a:rPr>
               <a:t>1/25</a:t>
             </a:r>
@@ -8537,7 +9013,7 @@
         </p:nvSpPr>
         <p:spPr>
           <a:xfrm>
-            <a:off x="1874519" y="4208095"/>
+            <a:off x="1874519" y="4195903"/>
             <a:ext cx="4572000" cy="548640"/>
           </a:xfrm>
           <a:prstGeom prst="rect">
@@ -8553,20 +9029,20 @@
           <a:p>
             <a:pPr algn="l"/>
             <a:r>
-              <a:rPr sz="2400" b="1" i="0">
+              <a:rPr sz="2280" b="1" i="0">
                 <a:solidFill>
                   <a:srgbClr val="1A1A1A"/>
                 </a:solidFill>
-                <a:latin typeface="Century Schoolbook"/>
+                <a:latin typeface="Lexend"/>
               </a:rPr>
               <a:t>C.   </a:t>
             </a:r>
             <a:r>
-              <a:rPr sz="2400" b="0" i="0">
+              <a:rPr sz="2280" b="0" i="0">
                 <a:solidFill>
                   <a:srgbClr val="1A1A1A"/>
                 </a:solidFill>
-                <a:latin typeface="Century Schoolbook"/>
+                <a:latin typeface="Lexend"/>
               </a:rPr>
               <a:t>−25</a:t>
             </a:r>
@@ -8581,7 +9057,7 @@
         </p:nvSpPr>
         <p:spPr>
           <a:xfrm>
-            <a:off x="6629400" y="4208095"/>
+            <a:off x="6629400" y="4195903"/>
             <a:ext cx="4572000" cy="548640"/>
           </a:xfrm>
           <a:prstGeom prst="rect">
@@ -8597,20 +9073,20 @@
           <a:p>
             <a:pPr algn="l"/>
             <a:r>
-              <a:rPr sz="2400" b="1" i="0">
+              <a:rPr sz="2280" b="1" i="0">
                 <a:solidFill>
                   <a:srgbClr val="1A1A1A"/>
                 </a:solidFill>
-                <a:latin typeface="Century Schoolbook"/>
+                <a:latin typeface="Lexend"/>
               </a:rPr>
               <a:t>D.   </a:t>
             </a:r>
             <a:r>
-              <a:rPr sz="2400" b="0" i="0">
+              <a:rPr sz="2280" b="0" i="0">
                 <a:solidFill>
                   <a:srgbClr val="1A1A1A"/>
                 </a:solidFill>
-                <a:latin typeface="Century Schoolbook"/>
+                <a:latin typeface="Lexend"/>
               </a:rPr>
               <a:t>−10</a:t>
             </a:r>
@@ -8625,7 +9101,7 @@
         </p:nvSpPr>
         <p:spPr>
           <a:xfrm>
-            <a:off x="777240" y="5213935"/>
+            <a:off x="777240" y="5201743"/>
             <a:ext cx="10607040" cy="457200"/>
           </a:xfrm>
           <a:prstGeom prst="rect">
@@ -8641,11 +9117,11 @@
           <a:p>
             <a:pPr algn="ctr"/>
             <a:r>
-              <a:rPr sz="2600" b="1" i="0">
+              <a:rPr sz="2470" b="1" i="0">
                 <a:solidFill>
                   <a:srgbClr val="1A1A1A"/>
                 </a:solidFill>
-                <a:latin typeface="Century Schoolbook"/>
+                <a:latin typeface="Lexend"/>
               </a:rPr>
               <a:t>Answer it.</a:t>
             </a:r>
@@ -8694,11 +9170,11 @@
           <a:p>
             <a:pPr algn="l"/>
             <a:r>
-              <a:rPr sz="3400" b="1" i="0">
+              <a:rPr sz="3229" b="1" i="0">
                 <a:solidFill>
                   <a:srgbClr val="1A1A1A"/>
                 </a:solidFill>
-                <a:latin typeface="Century Schoolbook"/>
+                <a:latin typeface="Lexend"/>
               </a:rPr>
               <a:t>Whiteboards   ·   Question 5 of 9</a:t>
             </a:r>
@@ -8834,11 +9310,11 @@
           <a:p>
             <a:pPr algn="l"/>
             <a:r>
-              <a:rPr sz="1100" b="0" i="1">
+              <a:rPr sz="1040" b="0" i="0">
                 <a:solidFill>
                   <a:srgbClr val="6B6B6B"/>
                 </a:solidFill>
-                <a:latin typeface="Century Schoolbook"/>
+                <a:latin typeface="Lexend"/>
               </a:rPr>
               <a:t>Grade 7 Accelerated · Unit 3 · Lesson 4 — Negative Exponent Law</a:t>
             </a:r>
@@ -8869,11 +9345,11 @@
           <a:p>
             <a:pPr algn="r"/>
             <a:r>
-              <a:rPr sz="1100" b="0" i="0">
+              <a:rPr sz="1040" b="0" i="0">
                 <a:solidFill>
                   <a:srgbClr val="6B6B6B"/>
                 </a:solidFill>
-                <a:latin typeface="Century Schoolbook"/>
+                <a:latin typeface="Lexend"/>
               </a:rPr>
               <a:t>24</a:t>
             </a:r>
@@ -8882,7 +9358,7 @@
       </p:sp>
       <p:pic>
         <p:nvPicPr>
-          <p:cNvPr id="8" name="Picture 7" descr="0b09890174e136ec.png"/>
+          <p:cNvPr id="8" name="Picture 7" descr="34b6c156891d8887.png"/>
           <p:cNvPicPr>
             <a:picLocks noChangeAspect="1"/>
           </p:cNvPicPr>
@@ -8896,8 +9372,8 @@
         </p:blipFill>
         <p:spPr>
           <a:xfrm>
-            <a:off x="5750052" y="2103120"/>
-            <a:ext cx="661416" cy="429768"/>
+            <a:off x="5763767" y="2103120"/>
+            <a:ext cx="633984" cy="420624"/>
           </a:xfrm>
           <a:prstGeom prst="rect">
             <a:avLst/>
@@ -8912,7 +9388,7 @@
         </p:nvSpPr>
         <p:spPr>
           <a:xfrm>
-            <a:off x="777240" y="2761487"/>
+            <a:off x="777240" y="2752344"/>
             <a:ext cx="10607040" cy="465151"/>
           </a:xfrm>
           <a:prstGeom prst="rect">
@@ -8928,27 +9404,51 @@
           <a:p>
             <a:pPr algn="ctr"/>
             <a:r>
-              <a:rPr sz="2600" b="0" i="0">
+              <a:rPr sz="2470" b="0" i="0">
                 <a:solidFill>
                   <a:srgbClr val="1A1A1A"/>
                 </a:solidFill>
-                <a:latin typeface="Century Schoolbook"/>
+                <a:latin typeface="Lexend"/>
               </a:rPr>
               <a:t>Which is the value?</a:t>
             </a:r>
           </a:p>
         </p:txBody>
       </p:sp>
-      <p:sp>
-        <p:nvSpPr>
-          <p:cNvPr id="10" name="TextBox 9"/>
-          <p:cNvSpPr txBox="1"/>
-          <p:nvPr/>
-        </p:nvSpPr>
-        <p:spPr>
-          <a:xfrm>
-            <a:off x="1874519" y="3427807"/>
-            <a:ext cx="4572000" cy="548640"/>
+      <p:pic>
+        <p:nvPicPr>
+          <p:cNvPr id="10" name="Picture 9" descr="b9c8e2103b94912c.png"/>
+          <p:cNvPicPr>
+            <a:picLocks noChangeAspect="1"/>
+          </p:cNvPicPr>
+          <p:nvPr/>
+        </p:nvPicPr>
+        <p:blipFill>
+          <a:blip r:embed="rId3"/>
+          <a:stretch>
+            <a:fillRect/>
+          </a:stretch>
+        </p:blipFill>
+        <p:spPr>
+          <a:xfrm>
+            <a:off x="5178551" y="3400375"/>
+            <a:ext cx="1908047" cy="664464"/>
+          </a:xfrm>
+          <a:prstGeom prst="rect">
+            <a:avLst/>
+          </a:prstGeom>
+        </p:spPr>
+      </p:pic>
+      <p:sp>
+        <p:nvSpPr>
+          <p:cNvPr id="11" name="TextBox 10"/>
+          <p:cNvSpPr txBox="1"/>
+          <p:nvPr/>
+        </p:nvSpPr>
+        <p:spPr>
+          <a:xfrm>
+            <a:off x="777240" y="4663440"/>
+            <a:ext cx="10607040" cy="548640"/>
           </a:xfrm>
           <a:prstGeom prst="rect">
             <a:avLst/>
@@ -8961,189 +9461,13 @@
           </a:bodyPr>
           <a:lstStyle/>
           <a:p>
-            <a:pPr algn="l"/>
-            <a:r>
-              <a:rPr sz="2400" b="1" i="0">
-                <a:solidFill>
-                  <a:srgbClr val="1A1A1A"/>
-                </a:solidFill>
-                <a:latin typeface="Century Schoolbook"/>
-              </a:rPr>
-              <a:t>A.   </a:t>
-            </a:r>
-            <a:r>
-              <a:rPr sz="2400" b="0" i="0">
-                <a:solidFill>
-                  <a:srgbClr val="1A1A1A"/>
-                </a:solidFill>
-                <a:latin typeface="Century Schoolbook"/>
-              </a:rPr>
-              <a:t>1/10</a:t>
-            </a:r>
-          </a:p>
-        </p:txBody>
-      </p:sp>
-      <p:sp>
-        <p:nvSpPr>
-          <p:cNvPr id="11" name="TextBox 10"/>
-          <p:cNvSpPr txBox="1"/>
-          <p:nvPr/>
-        </p:nvSpPr>
-        <p:spPr>
-          <a:xfrm>
-            <a:off x="6629400" y="3427807"/>
-            <a:ext cx="4572000" cy="548640"/>
-          </a:xfrm>
-          <a:prstGeom prst="rect">
-            <a:avLst/>
-          </a:prstGeom>
-          <a:noFill/>
-        </p:spPr>
-        <p:txBody>
-          <a:bodyPr wrap="square" lIns="45720" rIns="45720" tIns="18288" bIns="18288" anchor="t">
-            <a:spAutoFit/>
-          </a:bodyPr>
-          <a:lstStyle/>
-          <a:p>
-            <a:pPr algn="l"/>
-            <a:r>
-              <a:rPr sz="2400" b="1" i="0">
+            <a:pPr algn="ctr"/>
+            <a:r>
+              <a:rPr sz="3040" b="1" i="0">
                 <a:solidFill>
                   <a:srgbClr val="9E1B32"/>
                 </a:solidFill>
-                <a:latin typeface="Century Schoolbook"/>
-              </a:rPr>
-              <a:t>B.   </a:t>
-            </a:r>
-            <a:r>
-              <a:rPr sz="2400" b="1" i="0">
-                <a:solidFill>
-                  <a:srgbClr val="9E1B32"/>
-                </a:solidFill>
-                <a:latin typeface="Century Schoolbook"/>
-              </a:rPr>
-              <a:t>1/25</a:t>
-            </a:r>
-          </a:p>
-        </p:txBody>
-      </p:sp>
-      <p:sp>
-        <p:nvSpPr>
-          <p:cNvPr id="12" name="TextBox 11"/>
-          <p:cNvSpPr txBox="1"/>
-          <p:nvPr/>
-        </p:nvSpPr>
-        <p:spPr>
-          <a:xfrm>
-            <a:off x="1874519" y="4113607"/>
-            <a:ext cx="4572000" cy="548640"/>
-          </a:xfrm>
-          <a:prstGeom prst="rect">
-            <a:avLst/>
-          </a:prstGeom>
-          <a:noFill/>
-        </p:spPr>
-        <p:txBody>
-          <a:bodyPr wrap="square" lIns="45720" rIns="45720" tIns="18288" bIns="18288" anchor="t">
-            <a:spAutoFit/>
-          </a:bodyPr>
-          <a:lstStyle/>
-          <a:p>
-            <a:pPr algn="l"/>
-            <a:r>
-              <a:rPr sz="2400" b="1" i="0">
-                <a:solidFill>
-                  <a:srgbClr val="1A1A1A"/>
-                </a:solidFill>
-                <a:latin typeface="Century Schoolbook"/>
-              </a:rPr>
-              <a:t>C.   </a:t>
-            </a:r>
-            <a:r>
-              <a:rPr sz="2400" b="0" i="0">
-                <a:solidFill>
-                  <a:srgbClr val="1A1A1A"/>
-                </a:solidFill>
-                <a:latin typeface="Century Schoolbook"/>
-              </a:rPr>
-              <a:t>−25</a:t>
-            </a:r>
-          </a:p>
-        </p:txBody>
-      </p:sp>
-      <p:sp>
-        <p:nvSpPr>
-          <p:cNvPr id="13" name="TextBox 12"/>
-          <p:cNvSpPr txBox="1"/>
-          <p:nvPr/>
-        </p:nvSpPr>
-        <p:spPr>
-          <a:xfrm>
-            <a:off x="6629400" y="4113607"/>
-            <a:ext cx="4572000" cy="548640"/>
-          </a:xfrm>
-          <a:prstGeom prst="rect">
-            <a:avLst/>
-          </a:prstGeom>
-          <a:noFill/>
-        </p:spPr>
-        <p:txBody>
-          <a:bodyPr wrap="square" lIns="45720" rIns="45720" tIns="18288" bIns="18288" anchor="t">
-            <a:spAutoFit/>
-          </a:bodyPr>
-          <a:lstStyle/>
-          <a:p>
-            <a:pPr algn="l"/>
-            <a:r>
-              <a:rPr sz="2400" b="1" i="0">
-                <a:solidFill>
-                  <a:srgbClr val="1A1A1A"/>
-                </a:solidFill>
-                <a:latin typeface="Century Schoolbook"/>
-              </a:rPr>
-              <a:t>D.   </a:t>
-            </a:r>
-            <a:r>
-              <a:rPr sz="2400" b="0" i="0">
-                <a:solidFill>
-                  <a:srgbClr val="1A1A1A"/>
-                </a:solidFill>
-                <a:latin typeface="Century Schoolbook"/>
-              </a:rPr>
-              <a:t>−10</a:t>
-            </a:r>
-          </a:p>
-        </p:txBody>
-      </p:sp>
-      <p:sp>
-        <p:nvSpPr>
-          <p:cNvPr id="14" name="TextBox 13"/>
-          <p:cNvSpPr txBox="1"/>
-          <p:nvPr/>
-        </p:nvSpPr>
-        <p:spPr>
-          <a:xfrm>
-            <a:off x="777240" y="5119447"/>
-            <a:ext cx="10607040" cy="548640"/>
-          </a:xfrm>
-          <a:prstGeom prst="rect">
-            <a:avLst/>
-          </a:prstGeom>
-          <a:noFill/>
-        </p:spPr>
-        <p:txBody>
-          <a:bodyPr wrap="square" lIns="45720" rIns="45720" tIns="18288" bIns="18288" anchor="t">
-            <a:spAutoFit/>
-          </a:bodyPr>
-          <a:lstStyle/>
-          <a:p>
-            <a:pPr algn="ctr"/>
-            <a:r>
-              <a:rPr sz="3200" b="1" i="0">
-                <a:solidFill>
-                  <a:srgbClr val="9E1B32"/>
-                </a:solidFill>
-                <a:latin typeface="Century Schoolbook"/>
+                <a:latin typeface="Lexend"/>
               </a:rPr>
               <a:t>Answer:   B — 1/25</a:t>
             </a:r>
@@ -9192,11 +9516,11 @@
           <a:p>
             <a:pPr algn="l"/>
             <a:r>
-              <a:rPr sz="3400" b="1" i="0">
+              <a:rPr sz="3229" b="1" i="0">
                 <a:solidFill>
                   <a:srgbClr val="1A1A1A"/>
                 </a:solidFill>
-                <a:latin typeface="Century Schoolbook"/>
+                <a:latin typeface="Lexend"/>
               </a:rPr>
               <a:t>Whiteboards   ·   Question 6 of 9</a:t>
             </a:r>
@@ -9332,11 +9656,11 @@
           <a:p>
             <a:pPr algn="l"/>
             <a:r>
-              <a:rPr sz="1100" b="0" i="1">
+              <a:rPr sz="1040" b="0" i="0">
                 <a:solidFill>
                   <a:srgbClr val="6B6B6B"/>
                 </a:solidFill>
-                <a:latin typeface="Century Schoolbook"/>
+                <a:latin typeface="Lexend"/>
               </a:rPr>
               <a:t>Grade 7 Accelerated · Unit 3 · Lesson 4 — Negative Exponent Law</a:t>
             </a:r>
@@ -9367,11 +9691,11 @@
           <a:p>
             <a:pPr algn="r"/>
             <a:r>
-              <a:rPr sz="1100" b="0" i="0">
+              <a:rPr sz="1040" b="0" i="0">
                 <a:solidFill>
                   <a:srgbClr val="6B6B6B"/>
                 </a:solidFill>
-                <a:latin typeface="Century Schoolbook"/>
+                <a:latin typeface="Lexend"/>
               </a:rPr>
               <a:t>25</a:t>
             </a:r>
@@ -9380,7 +9704,7 @@
       </p:sp>
       <p:pic>
         <p:nvPicPr>
-          <p:cNvPr id="8" name="Picture 7" descr="9e50adf1c8369698.png"/>
+          <p:cNvPr id="8" name="Picture 7" descr="2ea43d19b748a42d.png"/>
           <p:cNvPicPr>
             <a:picLocks noChangeAspect="1"/>
           </p:cNvPicPr>
@@ -9394,8 +9718,8 @@
         </p:blipFill>
         <p:spPr>
           <a:xfrm>
-            <a:off x="5381244" y="2194560"/>
-            <a:ext cx="1399032" cy="429768"/>
+            <a:off x="5385816" y="2194560"/>
+            <a:ext cx="1389888" cy="417576"/>
           </a:xfrm>
           <a:prstGeom prst="rect">
             <a:avLst/>
@@ -9410,7 +9734,7 @@
         </p:nvSpPr>
         <p:spPr>
           <a:xfrm>
-            <a:off x="777240" y="2852928"/>
+            <a:off x="777240" y="2840736"/>
             <a:ext cx="10607040" cy="465151"/>
           </a:xfrm>
           <a:prstGeom prst="rect">
@@ -9426,11 +9750,11 @@
           <a:p>
             <a:pPr algn="ctr"/>
             <a:r>
-              <a:rPr sz="2600" b="0" i="0">
+              <a:rPr sz="2470" b="0" i="0">
                 <a:solidFill>
                   <a:srgbClr val="1A1A1A"/>
                 </a:solidFill>
-                <a:latin typeface="Century Schoolbook"/>
+                <a:latin typeface="Lexend"/>
               </a:rPr>
               <a:t>Which expression is equivalent?</a:t>
             </a:r>
@@ -9445,7 +9769,7 @@
         </p:nvSpPr>
         <p:spPr>
           <a:xfrm>
-            <a:off x="1874519" y="3519247"/>
+            <a:off x="1874519" y="3507055"/>
             <a:ext cx="4572000" cy="548640"/>
           </a:xfrm>
           <a:prstGeom prst="rect">
@@ -9461,29 +9785,29 @@
           <a:p>
             <a:pPr algn="l"/>
             <a:r>
-              <a:rPr sz="2400" b="1" i="0">
+              <a:rPr sz="2280" b="1" i="0">
                 <a:solidFill>
                   <a:srgbClr val="1A1A1A"/>
                 </a:solidFill>
-                <a:latin typeface="Century Schoolbook"/>
+                <a:latin typeface="Lexend"/>
               </a:rPr>
               <a:t>A.   </a:t>
             </a:r>
             <a:r>
-              <a:rPr sz="2400" b="0" i="0">
+              <a:rPr sz="2280" b="0" i="0">
                 <a:solidFill>
                   <a:srgbClr val="1A1A1A"/>
                 </a:solidFill>
-                <a:latin typeface="Century Schoolbook"/>
+                <a:latin typeface="Lexend"/>
               </a:rPr>
               <a:t>6</a:t>
             </a:r>
             <a:r>
-              <a:rPr sz="2400" b="0" i="0" baseline="30000">
+              <a:rPr sz="2280" b="0" i="0" baseline="30000">
                 <a:solidFill>
                   <a:srgbClr val="1A1A1A"/>
                 </a:solidFill>
-                <a:latin typeface="Century Schoolbook"/>
+                <a:latin typeface="Lexend"/>
               </a:rPr>
               <a:t>-10</a:t>
             </a:r>
@@ -9498,7 +9822,7 @@
         </p:nvSpPr>
         <p:spPr>
           <a:xfrm>
-            <a:off x="6629400" y="3519247"/>
+            <a:off x="6629400" y="3507055"/>
             <a:ext cx="4572000" cy="548640"/>
           </a:xfrm>
           <a:prstGeom prst="rect">
@@ -9514,29 +9838,29 @@
           <a:p>
             <a:pPr algn="l"/>
             <a:r>
-              <a:rPr sz="2400" b="1" i="0">
+              <a:rPr sz="2280" b="1" i="0">
                 <a:solidFill>
                   <a:srgbClr val="1A1A1A"/>
                 </a:solidFill>
-                <a:latin typeface="Century Schoolbook"/>
+                <a:latin typeface="Lexend"/>
               </a:rPr>
               <a:t>B.   </a:t>
             </a:r>
             <a:r>
-              <a:rPr sz="2400" b="0" i="0">
+              <a:rPr sz="2280" b="0" i="0">
                 <a:solidFill>
                   <a:srgbClr val="1A1A1A"/>
                 </a:solidFill>
-                <a:latin typeface="Century Schoolbook"/>
+                <a:latin typeface="Lexend"/>
               </a:rPr>
               <a:t>36</a:t>
             </a:r>
             <a:r>
-              <a:rPr sz="2400" b="0" i="0" baseline="30000">
+              <a:rPr sz="2280" b="0" i="0" baseline="30000">
                 <a:solidFill>
                   <a:srgbClr val="1A1A1A"/>
                 </a:solidFill>
-                <a:latin typeface="Century Schoolbook"/>
+                <a:latin typeface="Lexend"/>
               </a:rPr>
               <a:t>3</a:t>
             </a:r>
@@ -9551,7 +9875,7 @@
         </p:nvSpPr>
         <p:spPr>
           <a:xfrm>
-            <a:off x="1874519" y="4205047"/>
+            <a:off x="1874519" y="4192855"/>
             <a:ext cx="4572000" cy="548640"/>
           </a:xfrm>
           <a:prstGeom prst="rect">
@@ -9567,29 +9891,29 @@
           <a:p>
             <a:pPr algn="l"/>
             <a:r>
-              <a:rPr sz="2400" b="1" i="0">
+              <a:rPr sz="2280" b="1" i="0">
                 <a:solidFill>
                   <a:srgbClr val="1A1A1A"/>
                 </a:solidFill>
-                <a:latin typeface="Century Schoolbook"/>
+                <a:latin typeface="Lexend"/>
               </a:rPr>
               <a:t>C.   </a:t>
             </a:r>
             <a:r>
-              <a:rPr sz="2400" b="0" i="0">
+              <a:rPr sz="2280" b="0" i="0">
                 <a:solidFill>
                   <a:srgbClr val="1A1A1A"/>
                 </a:solidFill>
-                <a:latin typeface="Century Schoolbook"/>
+                <a:latin typeface="Lexend"/>
               </a:rPr>
               <a:t>6</a:t>
             </a:r>
             <a:r>
-              <a:rPr sz="2400" b="0" i="0" baseline="30000">
+              <a:rPr sz="2280" b="0" i="0" baseline="30000">
                 <a:solidFill>
                   <a:srgbClr val="1A1A1A"/>
                 </a:solidFill>
-                <a:latin typeface="Century Schoolbook"/>
+                <a:latin typeface="Lexend"/>
               </a:rPr>
               <a:t>-7</a:t>
             </a:r>
@@ -9604,7 +9928,7 @@
         </p:nvSpPr>
         <p:spPr>
           <a:xfrm>
-            <a:off x="6629400" y="4205047"/>
+            <a:off x="6629400" y="4192855"/>
             <a:ext cx="4572000" cy="548640"/>
           </a:xfrm>
           <a:prstGeom prst="rect">
@@ -9620,29 +9944,29 @@
           <a:p>
             <a:pPr algn="l"/>
             <a:r>
-              <a:rPr sz="2400" b="1" i="0">
+              <a:rPr sz="2280" b="1" i="0">
                 <a:solidFill>
                   <a:srgbClr val="1A1A1A"/>
                 </a:solidFill>
-                <a:latin typeface="Century Schoolbook"/>
+                <a:latin typeface="Lexend"/>
               </a:rPr>
               <a:t>D.   </a:t>
             </a:r>
             <a:r>
-              <a:rPr sz="2400" b="0" i="0">
+              <a:rPr sz="2280" b="0" i="0">
                 <a:solidFill>
                   <a:srgbClr val="1A1A1A"/>
                 </a:solidFill>
-                <a:latin typeface="Century Schoolbook"/>
+                <a:latin typeface="Lexend"/>
               </a:rPr>
               <a:t>6</a:t>
             </a:r>
             <a:r>
-              <a:rPr sz="2400" b="0" i="0" baseline="30000">
+              <a:rPr sz="2280" b="0" i="0" baseline="30000">
                 <a:solidFill>
                   <a:srgbClr val="1A1A1A"/>
                 </a:solidFill>
-                <a:latin typeface="Century Schoolbook"/>
+                <a:latin typeface="Lexend"/>
               </a:rPr>
               <a:t>3</a:t>
             </a:r>
@@ -9657,7 +9981,7 @@
         </p:nvSpPr>
         <p:spPr>
           <a:xfrm>
-            <a:off x="777240" y="5210887"/>
+            <a:off x="777240" y="5198695"/>
             <a:ext cx="10607040" cy="457200"/>
           </a:xfrm>
           <a:prstGeom prst="rect">
@@ -9673,11 +9997,11 @@
           <a:p>
             <a:pPr algn="ctr"/>
             <a:r>
-              <a:rPr sz="2600" b="1" i="0">
+              <a:rPr sz="2470" b="1" i="0">
                 <a:solidFill>
                   <a:srgbClr val="1A1A1A"/>
                 </a:solidFill>
-                <a:latin typeface="Century Schoolbook"/>
+                <a:latin typeface="Lexend"/>
               </a:rPr>
               <a:t>Answer it.</a:t>
             </a:r>
@@ -9726,11 +10050,11 @@
           <a:p>
             <a:pPr algn="l"/>
             <a:r>
-              <a:rPr sz="3400" b="1" i="0">
+              <a:rPr sz="3229" b="1" i="0">
                 <a:solidFill>
                   <a:srgbClr val="1A1A1A"/>
                 </a:solidFill>
-                <a:latin typeface="Century Schoolbook"/>
+                <a:latin typeface="Lexend"/>
               </a:rPr>
               <a:t>Whiteboards   ·   Question 6 of 9</a:t>
             </a:r>
@@ -9866,11 +10190,11 @@
           <a:p>
             <a:pPr algn="l"/>
             <a:r>
-              <a:rPr sz="1100" b="0" i="1">
+              <a:rPr sz="1040" b="0" i="0">
                 <a:solidFill>
                   <a:srgbClr val="6B6B6B"/>
                 </a:solidFill>
-                <a:latin typeface="Century Schoolbook"/>
+                <a:latin typeface="Lexend"/>
               </a:rPr>
               <a:t>Grade 7 Accelerated · Unit 3 · Lesson 4 — Negative Exponent Law</a:t>
             </a:r>
@@ -9901,11 +10225,11 @@
           <a:p>
             <a:pPr algn="r"/>
             <a:r>
-              <a:rPr sz="1100" b="0" i="0">
+              <a:rPr sz="1040" b="0" i="0">
                 <a:solidFill>
                   <a:srgbClr val="6B6B6B"/>
                 </a:solidFill>
-                <a:latin typeface="Century Schoolbook"/>
+                <a:latin typeface="Lexend"/>
               </a:rPr>
               <a:t>26</a:t>
             </a:r>
@@ -9914,7 +10238,7 @@
       </p:sp>
       <p:pic>
         <p:nvPicPr>
-          <p:cNvPr id="8" name="Picture 7" descr="c950f888df2a107a.png"/>
+          <p:cNvPr id="8" name="Picture 7" descr="f0604488e0753f6d.png"/>
           <p:cNvPicPr>
             <a:picLocks noChangeAspect="1"/>
           </p:cNvPicPr>
@@ -9928,8 +10252,8 @@
         </p:blipFill>
         <p:spPr>
           <a:xfrm>
-            <a:off x="5381244" y="2103120"/>
-            <a:ext cx="1399032" cy="429768"/>
+            <a:off x="5384291" y="2103120"/>
+            <a:ext cx="1392936" cy="417576"/>
           </a:xfrm>
           <a:prstGeom prst="rect">
             <a:avLst/>
@@ -9944,7 +10268,7 @@
         </p:nvSpPr>
         <p:spPr>
           <a:xfrm>
-            <a:off x="777240" y="2761487"/>
+            <a:off x="777240" y="2749295"/>
             <a:ext cx="10607040" cy="465151"/>
           </a:xfrm>
           <a:prstGeom prst="rect">
@@ -9960,27 +10284,51 @@
           <a:p>
             <a:pPr algn="ctr"/>
             <a:r>
-              <a:rPr sz="2600" b="0" i="0">
+              <a:rPr sz="2470" b="0" i="0">
                 <a:solidFill>
                   <a:srgbClr val="1A1A1A"/>
                 </a:solidFill>
-                <a:latin typeface="Century Schoolbook"/>
+                <a:latin typeface="Lexend"/>
               </a:rPr>
               <a:t>Which expression is equivalent?</a:t>
             </a:r>
           </a:p>
         </p:txBody>
       </p:sp>
-      <p:sp>
-        <p:nvSpPr>
-          <p:cNvPr id="10" name="TextBox 9"/>
-          <p:cNvSpPr txBox="1"/>
-          <p:nvPr/>
-        </p:nvSpPr>
-        <p:spPr>
-          <a:xfrm>
-            <a:off x="1874519" y="3427807"/>
-            <a:ext cx="4572000" cy="548640"/>
+      <p:pic>
+        <p:nvPicPr>
+          <p:cNvPr id="10" name="Picture 9" descr="3c35b48e83eedbe0.png"/>
+          <p:cNvPicPr>
+            <a:picLocks noChangeAspect="1"/>
+          </p:cNvPicPr>
+          <p:nvPr/>
+        </p:nvPicPr>
+        <p:blipFill>
+          <a:blip r:embed="rId3"/>
+          <a:stretch>
+            <a:fillRect/>
+          </a:stretch>
+        </p:blipFill>
+        <p:spPr>
+          <a:xfrm>
+            <a:off x="4704587" y="3452191"/>
+            <a:ext cx="2862072" cy="301752"/>
+          </a:xfrm>
+          <a:prstGeom prst="rect">
+            <a:avLst/>
+          </a:prstGeom>
+        </p:spPr>
+      </p:pic>
+      <p:sp>
+        <p:nvSpPr>
+          <p:cNvPr id="11" name="TextBox 10"/>
+          <p:cNvSpPr txBox="1"/>
+          <p:nvPr/>
+        </p:nvSpPr>
+        <p:spPr>
+          <a:xfrm>
+            <a:off x="777240" y="4663440"/>
+            <a:ext cx="10607040" cy="548640"/>
           </a:xfrm>
           <a:prstGeom prst="rect">
             <a:avLst/>
@@ -9993,234 +10341,22 @@
           </a:bodyPr>
           <a:lstStyle/>
           <a:p>
-            <a:pPr algn="l"/>
-            <a:r>
-              <a:rPr sz="2400" b="1" i="0">
-                <a:solidFill>
-                  <a:srgbClr val="1A1A1A"/>
-                </a:solidFill>
-                <a:latin typeface="Century Schoolbook"/>
-              </a:rPr>
-              <a:t>A.   </a:t>
-            </a:r>
-            <a:r>
-              <a:rPr sz="2400" b="0" i="0">
-                <a:solidFill>
-                  <a:srgbClr val="1A1A1A"/>
-                </a:solidFill>
-                <a:latin typeface="Century Schoolbook"/>
-              </a:rPr>
-              <a:t>6</a:t>
-            </a:r>
-            <a:r>
-              <a:rPr sz="2400" b="0" i="0" baseline="30000">
-                <a:solidFill>
-                  <a:srgbClr val="1A1A1A"/>
-                </a:solidFill>
-                <a:latin typeface="Century Schoolbook"/>
-              </a:rPr>
-              <a:t>-10</a:t>
-            </a:r>
-          </a:p>
-        </p:txBody>
-      </p:sp>
-      <p:sp>
-        <p:nvSpPr>
-          <p:cNvPr id="11" name="TextBox 10"/>
-          <p:cNvSpPr txBox="1"/>
-          <p:nvPr/>
-        </p:nvSpPr>
-        <p:spPr>
-          <a:xfrm>
-            <a:off x="6629400" y="3427807"/>
-            <a:ext cx="4572000" cy="548640"/>
-          </a:xfrm>
-          <a:prstGeom prst="rect">
-            <a:avLst/>
-          </a:prstGeom>
-          <a:noFill/>
-        </p:spPr>
-        <p:txBody>
-          <a:bodyPr wrap="square" lIns="45720" rIns="45720" tIns="18288" bIns="18288" anchor="t">
-            <a:spAutoFit/>
-          </a:bodyPr>
-          <a:lstStyle/>
-          <a:p>
-            <a:pPr algn="l"/>
-            <a:r>
-              <a:rPr sz="2400" b="1" i="0">
-                <a:solidFill>
-                  <a:srgbClr val="1A1A1A"/>
-                </a:solidFill>
-                <a:latin typeface="Century Schoolbook"/>
-              </a:rPr>
-              <a:t>B.   </a:t>
-            </a:r>
-            <a:r>
-              <a:rPr sz="2400" b="0" i="0">
-                <a:solidFill>
-                  <a:srgbClr val="1A1A1A"/>
-                </a:solidFill>
-                <a:latin typeface="Century Schoolbook"/>
-              </a:rPr>
-              <a:t>36</a:t>
-            </a:r>
-            <a:r>
-              <a:rPr sz="2400" b="0" i="0" baseline="30000">
-                <a:solidFill>
-                  <a:srgbClr val="1A1A1A"/>
-                </a:solidFill>
-                <a:latin typeface="Century Schoolbook"/>
-              </a:rPr>
-              <a:t>3</a:t>
-            </a:r>
-          </a:p>
-        </p:txBody>
-      </p:sp>
-      <p:sp>
-        <p:nvSpPr>
-          <p:cNvPr id="12" name="TextBox 11"/>
-          <p:cNvSpPr txBox="1"/>
-          <p:nvPr/>
-        </p:nvSpPr>
-        <p:spPr>
-          <a:xfrm>
-            <a:off x="1874519" y="4113607"/>
-            <a:ext cx="4572000" cy="548640"/>
-          </a:xfrm>
-          <a:prstGeom prst="rect">
-            <a:avLst/>
-          </a:prstGeom>
-          <a:noFill/>
-        </p:spPr>
-        <p:txBody>
-          <a:bodyPr wrap="square" lIns="45720" rIns="45720" tIns="18288" bIns="18288" anchor="t">
-            <a:spAutoFit/>
-          </a:bodyPr>
-          <a:lstStyle/>
-          <a:p>
-            <a:pPr algn="l"/>
-            <a:r>
-              <a:rPr sz="2400" b="1" i="0">
-                <a:solidFill>
-                  <a:srgbClr val="1A1A1A"/>
-                </a:solidFill>
-                <a:latin typeface="Century Schoolbook"/>
-              </a:rPr>
-              <a:t>C.   </a:t>
-            </a:r>
-            <a:r>
-              <a:rPr sz="2400" b="0" i="0">
-                <a:solidFill>
-                  <a:srgbClr val="1A1A1A"/>
-                </a:solidFill>
-                <a:latin typeface="Century Schoolbook"/>
-              </a:rPr>
-              <a:t>6</a:t>
-            </a:r>
-            <a:r>
-              <a:rPr sz="2400" b="0" i="0" baseline="30000">
-                <a:solidFill>
-                  <a:srgbClr val="1A1A1A"/>
-                </a:solidFill>
-                <a:latin typeface="Century Schoolbook"/>
-              </a:rPr>
-              <a:t>-7</a:t>
-            </a:r>
-          </a:p>
-        </p:txBody>
-      </p:sp>
-      <p:sp>
-        <p:nvSpPr>
-          <p:cNvPr id="13" name="TextBox 12"/>
-          <p:cNvSpPr txBox="1"/>
-          <p:nvPr/>
-        </p:nvSpPr>
-        <p:spPr>
-          <a:xfrm>
-            <a:off x="6629400" y="4113607"/>
-            <a:ext cx="4572000" cy="548640"/>
-          </a:xfrm>
-          <a:prstGeom prst="rect">
-            <a:avLst/>
-          </a:prstGeom>
-          <a:noFill/>
-        </p:spPr>
-        <p:txBody>
-          <a:bodyPr wrap="square" lIns="45720" rIns="45720" tIns="18288" bIns="18288" anchor="t">
-            <a:spAutoFit/>
-          </a:bodyPr>
-          <a:lstStyle/>
-          <a:p>
-            <a:pPr algn="l"/>
-            <a:r>
-              <a:rPr sz="2400" b="1" i="0">
+            <a:pPr algn="ctr"/>
+            <a:r>
+              <a:rPr sz="3040" b="1" i="0">
                 <a:solidFill>
                   <a:srgbClr val="9E1B32"/>
                 </a:solidFill>
-                <a:latin typeface="Century Schoolbook"/>
-              </a:rPr>
-              <a:t>D.   </a:t>
-            </a:r>
-            <a:r>
-              <a:rPr sz="2400" b="1" i="0">
+                <a:latin typeface="Lexend"/>
+              </a:rPr>
+              <a:t>Answer:   D — 6</a:t>
+            </a:r>
+            <a:r>
+              <a:rPr sz="3040" b="1" i="0" baseline="30000">
                 <a:solidFill>
                   <a:srgbClr val="9E1B32"/>
                 </a:solidFill>
-                <a:latin typeface="Century Schoolbook"/>
-              </a:rPr>
-              <a:t>6</a:t>
-            </a:r>
-            <a:r>
-              <a:rPr sz="2400" b="1" i="0" baseline="30000">
-                <a:solidFill>
-                  <a:srgbClr val="9E1B32"/>
-                </a:solidFill>
-                <a:latin typeface="Century Schoolbook"/>
-              </a:rPr>
-              <a:t>3</a:t>
-            </a:r>
-          </a:p>
-        </p:txBody>
-      </p:sp>
-      <p:sp>
-        <p:nvSpPr>
-          <p:cNvPr id="14" name="TextBox 13"/>
-          <p:cNvSpPr txBox="1"/>
-          <p:nvPr/>
-        </p:nvSpPr>
-        <p:spPr>
-          <a:xfrm>
-            <a:off x="777240" y="5119447"/>
-            <a:ext cx="10607040" cy="548640"/>
-          </a:xfrm>
-          <a:prstGeom prst="rect">
-            <a:avLst/>
-          </a:prstGeom>
-          <a:noFill/>
-        </p:spPr>
-        <p:txBody>
-          <a:bodyPr wrap="square" lIns="45720" rIns="45720" tIns="18288" bIns="18288" anchor="t">
-            <a:spAutoFit/>
-          </a:bodyPr>
-          <a:lstStyle/>
-          <a:p>
-            <a:pPr algn="ctr"/>
-            <a:r>
-              <a:rPr sz="3200" b="1" i="0">
-                <a:solidFill>
-                  <a:srgbClr val="9E1B32"/>
-                </a:solidFill>
-                <a:latin typeface="Century Schoolbook"/>
-              </a:rPr>
-              <a:t>Answer:   D — 6</a:t>
-            </a:r>
-            <a:r>
-              <a:rPr sz="3200" b="1" i="0" baseline="30000">
-                <a:solidFill>
-                  <a:srgbClr val="9E1B32"/>
-                </a:solidFill>
-                <a:latin typeface="Century Schoolbook"/>
+                <a:latin typeface="Lexend"/>
               </a:rPr>
               <a:t>3</a:t>
             </a:r>
@@ -10269,11 +10405,11 @@
           <a:p>
             <a:pPr algn="l"/>
             <a:r>
-              <a:rPr sz="3400" b="1" i="0">
+              <a:rPr sz="3229" b="1" i="0">
                 <a:solidFill>
                   <a:srgbClr val="1A1A1A"/>
                 </a:solidFill>
-                <a:latin typeface="Century Schoolbook"/>
+                <a:latin typeface="Lexend"/>
               </a:rPr>
               <a:t>Whiteboards   ·   Question 7 of 9</a:t>
             </a:r>
@@ -10409,11 +10545,11 @@
           <a:p>
             <a:pPr algn="l"/>
             <a:r>
-              <a:rPr sz="1100" b="0" i="1">
+              <a:rPr sz="1040" b="0" i="0">
                 <a:solidFill>
                   <a:srgbClr val="6B6B6B"/>
                 </a:solidFill>
-                <a:latin typeface="Century Schoolbook"/>
+                <a:latin typeface="Lexend"/>
               </a:rPr>
               <a:t>Grade 7 Accelerated · Unit 3 · Lesson 4 — Negative Exponent Law</a:t>
             </a:r>
@@ -10444,11 +10580,11 @@
           <a:p>
             <a:pPr algn="r"/>
             <a:r>
-              <a:rPr sz="1100" b="0" i="0">
+              <a:rPr sz="1040" b="0" i="0">
                 <a:solidFill>
                   <a:srgbClr val="6B6B6B"/>
                 </a:solidFill>
-                <a:latin typeface="Century Schoolbook"/>
+                <a:latin typeface="Lexend"/>
               </a:rPr>
               <a:t>27</a:t>
             </a:r>
@@ -10457,7 +10593,7 @@
       </p:sp>
       <p:pic>
         <p:nvPicPr>
-          <p:cNvPr id="8" name="Picture 7" descr="e37e6585587b7338.png"/>
+          <p:cNvPr id="8" name="Picture 7" descr="c6574940b1c5ccf0.png"/>
           <p:cNvPicPr>
             <a:picLocks noChangeAspect="1"/>
           </p:cNvPicPr>
@@ -10471,8 +10607,8 @@
         </p:blipFill>
         <p:spPr>
           <a:xfrm>
-            <a:off x="5375148" y="2194560"/>
-            <a:ext cx="1411224" cy="432816"/>
+            <a:off x="5372099" y="2194560"/>
+            <a:ext cx="1417320" cy="420624"/>
           </a:xfrm>
           <a:prstGeom prst="rect">
             <a:avLst/>
@@ -10503,11 +10639,11 @@
           <a:p>
             <a:pPr algn="ctr"/>
             <a:r>
-              <a:rPr sz="2600" b="1" i="0">
+              <a:rPr sz="2470" b="1" i="0">
                 <a:solidFill>
                   <a:srgbClr val="1A1A1A"/>
                 </a:solidFill>
-                <a:latin typeface="Century Schoolbook"/>
+                <a:latin typeface="Lexend"/>
               </a:rPr>
               <a:t>Answer it.</a:t>
             </a:r>
@@ -10556,11 +10692,11 @@
           <a:p>
             <a:pPr algn="l"/>
             <a:r>
-              <a:rPr sz="3400" b="1" i="0">
+              <a:rPr sz="3229" b="1" i="0">
                 <a:solidFill>
                   <a:srgbClr val="1A1A1A"/>
                 </a:solidFill>
-                <a:latin typeface="Century Schoolbook"/>
+                <a:latin typeface="Lexend"/>
               </a:rPr>
               <a:t>Whiteboards   ·   Question 7 of 9</a:t>
             </a:r>
@@ -10696,11 +10832,11 @@
           <a:p>
             <a:pPr algn="l"/>
             <a:r>
-              <a:rPr sz="1100" b="0" i="1">
+              <a:rPr sz="1040" b="0" i="0">
                 <a:solidFill>
                   <a:srgbClr val="6B6B6B"/>
                 </a:solidFill>
-                <a:latin typeface="Century Schoolbook"/>
+                <a:latin typeface="Lexend"/>
               </a:rPr>
               <a:t>Grade 7 Accelerated · Unit 3 · Lesson 4 — Negative Exponent Law</a:t>
             </a:r>
@@ -10731,11 +10867,11 @@
           <a:p>
             <a:pPr algn="r"/>
             <a:r>
-              <a:rPr sz="1100" b="0" i="0">
+              <a:rPr sz="1040" b="0" i="0">
                 <a:solidFill>
                   <a:srgbClr val="6B6B6B"/>
                 </a:solidFill>
-                <a:latin typeface="Century Schoolbook"/>
+                <a:latin typeface="Lexend"/>
               </a:rPr>
               <a:t>28</a:t>
             </a:r>
@@ -10744,7 +10880,7 @@
       </p:sp>
       <p:pic>
         <p:nvPicPr>
-          <p:cNvPr id="8" name="Picture 7" descr="3a37a698b11c2b61.png"/>
+          <p:cNvPr id="8" name="Picture 7" descr="737bd8d522cf781f.png"/>
           <p:cNvPicPr>
             <a:picLocks noChangeAspect="1"/>
           </p:cNvPicPr>
@@ -10758,17 +10894,41 @@
         </p:blipFill>
         <p:spPr>
           <a:xfrm>
-            <a:off x="5375148" y="2103120"/>
-            <a:ext cx="1411224" cy="426720"/>
+            <a:off x="5370576" y="2103120"/>
+            <a:ext cx="1420368" cy="420624"/>
           </a:xfrm>
           <a:prstGeom prst="rect">
             <a:avLst/>
           </a:prstGeom>
         </p:spPr>
       </p:pic>
-      <p:sp>
-        <p:nvSpPr>
-          <p:cNvPr id="9" name="TextBox 8"/>
+      <p:pic>
+        <p:nvPicPr>
+          <p:cNvPr id="9" name="Picture 8" descr="cd3edc3f48ebd1c9.png"/>
+          <p:cNvPicPr>
+            <a:picLocks noChangeAspect="1"/>
+          </p:cNvPicPr>
+          <p:nvPr/>
+        </p:nvPicPr>
+        <p:blipFill>
+          <a:blip r:embed="rId3"/>
+          <a:stretch>
+            <a:fillRect/>
+          </a:stretch>
+        </p:blipFill>
+        <p:spPr>
+          <a:xfrm>
+            <a:off x="4431791" y="2878836"/>
+            <a:ext cx="3410712" cy="304800"/>
+          </a:xfrm>
+          <a:prstGeom prst="rect">
+            <a:avLst/>
+          </a:prstGeom>
+        </p:spPr>
+      </p:pic>
+      <p:sp>
+        <p:nvSpPr>
+          <p:cNvPr id="10" name="TextBox 9"/>
           <p:cNvSpPr txBox="1"/>
           <p:nvPr/>
         </p:nvSpPr>
@@ -10790,11 +10950,11 @@
           <a:p>
             <a:pPr algn="ctr"/>
             <a:r>
-              <a:rPr sz="3200" b="1" i="0">
+              <a:rPr sz="3040" b="1" i="0">
                 <a:solidFill>
                   <a:srgbClr val="9E1B32"/>
                 </a:solidFill>
-                <a:latin typeface="Century Schoolbook"/>
+                <a:latin typeface="Lexend"/>
               </a:rPr>
               <a:t>Answer:   1</a:t>
             </a:r>
@@ -10843,11 +11003,11 @@
           <a:p>
             <a:pPr algn="l"/>
             <a:r>
-              <a:rPr sz="3400" b="1" i="0">
+              <a:rPr sz="3229" b="1" i="0">
                 <a:solidFill>
                   <a:srgbClr val="1A1A1A"/>
                 </a:solidFill>
-                <a:latin typeface="Century Schoolbook"/>
+                <a:latin typeface="Lexend"/>
               </a:rPr>
               <a:t>Whiteboards   ·   Question 8 of 9</a:t>
             </a:r>
@@ -10983,11 +11143,11 @@
           <a:p>
             <a:pPr algn="l"/>
             <a:r>
-              <a:rPr sz="1100" b="0" i="1">
+              <a:rPr sz="1040" b="0" i="0">
                 <a:solidFill>
                   <a:srgbClr val="6B6B6B"/>
                 </a:solidFill>
-                <a:latin typeface="Century Schoolbook"/>
+                <a:latin typeface="Lexend"/>
               </a:rPr>
               <a:t>Grade 7 Accelerated · Unit 3 · Lesson 4 — Negative Exponent Law</a:t>
             </a:r>
@@ -11018,11 +11178,11 @@
           <a:p>
             <a:pPr algn="r"/>
             <a:r>
-              <a:rPr sz="1100" b="0" i="0">
+              <a:rPr sz="1040" b="0" i="0">
                 <a:solidFill>
                   <a:srgbClr val="6B6B6B"/>
                 </a:solidFill>
-                <a:latin typeface="Century Schoolbook"/>
+                <a:latin typeface="Lexend"/>
               </a:rPr>
               <a:t>29</a:t>
             </a:r>
@@ -11031,7 +11191,7 @@
       </p:sp>
       <p:pic>
         <p:nvPicPr>
-          <p:cNvPr id="8" name="Picture 7" descr="d5e2dc9bfa32dfce.png"/>
+          <p:cNvPr id="8" name="Picture 7" descr="c069a33fa07e0980.png"/>
           <p:cNvPicPr>
             <a:picLocks noChangeAspect="1"/>
           </p:cNvPicPr>
@@ -11045,8 +11205,8 @@
         </p:blipFill>
         <p:spPr>
           <a:xfrm>
-            <a:off x="5725667" y="2194560"/>
-            <a:ext cx="710184" cy="1027176"/>
+            <a:off x="5742431" y="2194560"/>
+            <a:ext cx="676656" cy="978408"/>
           </a:xfrm>
           <a:prstGeom prst="rect">
             <a:avLst/>
@@ -11077,11 +11237,11 @@
           <a:p>
             <a:pPr algn="ctr"/>
             <a:r>
-              <a:rPr sz="2600" b="1" i="0">
+              <a:rPr sz="2470" b="1" i="0">
                 <a:solidFill>
                   <a:srgbClr val="1A1A1A"/>
                 </a:solidFill>
-                <a:latin typeface="Century Schoolbook"/>
+                <a:latin typeface="Lexend"/>
               </a:rPr>
               <a:t>Answer it.</a:t>
             </a:r>
@@ -11130,11 +11290,11 @@
           <a:p>
             <a:pPr algn="l"/>
             <a:r>
-              <a:rPr sz="3600" b="1" i="0">
+              <a:rPr sz="3420" b="1" i="0">
                 <a:solidFill>
                   <a:srgbClr val="1A1A1A"/>
                 </a:solidFill>
-                <a:latin typeface="Century Schoolbook"/>
+                <a:latin typeface="Lexend"/>
               </a:rPr>
               <a:t>Warm-Up</a:t>
             </a:r>
@@ -11270,11 +11430,11 @@
           <a:p>
             <a:pPr algn="l"/>
             <a:r>
-              <a:rPr sz="1100" b="0" i="1">
+              <a:rPr sz="1040" b="0" i="0">
                 <a:solidFill>
                   <a:srgbClr val="6B6B6B"/>
                 </a:solidFill>
-                <a:latin typeface="Century Schoolbook"/>
+                <a:latin typeface="Lexend"/>
               </a:rPr>
               <a:t>Grade 7 Accelerated · Unit 3 · Lesson 4 — Negative Exponent Law</a:t>
             </a:r>
@@ -11305,11 +11465,11 @@
           <a:p>
             <a:pPr algn="r"/>
             <a:r>
-              <a:rPr sz="1100" b="0" i="0">
+              <a:rPr sz="1040" b="0" i="0">
                 <a:solidFill>
                   <a:srgbClr val="6B6B6B"/>
                 </a:solidFill>
-                <a:latin typeface="Century Schoolbook"/>
+                <a:latin typeface="Lexend"/>
               </a:rPr>
               <a:t>3</a:t>
             </a:r>
@@ -11324,8 +11484,8 @@
         </p:nvSpPr>
         <p:spPr>
           <a:xfrm>
-            <a:off x="1874519" y="1566672"/>
-            <a:ext cx="3058734" cy="457200"/>
+            <a:off x="1874519" y="1559052"/>
+            <a:ext cx="2921808" cy="457200"/>
           </a:xfrm>
           <a:prstGeom prst="rect">
             <a:avLst/>
@@ -11340,11 +11500,11 @@
           <a:p>
             <a:pPr algn="l"/>
             <a:r>
-              <a:rPr sz="2300" b="0" i="0">
+              <a:rPr sz="2180" b="0" i="0">
                 <a:solidFill>
                   <a:srgbClr val="1A1A1A"/>
                 </a:solidFill>
-                <a:latin typeface="Century Schoolbook"/>
+                <a:latin typeface="Lexend"/>
               </a:rPr>
               <a:t>1.   Find the value:  </a:t>
             </a:r>
@@ -11353,7 +11513,7 @@
       </p:sp>
       <p:pic>
         <p:nvPicPr>
-          <p:cNvPr id="9" name="Picture 8" descr="e6b67427858e96f9.png"/>
+          <p:cNvPr id="9" name="Picture 8" descr="7e2e2a945d199f77.png"/>
           <p:cNvPicPr>
             <a:picLocks noChangeAspect="1"/>
           </p:cNvPicPr>
@@ -11367,8 +11527,8 @@
         </p:blipFill>
         <p:spPr>
           <a:xfrm>
-            <a:off x="4796094" y="1463040"/>
-            <a:ext cx="795528" cy="664464"/>
+            <a:off x="4659168" y="1463040"/>
+            <a:ext cx="844296" cy="649224"/>
           </a:xfrm>
           <a:prstGeom prst="rect">
             <a:avLst/>
@@ -11383,8 +11543,8 @@
         </p:nvSpPr>
         <p:spPr>
           <a:xfrm>
-            <a:off x="6140262" y="1440180"/>
-            <a:ext cx="565792" cy="457200"/>
+            <a:off x="6052104" y="1440180"/>
+            <a:ext cx="546819" cy="457200"/>
           </a:xfrm>
           <a:prstGeom prst="rect">
             <a:avLst/>
@@ -11399,11 +11559,11 @@
           <a:p>
             <a:pPr algn="l"/>
             <a:r>
-              <a:rPr sz="2300" b="1" i="0">
+              <a:rPr sz="2180" b="1" i="0">
                 <a:solidFill>
                   <a:srgbClr val="9E1B32"/>
                 </a:solidFill>
-                <a:latin typeface="Century Schoolbook"/>
+                <a:latin typeface="Lexend"/>
               </a:rPr>
               <a:t>25</a:t>
             </a:r>
@@ -11418,8 +11578,8 @@
         </p:nvSpPr>
         <p:spPr>
           <a:xfrm>
-            <a:off x="1874519" y="2305812"/>
-            <a:ext cx="3255563" cy="457200"/>
+            <a:off x="1874519" y="2290572"/>
+            <a:ext cx="3159402" cy="457200"/>
           </a:xfrm>
           <a:prstGeom prst="rect">
             <a:avLst/>
@@ -11434,11 +11594,11 @@
           <a:p>
             <a:pPr algn="l"/>
             <a:r>
-              <a:rPr sz="2300" b="0" i="0">
+              <a:rPr sz="2180" b="0" i="0">
                 <a:solidFill>
                   <a:srgbClr val="1A1A1A"/>
                 </a:solidFill>
-                <a:latin typeface="Century Schoolbook"/>
+                <a:latin typeface="Lexend"/>
               </a:rPr>
               <a:t>2.   Which is greater, </a:t>
             </a:r>
@@ -11447,7 +11607,7 @@
       </p:sp>
       <p:pic>
         <p:nvPicPr>
-          <p:cNvPr id="12" name="Picture 11" descr="9a9a9137b9c7170a.png"/>
+          <p:cNvPr id="12" name="Picture 11" descr="10d7b99c008a1e6a.png"/>
           <p:cNvPicPr>
             <a:picLocks noChangeAspect="1"/>
           </p:cNvPicPr>
@@ -11461,8 +11621,8 @@
         </p:blipFill>
         <p:spPr>
           <a:xfrm>
-            <a:off x="4992923" y="2330196"/>
-            <a:ext cx="688848" cy="408432"/>
+            <a:off x="4896762" y="2324100"/>
+            <a:ext cx="697992" cy="390144"/>
           </a:xfrm>
           <a:prstGeom prst="rect">
             <a:avLst/>
@@ -11477,8 +11637,8 @@
         </p:nvSpPr>
         <p:spPr>
           <a:xfrm>
-            <a:off x="5681771" y="2305812"/>
-            <a:ext cx="1242626" cy="457200"/>
+            <a:off x="5594754" y="2290572"/>
+            <a:ext cx="1225980" cy="457200"/>
           </a:xfrm>
           <a:prstGeom prst="rect">
             <a:avLst/>
@@ -11493,11 +11653,11 @@
           <a:p>
             <a:pPr algn="l"/>
             <a:r>
-              <a:rPr sz="2300" b="0" i="0">
+              <a:rPr sz="2180" b="0" i="0">
                 <a:solidFill>
                   <a:srgbClr val="1A1A1A"/>
                 </a:solidFill>
-                <a:latin typeface="Century Schoolbook"/>
+                <a:latin typeface="Lexend"/>
               </a:rPr>
               <a:t> or 5.5?</a:t>
             </a:r>
@@ -11512,8 +11672,8 @@
         </p:nvSpPr>
         <p:spPr>
           <a:xfrm>
-            <a:off x="7335878" y="2305812"/>
-            <a:ext cx="651876" cy="457200"/>
+            <a:off x="7232214" y="2290572"/>
+            <a:ext cx="636492" cy="457200"/>
           </a:xfrm>
           <a:prstGeom prst="rect">
             <a:avLst/>
@@ -11528,11 +11688,11 @@
           <a:p>
             <a:pPr algn="l"/>
             <a:r>
-              <a:rPr sz="2300" b="1" i="0">
+              <a:rPr sz="2180" b="1" i="0">
                 <a:solidFill>
                   <a:srgbClr val="9E1B32"/>
                 </a:solidFill>
-                <a:latin typeface="Century Schoolbook"/>
+                <a:latin typeface="Lexend"/>
               </a:rPr>
               <a:t>5.5</a:t>
             </a:r>
@@ -11547,8 +11707,8 @@
         </p:nvSpPr>
         <p:spPr>
           <a:xfrm>
-            <a:off x="1874519" y="2918460"/>
-            <a:ext cx="1652008" cy="457200"/>
+            <a:off x="1874519" y="2903220"/>
+            <a:ext cx="1612295" cy="457200"/>
           </a:xfrm>
           <a:prstGeom prst="rect">
             <a:avLst/>
@@ -11563,11 +11723,11 @@
           <a:p>
             <a:pPr algn="l"/>
             <a:r>
-              <a:rPr sz="2300" b="0" i="0">
+              <a:rPr sz="2180" b="0" i="0">
                 <a:solidFill>
                   <a:srgbClr val="1A1A1A"/>
                 </a:solidFill>
-                <a:latin typeface="Century Schoolbook"/>
+                <a:latin typeface="Lexend"/>
               </a:rPr>
               <a:t>3.   Solve  </a:t>
             </a:r>
@@ -11576,7 +11736,7 @@
       </p:sp>
       <p:pic>
         <p:nvPicPr>
-          <p:cNvPr id="16" name="Picture 15" descr="86c14b3a9138d085.png"/>
+          <p:cNvPr id="16" name="Picture 15" descr="3835561d3a33385e.png"/>
           <p:cNvPicPr>
             <a:picLocks noChangeAspect="1"/>
           </p:cNvPicPr>
@@ -11590,8 +11750,8 @@
         </p:blipFill>
         <p:spPr>
           <a:xfrm>
-            <a:off x="3389368" y="3031236"/>
-            <a:ext cx="1136904" cy="231648"/>
+            <a:off x="3349655" y="3019044"/>
+            <a:ext cx="1112520" cy="225552"/>
           </a:xfrm>
           <a:prstGeom prst="rect">
             <a:avLst/>
@@ -11606,8 +11766,8 @@
         </p:nvSpPr>
         <p:spPr>
           <a:xfrm>
-            <a:off x="5074912" y="2918460"/>
-            <a:ext cx="1130250" cy="457200"/>
+            <a:off x="5010815" y="2903220"/>
+            <a:ext cx="1093295" cy="457200"/>
           </a:xfrm>
           <a:prstGeom prst="rect">
             <a:avLst/>
@@ -11622,11 +11782,11 @@
           <a:p>
             <a:pPr algn="l"/>
             <a:r>
-              <a:rPr sz="2300" b="1" i="0">
+              <a:rPr sz="2180" b="1" i="0">
                 <a:solidFill>
                   <a:srgbClr val="9E1B32"/>
                 </a:solidFill>
-                <a:latin typeface="Century Schoolbook"/>
+                <a:latin typeface="Lexend"/>
               </a:rPr>
               <a:t>x = −7</a:t>
             </a:r>
@@ -11641,8 +11801,8 @@
         </p:nvSpPr>
         <p:spPr>
           <a:xfrm>
-            <a:off x="1874519" y="3602736"/>
-            <a:ext cx="4308965" cy="457200"/>
+            <a:off x="1874519" y="3579876"/>
+            <a:ext cx="4278880" cy="457200"/>
           </a:xfrm>
           <a:prstGeom prst="rect">
             <a:avLst/>
@@ -11657,11 +11817,11 @@
           <a:p>
             <a:pPr algn="l"/>
             <a:r>
-              <a:rPr sz="2300" b="0" i="0">
+              <a:rPr sz="2180" b="0" i="0">
                 <a:solidFill>
                   <a:srgbClr val="1A1A1A"/>
                 </a:solidFill>
-                <a:latin typeface="Century Schoolbook"/>
+                <a:latin typeface="Lexend"/>
               </a:rPr>
               <a:t>4.   What is the reciprocal of </a:t>
             </a:r>
@@ -11670,7 +11830,7 @@
       </p:sp>
       <p:pic>
         <p:nvPicPr>
-          <p:cNvPr id="19" name="Picture 18" descr="ef641fad4ba74c7d.png"/>
+          <p:cNvPr id="19" name="Picture 18" descr="f0b15a73405cbe94.png"/>
           <p:cNvPicPr>
             <a:picLocks noChangeAspect="1"/>
           </p:cNvPicPr>
@@ -11684,8 +11844,8 @@
         </p:blipFill>
         <p:spPr>
           <a:xfrm>
-            <a:off x="6046325" y="3553968"/>
-            <a:ext cx="170688" cy="554736"/>
+            <a:off x="6016240" y="3538728"/>
+            <a:ext cx="198120" cy="539496"/>
           </a:xfrm>
           <a:prstGeom prst="rect">
             <a:avLst/>
@@ -11700,8 +11860,8 @@
         </p:nvSpPr>
         <p:spPr>
           <a:xfrm>
-            <a:off x="6217013" y="3602736"/>
-            <a:ext cx="3880389" cy="457200"/>
+            <a:off x="6214360" y="3579876"/>
+            <a:ext cx="3917394" cy="457200"/>
           </a:xfrm>
           <a:prstGeom prst="rect">
             <a:avLst/>
@@ -11716,11 +11876,11 @@
           <a:p>
             <a:pPr algn="l"/>
             <a:r>
-              <a:rPr sz="2300" b="0" i="0">
+              <a:rPr sz="2180" b="0" i="0">
                 <a:solidFill>
                   <a:srgbClr val="1A1A1A"/>
                 </a:solidFill>
-                <a:latin typeface="Century Schoolbook"/>
+                <a:latin typeface="Lexend"/>
               </a:rPr>
               <a:t>?  What is the opposite of </a:t>
             </a:r>
@@ -11729,7 +11889,7 @@
       </p:sp>
       <p:pic>
         <p:nvPicPr>
-          <p:cNvPr id="21" name="Picture 20" descr="ef641fad4ba74c7d.png"/>
+          <p:cNvPr id="21" name="Picture 20" descr="f0b15a73405cbe94.png"/>
           <p:cNvPicPr>
             <a:picLocks noChangeAspect="1"/>
           </p:cNvPicPr>
@@ -11743,8 +11903,8 @@
         </p:blipFill>
         <p:spPr>
           <a:xfrm>
-            <a:off x="9960242" y="3553968"/>
-            <a:ext cx="170688" cy="554736"/>
+            <a:off x="9994595" y="3538728"/>
+            <a:ext cx="198120" cy="539496"/>
           </a:xfrm>
           <a:prstGeom prst="rect">
             <a:avLst/>
@@ -11759,8 +11919,8 @@
         </p:nvSpPr>
         <p:spPr>
           <a:xfrm>
-            <a:off x="10130930" y="3602736"/>
-            <a:ext cx="347771" cy="457200"/>
+            <a:off x="10192715" y="3579876"/>
+            <a:ext cx="360631" cy="457200"/>
           </a:xfrm>
           <a:prstGeom prst="rect">
             <a:avLst/>
@@ -11775,11 +11935,11 @@
           <a:p>
             <a:pPr algn="l"/>
             <a:r>
-              <a:rPr sz="2300" b="0" i="0">
+              <a:rPr sz="2180" b="0" i="0">
                 <a:solidFill>
                   <a:srgbClr val="1A1A1A"/>
                 </a:solidFill>
-                <a:latin typeface="Century Schoolbook"/>
+                <a:latin typeface="Lexend"/>
               </a:rPr>
               <a:t>?</a:t>
             </a:r>
@@ -11788,7 +11948,7 @@
       </p:sp>
       <p:pic>
         <p:nvPicPr>
-          <p:cNvPr id="23" name="Picture 22" descr="c947c2e93b2d33a0.png"/>
+          <p:cNvPr id="23" name="Picture 22" descr="fa151ddb9afb949a.png"/>
           <p:cNvPicPr>
             <a:picLocks noChangeAspect="1"/>
           </p:cNvPicPr>
@@ -11802,8 +11962,8 @@
         </p:blipFill>
         <p:spPr>
           <a:xfrm>
-            <a:off x="2606040" y="4154424"/>
-            <a:ext cx="170688" cy="554736"/>
+            <a:off x="2606040" y="4123944"/>
+            <a:ext cx="198120" cy="539496"/>
           </a:xfrm>
           <a:prstGeom prst="rect">
             <a:avLst/>
@@ -11818,8 +11978,8 @@
         </p:nvSpPr>
         <p:spPr>
           <a:xfrm>
-            <a:off x="2776728" y="4203192"/>
-            <a:ext cx="1173581" cy="457200"/>
+            <a:off x="2804160" y="4165092"/>
+            <a:ext cx="1159787" cy="457200"/>
           </a:xfrm>
           <a:prstGeom prst="rect">
             <a:avLst/>
@@ -11834,11 +11994,11 @@
           <a:p>
             <a:pPr algn="l"/>
             <a:r>
-              <a:rPr sz="2300" b="1" i="0">
+              <a:rPr sz="2180" b="1" i="0">
                 <a:solidFill>
                   <a:srgbClr val="9E1B32"/>
                 </a:solidFill>
-                <a:latin typeface="Century Schoolbook"/>
+                <a:latin typeface="Lexend"/>
               </a:rPr>
               <a:t>  and  </a:t>
             </a:r>
@@ -11847,7 +12007,7 @@
       </p:sp>
       <p:pic>
         <p:nvPicPr>
-          <p:cNvPr id="25" name="Picture 24" descr="a339c6c78254d98a.png"/>
+          <p:cNvPr id="25" name="Picture 24" descr="8205fb4d0fb708a2.png"/>
           <p:cNvPicPr>
             <a:picLocks noChangeAspect="1"/>
           </p:cNvPicPr>
@@ -11861,8 +12021,8 @@
         </p:blipFill>
         <p:spPr>
           <a:xfrm>
-            <a:off x="3813149" y="4154424"/>
-            <a:ext cx="377952" cy="554736"/>
+            <a:off x="3826787" y="4123944"/>
+            <a:ext cx="365760" cy="539496"/>
           </a:xfrm>
           <a:prstGeom prst="rect">
             <a:avLst/>
@@ -11911,11 +12071,11 @@
           <a:p>
             <a:pPr algn="l"/>
             <a:r>
-              <a:rPr sz="3400" b="1" i="0">
+              <a:rPr sz="3229" b="1" i="0">
                 <a:solidFill>
                   <a:srgbClr val="1A1A1A"/>
                 </a:solidFill>
-                <a:latin typeface="Century Schoolbook"/>
+                <a:latin typeface="Lexend"/>
               </a:rPr>
               <a:t>Whiteboards   ·   Question 8 of 9</a:t>
             </a:r>
@@ -12051,11 +12211,11 @@
           <a:p>
             <a:pPr algn="l"/>
             <a:r>
-              <a:rPr sz="1100" b="0" i="1">
+              <a:rPr sz="1040" b="0" i="0">
                 <a:solidFill>
                   <a:srgbClr val="6B6B6B"/>
                 </a:solidFill>
-                <a:latin typeface="Century Schoolbook"/>
+                <a:latin typeface="Lexend"/>
               </a:rPr>
               <a:t>Grade 7 Accelerated · Unit 3 · Lesson 4 — Negative Exponent Law</a:t>
             </a:r>
@@ -12086,11 +12246,11 @@
           <a:p>
             <a:pPr algn="r"/>
             <a:r>
-              <a:rPr sz="1100" b="0" i="0">
+              <a:rPr sz="1040" b="0" i="0">
                 <a:solidFill>
                   <a:srgbClr val="6B6B6B"/>
                 </a:solidFill>
-                <a:latin typeface="Century Schoolbook"/>
+                <a:latin typeface="Lexend"/>
               </a:rPr>
               <a:t>30</a:t>
             </a:r>
@@ -12099,7 +12259,7 @@
       </p:sp>
       <p:pic>
         <p:nvPicPr>
-          <p:cNvPr id="8" name="Picture 7" descr="4d44fa8d60938d74.png"/>
+          <p:cNvPr id="8" name="Picture 7" descr="3bba102cf2b4d39b.png"/>
           <p:cNvPicPr>
             <a:picLocks noChangeAspect="1"/>
           </p:cNvPicPr>
@@ -12113,52 +12273,17 @@
         </p:blipFill>
         <p:spPr>
           <a:xfrm>
-            <a:off x="5728716" y="2103120"/>
-            <a:ext cx="704088" cy="1027176"/>
+            <a:off x="5745480" y="2103120"/>
+            <a:ext cx="670560" cy="981455"/>
           </a:xfrm>
           <a:prstGeom prst="rect">
             <a:avLst/>
           </a:prstGeom>
         </p:spPr>
       </p:pic>
-      <p:sp>
-        <p:nvSpPr>
-          <p:cNvPr id="9" name="TextBox 8"/>
-          <p:cNvSpPr txBox="1"/>
-          <p:nvPr/>
-        </p:nvSpPr>
-        <p:spPr>
-          <a:xfrm>
-            <a:off x="4887468" y="4860036"/>
-            <a:ext cx="1920240" cy="548640"/>
-          </a:xfrm>
-          <a:prstGeom prst="rect">
-            <a:avLst/>
-          </a:prstGeom>
-          <a:noFill/>
-        </p:spPr>
-        <p:txBody>
-          <a:bodyPr wrap="square" lIns="45720" rIns="45720" tIns="18288" bIns="18288" anchor="ctr">
-            <a:spAutoFit/>
-          </a:bodyPr>
-          <a:lstStyle/>
-          <a:p>
-            <a:pPr algn="l"/>
-            <a:r>
-              <a:rPr sz="3200" b="1" i="0">
-                <a:solidFill>
-                  <a:srgbClr val="9E1B32"/>
-                </a:solidFill>
-                <a:latin typeface="Century Schoolbook"/>
-              </a:rPr>
-              <a:t>Answer:</a:t>
-            </a:r>
-          </a:p>
-        </p:txBody>
-      </p:sp>
       <p:pic>
         <p:nvPicPr>
-          <p:cNvPr id="10" name="Picture 9" descr="f17cb56101b51681.png"/>
+          <p:cNvPr id="9" name="Picture 8" descr="0e2ea5a2bdf7f31c.png"/>
           <p:cNvPicPr>
             <a:picLocks noChangeAspect="1"/>
           </p:cNvPicPr>
@@ -12172,8 +12297,91 @@
         </p:blipFill>
         <p:spPr>
           <a:xfrm>
-            <a:off x="6807708" y="4663440"/>
-            <a:ext cx="466344" cy="941832"/>
+            <a:off x="4885944" y="3386328"/>
+            <a:ext cx="2502408" cy="710184"/>
+          </a:xfrm>
+          <a:prstGeom prst="rect">
+            <a:avLst/>
+          </a:prstGeom>
+        </p:spPr>
+      </p:pic>
+      <p:pic>
+        <p:nvPicPr>
+          <p:cNvPr id="10" name="Picture 9" descr="c6e45c9cf6e731b9.png"/>
+          <p:cNvPicPr>
+            <a:picLocks noChangeAspect="1"/>
+          </p:cNvPicPr>
+          <p:nvPr/>
+        </p:nvPicPr>
+        <p:blipFill>
+          <a:blip r:embed="rId4"/>
+          <a:stretch>
+            <a:fillRect/>
+          </a:stretch>
+        </p:blipFill>
+        <p:spPr>
+          <a:xfrm>
+            <a:off x="4885944" y="4224528"/>
+            <a:ext cx="1149096" cy="658368"/>
+          </a:xfrm>
+          <a:prstGeom prst="rect">
+            <a:avLst/>
+          </a:prstGeom>
+        </p:spPr>
+      </p:pic>
+      <p:sp>
+        <p:nvSpPr>
+          <p:cNvPr id="11" name="TextBox 10"/>
+          <p:cNvSpPr txBox="1"/>
+          <p:nvPr/>
+        </p:nvSpPr>
+        <p:spPr>
+          <a:xfrm>
+            <a:off x="4878324" y="5199888"/>
+            <a:ext cx="1920240" cy="548640"/>
+          </a:xfrm>
+          <a:prstGeom prst="rect">
+            <a:avLst/>
+          </a:prstGeom>
+          <a:noFill/>
+        </p:spPr>
+        <p:txBody>
+          <a:bodyPr wrap="square" lIns="45720" rIns="45720" tIns="18288" bIns="18288" anchor="ctr">
+            <a:spAutoFit/>
+          </a:bodyPr>
+          <a:lstStyle/>
+          <a:p>
+            <a:pPr algn="l"/>
+            <a:r>
+              <a:rPr sz="3040" b="1" i="0">
+                <a:solidFill>
+                  <a:srgbClr val="9E1B32"/>
+                </a:solidFill>
+                <a:latin typeface="Lexend"/>
+              </a:rPr>
+              <a:t>Answer:</a:t>
+            </a:r>
+          </a:p>
+        </p:txBody>
+      </p:sp>
+      <p:pic>
+        <p:nvPicPr>
+          <p:cNvPr id="12" name="Picture 11" descr="d47bd37afc5ec3e7.png"/>
+          <p:cNvPicPr>
+            <a:picLocks noChangeAspect="1"/>
+          </p:cNvPicPr>
+          <p:nvPr/>
+        </p:nvPicPr>
+        <p:blipFill>
+          <a:blip r:embed="rId5"/>
+          <a:stretch>
+            <a:fillRect/>
+          </a:stretch>
+        </p:blipFill>
+        <p:spPr>
+          <a:xfrm>
+            <a:off x="6798564" y="5020056"/>
+            <a:ext cx="484632" cy="908304"/>
           </a:xfrm>
           <a:prstGeom prst="rect">
             <a:avLst/>
@@ -12222,11 +12430,11 @@
           <a:p>
             <a:pPr algn="l"/>
             <a:r>
-              <a:rPr sz="3400" b="1" i="0">
+              <a:rPr sz="3229" b="1" i="0">
                 <a:solidFill>
                   <a:srgbClr val="1A1A1A"/>
                 </a:solidFill>
-                <a:latin typeface="Century Schoolbook"/>
+                <a:latin typeface="Lexend"/>
               </a:rPr>
               <a:t>Whiteboards   ·   Question 9 of 9</a:t>
             </a:r>
@@ -12362,11 +12570,11 @@
           <a:p>
             <a:pPr algn="l"/>
             <a:r>
-              <a:rPr sz="1100" b="0" i="1">
+              <a:rPr sz="1040" b="0" i="0">
                 <a:solidFill>
                   <a:srgbClr val="6B6B6B"/>
                 </a:solidFill>
-                <a:latin typeface="Century Schoolbook"/>
+                <a:latin typeface="Lexend"/>
               </a:rPr>
               <a:t>Grade 7 Accelerated · Unit 3 · Lesson 4 — Negative Exponent Law</a:t>
             </a:r>
@@ -12397,11 +12605,11 @@
           <a:p>
             <a:pPr algn="r"/>
             <a:r>
-              <a:rPr sz="1100" b="0" i="0">
+              <a:rPr sz="1040" b="0" i="0">
                 <a:solidFill>
                   <a:srgbClr val="6B6B6B"/>
                 </a:solidFill>
-                <a:latin typeface="Century Schoolbook"/>
+                <a:latin typeface="Lexend"/>
               </a:rPr>
               <a:t>31</a:t>
             </a:r>
@@ -12416,8 +12624,8 @@
         </p:nvSpPr>
         <p:spPr>
           <a:xfrm>
-            <a:off x="3151600" y="2171700"/>
-            <a:ext cx="4034887" cy="457200"/>
+            <a:off x="3244327" y="2171700"/>
+            <a:ext cx="3967001" cy="457200"/>
           </a:xfrm>
           <a:prstGeom prst="rect">
             <a:avLst/>
@@ -12432,11 +12640,11 @@
           <a:p>
             <a:pPr algn="l"/>
             <a:r>
-              <a:rPr sz="2600" b="0" i="0">
+              <a:rPr sz="2470" b="0" i="0">
                 <a:solidFill>
                   <a:srgbClr val="1A1A1A"/>
                 </a:solidFill>
-                <a:latin typeface="Century Schoolbook"/>
+                <a:latin typeface="Lexend"/>
               </a:rPr>
               <a:t>Ellen says the value of  </a:t>
             </a:r>
@@ -12445,7 +12653,7 @@
       </p:sp>
       <p:pic>
         <p:nvPicPr>
-          <p:cNvPr id="9" name="Picture 8" descr="b9af177cb680bce6.png"/>
+          <p:cNvPr id="9" name="Picture 8" descr="64e1dd1e79cf6965.png"/>
           <p:cNvPicPr>
             <a:picLocks noChangeAspect="1"/>
           </p:cNvPicPr>
@@ -12459,8 +12667,8 @@
         </p:blipFill>
         <p:spPr>
           <a:xfrm>
-            <a:off x="7049327" y="2229612"/>
-            <a:ext cx="527304" cy="341376"/>
+            <a:off x="7074169" y="2229612"/>
+            <a:ext cx="505968" cy="341376"/>
           </a:xfrm>
           <a:prstGeom prst="rect">
             <a:avLst/>
@@ -12475,8 +12683,8 @@
         </p:nvSpPr>
         <p:spPr>
           <a:xfrm>
-            <a:off x="7576631" y="2171700"/>
-            <a:ext cx="1570447" cy="457200"/>
+            <a:off x="7580137" y="2171700"/>
+            <a:ext cx="1474215" cy="457200"/>
           </a:xfrm>
           <a:prstGeom prst="rect">
             <a:avLst/>
@@ -12491,11 +12699,11 @@
           <a:p>
             <a:pPr algn="l"/>
             <a:r>
-              <a:rPr sz="2600" b="0" i="0">
+              <a:rPr sz="2470" b="0" i="0">
                 <a:solidFill>
                   <a:srgbClr val="1A1A1A"/>
                 </a:solidFill>
-                <a:latin typeface="Century Schoolbook"/>
+                <a:latin typeface="Lexend"/>
               </a:rPr>
               <a:t>  is  −25.</a:t>
             </a:r>
@@ -12526,11 +12734,11 @@
           <a:p>
             <a:pPr algn="ctr"/>
             <a:r>
-              <a:rPr sz="2600" b="0" i="0">
+              <a:rPr sz="2470" b="0" i="0">
                 <a:solidFill>
                   <a:srgbClr val="1A1A1A"/>
                 </a:solidFill>
-                <a:latin typeface="Century Schoolbook"/>
+                <a:latin typeface="Lexend"/>
               </a:rPr>
               <a:t>Explain why she is wrong, and show the correct value.</a:t>
             </a:r>
@@ -12561,11 +12769,11 @@
           <a:p>
             <a:pPr algn="ctr"/>
             <a:r>
-              <a:rPr sz="2600" b="1" i="0">
+              <a:rPr sz="2470" b="1" i="0">
                 <a:solidFill>
                   <a:srgbClr val="1A1A1A"/>
                 </a:solidFill>
-                <a:latin typeface="Century Schoolbook"/>
+                <a:latin typeface="Lexend"/>
               </a:rPr>
               <a:t>Write your answer in sentences.</a:t>
             </a:r>
@@ -12614,11 +12822,11 @@
           <a:p>
             <a:pPr algn="l"/>
             <a:r>
-              <a:rPr sz="3400" b="1" i="0">
+              <a:rPr sz="3229" b="1" i="0">
                 <a:solidFill>
                   <a:srgbClr val="1A1A1A"/>
                 </a:solidFill>
-                <a:latin typeface="Century Schoolbook"/>
+                <a:latin typeface="Lexend"/>
               </a:rPr>
               <a:t>Whiteboards   ·   Question 9 of 9</a:t>
             </a:r>
@@ -12754,11 +12962,11 @@
           <a:p>
             <a:pPr algn="l"/>
             <a:r>
-              <a:rPr sz="1100" b="0" i="1">
+              <a:rPr sz="1040" b="0" i="0">
                 <a:solidFill>
                   <a:srgbClr val="6B6B6B"/>
                 </a:solidFill>
-                <a:latin typeface="Century Schoolbook"/>
+                <a:latin typeface="Lexend"/>
               </a:rPr>
               <a:t>Grade 7 Accelerated · Unit 3 · Lesson 4 — Negative Exponent Law</a:t>
             </a:r>
@@ -12789,11 +12997,11 @@
           <a:p>
             <a:pPr algn="r"/>
             <a:r>
-              <a:rPr sz="1100" b="0" i="0">
+              <a:rPr sz="1040" b="0" i="0">
                 <a:solidFill>
                   <a:srgbClr val="6B6B6B"/>
                 </a:solidFill>
-                <a:latin typeface="Century Schoolbook"/>
+                <a:latin typeface="Lexend"/>
               </a:rPr>
               <a:t>32</a:t>
             </a:r>
@@ -12808,8 +13016,8 @@
         </p:nvSpPr>
         <p:spPr>
           <a:xfrm>
-            <a:off x="3150076" y="2080260"/>
-            <a:ext cx="4034887" cy="457200"/>
+            <a:off x="3244327" y="2080260"/>
+            <a:ext cx="3967001" cy="457200"/>
           </a:xfrm>
           <a:prstGeom prst="rect">
             <a:avLst/>
@@ -12824,11 +13032,11 @@
           <a:p>
             <a:pPr algn="l"/>
             <a:r>
-              <a:rPr sz="2600" b="0" i="0">
+              <a:rPr sz="2470" b="0" i="0">
                 <a:solidFill>
                   <a:srgbClr val="1A1A1A"/>
                 </a:solidFill>
-                <a:latin typeface="Century Schoolbook"/>
+                <a:latin typeface="Lexend"/>
               </a:rPr>
               <a:t>Ellen says the value of  </a:t>
             </a:r>
@@ -12837,7 +13045,7 @@
       </p:sp>
       <p:pic>
         <p:nvPicPr>
-          <p:cNvPr id="9" name="Picture 8" descr="04a54a40cd0eb4b5.png"/>
+          <p:cNvPr id="9" name="Picture 8" descr="c0ab7b0d6a4ecdbd.png"/>
           <p:cNvPicPr>
             <a:picLocks noChangeAspect="1"/>
           </p:cNvPicPr>
@@ -12851,8 +13059,8 @@
         </p:blipFill>
         <p:spPr>
           <a:xfrm>
-            <a:off x="7047803" y="2138171"/>
-            <a:ext cx="530352" cy="341376"/>
+            <a:off x="7074169" y="2138171"/>
+            <a:ext cx="505968" cy="341376"/>
           </a:xfrm>
           <a:prstGeom prst="rect">
             <a:avLst/>
@@ -12867,8 +13075,8 @@
         </p:nvSpPr>
         <p:spPr>
           <a:xfrm>
-            <a:off x="7578155" y="2080260"/>
-            <a:ext cx="1570447" cy="457200"/>
+            <a:off x="7580137" y="2080260"/>
+            <a:ext cx="1474215" cy="457200"/>
           </a:xfrm>
           <a:prstGeom prst="rect">
             <a:avLst/>
@@ -12883,11 +13091,11 @@
           <a:p>
             <a:pPr algn="l"/>
             <a:r>
-              <a:rPr sz="2600" b="0" i="0">
+              <a:rPr sz="2470" b="0" i="0">
                 <a:solidFill>
                   <a:srgbClr val="1A1A1A"/>
                 </a:solidFill>
-                <a:latin typeface="Century Schoolbook"/>
+                <a:latin typeface="Lexend"/>
               </a:rPr>
               <a:t>  is  −25.</a:t>
             </a:r>
@@ -12918,11 +13126,11 @@
           <a:p>
             <a:pPr algn="ctr"/>
             <a:r>
-              <a:rPr sz="2600" b="0" i="0">
+              <a:rPr sz="2470" b="0" i="0">
                 <a:solidFill>
                   <a:srgbClr val="1A1A1A"/>
                 </a:solidFill>
-                <a:latin typeface="Century Schoolbook"/>
+                <a:latin typeface="Lexend"/>
               </a:rPr>
               <a:t>Explain why she is wrong, and show the correct value.</a:t>
             </a:r>
@@ -12932,6 +13140,65 @@
       <p:sp>
         <p:nvSpPr>
           <p:cNvPr id="12" name="TextBox 11"/>
+          <p:cNvSpPr txBox="1"/>
+          <p:nvPr/>
+        </p:nvSpPr>
+        <p:spPr>
+          <a:xfrm>
+            <a:off x="1465283" y="3414091"/>
+            <a:ext cx="9368113" cy="457200"/>
+          </a:xfrm>
+          <a:prstGeom prst="rect">
+            <a:avLst/>
+          </a:prstGeom>
+          <a:noFill/>
+        </p:spPr>
+        <p:txBody>
+          <a:bodyPr wrap="none" lIns="45720" rIns="45720" tIns="18288" bIns="18288" anchor="ctr">
+            <a:noAutofit/>
+          </a:bodyPr>
+          <a:lstStyle/>
+          <a:p>
+            <a:pPr algn="l"/>
+            <a:r>
+              <a:rPr sz="2330" b="0" i="0">
+                <a:solidFill>
+                  <a:srgbClr val="1A1A1A"/>
+                </a:solidFill>
+                <a:latin typeface="Lexend"/>
+              </a:rPr>
+              <a:t>A negative exponent means the reciprocal, not the opposite.</a:t>
+            </a:r>
+          </a:p>
+        </p:txBody>
+      </p:sp>
+      <p:pic>
+        <p:nvPicPr>
+          <p:cNvPr id="13" name="Picture 12" descr="f6e64cf386c3791e.png"/>
+          <p:cNvPicPr>
+            <a:picLocks noChangeAspect="1"/>
+          </p:cNvPicPr>
+          <p:nvPr/>
+        </p:nvPicPr>
+        <p:blipFill>
+          <a:blip r:embed="rId3"/>
+          <a:stretch>
+            <a:fillRect/>
+          </a:stretch>
+        </p:blipFill>
+        <p:spPr>
+          <a:xfrm>
+            <a:off x="1520147" y="3939871"/>
+            <a:ext cx="1612392" cy="560832"/>
+          </a:xfrm>
+          <a:prstGeom prst="rect">
+            <a:avLst/>
+          </a:prstGeom>
+        </p:spPr>
+      </p:pic>
+      <p:sp>
+        <p:nvSpPr>
+          <p:cNvPr id="14" name="TextBox 13"/>
           <p:cNvSpPr txBox="1"/>
           <p:nvPr/>
         </p:nvSpPr>
@@ -12953,47 +13220,47 @@
           <a:p>
             <a:pPr algn="ctr"/>
             <a:r>
-              <a:rPr sz="3200" b="1" i="0">
+              <a:rPr sz="3040" b="1" i="0">
                 <a:solidFill>
                   <a:srgbClr val="9E1B32"/>
                 </a:solidFill>
-                <a:latin typeface="Century Schoolbook"/>
+                <a:latin typeface="Lexend"/>
               </a:rPr>
               <a:t>Answer:   5</a:t>
             </a:r>
             <a:r>
-              <a:rPr sz="3200" b="1" i="0" baseline="30000">
+              <a:rPr sz="3040" b="1" i="0" baseline="30000">
                 <a:solidFill>
                   <a:srgbClr val="9E1B32"/>
                 </a:solidFill>
-                <a:latin typeface="Century Schoolbook"/>
+                <a:latin typeface="Lexend"/>
               </a:rPr>
               <a:t>-2</a:t>
             </a:r>
             <a:r>
-              <a:rPr sz="3200" b="1" i="0">
+              <a:rPr sz="3040" b="1" i="0">
                 <a:solidFill>
                   <a:srgbClr val="9E1B32"/>
                 </a:solidFill>
-                <a:latin typeface="Century Schoolbook"/>
+                <a:latin typeface="Lexend"/>
               </a:rPr>
               <a:t> = 1/5</a:t>
             </a:r>
             <a:r>
-              <a:rPr sz="3200" b="1" i="0" baseline="30000">
+              <a:rPr sz="3040" b="1" i="0" baseline="30000">
                 <a:solidFill>
                   <a:srgbClr val="9E1B32"/>
                 </a:solidFill>
-                <a:latin typeface="Century Schoolbook"/>
+                <a:latin typeface="Lexend"/>
               </a:rPr>
               <a:t>2</a:t>
             </a:r>
             <a:r>
-              <a:rPr sz="3200" b="1" i="0">
+              <a:rPr sz="3040" b="1" i="0">
                 <a:solidFill>
                   <a:srgbClr val="9E1B32"/>
                 </a:solidFill>
-                <a:latin typeface="Century Schoolbook"/>
+                <a:latin typeface="Lexend"/>
               </a:rPr>
               <a:t> = 1/25</a:t>
             </a:r>
@@ -13042,11 +13309,11 @@
           <a:p>
             <a:pPr algn="l"/>
             <a:r>
-              <a:rPr sz="3600" b="1" i="0">
+              <a:rPr sz="3420" b="1" i="0">
                 <a:solidFill>
                   <a:srgbClr val="1A1A1A"/>
                 </a:solidFill>
-                <a:latin typeface="Century Schoolbook"/>
+                <a:latin typeface="Lexend"/>
               </a:rPr>
               <a:t>Independent Set</a:t>
             </a:r>
@@ -13182,11 +13449,11 @@
           <a:p>
             <a:pPr algn="l"/>
             <a:r>
-              <a:rPr sz="1100" b="0" i="1">
+              <a:rPr sz="1040" b="0" i="0">
                 <a:solidFill>
                   <a:srgbClr val="6B6B6B"/>
                 </a:solidFill>
-                <a:latin typeface="Century Schoolbook"/>
+                <a:latin typeface="Lexend"/>
               </a:rPr>
               <a:t>Grade 7 Accelerated · Unit 3 · Lesson 4 — Negative Exponent Law</a:t>
             </a:r>
@@ -13217,11 +13484,11 @@
           <a:p>
             <a:pPr algn="r"/>
             <a:r>
-              <a:rPr sz="1100" b="0" i="0">
+              <a:rPr sz="1040" b="0" i="0">
                 <a:solidFill>
                   <a:srgbClr val="6B6B6B"/>
                 </a:solidFill>
-                <a:latin typeface="Century Schoolbook"/>
+                <a:latin typeface="Lexend"/>
               </a:rPr>
               <a:t>33</a:t>
             </a:r>
@@ -13252,11 +13519,11 @@
           <a:p>
             <a:pPr algn="l"/>
             <a:r>
-              <a:rPr sz="2300" b="1" i="0">
+              <a:rPr sz="2180" b="1" i="0">
                 <a:solidFill>
                   <a:srgbClr val="0B5394"/>
                 </a:solidFill>
-                <a:latin typeface="Century Schoolbook"/>
+                <a:latin typeface="Lexend"/>
               </a:rPr>
               <a:t>1.</a:t>
             </a:r>
@@ -13272,7 +13539,7 @@
         <p:spPr>
           <a:xfrm>
             <a:off x="1554480" y="1495044"/>
-            <a:ext cx="7581703" cy="457200"/>
+            <a:ext cx="7533206" cy="457200"/>
           </a:xfrm>
           <a:prstGeom prst="rect">
             <a:avLst/>
@@ -13287,11 +13554,11 @@
           <a:p>
             <a:pPr algn="l"/>
             <a:r>
-              <a:rPr sz="2300" b="0" i="0">
+              <a:rPr sz="2180" b="0" i="0">
                 <a:solidFill>
                   <a:srgbClr val="1A1A1A"/>
                 </a:solidFill>
-                <a:latin typeface="Century Schoolbook"/>
+                <a:latin typeface="Lexend"/>
               </a:rPr>
               <a:t>Rewrite with a positive exponent. Do not evaluate.  </a:t>
             </a:r>
@@ -13300,7 +13567,7 @@
       </p:sp>
       <p:pic>
         <p:nvPicPr>
-          <p:cNvPr id="10" name="Picture 9" descr="461f8cd1ec532b03.png"/>
+          <p:cNvPr id="10" name="Picture 9" descr="53ac0340f6e45168.png"/>
           <p:cNvPicPr>
             <a:picLocks noChangeAspect="1"/>
           </p:cNvPicPr>
@@ -13314,8 +13581,8 @@
         </p:blipFill>
         <p:spPr>
           <a:xfrm>
-            <a:off x="8999023" y="1583436"/>
-            <a:ext cx="426720" cy="280416"/>
+            <a:off x="8950526" y="1586484"/>
+            <a:ext cx="408432" cy="274320"/>
           </a:xfrm>
           <a:prstGeom prst="rect">
             <a:avLst/>
@@ -13346,11 +13613,11 @@
           <a:p>
             <a:pPr algn="l"/>
             <a:r>
-              <a:rPr sz="2300" b="1" i="0">
+              <a:rPr sz="2180" b="1" i="0">
                 <a:solidFill>
                   <a:srgbClr val="0B5394"/>
                 </a:solidFill>
-                <a:latin typeface="Century Schoolbook"/>
+                <a:latin typeface="Lexend"/>
               </a:rPr>
               <a:t>2.</a:t>
             </a:r>
@@ -13366,7 +13633,7 @@
         <p:spPr>
           <a:xfrm>
             <a:off x="1554480" y="2089403"/>
-            <a:ext cx="2548440" cy="457200"/>
+            <a:ext cx="2460558" cy="457200"/>
           </a:xfrm>
           <a:prstGeom prst="rect">
             <a:avLst/>
@@ -13381,11 +13648,11 @@
           <a:p>
             <a:pPr algn="l"/>
             <a:r>
-              <a:rPr sz="2300" b="0" i="0">
+              <a:rPr sz="2180" b="0" i="0">
                 <a:solidFill>
                   <a:srgbClr val="1A1A1A"/>
                 </a:solidFill>
-                <a:latin typeface="Century Schoolbook"/>
+                <a:latin typeface="Lexend"/>
               </a:rPr>
               <a:t>Find the value.  </a:t>
             </a:r>
@@ -13394,7 +13661,7 @@
       </p:sp>
       <p:pic>
         <p:nvPicPr>
-          <p:cNvPr id="13" name="Picture 12" descr="dfc1ef4164404941.png"/>
+          <p:cNvPr id="13" name="Picture 12" descr="c004569814520360.png"/>
           <p:cNvPicPr>
             <a:picLocks noChangeAspect="1"/>
           </p:cNvPicPr>
@@ -13408,8 +13675,8 @@
         </p:blipFill>
         <p:spPr>
           <a:xfrm>
-            <a:off x="3965760" y="2176271"/>
-            <a:ext cx="423672" cy="283464"/>
+            <a:off x="3877878" y="2182367"/>
+            <a:ext cx="417576" cy="271272"/>
           </a:xfrm>
           <a:prstGeom prst="rect">
             <a:avLst/>
@@ -13440,11 +13707,11 @@
           <a:p>
             <a:pPr algn="l"/>
             <a:r>
-              <a:rPr sz="2300" b="1" i="0">
+              <a:rPr sz="2180" b="1" i="0">
                 <a:solidFill>
                   <a:srgbClr val="0B5394"/>
                 </a:solidFill>
-                <a:latin typeface="Century Schoolbook"/>
+                <a:latin typeface="Lexend"/>
               </a:rPr>
               <a:t>3.</a:t>
             </a:r>
@@ -13460,7 +13727,7 @@
         <p:spPr>
           <a:xfrm>
             <a:off x="1554480" y="2683763"/>
-            <a:ext cx="2548440" cy="457200"/>
+            <a:ext cx="2460558" cy="457200"/>
           </a:xfrm>
           <a:prstGeom prst="rect">
             <a:avLst/>
@@ -13475,11 +13742,11 @@
           <a:p>
             <a:pPr algn="l"/>
             <a:r>
-              <a:rPr sz="2300" b="0" i="0">
+              <a:rPr sz="2180" b="0" i="0">
                 <a:solidFill>
                   <a:srgbClr val="1A1A1A"/>
                 </a:solidFill>
-                <a:latin typeface="Century Schoolbook"/>
+                <a:latin typeface="Lexend"/>
               </a:rPr>
               <a:t>Find the value.  </a:t>
             </a:r>
@@ -13488,7 +13755,7 @@
       </p:sp>
       <p:pic>
         <p:nvPicPr>
-          <p:cNvPr id="16" name="Picture 15" descr="e54deab6934343bd.png"/>
+          <p:cNvPr id="16" name="Picture 15" descr="ede3a9483986675e.png"/>
           <p:cNvPicPr>
             <a:picLocks noChangeAspect="1"/>
           </p:cNvPicPr>
@@ -13502,8 +13769,8 @@
         </p:blipFill>
         <p:spPr>
           <a:xfrm>
-            <a:off x="3965760" y="2744723"/>
-            <a:ext cx="868680" cy="335280"/>
+            <a:off x="3877878" y="2744723"/>
+            <a:ext cx="838200" cy="335280"/>
           </a:xfrm>
           <a:prstGeom prst="rect">
             <a:avLst/>
@@ -13518,7 +13785,7 @@
         </p:nvSpPr>
         <p:spPr>
           <a:xfrm>
-            <a:off x="960120" y="3375659"/>
+            <a:off x="960120" y="3368039"/>
             <a:ext cx="548640" cy="457200"/>
           </a:xfrm>
           <a:prstGeom prst="rect">
@@ -13534,11 +13801,11 @@
           <a:p>
             <a:pPr algn="l"/>
             <a:r>
-              <a:rPr sz="2300" b="1" i="0">
+              <a:rPr sz="2180" b="1" i="0">
                 <a:solidFill>
                   <a:srgbClr val="0B5394"/>
                 </a:solidFill>
-                <a:latin typeface="Century Schoolbook"/>
+                <a:latin typeface="Lexend"/>
               </a:rPr>
               <a:t>4.</a:t>
             </a:r>
@@ -13553,8 +13820,8 @@
         </p:nvSpPr>
         <p:spPr>
           <a:xfrm>
-            <a:off x="1554480" y="3375659"/>
-            <a:ext cx="2548440" cy="457200"/>
+            <a:off x="1554480" y="3368039"/>
+            <a:ext cx="2460558" cy="457200"/>
           </a:xfrm>
           <a:prstGeom prst="rect">
             <a:avLst/>
@@ -13569,11 +13836,11 @@
           <a:p>
             <a:pPr algn="l"/>
             <a:r>
-              <a:rPr sz="2300" b="0" i="0">
+              <a:rPr sz="2180" b="0" i="0">
                 <a:solidFill>
                   <a:srgbClr val="1A1A1A"/>
                 </a:solidFill>
-                <a:latin typeface="Century Schoolbook"/>
+                <a:latin typeface="Lexend"/>
               </a:rPr>
               <a:t>Find the value.  </a:t>
             </a:r>
@@ -13582,7 +13849,7 @@
       </p:sp>
       <p:pic>
         <p:nvPicPr>
-          <p:cNvPr id="19" name="Picture 18" descr="15c9666cbba8effe.png"/>
+          <p:cNvPr id="19" name="Picture 18" descr="813a84954f7417e1.png"/>
           <p:cNvPicPr>
             <a:picLocks noChangeAspect="1"/>
           </p:cNvPicPr>
@@ -13596,8 +13863,8 @@
         </p:blipFill>
         <p:spPr>
           <a:xfrm>
-            <a:off x="3965760" y="3300983"/>
-            <a:ext cx="627888" cy="606552"/>
+            <a:off x="3877878" y="3300983"/>
+            <a:ext cx="606552" cy="591312"/>
           </a:xfrm>
           <a:prstGeom prst="rect">
             <a:avLst/>
@@ -13612,7 +13879,7 @@
         </p:nvSpPr>
         <p:spPr>
           <a:xfrm>
-            <a:off x="960120" y="4067555"/>
+            <a:off x="960120" y="4052315"/>
             <a:ext cx="548640" cy="457200"/>
           </a:xfrm>
           <a:prstGeom prst="rect">
@@ -13628,11 +13895,11 @@
           <a:p>
             <a:pPr algn="l"/>
             <a:r>
-              <a:rPr sz="2300" b="1" i="0">
+              <a:rPr sz="2180" b="1" i="0">
                 <a:solidFill>
                   <a:srgbClr val="0B5394"/>
                 </a:solidFill>
-                <a:latin typeface="Century Schoolbook"/>
+                <a:latin typeface="Lexend"/>
               </a:rPr>
               <a:t>5.</a:t>
             </a:r>
@@ -13647,8 +13914,8 @@
         </p:nvSpPr>
         <p:spPr>
           <a:xfrm>
-            <a:off x="1554480" y="4067555"/>
-            <a:ext cx="2548440" cy="457200"/>
+            <a:off x="1554480" y="4052315"/>
+            <a:ext cx="2460558" cy="457200"/>
           </a:xfrm>
           <a:prstGeom prst="rect">
             <a:avLst/>
@@ -13663,11 +13930,11 @@
           <a:p>
             <a:pPr algn="l"/>
             <a:r>
-              <a:rPr sz="2300" b="0" i="0">
+              <a:rPr sz="2180" b="0" i="0">
                 <a:solidFill>
                   <a:srgbClr val="1A1A1A"/>
                 </a:solidFill>
-                <a:latin typeface="Century Schoolbook"/>
+                <a:latin typeface="Lexend"/>
               </a:rPr>
               <a:t>Find the value.  </a:t>
             </a:r>
@@ -13676,7 +13943,7 @@
       </p:sp>
       <p:pic>
         <p:nvPicPr>
-          <p:cNvPr id="22" name="Picture 21" descr="cf4e0187a56e9633.png"/>
+          <p:cNvPr id="22" name="Picture 21" descr="220f65bf45ba4782.png"/>
           <p:cNvPicPr>
             <a:picLocks noChangeAspect="1"/>
           </p:cNvPicPr>
@@ -13690,8 +13957,8 @@
         </p:blipFill>
         <p:spPr>
           <a:xfrm>
-            <a:off x="3965760" y="4155947"/>
-            <a:ext cx="911352" cy="280416"/>
+            <a:off x="3877878" y="4142231"/>
+            <a:ext cx="908304" cy="277368"/>
           </a:xfrm>
           <a:prstGeom prst="rect">
             <a:avLst/>
@@ -13706,7 +13973,7 @@
         </p:nvSpPr>
         <p:spPr>
           <a:xfrm>
-            <a:off x="960120" y="4735067"/>
+            <a:off x="960120" y="4712207"/>
             <a:ext cx="548640" cy="457200"/>
           </a:xfrm>
           <a:prstGeom prst="rect">
@@ -13722,11 +13989,11 @@
           <a:p>
             <a:pPr algn="l"/>
             <a:r>
-              <a:rPr sz="2300" b="1" i="0">
+              <a:rPr sz="2180" b="1" i="0">
                 <a:solidFill>
                   <a:srgbClr val="0B5394"/>
                 </a:solidFill>
-                <a:latin typeface="Century Schoolbook"/>
+                <a:latin typeface="Lexend"/>
               </a:rPr>
               <a:t>6.</a:t>
             </a:r>
@@ -13741,8 +14008,8 @@
         </p:nvSpPr>
         <p:spPr>
           <a:xfrm>
-            <a:off x="1554480" y="4735067"/>
-            <a:ext cx="2720291" cy="457200"/>
+            <a:off x="1554480" y="4712207"/>
+            <a:ext cx="2684114" cy="457200"/>
           </a:xfrm>
           <a:prstGeom prst="rect">
             <a:avLst/>
@@ -13757,11 +14024,11 @@
           <a:p>
             <a:pPr algn="l"/>
             <a:r>
-              <a:rPr sz="2300" b="0" i="0">
+              <a:rPr sz="2180" b="0" i="0">
                 <a:solidFill>
                   <a:srgbClr val="1A1A1A"/>
                 </a:solidFill>
-                <a:latin typeface="Century Schoolbook"/>
+                <a:latin typeface="Lexend"/>
               </a:rPr>
               <a:t>Find the value of </a:t>
             </a:r>
@@ -13770,7 +14037,7 @@
       </p:sp>
       <p:pic>
         <p:nvPicPr>
-          <p:cNvPr id="25" name="Picture 24" descr="0afe177f69dd5e06.png"/>
+          <p:cNvPr id="25" name="Picture 24" descr="6d78c2be12150bf5.png"/>
           <p:cNvPicPr>
             <a:picLocks noChangeAspect="1"/>
           </p:cNvPicPr>
@@ -13784,8 +14051,8 @@
         </p:blipFill>
         <p:spPr>
           <a:xfrm>
-            <a:off x="4137611" y="4888992"/>
-            <a:ext cx="155448" cy="149352"/>
+            <a:off x="4101434" y="4856987"/>
+            <a:ext cx="146304" cy="167640"/>
           </a:xfrm>
           <a:prstGeom prst="rect">
             <a:avLst/>
@@ -13800,8 +14067,8 @@
         </p:nvSpPr>
         <p:spPr>
           <a:xfrm>
-            <a:off x="4293059" y="4735067"/>
-            <a:ext cx="468561" cy="457200"/>
+            <a:off x="4247738" y="4712207"/>
+            <a:ext cx="442110" cy="457200"/>
           </a:xfrm>
           <a:prstGeom prst="rect">
             <a:avLst/>
@@ -13816,11 +14083,11 @@
           <a:p>
             <a:pPr algn="l"/>
             <a:r>
-              <a:rPr sz="2300" b="0" i="0">
+              <a:rPr sz="2180" b="0" i="0">
                 <a:solidFill>
                   <a:srgbClr val="1A1A1A"/>
                 </a:solidFill>
-                <a:latin typeface="Century Schoolbook"/>
+                <a:latin typeface="Lexend"/>
               </a:rPr>
               <a:t>.  </a:t>
             </a:r>
@@ -13829,7 +14096,7 @@
       </p:sp>
       <p:pic>
         <p:nvPicPr>
-          <p:cNvPr id="27" name="Picture 26" descr="cd419a222e900c27.png"/>
+          <p:cNvPr id="27" name="Picture 26" descr="99c5f65aa2cee228.png"/>
           <p:cNvPicPr>
             <a:picLocks noChangeAspect="1"/>
           </p:cNvPicPr>
@@ -13843,8 +14110,8 @@
         </p:blipFill>
         <p:spPr>
           <a:xfrm>
-            <a:off x="4624460" y="4684776"/>
-            <a:ext cx="947928" cy="557784"/>
+            <a:off x="4552689" y="4669535"/>
+            <a:ext cx="926592" cy="542544"/>
           </a:xfrm>
           <a:prstGeom prst="rect">
             <a:avLst/>
@@ -13893,11 +14160,11 @@
           <a:p>
             <a:pPr algn="l"/>
             <a:r>
-              <a:rPr sz="3600" b="1" i="0">
+              <a:rPr sz="3420" b="1" i="0">
                 <a:solidFill>
                   <a:srgbClr val="1A1A1A"/>
                 </a:solidFill>
-                <a:latin typeface="Century Schoolbook"/>
+                <a:latin typeface="Lexend"/>
               </a:rPr>
               <a:t>IXL</a:t>
             </a:r>
@@ -14033,11 +14300,11 @@
           <a:p>
             <a:pPr algn="l"/>
             <a:r>
-              <a:rPr sz="1100" b="0" i="1">
+              <a:rPr sz="1040" b="0" i="0">
                 <a:solidFill>
                   <a:srgbClr val="6B6B6B"/>
                 </a:solidFill>
-                <a:latin typeface="Century Schoolbook"/>
+                <a:latin typeface="Lexend"/>
               </a:rPr>
               <a:t>Grade 7 Accelerated · Unit 3 · Lesson 4 — Negative Exponent Law</a:t>
             </a:r>
@@ -14068,11 +14335,11 @@
           <a:p>
             <a:pPr algn="r"/>
             <a:r>
-              <a:rPr sz="1100" b="0" i="0">
+              <a:rPr sz="1040" b="0" i="0">
                 <a:solidFill>
                   <a:srgbClr val="6B6B6B"/>
                 </a:solidFill>
-                <a:latin typeface="Century Schoolbook"/>
+                <a:latin typeface="Lexend"/>
               </a:rPr>
               <a:t>34</a:t>
             </a:r>
@@ -14103,11 +14370,11 @@
           <a:p>
             <a:pPr algn="l"/>
             <a:r>
-              <a:rPr sz="2100" b="1" i="0">
+              <a:rPr sz="1989" b="1" i="0">
                 <a:solidFill>
                   <a:srgbClr val="0B5394"/>
                 </a:solidFill>
-                <a:latin typeface="Century Schoolbook"/>
+                <a:latin typeface="Lexend"/>
               </a:rPr>
               <a:t>1.</a:t>
             </a:r>
@@ -14138,11 +14405,11 @@
           <a:p>
             <a:pPr algn="l"/>
             <a:r>
-              <a:rPr sz="2100" b="0" i="0">
+              <a:rPr sz="1989" b="0" i="0">
                 <a:solidFill>
                   <a:srgbClr val="1A1A1A"/>
                 </a:solidFill>
-                <a:latin typeface="Century Schoolbook"/>
+                <a:latin typeface="Lexend"/>
               </a:rPr>
               <a:t>Open IXL and start today's skills.</a:t>
             </a:r>
@@ -14173,11 +14440,11 @@
           <a:p>
             <a:pPr algn="l"/>
             <a:r>
-              <a:rPr sz="2100" b="1" i="0">
+              <a:rPr sz="1989" b="1" i="0">
                 <a:solidFill>
                   <a:srgbClr val="0B5394"/>
                 </a:solidFill>
-                <a:latin typeface="Century Schoolbook"/>
+                <a:latin typeface="Lexend"/>
               </a:rPr>
               <a:t>2.</a:t>
             </a:r>
@@ -14208,11 +14475,11 @@
           <a:p>
             <a:pPr algn="l"/>
             <a:r>
-              <a:rPr sz="2100" b="0" i="0">
+              <a:rPr sz="1989" b="0" i="0">
                 <a:solidFill>
                   <a:srgbClr val="1A1A1A"/>
                 </a:solidFill>
-                <a:latin typeface="Century Schoolbook"/>
+                <a:latin typeface="Lexend"/>
               </a:rPr>
               <a:t>Work on paper where the question needs work. The answer box does not show it.</a:t>
             </a:r>
@@ -14243,11 +14510,11 @@
           <a:p>
             <a:pPr algn="l"/>
             <a:r>
-              <a:rPr sz="2100" b="1" i="0">
+              <a:rPr sz="1989" b="1" i="0">
                 <a:solidFill>
                   <a:srgbClr val="0B5394"/>
                 </a:solidFill>
-                <a:latin typeface="Century Schoolbook"/>
+                <a:latin typeface="Lexend"/>
               </a:rPr>
               <a:t>3.</a:t>
             </a:r>
@@ -14278,11 +14545,11 @@
           <a:p>
             <a:pPr algn="l"/>
             <a:r>
-              <a:rPr sz="2100" b="0" i="0">
+              <a:rPr sz="1989" b="0" i="0">
                 <a:solidFill>
                   <a:srgbClr val="1A1A1A"/>
                 </a:solidFill>
-                <a:latin typeface="Century Schoolbook"/>
+                <a:latin typeface="Lexend"/>
               </a:rPr>
               <a:t>Every skill listed is required, to a SmartScore of 67. Due at the start of the next class.</a:t>
             </a:r>
@@ -14313,11 +14580,11 @@
           <a:p>
             <a:pPr algn="l"/>
             <a:r>
-              <a:rPr sz="2100" b="1" i="0">
+              <a:rPr sz="1989" b="1" i="0">
                 <a:solidFill>
                   <a:srgbClr val="1A1A1A"/>
                 </a:solidFill>
-                <a:latin typeface="Century Schoolbook"/>
+                <a:latin typeface="Lexend"/>
               </a:rPr>
               <a:t>Today's skills — all required</a:t>
             </a:r>
@@ -14348,11 +14615,11 @@
           <a:p>
             <a:pPr algn="l"/>
             <a:r>
-              <a:rPr sz="1900" b="0" i="0">
+              <a:rPr sz="1810" b="0" i="0">
                 <a:solidFill>
                   <a:srgbClr val="1A1A1A"/>
                 </a:solidFill>
-                <a:latin typeface="Century Schoolbook"/>
+                <a:latin typeface="Lexend"/>
               </a:rPr>
               <a:t>Understanding negative exponents — YBB</a:t>
             </a:r>
@@ -14383,11 +14650,11 @@
           <a:p>
             <a:pPr algn="l"/>
             <a:r>
-              <a:rPr sz="1900" b="0" i="0">
+              <a:rPr sz="1810" b="0" i="0">
                 <a:solidFill>
                   <a:srgbClr val="1A1A1A"/>
                 </a:solidFill>
-                <a:latin typeface="Century Schoolbook"/>
+                <a:latin typeface="Lexend"/>
               </a:rPr>
               <a:t>Evaluate powers with negative exponents — WGS</a:t>
             </a:r>
@@ -14436,11 +14703,11 @@
           <a:p>
             <a:pPr algn="l"/>
             <a:r>
-              <a:rPr sz="3600" b="1" i="0">
+              <a:rPr sz="3420" b="1" i="0">
                 <a:solidFill>
                   <a:srgbClr val="1A1A1A"/>
                 </a:solidFill>
-                <a:latin typeface="Century Schoolbook"/>
+                <a:latin typeface="Lexend"/>
               </a:rPr>
               <a:t>Notes</a:t>
             </a:r>
@@ -14576,11 +14843,11 @@
           <a:p>
             <a:pPr algn="l"/>
             <a:r>
-              <a:rPr sz="1100" b="0" i="1">
+              <a:rPr sz="1040" b="0" i="0">
                 <a:solidFill>
                   <a:srgbClr val="6B6B6B"/>
                 </a:solidFill>
-                <a:latin typeface="Century Schoolbook"/>
+                <a:latin typeface="Lexend"/>
               </a:rPr>
               <a:t>Grade 7 Accelerated · Unit 3 · Lesson 4 — Negative Exponent Law</a:t>
             </a:r>
@@ -14611,11 +14878,11 @@
           <a:p>
             <a:pPr algn="r"/>
             <a:r>
-              <a:rPr sz="1100" b="0" i="0">
+              <a:rPr sz="1040" b="0" i="0">
                 <a:solidFill>
                   <a:srgbClr val="6B6B6B"/>
                 </a:solidFill>
-                <a:latin typeface="Century Schoolbook"/>
+                <a:latin typeface="Lexend"/>
               </a:rPr>
               <a:t>4</a:t>
             </a:r>
@@ -14646,11 +14913,11 @@
           <a:p>
             <a:pPr algn="l"/>
             <a:r>
-              <a:rPr sz="2500" b="1" i="0">
+              <a:rPr sz="2380" b="1" i="0">
                 <a:solidFill>
                   <a:srgbClr val="1A1A1A"/>
                 </a:solidFill>
-                <a:latin typeface="Century Schoolbook"/>
+                <a:latin typeface="Lexend"/>
               </a:rPr>
               <a:t>I.  The pattern keeps going past zero</a:t>
             </a:r>
@@ -14728,20 +14995,20 @@
                     <a:p>
                       <a:pPr algn="ctr"/>
                       <a:r>
-                        <a:rPr sz="1800" b="1">
+                        <a:rPr sz="1710" b="1">
                           <a:solidFill>
                             <a:srgbClr val="1A1A1A"/>
                           </a:solidFill>
-                          <a:latin typeface="Century Schoolbook"/>
+                          <a:latin typeface="Lexend"/>
                         </a:rPr>
                         <a:t>2</a:t>
                       </a:r>
                       <a:r>
-                        <a:rPr sz="1800" b="1" baseline="30000">
+                        <a:rPr sz="1710" b="1" baseline="30000">
                           <a:solidFill>
                             <a:srgbClr val="1A1A1A"/>
                           </a:solidFill>
-                          <a:latin typeface="Century Schoolbook"/>
+                          <a:latin typeface="Lexend"/>
                         </a:rPr>
                         <a:t>4</a:t>
                       </a:r>
@@ -14784,20 +15051,20 @@
                     <a:p>
                       <a:pPr algn="ctr"/>
                       <a:r>
-                        <a:rPr sz="1800" b="1">
+                        <a:rPr sz="1710" b="1">
                           <a:solidFill>
                             <a:srgbClr val="1A1A1A"/>
                           </a:solidFill>
-                          <a:latin typeface="Century Schoolbook"/>
+                          <a:latin typeface="Lexend"/>
                         </a:rPr>
                         <a:t>2</a:t>
                       </a:r>
                       <a:r>
-                        <a:rPr sz="1800" b="1" baseline="30000">
+                        <a:rPr sz="1710" b="1" baseline="30000">
                           <a:solidFill>
                             <a:srgbClr val="1A1A1A"/>
                           </a:solidFill>
-                          <a:latin typeface="Century Schoolbook"/>
+                          <a:latin typeface="Lexend"/>
                         </a:rPr>
                         <a:t>3</a:t>
                       </a:r>
@@ -14840,20 +15107,20 @@
                     <a:p>
                       <a:pPr algn="ctr"/>
                       <a:r>
-                        <a:rPr sz="1800" b="1">
+                        <a:rPr sz="1710" b="1">
                           <a:solidFill>
                             <a:srgbClr val="1A1A1A"/>
                           </a:solidFill>
-                          <a:latin typeface="Century Schoolbook"/>
+                          <a:latin typeface="Lexend"/>
                         </a:rPr>
                         <a:t>2</a:t>
                       </a:r>
                       <a:r>
-                        <a:rPr sz="1800" b="1" baseline="30000">
+                        <a:rPr sz="1710" b="1" baseline="30000">
                           <a:solidFill>
                             <a:srgbClr val="1A1A1A"/>
                           </a:solidFill>
-                          <a:latin typeface="Century Schoolbook"/>
+                          <a:latin typeface="Lexend"/>
                         </a:rPr>
                         <a:t>2</a:t>
                       </a:r>
@@ -14896,20 +15163,20 @@
                     <a:p>
                       <a:pPr algn="ctr"/>
                       <a:r>
-                        <a:rPr sz="1800" b="1">
+                        <a:rPr sz="1710" b="1">
                           <a:solidFill>
                             <a:srgbClr val="1A1A1A"/>
                           </a:solidFill>
-                          <a:latin typeface="Century Schoolbook"/>
+                          <a:latin typeface="Lexend"/>
                         </a:rPr>
                         <a:t>2</a:t>
                       </a:r>
                       <a:r>
-                        <a:rPr sz="1800" b="1" baseline="30000">
+                        <a:rPr sz="1710" b="1" baseline="30000">
                           <a:solidFill>
                             <a:srgbClr val="1A1A1A"/>
                           </a:solidFill>
-                          <a:latin typeface="Century Schoolbook"/>
+                          <a:latin typeface="Lexend"/>
                         </a:rPr>
                         <a:t>1</a:t>
                       </a:r>
@@ -14952,20 +15219,20 @@
                     <a:p>
                       <a:pPr algn="ctr"/>
                       <a:r>
-                        <a:rPr sz="1800" b="1">
+                        <a:rPr sz="1710" b="1">
                           <a:solidFill>
                             <a:srgbClr val="1A1A1A"/>
                           </a:solidFill>
-                          <a:latin typeface="Century Schoolbook"/>
+                          <a:latin typeface="Lexend"/>
                         </a:rPr>
                         <a:t>2</a:t>
                       </a:r>
                       <a:r>
-                        <a:rPr sz="1800" b="1" baseline="30000">
+                        <a:rPr sz="1710" b="1" baseline="30000">
                           <a:solidFill>
                             <a:srgbClr val="1A1A1A"/>
                           </a:solidFill>
-                          <a:latin typeface="Century Schoolbook"/>
+                          <a:latin typeface="Lexend"/>
                         </a:rPr>
                         <a:t>0</a:t>
                       </a:r>
@@ -15008,20 +15275,20 @@
                     <a:p>
                       <a:pPr algn="ctr"/>
                       <a:r>
-                        <a:rPr sz="1800" b="1">
+                        <a:rPr sz="1710" b="1">
                           <a:solidFill>
                             <a:srgbClr val="1A1A1A"/>
                           </a:solidFill>
-                          <a:latin typeface="Century Schoolbook"/>
+                          <a:latin typeface="Lexend"/>
                         </a:rPr>
                         <a:t>2</a:t>
                       </a:r>
                       <a:r>
-                        <a:rPr sz="1800" b="1" baseline="30000">
+                        <a:rPr sz="1710" b="1" baseline="30000">
                           <a:solidFill>
                             <a:srgbClr val="1A1A1A"/>
                           </a:solidFill>
-                          <a:latin typeface="Century Schoolbook"/>
+                          <a:latin typeface="Lexend"/>
                         </a:rPr>
                         <a:t>-1</a:t>
                       </a:r>
@@ -15064,20 +15331,20 @@
                     <a:p>
                       <a:pPr algn="ctr"/>
                       <a:r>
-                        <a:rPr sz="1800" b="1">
+                        <a:rPr sz="1710" b="1">
                           <a:solidFill>
                             <a:srgbClr val="1A1A1A"/>
                           </a:solidFill>
-                          <a:latin typeface="Century Schoolbook"/>
+                          <a:latin typeface="Lexend"/>
                         </a:rPr>
                         <a:t>2</a:t>
                       </a:r>
                       <a:r>
-                        <a:rPr sz="1800" b="1" baseline="30000">
+                        <a:rPr sz="1710" b="1" baseline="30000">
                           <a:solidFill>
                             <a:srgbClr val="1A1A1A"/>
                           </a:solidFill>
-                          <a:latin typeface="Century Schoolbook"/>
+                          <a:latin typeface="Lexend"/>
                         </a:rPr>
                         <a:t>-2</a:t>
                       </a:r>
@@ -15120,20 +15387,20 @@
                     <a:p>
                       <a:pPr algn="ctr"/>
                       <a:r>
-                        <a:rPr sz="1800" b="1">
+                        <a:rPr sz="1710" b="1">
                           <a:solidFill>
                             <a:srgbClr val="1A1A1A"/>
                           </a:solidFill>
-                          <a:latin typeface="Century Schoolbook"/>
+                          <a:latin typeface="Lexend"/>
                         </a:rPr>
                         <a:t>2</a:t>
                       </a:r>
                       <a:r>
-                        <a:rPr sz="1800" b="1" baseline="30000">
+                        <a:rPr sz="1710" b="1" baseline="30000">
                           <a:solidFill>
                             <a:srgbClr val="1A1A1A"/>
                           </a:solidFill>
-                          <a:latin typeface="Century Schoolbook"/>
+                          <a:latin typeface="Lexend"/>
                         </a:rPr>
                         <a:t>-3</a:t>
                       </a:r>
@@ -15178,11 +15445,11 @@
                     <a:p>
                       <a:pPr algn="ctr"/>
                       <a:r>
-                        <a:rPr sz="1800" b="0">
+                        <a:rPr sz="1710" b="0">
                           <a:solidFill>
                             <a:srgbClr val="1A1A1A"/>
                           </a:solidFill>
-                          <a:latin typeface="Century Schoolbook"/>
+                          <a:latin typeface="Lexend"/>
                         </a:rPr>
                         <a:t>16</a:t>
                       </a:r>
@@ -15225,11 +15492,11 @@
                     <a:p>
                       <a:pPr algn="ctr"/>
                       <a:r>
-                        <a:rPr sz="1800" b="0">
+                        <a:rPr sz="1710" b="0">
                           <a:solidFill>
                             <a:srgbClr val="1A1A1A"/>
                           </a:solidFill>
-                          <a:latin typeface="Century Schoolbook"/>
+                          <a:latin typeface="Lexend"/>
                         </a:rPr>
                         <a:t>8</a:t>
                       </a:r>
@@ -15272,11 +15539,11 @@
                     <a:p>
                       <a:pPr algn="ctr"/>
                       <a:r>
-                        <a:rPr sz="1800" b="0">
+                        <a:rPr sz="1710" b="0">
                           <a:solidFill>
                             <a:srgbClr val="1A1A1A"/>
                           </a:solidFill>
-                          <a:latin typeface="Century Schoolbook"/>
+                          <a:latin typeface="Lexend"/>
                         </a:rPr>
                         <a:t>4</a:t>
                       </a:r>
@@ -15319,11 +15586,11 @@
                     <a:p>
                       <a:pPr algn="ctr"/>
                       <a:r>
-                        <a:rPr sz="1800" b="0">
+                        <a:rPr sz="1710" b="0">
                           <a:solidFill>
                             <a:srgbClr val="1A1A1A"/>
                           </a:solidFill>
-                          <a:latin typeface="Century Schoolbook"/>
+                          <a:latin typeface="Lexend"/>
                         </a:rPr>
                         <a:t>2</a:t>
                       </a:r>
@@ -15366,11 +15633,11 @@
                     <a:p>
                       <a:pPr algn="ctr"/>
                       <a:r>
-                        <a:rPr sz="1800" b="0">
+                        <a:rPr sz="1710" b="0">
                           <a:solidFill>
                             <a:srgbClr val="1A1A1A"/>
                           </a:solidFill>
-                          <a:latin typeface="Century Schoolbook"/>
+                          <a:latin typeface="Lexend"/>
                         </a:rPr>
                         <a:t>1</a:t>
                       </a:r>
@@ -15413,11 +15680,11 @@
                     <a:p>
                       <a:pPr algn="ctr"/>
                       <a:r>
-                        <a:rPr sz="1800" b="0">
+                        <a:rPr sz="1710" b="0">
                           <a:solidFill>
                             <a:srgbClr val="1A1A1A"/>
                           </a:solidFill>
-                          <a:latin typeface="Century Schoolbook"/>
+                          <a:latin typeface="Lexend"/>
                         </a:rPr>
                         <a:t>1/2</a:t>
                       </a:r>
@@ -15460,11 +15727,11 @@
                     <a:p>
                       <a:pPr algn="ctr"/>
                       <a:r>
-                        <a:rPr sz="1800" b="0">
+                        <a:rPr sz="1710" b="0">
                           <a:solidFill>
                             <a:srgbClr val="1A1A1A"/>
                           </a:solidFill>
-                          <a:latin typeface="Century Schoolbook"/>
+                          <a:latin typeface="Lexend"/>
                         </a:rPr>
                         <a:t>1/4</a:t>
                       </a:r>
@@ -15507,11 +15774,11 @@
                     <a:p>
                       <a:pPr algn="ctr"/>
                       <a:r>
-                        <a:rPr sz="1800" b="0">
+                        <a:rPr sz="1710" b="0">
                           <a:solidFill>
                             <a:srgbClr val="1A1A1A"/>
                           </a:solidFill>
-                          <a:latin typeface="Century Schoolbook"/>
+                          <a:latin typeface="Lexend"/>
                         </a:rPr>
                         <a:t>1/8</a:t>
                       </a:r>
@@ -15554,7 +15821,7 @@
       </p:graphicFrame>
       <p:pic>
         <p:nvPicPr>
-          <p:cNvPr id="11" name="Picture 10" descr="81375e471a1972b2.png"/>
+          <p:cNvPr id="11" name="Picture 10" descr="311a92ab63e08fd4.png"/>
           <p:cNvPicPr>
             <a:picLocks noChangeAspect="1"/>
           </p:cNvPicPr>
@@ -15568,8 +15835,8 @@
         </p:blipFill>
         <p:spPr>
           <a:xfrm>
-            <a:off x="2601960" y="2990088"/>
-            <a:ext cx="1316736" cy="734568"/>
+            <a:off x="2772438" y="2990088"/>
+            <a:ext cx="1219200" cy="731520"/>
           </a:xfrm>
           <a:prstGeom prst="rect">
             <a:avLst/>
@@ -15584,8 +15851,8 @@
         </p:nvSpPr>
         <p:spPr>
           <a:xfrm>
-            <a:off x="3918696" y="3128772"/>
-            <a:ext cx="988583" cy="457200"/>
+            <a:off x="3991638" y="3127248"/>
+            <a:ext cx="955265" cy="457200"/>
           </a:xfrm>
           <a:prstGeom prst="rect">
             <a:avLst/>
@@ -15600,11 +15867,11 @@
           <a:p>
             <a:pPr algn="l"/>
             <a:r>
-              <a:rPr sz="2600" b="0" i="0">
+              <a:rPr sz="2470" b="0" i="0">
                 <a:solidFill>
                   <a:srgbClr val="1A1A1A"/>
                 </a:solidFill>
-                <a:latin typeface="Century Schoolbook"/>
+                <a:latin typeface="Lexend"/>
               </a:rPr>
               <a:t>        </a:t>
             </a:r>
@@ -15613,7 +15880,7 @@
       </p:sp>
       <p:pic>
         <p:nvPicPr>
-          <p:cNvPr id="13" name="Picture 12" descr="e662eafaba09aa9a.png"/>
+          <p:cNvPr id="13" name="Picture 12" descr="049aeed39d2b92eb.png"/>
           <p:cNvPicPr>
             <a:picLocks noChangeAspect="1"/>
           </p:cNvPicPr>
@@ -15627,8 +15894,8 @@
         </p:blipFill>
         <p:spPr>
           <a:xfrm>
-            <a:off x="4770120" y="2990088"/>
-            <a:ext cx="1969008" cy="734568"/>
+            <a:off x="4809744" y="2990088"/>
+            <a:ext cx="1892807" cy="731520"/>
           </a:xfrm>
           <a:prstGeom prst="rect">
             <a:avLst/>
@@ -15643,8 +15910,8 @@
         </p:nvSpPr>
         <p:spPr>
           <a:xfrm>
-            <a:off x="6739128" y="3128772"/>
-            <a:ext cx="988583" cy="457200"/>
+            <a:off x="6702552" y="3127248"/>
+            <a:ext cx="955265" cy="457200"/>
           </a:xfrm>
           <a:prstGeom prst="rect">
             <a:avLst/>
@@ -15659,11 +15926,11 @@
           <a:p>
             <a:pPr algn="l"/>
             <a:r>
-              <a:rPr sz="2600" b="0" i="0">
+              <a:rPr sz="2470" b="0" i="0">
                 <a:solidFill>
                   <a:srgbClr val="1A1A1A"/>
                 </a:solidFill>
-                <a:latin typeface="Century Schoolbook"/>
+                <a:latin typeface="Lexend"/>
               </a:rPr>
               <a:t>        </a:t>
             </a:r>
@@ -15672,7 +15939,7 @@
       </p:sp>
       <p:pic>
         <p:nvPicPr>
-          <p:cNvPr id="15" name="Picture 14" descr="97a68c5b0d6f071a.png"/>
+          <p:cNvPr id="15" name="Picture 14" descr="bccda89799466171.png"/>
           <p:cNvPicPr>
             <a:picLocks noChangeAspect="1"/>
           </p:cNvPicPr>
@@ -15686,8 +15953,8 @@
         </p:blipFill>
         <p:spPr>
           <a:xfrm>
-            <a:off x="7590551" y="2990088"/>
-            <a:ext cx="1969008" cy="734568"/>
+            <a:off x="7520657" y="2991612"/>
+            <a:ext cx="1868424" cy="728472"/>
           </a:xfrm>
           <a:prstGeom prst="rect">
             <a:avLst/>
@@ -15736,11 +16003,11 @@
           <a:p>
             <a:pPr algn="l"/>
             <a:r>
-              <a:rPr sz="3600" b="1" i="0">
+              <a:rPr sz="3420" b="1" i="0">
                 <a:solidFill>
                   <a:srgbClr val="1A1A1A"/>
                 </a:solidFill>
-                <a:latin typeface="Century Schoolbook"/>
+                <a:latin typeface="Lexend"/>
               </a:rPr>
               <a:t>Notes</a:t>
             </a:r>
@@ -15876,11 +16143,11 @@
           <a:p>
             <a:pPr algn="l"/>
             <a:r>
-              <a:rPr sz="1100" b="0" i="1">
+              <a:rPr sz="1040" b="0" i="0">
                 <a:solidFill>
                   <a:srgbClr val="6B6B6B"/>
                 </a:solidFill>
-                <a:latin typeface="Century Schoolbook"/>
+                <a:latin typeface="Lexend"/>
               </a:rPr>
               <a:t>Grade 7 Accelerated · Unit 3 · Lesson 4 — Negative Exponent Law</a:t>
             </a:r>
@@ -15911,11 +16178,11 @@
           <a:p>
             <a:pPr algn="r"/>
             <a:r>
-              <a:rPr sz="1100" b="0" i="0">
+              <a:rPr sz="1040" b="0" i="0">
                 <a:solidFill>
                   <a:srgbClr val="6B6B6B"/>
                 </a:solidFill>
-                <a:latin typeface="Century Schoolbook"/>
+                <a:latin typeface="Lexend"/>
               </a:rPr>
               <a:t>5</a:t>
             </a:r>
@@ -15946,11 +16213,11 @@
           <a:p>
             <a:pPr algn="l"/>
             <a:r>
-              <a:rPr sz="2500" b="1" i="0">
+              <a:rPr sz="2380" b="1" i="0">
                 <a:solidFill>
                   <a:srgbClr val="1A1A1A"/>
                 </a:solidFill>
-                <a:latin typeface="Century Schoolbook"/>
+                <a:latin typeface="Lexend"/>
               </a:rPr>
               <a:t>II.  The negative exponent law</a:t>
             </a:r>
@@ -15994,7 +16261,7 @@
       </p:cxnSp>
       <p:pic>
         <p:nvPicPr>
-          <p:cNvPr id="10" name="Picture 9" descr="db26dd1c4f061617.png"/>
+          <p:cNvPr id="10" name="Picture 9" descr="28aa15ddbf8bfdef.png"/>
           <p:cNvPicPr>
             <a:picLocks noChangeAspect="1"/>
           </p:cNvPicPr>
@@ -16008,8 +16275,8 @@
         </p:blipFill>
         <p:spPr>
           <a:xfrm>
-            <a:off x="3107725" y="1993392"/>
-            <a:ext cx="1362456" cy="673608"/>
+            <a:off x="3127445" y="1993392"/>
+            <a:ext cx="1365504" cy="685800"/>
           </a:xfrm>
           <a:prstGeom prst="rect">
             <a:avLst/>
@@ -16024,8 +16291,8 @@
         </p:nvSpPr>
         <p:spPr>
           <a:xfrm>
-            <a:off x="4470181" y="2101596"/>
-            <a:ext cx="1183151" cy="457200"/>
+            <a:off x="4492949" y="2107692"/>
+            <a:ext cx="1141503" cy="457200"/>
           </a:xfrm>
           <a:prstGeom prst="rect">
             <a:avLst/>
@@ -16040,11 +16307,11 @@
           <a:p>
             <a:pPr algn="l"/>
             <a:r>
-              <a:rPr sz="2600" b="0" i="0">
+              <a:rPr sz="2470" b="0" i="0">
                 <a:solidFill>
                   <a:srgbClr val="1A1A1A"/>
                 </a:solidFill>
-                <a:latin typeface="Century Schoolbook"/>
+                <a:latin typeface="Lexend"/>
               </a:rPr>
               <a:t>          </a:t>
             </a:r>
@@ -16053,7 +16320,7 @@
       </p:sp>
       <p:pic>
         <p:nvPicPr>
-          <p:cNvPr id="12" name="Picture 11" descr="d3322f317e3cdae4.png"/>
+          <p:cNvPr id="12" name="Picture 11" descr="703929da3359c7e4.png"/>
           <p:cNvPicPr>
             <a:picLocks noChangeAspect="1"/>
           </p:cNvPicPr>
@@ -16067,8 +16334,8 @@
         </p:blipFill>
         <p:spPr>
           <a:xfrm>
-            <a:off x="5516173" y="1993392"/>
-            <a:ext cx="1395984" cy="673608"/>
+            <a:off x="5497293" y="1993392"/>
+            <a:ext cx="1405128" cy="685800"/>
           </a:xfrm>
           <a:prstGeom prst="rect">
             <a:avLst/>
@@ -16083,8 +16350,8 @@
         </p:nvSpPr>
         <p:spPr>
           <a:xfrm>
-            <a:off x="6912157" y="2101596"/>
-            <a:ext cx="1299682" cy="457200"/>
+            <a:off x="6902421" y="2107692"/>
+            <a:ext cx="1263198" cy="457200"/>
           </a:xfrm>
           <a:prstGeom prst="rect">
             <a:avLst/>
@@ -16099,11 +16366,11 @@
           <a:p>
             <a:pPr algn="l"/>
             <a:r>
-              <a:rPr sz="2600" b="0" i="0">
+              <a:rPr sz="2470" b="0" i="0">
                 <a:solidFill>
                   <a:srgbClr val="1A1A1A"/>
                 </a:solidFill>
-                <a:latin typeface="Century Schoolbook"/>
+                <a:latin typeface="Lexend"/>
               </a:rPr>
               <a:t>          (</a:t>
             </a:r>
@@ -16112,7 +16379,7 @@
       </p:sp>
       <p:pic>
         <p:nvPicPr>
-          <p:cNvPr id="14" name="Picture 13" descr="6a9975e145b437dd.png"/>
+          <p:cNvPr id="14" name="Picture 13" descr="47b5f205461fb9cf.png"/>
           <p:cNvPicPr>
             <a:picLocks noChangeAspect="1"/>
           </p:cNvPicPr>
@@ -16126,8 +16393,8 @@
         </p:blipFill>
         <p:spPr>
           <a:xfrm>
-            <a:off x="8074679" y="2161032"/>
-            <a:ext cx="789432" cy="338328"/>
+            <a:off x="8028459" y="2197608"/>
+            <a:ext cx="810768" cy="277368"/>
           </a:xfrm>
           <a:prstGeom prst="rect">
             <a:avLst/>
@@ -16142,8 +16409,8 @@
         </p:nvSpPr>
         <p:spPr>
           <a:xfrm>
-            <a:off x="8864111" y="2101596"/>
-            <a:ext cx="326842" cy="457200"/>
+            <a:off x="8839227" y="2107692"/>
+            <a:ext cx="332006" cy="457200"/>
           </a:xfrm>
           <a:prstGeom prst="rect">
             <a:avLst/>
@@ -16158,11 +16425,11 @@
           <a:p>
             <a:pPr algn="l"/>
             <a:r>
-              <a:rPr sz="2600" b="0" i="0">
+              <a:rPr sz="2470" b="0" i="0">
                 <a:solidFill>
                   <a:srgbClr val="1A1A1A"/>
                 </a:solidFill>
-                <a:latin typeface="Century Schoolbook"/>
+                <a:latin typeface="Lexend"/>
               </a:rPr>
               <a:t>)</a:t>
             </a:r>
@@ -16171,7 +16438,7 @@
       </p:sp>
       <p:pic>
         <p:nvPicPr>
-          <p:cNvPr id="16" name="Picture 15" descr="01a1e8399ce2f91b.png"/>
+          <p:cNvPr id="16" name="Picture 15" descr="c4472833bac66d5b.png"/>
           <p:cNvPicPr>
             <a:picLocks noChangeAspect="1"/>
           </p:cNvPicPr>
@@ -16185,8 +16452,8 @@
         </p:blipFill>
         <p:spPr>
           <a:xfrm>
-            <a:off x="1497114" y="2941320"/>
-            <a:ext cx="2170176" cy="740664"/>
+            <a:off x="1645979" y="2953512"/>
+            <a:ext cx="2103120" cy="734568"/>
           </a:xfrm>
           <a:prstGeom prst="rect">
             <a:avLst/>
@@ -16201,8 +16468,8 @@
         </p:nvSpPr>
         <p:spPr>
           <a:xfrm>
-            <a:off x="3667290" y="3083052"/>
-            <a:ext cx="1922352" cy="457200"/>
+            <a:off x="3749099" y="3092196"/>
+            <a:ext cx="1866074" cy="457200"/>
           </a:xfrm>
           <a:prstGeom prst="rect">
             <a:avLst/>
@@ -16217,11 +16484,11 @@
           <a:p>
             <a:pPr algn="l"/>
             <a:r>
-              <a:rPr sz="2600" b="0" i="0">
+              <a:rPr sz="2470" b="0" i="0">
                 <a:solidFill>
                   <a:srgbClr val="1A1A1A"/>
                 </a:solidFill>
-                <a:latin typeface="Century Schoolbook"/>
+                <a:latin typeface="Lexend"/>
               </a:rPr>
               <a:t>      but      </a:t>
             </a:r>
@@ -16230,7 +16497,7 @@
       </p:sp>
       <p:pic>
         <p:nvPicPr>
-          <p:cNvPr id="18" name="Picture 17" descr="4d0780cba10826c2.png"/>
+          <p:cNvPr id="18" name="Picture 17" descr="423c7123e052fac5.png"/>
           <p:cNvPicPr>
             <a:picLocks noChangeAspect="1"/>
           </p:cNvPicPr>
@@ -16244,8 +16511,8 @@
         </p:blipFill>
         <p:spPr>
           <a:xfrm>
-            <a:off x="5452483" y="3140964"/>
-            <a:ext cx="1682496" cy="341376"/>
+            <a:off x="5478014" y="3150108"/>
+            <a:ext cx="1581912" cy="341376"/>
           </a:xfrm>
           <a:prstGeom prst="rect">
             <a:avLst/>
@@ -16260,8 +16527,8 @@
         </p:nvSpPr>
         <p:spPr>
           <a:xfrm>
-            <a:off x="7134979" y="3083052"/>
-            <a:ext cx="1987138" cy="457200"/>
+            <a:off x="7059926" y="3092196"/>
+            <a:ext cx="1946854" cy="457200"/>
           </a:xfrm>
           <a:prstGeom prst="rect">
             <a:avLst/>
@@ -16276,11 +16543,11 @@
           <a:p>
             <a:pPr algn="l"/>
             <a:r>
-              <a:rPr sz="2600" b="0" i="0">
+              <a:rPr sz="2470" b="0" i="0">
                 <a:solidFill>
                   <a:srgbClr val="1A1A1A"/>
                 </a:solidFill>
-                <a:latin typeface="Century Schoolbook"/>
+                <a:latin typeface="Lexend"/>
               </a:rPr>
               <a:t>      and      </a:t>
             </a:r>
@@ -16289,7 +16556,7 @@
       </p:sp>
       <p:pic>
         <p:nvPicPr>
-          <p:cNvPr id="20" name="Picture 19" descr="06d6b57bc03862b5.png"/>
+          <p:cNvPr id="20" name="Picture 19" descr="1f1d03da98083e56.png"/>
           <p:cNvPicPr>
             <a:picLocks noChangeAspect="1"/>
           </p:cNvPicPr>
@@ -16303,8 +16570,8 @@
         </p:blipFill>
         <p:spPr>
           <a:xfrm>
-            <a:off x="8984957" y="3108960"/>
-            <a:ext cx="1679448" cy="405384"/>
+            <a:off x="8869620" y="3115056"/>
+            <a:ext cx="1645920" cy="411480"/>
           </a:xfrm>
           <a:prstGeom prst="rect">
             <a:avLst/>
@@ -16319,7 +16586,7 @@
         </p:nvSpPr>
         <p:spPr>
           <a:xfrm>
-            <a:off x="987552" y="4020312"/>
+            <a:off x="987552" y="4026408"/>
             <a:ext cx="10131551" cy="475488"/>
           </a:xfrm>
           <a:prstGeom prst="rect">
@@ -16335,11 +16602,11 @@
           <a:p>
             <a:pPr algn="l"/>
             <a:r>
-              <a:rPr sz="2300" b="1" i="0">
+              <a:rPr sz="2180" b="1" i="0">
                 <a:solidFill>
                   <a:srgbClr val="1A1A1A"/>
                 </a:solidFill>
-                <a:latin typeface="Century Schoolbook"/>
+                <a:latin typeface="Lexend"/>
               </a:rPr>
               <a:t>A negative exponent means reciprocal. It never means a negative value.</a:t>
             </a:r>
@@ -16354,8 +16621,8 @@
         </p:nvSpPr>
         <p:spPr>
           <a:xfrm>
-            <a:off x="987552" y="4908804"/>
-            <a:ext cx="4433488" cy="457200"/>
+            <a:off x="987552" y="4911851"/>
+            <a:ext cx="4402523" cy="457200"/>
           </a:xfrm>
           <a:prstGeom prst="rect">
             <a:avLst/>
@@ -16370,11 +16637,11 @@
           <a:p>
             <a:pPr algn="l"/>
             <a:r>
-              <a:rPr sz="2300" b="0" i="0">
+              <a:rPr sz="2180" b="0" i="0">
                 <a:solidFill>
                   <a:srgbClr val="1A1A1A"/>
                 </a:solidFill>
-                <a:latin typeface="Century Schoolbook"/>
+                <a:latin typeface="Lexend"/>
               </a:rPr>
               <a:t>The base keeps its own sign:  </a:t>
             </a:r>
@@ -16383,7 +16650,7 @@
       </p:sp>
       <p:pic>
         <p:nvPicPr>
-          <p:cNvPr id="23" name="Picture 22" descr="6487353c74996e1d.png"/>
+          <p:cNvPr id="23" name="Picture 22" descr="40306a195e2bf5f0.png"/>
           <p:cNvPicPr>
             <a:picLocks noChangeAspect="1"/>
           </p:cNvPicPr>
@@ -16397,8 +16664,8 @@
         </p:blipFill>
         <p:spPr>
           <a:xfrm>
-            <a:off x="5283880" y="4733544"/>
-            <a:ext cx="4267200" cy="807720"/>
+            <a:off x="5252915" y="4739639"/>
+            <a:ext cx="3962399" cy="801624"/>
           </a:xfrm>
           <a:prstGeom prst="rect">
             <a:avLst/>
@@ -16447,11 +16714,11 @@
           <a:p>
             <a:pPr algn="l"/>
             <a:r>
-              <a:rPr sz="3600" b="1" i="0">
+              <a:rPr sz="3420" b="1" i="0">
                 <a:solidFill>
                   <a:srgbClr val="1A1A1A"/>
                 </a:solidFill>
-                <a:latin typeface="Century Schoolbook"/>
+                <a:latin typeface="Lexend"/>
               </a:rPr>
               <a:t>Notes</a:t>
             </a:r>
@@ -16587,11 +16854,11 @@
           <a:p>
             <a:pPr algn="l"/>
             <a:r>
-              <a:rPr sz="1100" b="0" i="1">
+              <a:rPr sz="1040" b="0" i="0">
                 <a:solidFill>
                   <a:srgbClr val="6B6B6B"/>
                 </a:solidFill>
-                <a:latin typeface="Century Schoolbook"/>
+                <a:latin typeface="Lexend"/>
               </a:rPr>
               <a:t>Grade 7 Accelerated · Unit 3 · Lesson 4 — Negative Exponent Law</a:t>
             </a:r>
@@ -16622,11 +16889,11 @@
           <a:p>
             <a:pPr algn="r"/>
             <a:r>
-              <a:rPr sz="1100" b="0" i="0">
+              <a:rPr sz="1040" b="0" i="0">
                 <a:solidFill>
                   <a:srgbClr val="6B6B6B"/>
                 </a:solidFill>
-                <a:latin typeface="Century Schoolbook"/>
+                <a:latin typeface="Lexend"/>
               </a:rPr>
               <a:t>6</a:t>
             </a:r>
@@ -16657,11 +16924,11 @@
           <a:p>
             <a:pPr algn="l"/>
             <a:r>
-              <a:rPr sz="2500" b="1" i="0">
+              <a:rPr sz="2380" b="1" i="0">
                 <a:solidFill>
                   <a:srgbClr val="1A1A1A"/>
                 </a:solidFill>
-                <a:latin typeface="Century Schoolbook"/>
+                <a:latin typeface="Lexend"/>
               </a:rPr>
               <a:t>III.  The laws still work with negative exponents</a:t>
             </a:r>
@@ -16705,7 +16972,7 @@
       </p:cxnSp>
       <p:pic>
         <p:nvPicPr>
-          <p:cNvPr id="10" name="Picture 9" descr="5f5217f7eb4021f2.png"/>
+          <p:cNvPr id="10" name="Picture 9" descr="cc0334afe7b278a8.png"/>
           <p:cNvPicPr>
             <a:picLocks noChangeAspect="1"/>
           </p:cNvPicPr>
@@ -16719,8 +16986,8 @@
         </p:blipFill>
         <p:spPr>
           <a:xfrm>
-            <a:off x="3665219" y="1993392"/>
-            <a:ext cx="4831080" cy="752856"/>
+            <a:off x="3700271" y="1993392"/>
+            <a:ext cx="4760976" cy="734568"/>
           </a:xfrm>
           <a:prstGeom prst="rect">
             <a:avLst/>
@@ -16735,8 +17002,8 @@
         </p:nvSpPr>
         <p:spPr>
           <a:xfrm>
-            <a:off x="3438293" y="2997708"/>
-            <a:ext cx="1124413" cy="457200"/>
+            <a:off x="3522958" y="2979420"/>
+            <a:ext cx="1107483" cy="457200"/>
           </a:xfrm>
           <a:prstGeom prst="rect">
             <a:avLst/>
@@ -16751,11 +17018,11 @@
           <a:p>
             <a:pPr algn="l"/>
             <a:r>
-              <a:rPr sz="2600" b="0" i="0">
+              <a:rPr sz="2470" b="0" i="0">
                 <a:solidFill>
                   <a:srgbClr val="1A1A1A"/>
                 </a:solidFill>
-                <a:latin typeface="Century Schoolbook"/>
+                <a:latin typeface="Lexend"/>
               </a:rPr>
               <a:t>or      </a:t>
             </a:r>
@@ -16764,7 +17031,7 @@
       </p:sp>
       <p:pic>
         <p:nvPicPr>
-          <p:cNvPr id="12" name="Picture 11" descr="9ad19008f4436ada.png"/>
+          <p:cNvPr id="12" name="Picture 11" descr="9c8b9f7e693c72bf.png"/>
           <p:cNvPicPr>
             <a:picLocks noChangeAspect="1"/>
           </p:cNvPicPr>
@@ -16778,8 +17045,8 @@
         </p:blipFill>
         <p:spPr>
           <a:xfrm>
-            <a:off x="4425546" y="3052572"/>
-            <a:ext cx="4297680" cy="347472"/>
+            <a:off x="4493281" y="3038856"/>
+            <a:ext cx="4145280" cy="338328"/>
           </a:xfrm>
           <a:prstGeom prst="rect">
             <a:avLst/>
@@ -16788,7 +17055,7 @@
       </p:pic>
       <p:pic>
         <p:nvPicPr>
-          <p:cNvPr id="13" name="Picture 12" descr="986b589c42d28562.png"/>
+          <p:cNvPr id="13" name="Picture 12" descr="ba6216107014bb83.png"/>
           <p:cNvPicPr>
             <a:picLocks noChangeAspect="1"/>
           </p:cNvPicPr>
@@ -16802,8 +17069,8 @@
         </p:blipFill>
         <p:spPr>
           <a:xfrm>
-            <a:off x="4219955" y="3706368"/>
-            <a:ext cx="3721608" cy="822960"/>
+            <a:off x="4319015" y="3688080"/>
+            <a:ext cx="3523488" cy="783336"/>
           </a:xfrm>
           <a:prstGeom prst="rect">
             <a:avLst/>
@@ -16818,7 +17085,7 @@
         </p:nvSpPr>
         <p:spPr>
           <a:xfrm>
-            <a:off x="987552" y="4867656"/>
+            <a:off x="987552" y="4809744"/>
             <a:ext cx="10131551" cy="950976"/>
           </a:xfrm>
           <a:prstGeom prst="rect">
@@ -16834,11 +17101,11 @@
           <a:p>
             <a:pPr algn="l"/>
             <a:r>
-              <a:rPr sz="2300" b="1" i="0">
+              <a:rPr sz="2180" b="1" i="0">
                 <a:solidFill>
                   <a:srgbClr val="1A1A1A"/>
                 </a:solidFill>
-                <a:latin typeface="Century Schoolbook"/>
+                <a:latin typeface="Lexend"/>
               </a:rPr>
               <a:t>Add, subtract and multiply exponents exactly as before — the exponents are just integers now.</a:t>
             </a:r>
@@ -16887,11 +17154,11 @@
           <a:p>
             <a:pPr algn="l"/>
             <a:r>
-              <a:rPr sz="3600" b="1" i="0">
+              <a:rPr sz="3420" b="1" i="0">
                 <a:solidFill>
                   <a:srgbClr val="1A1A1A"/>
                 </a:solidFill>
-                <a:latin typeface="Century Schoolbook"/>
+                <a:latin typeface="Lexend"/>
               </a:rPr>
               <a:t>Example 1</a:t>
             </a:r>
@@ -17027,11 +17294,11 @@
           <a:p>
             <a:pPr algn="l"/>
             <a:r>
-              <a:rPr sz="1100" b="0" i="1">
+              <a:rPr sz="1040" b="0" i="0">
                 <a:solidFill>
                   <a:srgbClr val="6B6B6B"/>
                 </a:solidFill>
-                <a:latin typeface="Century Schoolbook"/>
+                <a:latin typeface="Lexend"/>
               </a:rPr>
               <a:t>Grade 7 Accelerated · Unit 3 · Lesson 4 — Negative Exponent Law</a:t>
             </a:r>
@@ -17062,11 +17329,11 @@
           <a:p>
             <a:pPr algn="r"/>
             <a:r>
-              <a:rPr sz="1100" b="0" i="0">
+              <a:rPr sz="1040" b="0" i="0">
                 <a:solidFill>
                   <a:srgbClr val="6B6B6B"/>
                 </a:solidFill>
-                <a:latin typeface="Century Schoolbook"/>
+                <a:latin typeface="Lexend"/>
               </a:rPr>
               <a:t>7</a:t>
             </a:r>
@@ -17075,7 +17342,7 @@
       </p:sp>
       <p:pic>
         <p:nvPicPr>
-          <p:cNvPr id="8" name="Picture 7" descr="55e053ce9247b821.png"/>
+          <p:cNvPr id="8" name="Picture 7" descr="d8836e49d1cfec86.png"/>
           <p:cNvPicPr>
             <a:picLocks noChangeAspect="1"/>
           </p:cNvPicPr>
@@ -17089,8 +17356,8 @@
         </p:blipFill>
         <p:spPr>
           <a:xfrm>
-            <a:off x="5795772" y="2103120"/>
-            <a:ext cx="569976" cy="816864"/>
+            <a:off x="5812536" y="2103120"/>
+            <a:ext cx="536448" cy="789432"/>
           </a:xfrm>
           <a:prstGeom prst="rect">
             <a:avLst/>
@@ -17105,7 +17372,7 @@
         </p:nvSpPr>
         <p:spPr>
           <a:xfrm>
-            <a:off x="777240" y="3422904"/>
+            <a:off x="777240" y="3395472"/>
             <a:ext cx="10607040" cy="429370"/>
           </a:xfrm>
           <a:prstGeom prst="rect">
@@ -17121,11 +17388,11 @@
           <a:p>
             <a:pPr algn="ctr"/>
             <a:r>
-              <a:rPr sz="2400" b="1" i="0">
+              <a:rPr sz="2280" b="1" i="0">
                 <a:solidFill>
                   <a:srgbClr val="1A1A1A"/>
                 </a:solidFill>
-                <a:latin typeface="Century Schoolbook"/>
+                <a:latin typeface="Lexend"/>
               </a:rPr>
               <a:t>Rewrite with positive exponents, then find the value.</a:t>
             </a:r>
@@ -17174,11 +17441,11 @@
           <a:p>
             <a:pPr algn="l"/>
             <a:r>
-              <a:rPr sz="3600" b="1" i="0">
+              <a:rPr sz="3420" b="1" i="0">
                 <a:solidFill>
                   <a:srgbClr val="1A1A1A"/>
                 </a:solidFill>
-                <a:latin typeface="Century Schoolbook"/>
+                <a:latin typeface="Lexend"/>
               </a:rPr>
               <a:t>Example 1</a:t>
             </a:r>
@@ -17314,11 +17581,11 @@
           <a:p>
             <a:pPr algn="l"/>
             <a:r>
-              <a:rPr sz="1100" b="0" i="1">
+              <a:rPr sz="1040" b="0" i="0">
                 <a:solidFill>
                   <a:srgbClr val="6B6B6B"/>
                 </a:solidFill>
-                <a:latin typeface="Century Schoolbook"/>
+                <a:latin typeface="Lexend"/>
               </a:rPr>
               <a:t>Grade 7 Accelerated · Unit 3 · Lesson 4 — Negative Exponent Law</a:t>
             </a:r>
@@ -17349,11 +17616,11 @@
           <a:p>
             <a:pPr algn="r"/>
             <a:r>
-              <a:rPr sz="1100" b="0" i="0">
+              <a:rPr sz="1040" b="0" i="0">
                 <a:solidFill>
                   <a:srgbClr val="6B6B6B"/>
                 </a:solidFill>
-                <a:latin typeface="Century Schoolbook"/>
+                <a:latin typeface="Lexend"/>
               </a:rPr>
               <a:t>8</a:t>
             </a:r>
@@ -17362,7 +17629,7 @@
       </p:sp>
       <p:pic>
         <p:nvPicPr>
-          <p:cNvPr id="8" name="Picture 7" descr="86e883f301281d71.png"/>
+          <p:cNvPr id="8" name="Picture 7" descr="b5557daf282610ed.png"/>
           <p:cNvPicPr>
             <a:picLocks noChangeAspect="1"/>
           </p:cNvPicPr>
@@ -17377,7 +17644,7 @@
         <p:spPr>
           <a:xfrm>
             <a:off x="1828800" y="1920240"/>
-            <a:ext cx="1380744" cy="816864"/>
+            <a:ext cx="1313688" cy="792480"/>
           </a:xfrm>
           <a:prstGeom prst="rect">
             <a:avLst/>
@@ -17386,7 +17653,7 @@
       </p:pic>
       <p:pic>
         <p:nvPicPr>
-          <p:cNvPr id="9" name="Picture 8" descr="bdb5dbd5190fc4b9.png"/>
+          <p:cNvPr id="9" name="Picture 8" descr="910e7e74eaed257f.png"/>
           <p:cNvPicPr>
             <a:picLocks noChangeAspect="1"/>
           </p:cNvPicPr>
@@ -17400,8 +17667,8 @@
         </p:blipFill>
         <p:spPr>
           <a:xfrm>
-            <a:off x="1828800" y="3011423"/>
-            <a:ext cx="2764536" cy="804672"/>
+            <a:off x="1828800" y="2987040"/>
+            <a:ext cx="2727960" cy="789432"/>
           </a:xfrm>
           <a:prstGeom prst="rect">
             <a:avLst/>
@@ -17432,11 +17699,11 @@
           <a:p>
             <a:pPr algn="ctr"/>
             <a:r>
-              <a:rPr sz="3200" b="1" i="0">
+              <a:rPr sz="3040" b="1" i="0">
                 <a:solidFill>
                   <a:srgbClr val="9E1B32"/>
                 </a:solidFill>
-                <a:latin typeface="Century Schoolbook"/>
+                <a:latin typeface="Lexend"/>
               </a:rPr>
               <a:t>Answer:   81/8 = 10.125</a:t>
             </a:r>
@@ -17485,11 +17752,11 @@
           <a:p>
             <a:pPr algn="l"/>
             <a:r>
-              <a:rPr sz="3600" b="1" i="0">
+              <a:rPr sz="3420" b="1" i="0">
                 <a:solidFill>
                   <a:srgbClr val="1A1A1A"/>
                 </a:solidFill>
-                <a:latin typeface="Century Schoolbook"/>
+                <a:latin typeface="Lexend"/>
               </a:rPr>
               <a:t>Your Turn</a:t>
             </a:r>
@@ -17625,11 +17892,11 @@
           <a:p>
             <a:pPr algn="l"/>
             <a:r>
-              <a:rPr sz="1100" b="0" i="1">
+              <a:rPr sz="1040" b="0" i="0">
                 <a:solidFill>
                   <a:srgbClr val="6B6B6B"/>
                 </a:solidFill>
-                <a:latin typeface="Century Schoolbook"/>
+                <a:latin typeface="Lexend"/>
               </a:rPr>
               <a:t>Grade 7 Accelerated · Unit 3 · Lesson 4 — Negative Exponent Law</a:t>
             </a:r>
@@ -17660,11 +17927,11 @@
           <a:p>
             <a:pPr algn="r"/>
             <a:r>
-              <a:rPr sz="1100" b="0" i="0">
+              <a:rPr sz="1040" b="0" i="0">
                 <a:solidFill>
                   <a:srgbClr val="6B6B6B"/>
                 </a:solidFill>
-                <a:latin typeface="Century Schoolbook"/>
+                <a:latin typeface="Lexend"/>
               </a:rPr>
               <a:t>9</a:t>
             </a:r>
@@ -17673,7 +17940,7 @@
       </p:sp>
       <p:pic>
         <p:nvPicPr>
-          <p:cNvPr id="8" name="Picture 7" descr="04c00c9d3a9d2478.png"/>
+          <p:cNvPr id="8" name="Picture 7" descr="56f58bfbd6c8fb8c.png"/>
           <p:cNvPicPr>
             <a:picLocks noChangeAspect="1"/>
           </p:cNvPicPr>
@@ -17687,8 +17954,8 @@
         </p:blipFill>
         <p:spPr>
           <a:xfrm>
-            <a:off x="5725667" y="2194560"/>
-            <a:ext cx="710184" cy="1021080"/>
+            <a:off x="5750052" y="1600200"/>
+            <a:ext cx="661416" cy="993648"/>
           </a:xfrm>
           <a:prstGeom prst="rect">
             <a:avLst/>
@@ -17703,7 +17970,7 @@
         </p:nvSpPr>
         <p:spPr>
           <a:xfrm>
-            <a:off x="777240" y="3718560"/>
+            <a:off x="777240" y="3096768"/>
             <a:ext cx="10607040" cy="429370"/>
           </a:xfrm>
           <a:prstGeom prst="rect">
@@ -17719,11 +17986,11 @@
           <a:p>
             <a:pPr algn="ctr"/>
             <a:r>
-              <a:rPr sz="2400" b="1" i="0">
+              <a:rPr sz="2280" b="1" i="0">
                 <a:solidFill>
                   <a:srgbClr val="1A1A1A"/>
                 </a:solidFill>
-                <a:latin typeface="Century Schoolbook"/>
+                <a:latin typeface="Lexend"/>
               </a:rPr>
               <a:t>Rewrite with positive exponents, then find the value.</a:t>
             </a:r>

--- a/a7/packages/A7 Unit 3 - Exponents and Scientific Notation/Lessons/3.04/A7 3.04 Negative Exponent Law - Slides.pptx
+++ b/a7/packages/A7 Unit 3 - Exponents and Scientific Notation/Lessons/3.04/A7 3.04 Negative Exponent Law - Slides.pptx
@@ -8155,7 +8155,7 @@
       </p:sp>
       <p:pic>
         <p:nvPicPr>
-          <p:cNvPr id="8" name="Picture 7" descr="20cab291981eb64f.png"/>
+          <p:cNvPr id="8" name="Picture 7" descr="05ed5994341d2d15.png"/>
           <p:cNvPicPr>
             <a:picLocks noChangeAspect="1"/>
           </p:cNvPicPr>
@@ -8169,8 +8169,8 @@
         </p:blipFill>
         <p:spPr>
           <a:xfrm>
-            <a:off x="5457444" y="2194560"/>
-            <a:ext cx="1246632" cy="505968"/>
+            <a:off x="5462015" y="2194560"/>
+            <a:ext cx="1237488" cy="505968"/>
           </a:xfrm>
           <a:prstGeom prst="rect">
             <a:avLst/>
@@ -8442,7 +8442,7 @@
       </p:sp>
       <p:pic>
         <p:nvPicPr>
-          <p:cNvPr id="8" name="Picture 7" descr="b3224c13b7d8fa54.png"/>
+          <p:cNvPr id="8" name="Picture 7" descr="e3e235a5ec086a83.png"/>
           <p:cNvPicPr>
             <a:picLocks noChangeAspect="1"/>
           </p:cNvPicPr>
@@ -8456,8 +8456,8 @@
         </p:blipFill>
         <p:spPr>
           <a:xfrm>
-            <a:off x="5455919" y="2103120"/>
-            <a:ext cx="1249680" cy="509016"/>
+            <a:off x="5460491" y="2103120"/>
+            <a:ext cx="1240536" cy="509016"/>
           </a:xfrm>
           <a:prstGeom prst="rect">
             <a:avLst/>
@@ -8466,7 +8466,7 @@
       </p:pic>
       <p:pic>
         <p:nvPicPr>
-          <p:cNvPr id="9" name="Picture 8" descr="6b0d31b34f4f077d.png"/>
+          <p:cNvPr id="9" name="Picture 8" descr="a99396db6bc2a464.png"/>
           <p:cNvPicPr>
             <a:picLocks noChangeAspect="1"/>
           </p:cNvPicPr>
@@ -8480,8 +8480,8 @@
         </p:blipFill>
         <p:spPr>
           <a:xfrm>
-            <a:off x="4001943" y="2913888"/>
-            <a:ext cx="2039112" cy="728472"/>
+            <a:off x="3825159" y="2913888"/>
+            <a:ext cx="2023872" cy="728472"/>
           </a:xfrm>
           <a:prstGeom prst="rect">
             <a:avLst/>
@@ -8490,7 +8490,7 @@
       </p:pic>
       <p:pic>
         <p:nvPicPr>
-          <p:cNvPr id="10" name="Picture 9" descr="6a0147d16c9e8ceb.png"/>
+          <p:cNvPr id="10" name="Picture 9" descr="e24b5ec6ef9ddd3a.png"/>
           <p:cNvPicPr>
             <a:picLocks noChangeAspect="1"/>
           </p:cNvPicPr>
@@ -8504,8 +8504,8 @@
         </p:blipFill>
         <p:spPr>
           <a:xfrm>
-            <a:off x="4001943" y="3950207"/>
-            <a:ext cx="1493520" cy="368808"/>
+            <a:off x="3825159" y="3950207"/>
+            <a:ext cx="1673352" cy="368808"/>
           </a:xfrm>
           <a:prstGeom prst="rect">
             <a:avLst/>
@@ -8520,7 +8520,7 @@
         </p:nvSpPr>
         <p:spPr>
           <a:xfrm>
-            <a:off x="5495463" y="3906012"/>
+            <a:off x="5498511" y="3906012"/>
             <a:ext cx="1338233" cy="457200"/>
           </a:xfrm>
           <a:prstGeom prst="rect">
@@ -8549,7 +8549,7 @@
       </p:sp>
       <p:pic>
         <p:nvPicPr>
-          <p:cNvPr id="12" name="Picture 11" descr="e42c82d3a519661f.png"/>
+          <p:cNvPr id="12" name="Picture 11" descr="0b6efffc5fd5cf35.png"/>
           <p:cNvPicPr>
             <a:picLocks noChangeAspect="1"/>
           </p:cNvPicPr>
@@ -8563,8 +8563,8 @@
         </p:blipFill>
         <p:spPr>
           <a:xfrm>
-            <a:off x="6696536" y="3770375"/>
-            <a:ext cx="1569720" cy="728472"/>
+            <a:off x="6699584" y="3770375"/>
+            <a:ext cx="1740408" cy="728472"/>
           </a:xfrm>
           <a:prstGeom prst="rect">
             <a:avLst/>
@@ -8579,7 +8579,7 @@
         </p:nvSpPr>
         <p:spPr>
           <a:xfrm>
-            <a:off x="4849367" y="4806695"/>
+            <a:off x="4725924" y="4808220"/>
             <a:ext cx="1920240" cy="548640"/>
           </a:xfrm>
           <a:prstGeom prst="rect">
@@ -8608,7 +8608,7 @@
       </p:sp>
       <p:pic>
         <p:nvPicPr>
-          <p:cNvPr id="14" name="Picture 13" descr="4df8b33a9d5d56bd.png"/>
+          <p:cNvPr id="14" name="Picture 13" descr="4a899f6d16bb648c.png"/>
           <p:cNvPicPr>
             <a:picLocks noChangeAspect="1"/>
           </p:cNvPicPr>
@@ -8622,8 +8622,8 @@
         </p:blipFill>
         <p:spPr>
           <a:xfrm>
-            <a:off x="6769607" y="4663440"/>
-            <a:ext cx="542544" cy="835152"/>
+            <a:off x="6646163" y="4663440"/>
+            <a:ext cx="789432" cy="838200"/>
           </a:xfrm>
           <a:prstGeom prst="rect">
             <a:avLst/>
@@ -8860,7 +8860,7 @@
       </p:sp>
       <p:pic>
         <p:nvPicPr>
-          <p:cNvPr id="8" name="Picture 7" descr="9e00e37454aae3a5.png"/>
+          <p:cNvPr id="8" name="Picture 7" descr="cd97e5aee2cc52e6.png"/>
           <p:cNvPicPr>
             <a:picLocks noChangeAspect="1"/>
           </p:cNvPicPr>
@@ -8874,8 +8874,8 @@
         </p:blipFill>
         <p:spPr>
           <a:xfrm>
-            <a:off x="5765292" y="2194560"/>
-            <a:ext cx="630936" cy="420624"/>
+            <a:off x="5775960" y="2194560"/>
+            <a:ext cx="609600" cy="417576"/>
           </a:xfrm>
           <a:prstGeom prst="rect">
             <a:avLst/>
@@ -8890,7 +8890,7 @@
         </p:nvSpPr>
         <p:spPr>
           <a:xfrm>
-            <a:off x="777240" y="2843784"/>
+            <a:off x="777240" y="2840736"/>
             <a:ext cx="10607040" cy="465151"/>
           </a:xfrm>
           <a:prstGeom prst="rect">
@@ -8925,7 +8925,7 @@
         </p:nvSpPr>
         <p:spPr>
           <a:xfrm>
-            <a:off x="1874519" y="3510103"/>
+            <a:off x="1874519" y="3507055"/>
             <a:ext cx="4572000" cy="548640"/>
           </a:xfrm>
           <a:prstGeom prst="rect">
@@ -8956,7 +8956,7 @@
                 </a:solidFill>
                 <a:latin typeface="Lexend"/>
               </a:rPr>
-              <a:t>1/10</a:t>
+              <a:t>1/14</a:t>
             </a:r>
           </a:p>
         </p:txBody>
@@ -8969,7 +8969,7 @@
         </p:nvSpPr>
         <p:spPr>
           <a:xfrm>
-            <a:off x="6629400" y="3510103"/>
+            <a:off x="6629400" y="3507055"/>
             <a:ext cx="4572000" cy="548640"/>
           </a:xfrm>
           <a:prstGeom prst="rect">
@@ -9000,7 +9000,7 @@
                 </a:solidFill>
                 <a:latin typeface="Lexend"/>
               </a:rPr>
-              <a:t>1/25</a:t>
+              <a:t>1/49</a:t>
             </a:r>
           </a:p>
         </p:txBody>
@@ -9013,7 +9013,7 @@
         </p:nvSpPr>
         <p:spPr>
           <a:xfrm>
-            <a:off x="1874519" y="4195903"/>
+            <a:off x="1874519" y="4192855"/>
             <a:ext cx="4572000" cy="548640"/>
           </a:xfrm>
           <a:prstGeom prst="rect">
@@ -9044,7 +9044,7 @@
                 </a:solidFill>
                 <a:latin typeface="Lexend"/>
               </a:rPr>
-              <a:t>−25</a:t>
+              <a:t>−49</a:t>
             </a:r>
           </a:p>
         </p:txBody>
@@ -9057,7 +9057,7 @@
         </p:nvSpPr>
         <p:spPr>
           <a:xfrm>
-            <a:off x="6629400" y="4195903"/>
+            <a:off x="6629400" y="4192855"/>
             <a:ext cx="4572000" cy="548640"/>
           </a:xfrm>
           <a:prstGeom prst="rect">
@@ -9088,7 +9088,7 @@
                 </a:solidFill>
                 <a:latin typeface="Lexend"/>
               </a:rPr>
-              <a:t>−10</a:t>
+              <a:t>−14</a:t>
             </a:r>
           </a:p>
         </p:txBody>
@@ -9101,7 +9101,7 @@
         </p:nvSpPr>
         <p:spPr>
           <a:xfrm>
-            <a:off x="777240" y="5201743"/>
+            <a:off x="777240" y="5198695"/>
             <a:ext cx="10607040" cy="457200"/>
           </a:xfrm>
           <a:prstGeom prst="rect">
@@ -9358,7 +9358,7 @@
       </p:sp>
       <p:pic>
         <p:nvPicPr>
-          <p:cNvPr id="8" name="Picture 7" descr="34b6c156891d8887.png"/>
+          <p:cNvPr id="8" name="Picture 7" descr="292c6252f152d049.png"/>
           <p:cNvPicPr>
             <a:picLocks noChangeAspect="1"/>
           </p:cNvPicPr>
@@ -9372,8 +9372,8 @@
         </p:blipFill>
         <p:spPr>
           <a:xfrm>
-            <a:off x="5763767" y="2103120"/>
-            <a:ext cx="633984" cy="420624"/>
+            <a:off x="5775960" y="2103120"/>
+            <a:ext cx="609600" cy="417576"/>
           </a:xfrm>
           <a:prstGeom prst="rect">
             <a:avLst/>
@@ -9388,7 +9388,7 @@
         </p:nvSpPr>
         <p:spPr>
           <a:xfrm>
-            <a:off x="777240" y="2752344"/>
+            <a:off x="777240" y="2749295"/>
             <a:ext cx="10607040" cy="465151"/>
           </a:xfrm>
           <a:prstGeom prst="rect">
@@ -9417,7 +9417,7 @@
       </p:sp>
       <p:pic>
         <p:nvPicPr>
-          <p:cNvPr id="10" name="Picture 9" descr="b9c8e2103b94912c.png"/>
+          <p:cNvPr id="10" name="Picture 9" descr="0d046fd1892be304.png"/>
           <p:cNvPicPr>
             <a:picLocks noChangeAspect="1"/>
           </p:cNvPicPr>
@@ -9431,8 +9431,8 @@
         </p:blipFill>
         <p:spPr>
           <a:xfrm>
-            <a:off x="5178551" y="3400375"/>
-            <a:ext cx="1908047" cy="664464"/>
+            <a:off x="5181599" y="3397327"/>
+            <a:ext cx="1898904" cy="664464"/>
           </a:xfrm>
           <a:prstGeom prst="rect">
             <a:avLst/>
@@ -9469,7 +9469,7 @@
                 </a:solidFill>
                 <a:latin typeface="Lexend"/>
               </a:rPr>
-              <a:t>Answer:   B — 1/25</a:t>
+              <a:t>Answer:   B — 1/49</a:t>
             </a:r>
           </a:p>
         </p:txBody>
@@ -9704,7 +9704,7 @@
       </p:sp>
       <p:pic>
         <p:nvPicPr>
-          <p:cNvPr id="8" name="Picture 7" descr="2ea43d19b748a42d.png"/>
+          <p:cNvPr id="8" name="Picture 7" descr="efb7beb69be3a83a.png"/>
           <p:cNvPicPr>
             <a:picLocks noChangeAspect="1"/>
           </p:cNvPicPr>
@@ -9718,8 +9718,8 @@
         </p:blipFill>
         <p:spPr>
           <a:xfrm>
-            <a:off x="5385816" y="2194560"/>
-            <a:ext cx="1389888" cy="417576"/>
+            <a:off x="5355336" y="2194560"/>
+            <a:ext cx="1450848" cy="414528"/>
           </a:xfrm>
           <a:prstGeom prst="rect">
             <a:avLst/>
@@ -9734,7 +9734,7 @@
         </p:nvSpPr>
         <p:spPr>
           <a:xfrm>
-            <a:off x="777240" y="2840736"/>
+            <a:off x="777240" y="2837687"/>
             <a:ext cx="10607040" cy="465151"/>
           </a:xfrm>
           <a:prstGeom prst="rect">
@@ -9769,7 +9769,7 @@
         </p:nvSpPr>
         <p:spPr>
           <a:xfrm>
-            <a:off x="1874519" y="3507055"/>
+            <a:off x="1874519" y="3504007"/>
             <a:ext cx="4572000" cy="548640"/>
           </a:xfrm>
           <a:prstGeom prst="rect">
@@ -9800,7 +9800,7 @@
                 </a:solidFill>
                 <a:latin typeface="Lexend"/>
               </a:rPr>
-              <a:t>6</a:t>
+              <a:t>4</a:t>
             </a:r>
             <a:r>
               <a:rPr sz="2280" b="0" i="0" baseline="30000">
@@ -9809,7 +9809,7 @@
                 </a:solidFill>
                 <a:latin typeface="Lexend"/>
               </a:rPr>
-              <a:t>-10</a:t>
+              <a:t>-21</a:t>
             </a:r>
           </a:p>
         </p:txBody>
@@ -9822,7 +9822,7 @@
         </p:nvSpPr>
         <p:spPr>
           <a:xfrm>
-            <a:off x="6629400" y="3507055"/>
+            <a:off x="6629400" y="3504007"/>
             <a:ext cx="4572000" cy="548640"/>
           </a:xfrm>
           <a:prstGeom prst="rect">
@@ -9853,7 +9853,7 @@
                 </a:solidFill>
                 <a:latin typeface="Lexend"/>
               </a:rPr>
-              <a:t>36</a:t>
+              <a:t>16</a:t>
             </a:r>
             <a:r>
               <a:rPr sz="2280" b="0" i="0" baseline="30000">
@@ -9862,7 +9862,7 @@
                 </a:solidFill>
                 <a:latin typeface="Lexend"/>
               </a:rPr>
-              <a:t>3</a:t>
+              <a:t>4</a:t>
             </a:r>
           </a:p>
         </p:txBody>
@@ -9875,7 +9875,7 @@
         </p:nvSpPr>
         <p:spPr>
           <a:xfrm>
-            <a:off x="1874519" y="4192855"/>
+            <a:off x="1874519" y="4189807"/>
             <a:ext cx="4572000" cy="548640"/>
           </a:xfrm>
           <a:prstGeom prst="rect">
@@ -9906,7 +9906,7 @@
                 </a:solidFill>
                 <a:latin typeface="Lexend"/>
               </a:rPr>
-              <a:t>6</a:t>
+              <a:t>4</a:t>
             </a:r>
             <a:r>
               <a:rPr sz="2280" b="0" i="0" baseline="30000">
@@ -9915,7 +9915,7 @@
                 </a:solidFill>
                 <a:latin typeface="Lexend"/>
               </a:rPr>
-              <a:t>-7</a:t>
+              <a:t>-10</a:t>
             </a:r>
           </a:p>
         </p:txBody>
@@ -9928,7 +9928,7 @@
         </p:nvSpPr>
         <p:spPr>
           <a:xfrm>
-            <a:off x="6629400" y="4192855"/>
+            <a:off x="6629400" y="4189807"/>
             <a:ext cx="4572000" cy="548640"/>
           </a:xfrm>
           <a:prstGeom prst="rect">
@@ -9959,7 +9959,7 @@
                 </a:solidFill>
                 <a:latin typeface="Lexend"/>
               </a:rPr>
-              <a:t>6</a:t>
+              <a:t>4</a:t>
             </a:r>
             <a:r>
               <a:rPr sz="2280" b="0" i="0" baseline="30000">
@@ -9968,7 +9968,7 @@
                 </a:solidFill>
                 <a:latin typeface="Lexend"/>
               </a:rPr>
-              <a:t>3</a:t>
+              <a:t>4</a:t>
             </a:r>
           </a:p>
         </p:txBody>
@@ -9981,7 +9981,7 @@
         </p:nvSpPr>
         <p:spPr>
           <a:xfrm>
-            <a:off x="777240" y="5198695"/>
+            <a:off x="777240" y="5195647"/>
             <a:ext cx="10607040" cy="457200"/>
           </a:xfrm>
           <a:prstGeom prst="rect">
@@ -10238,7 +10238,7 @@
       </p:sp>
       <p:pic>
         <p:nvPicPr>
-          <p:cNvPr id="8" name="Picture 7" descr="f0604488e0753f6d.png"/>
+          <p:cNvPr id="8" name="Picture 7" descr="5354deec5b025c5d.png"/>
           <p:cNvPicPr>
             <a:picLocks noChangeAspect="1"/>
           </p:cNvPicPr>
@@ -10252,8 +10252,8 @@
         </p:blipFill>
         <p:spPr>
           <a:xfrm>
-            <a:off x="5384291" y="2103120"/>
-            <a:ext cx="1392936" cy="417576"/>
+            <a:off x="5355336" y="2103120"/>
+            <a:ext cx="1450848" cy="414528"/>
           </a:xfrm>
           <a:prstGeom prst="rect">
             <a:avLst/>
@@ -10268,7 +10268,7 @@
         </p:nvSpPr>
         <p:spPr>
           <a:xfrm>
-            <a:off x="777240" y="2749295"/>
+            <a:off x="777240" y="2746247"/>
             <a:ext cx="10607040" cy="465151"/>
           </a:xfrm>
           <a:prstGeom prst="rect">
@@ -10297,7 +10297,7 @@
       </p:sp>
       <p:pic>
         <p:nvPicPr>
-          <p:cNvPr id="10" name="Picture 9" descr="3c35b48e83eedbe0.png"/>
+          <p:cNvPr id="10" name="Picture 9" descr="61de82c6fa4065ab.png"/>
           <p:cNvPicPr>
             <a:picLocks noChangeAspect="1"/>
           </p:cNvPicPr>
@@ -10311,8 +10311,8 @@
         </p:blipFill>
         <p:spPr>
           <a:xfrm>
-            <a:off x="4704587" y="3452191"/>
-            <a:ext cx="2862072" cy="301752"/>
+            <a:off x="4658867" y="3449143"/>
+            <a:ext cx="2953512" cy="301752"/>
           </a:xfrm>
           <a:prstGeom prst="rect">
             <a:avLst/>
@@ -10349,7 +10349,7 @@
                 </a:solidFill>
                 <a:latin typeface="Lexend"/>
               </a:rPr>
-              <a:t>Answer:   D — 6</a:t>
+              <a:t>Answer:   D — 4</a:t>
             </a:r>
             <a:r>
               <a:rPr sz="3040" b="1" i="0" baseline="30000">
@@ -10358,7 +10358,7 @@
                 </a:solidFill>
                 <a:latin typeface="Lexend"/>
               </a:rPr>
-              <a:t>3</a:t>
+              <a:t>4</a:t>
             </a:r>
           </a:p>
         </p:txBody>
@@ -11191,7 +11191,7 @@
       </p:sp>
       <p:pic>
         <p:nvPicPr>
-          <p:cNvPr id="8" name="Picture 7" descr="c069a33fa07e0980.png"/>
+          <p:cNvPr id="8" name="Picture 7" descr="170520fa2fb515e6.png"/>
           <p:cNvPicPr>
             <a:picLocks noChangeAspect="1"/>
           </p:cNvPicPr>
@@ -11205,8 +11205,8 @@
         </p:blipFill>
         <p:spPr>
           <a:xfrm>
-            <a:off x="5742431" y="2194560"/>
-            <a:ext cx="676656" cy="978408"/>
+            <a:off x="5625084" y="2194560"/>
+            <a:ext cx="911352" cy="981455"/>
           </a:xfrm>
           <a:prstGeom prst="rect">
             <a:avLst/>
@@ -12259,7 +12259,7 @@
       </p:sp>
       <p:pic>
         <p:nvPicPr>
-          <p:cNvPr id="8" name="Picture 7" descr="3bba102cf2b4d39b.png"/>
+          <p:cNvPr id="8" name="Picture 7" descr="5083a771fa167e78.png"/>
           <p:cNvPicPr>
             <a:picLocks noChangeAspect="1"/>
           </p:cNvPicPr>
@@ -12273,8 +12273,8 @@
         </p:blipFill>
         <p:spPr>
           <a:xfrm>
-            <a:off x="5745480" y="2103120"/>
-            <a:ext cx="670560" cy="981455"/>
+            <a:off x="5628131" y="2103120"/>
+            <a:ext cx="905256" cy="984504"/>
           </a:xfrm>
           <a:prstGeom prst="rect">
             <a:avLst/>
@@ -12283,7 +12283,7 @@
       </p:pic>
       <p:pic>
         <p:nvPicPr>
-          <p:cNvPr id="9" name="Picture 8" descr="0e2ea5a2bdf7f31c.png"/>
+          <p:cNvPr id="9" name="Picture 8" descr="26bb29da2dcbe976.png"/>
           <p:cNvPicPr>
             <a:picLocks noChangeAspect="1"/>
           </p:cNvPicPr>
@@ -12297,8 +12297,8 @@
         </p:blipFill>
         <p:spPr>
           <a:xfrm>
-            <a:off x="4885944" y="3386328"/>
-            <a:ext cx="2502408" cy="710184"/>
+            <a:off x="4637531" y="3389376"/>
+            <a:ext cx="2999232" cy="713232"/>
           </a:xfrm>
           <a:prstGeom prst="rect">
             <a:avLst/>
@@ -12307,7 +12307,7 @@
       </p:pic>
       <p:pic>
         <p:nvPicPr>
-          <p:cNvPr id="10" name="Picture 9" descr="c6e45c9cf6e731b9.png"/>
+          <p:cNvPr id="10" name="Picture 9" descr="657ab801421f2555.png"/>
           <p:cNvPicPr>
             <a:picLocks noChangeAspect="1"/>
           </p:cNvPicPr>
@@ -12321,8 +12321,8 @@
         </p:blipFill>
         <p:spPr>
           <a:xfrm>
-            <a:off x="4885944" y="4224528"/>
-            <a:ext cx="1149096" cy="658368"/>
+            <a:off x="4637531" y="4230624"/>
+            <a:ext cx="1435608" cy="661416"/>
           </a:xfrm>
           <a:prstGeom prst="rect">
             <a:avLst/>
@@ -12337,7 +12337,7 @@
         </p:nvSpPr>
         <p:spPr>
           <a:xfrm>
-            <a:off x="4878324" y="5199888"/>
+            <a:off x="4774692" y="5210556"/>
             <a:ext cx="1920240" cy="548640"/>
           </a:xfrm>
           <a:prstGeom prst="rect">
@@ -12366,7 +12366,7 @@
       </p:sp>
       <p:pic>
         <p:nvPicPr>
-          <p:cNvPr id="12" name="Picture 11" descr="d47bd37afc5ec3e7.png"/>
+          <p:cNvPr id="12" name="Picture 11" descr="6b831c282b463cfc.png"/>
           <p:cNvPicPr>
             <a:picLocks noChangeAspect="1"/>
           </p:cNvPicPr>
@@ -12380,8 +12380,8 @@
         </p:blipFill>
         <p:spPr>
           <a:xfrm>
-            <a:off x="6798564" y="5020056"/>
-            <a:ext cx="484632" cy="908304"/>
+            <a:off x="6694932" y="5029200"/>
+            <a:ext cx="691896" cy="911352"/>
           </a:xfrm>
           <a:prstGeom prst="rect">
             <a:avLst/>
@@ -12624,7 +12624,7 @@
         </p:nvSpPr>
         <p:spPr>
           <a:xfrm>
-            <a:off x="3244327" y="2171700"/>
+            <a:off x="3058271" y="2171700"/>
             <a:ext cx="3967001" cy="457200"/>
           </a:xfrm>
           <a:prstGeom prst="rect">
@@ -12653,7 +12653,7 @@
       </p:sp>
       <p:pic>
         <p:nvPicPr>
-          <p:cNvPr id="9" name="Picture 8" descr="64e1dd1e79cf6965.png"/>
+          <p:cNvPr id="9" name="Picture 8" descr="b511c60c185ded48.png"/>
           <p:cNvPicPr>
             <a:picLocks noChangeAspect="1"/>
           </p:cNvPicPr>
@@ -12667,8 +12667,8 @@
         </p:blipFill>
         <p:spPr>
           <a:xfrm>
-            <a:off x="7074169" y="2229612"/>
-            <a:ext cx="505968" cy="341376"/>
+            <a:off x="6888113" y="2231136"/>
+            <a:ext cx="670560" cy="338328"/>
           </a:xfrm>
           <a:prstGeom prst="rect">
             <a:avLst/>
@@ -12683,8 +12683,8 @@
         </p:nvSpPr>
         <p:spPr>
           <a:xfrm>
-            <a:off x="7580137" y="2171700"/>
-            <a:ext cx="1474215" cy="457200"/>
+            <a:off x="7558673" y="2171700"/>
+            <a:ext cx="1681734" cy="457200"/>
           </a:xfrm>
           <a:prstGeom prst="rect">
             <a:avLst/>
@@ -12705,7 +12705,7 @@
                 </a:solidFill>
                 <a:latin typeface="Lexend"/>
               </a:rPr>
-              <a:t>  is  −25.</a:t>
+              <a:t>  is  −144.</a:t>
             </a:r>
           </a:p>
         </p:txBody>
@@ -13016,7 +13016,7 @@
         </p:nvSpPr>
         <p:spPr>
           <a:xfrm>
-            <a:off x="3244327" y="2080260"/>
+            <a:off x="3058271" y="2080260"/>
             <a:ext cx="3967001" cy="457200"/>
           </a:xfrm>
           <a:prstGeom prst="rect">
@@ -13045,7 +13045,7 @@
       </p:sp>
       <p:pic>
         <p:nvPicPr>
-          <p:cNvPr id="9" name="Picture 8" descr="c0ab7b0d6a4ecdbd.png"/>
+          <p:cNvPr id="9" name="Picture 8" descr="1d6981f2fce9306c.png"/>
           <p:cNvPicPr>
             <a:picLocks noChangeAspect="1"/>
           </p:cNvPicPr>
@@ -13059,8 +13059,8 @@
         </p:blipFill>
         <p:spPr>
           <a:xfrm>
-            <a:off x="7074169" y="2138171"/>
-            <a:ext cx="505968" cy="341376"/>
+            <a:off x="6888113" y="2139696"/>
+            <a:ext cx="670560" cy="338328"/>
           </a:xfrm>
           <a:prstGeom prst="rect">
             <a:avLst/>
@@ -13075,8 +13075,8 @@
         </p:nvSpPr>
         <p:spPr>
           <a:xfrm>
-            <a:off x="7580137" y="2080260"/>
-            <a:ext cx="1474215" cy="457200"/>
+            <a:off x="7558673" y="2080260"/>
+            <a:ext cx="1681734" cy="457200"/>
           </a:xfrm>
           <a:prstGeom prst="rect">
             <a:avLst/>
@@ -13097,7 +13097,7 @@
                 </a:solidFill>
                 <a:latin typeface="Lexend"/>
               </a:rPr>
-              <a:t>  is  −25.</a:t>
+              <a:t>  is  −144.</a:t>
             </a:r>
           </a:p>
         </p:txBody>
@@ -13174,7 +13174,7 @@
       </p:sp>
       <p:pic>
         <p:nvPicPr>
-          <p:cNvPr id="13" name="Picture 12" descr="f6e64cf386c3791e.png"/>
+          <p:cNvPr id="13" name="Picture 12" descr="aed21e693a3711f6.png"/>
           <p:cNvPicPr>
             <a:picLocks noChangeAspect="1"/>
           </p:cNvPicPr>
@@ -13189,7 +13189,7 @@
         <p:spPr>
           <a:xfrm>
             <a:off x="1520147" y="3939871"/>
-            <a:ext cx="1612392" cy="560832"/>
+            <a:ext cx="2066543" cy="557784"/>
           </a:xfrm>
           <a:prstGeom prst="rect">
             <a:avLst/>
@@ -13226,7 +13226,7 @@
                 </a:solidFill>
                 <a:latin typeface="Lexend"/>
               </a:rPr>
-              <a:t>Answer:   5</a:t>
+              <a:t>Answer:   12</a:t>
             </a:r>
             <a:r>
               <a:rPr sz="3040" b="1" i="0" baseline="30000">
@@ -13244,7 +13244,7 @@
                 </a:solidFill>
                 <a:latin typeface="Lexend"/>
               </a:rPr>
-              <a:t> = 1/5</a:t>
+              <a:t> = 1/12</a:t>
             </a:r>
             <a:r>
               <a:rPr sz="3040" b="1" i="0" baseline="30000">
@@ -13262,7 +13262,7 @@
                 </a:solidFill>
                 <a:latin typeface="Lexend"/>
               </a:rPr>
-              <a:t> = 1/25</a:t>
+              <a:t> = 1/144</a:t>
             </a:r>
           </a:p>
         </p:txBody>
